--- a/MELISOvsGPU.pptx
+++ b/MELISOvsGPU.pptx
@@ -8,12 +8,13 @@
     <p:sldId id="266" r:id="rId2"/>
     <p:sldId id="265" r:id="rId3"/>
     <p:sldId id="257" r:id="rId4"/>
-    <p:sldId id="259" r:id="rId5"/>
-    <p:sldId id="260" r:id="rId6"/>
-    <p:sldId id="262" r:id="rId7"/>
-    <p:sldId id="261" r:id="rId8"/>
-    <p:sldId id="258" r:id="rId9"/>
-    <p:sldId id="263" r:id="rId10"/>
+    <p:sldId id="267" r:id="rId5"/>
+    <p:sldId id="259" r:id="rId6"/>
+    <p:sldId id="260" r:id="rId7"/>
+    <p:sldId id="262" r:id="rId8"/>
+    <p:sldId id="261" r:id="rId9"/>
+    <p:sldId id="258" r:id="rId10"/>
+    <p:sldId id="263" r:id="rId11"/>
   </p:sldIdLst>
   <p:sldSz cx="12192000" cy="6858000"/>
   <p:notesSz cx="6858000" cy="9144000"/>
@@ -131,6 +132,291 @@
 </p:presentation>
 </file>
 
+<file path=ppt/revisionInfo.xml><?xml version="1.0" encoding="utf-8"?>
+<p1510:revInfo xmlns:a="http://schemas.openxmlformats.org/drawingml/2006/main" xmlns:r="http://schemas.openxmlformats.org/officeDocument/2006/relationships" xmlns:p1510="http://schemas.microsoft.com/office/powerpoint/2015/10/main">
+  <p1510:revLst>
+    <p1510:client id="{6486FCFF-8752-4976-86E7-4BDA6065866B}" v="12" dt="2025-04-03T19:15:18.422"/>
+  </p1510:revLst>
+</p1510:revInfo>
+</file>
+
+<file path=ppt/changesInfos/changesInfo1.xml><?xml version="1.0" encoding="utf-8"?>
+<pc:chgInfo xmlns:a="http://schemas.openxmlformats.org/drawingml/2006/main" xmlns:r="http://schemas.openxmlformats.org/officeDocument/2006/relationships" xmlns:ac="http://schemas.microsoft.com/office/drawing/2013/main/command" xmlns:pc="http://schemas.microsoft.com/office/powerpoint/2013/main/command">
+  <pc:docChgLst>
+    <pc:chgData name="Quang-Nguyen Vo-Huynh" userId="6a1b2bcfbbb34c0c" providerId="LiveId" clId="{6486FCFF-8752-4976-86E7-4BDA6065866B}"/>
+    <pc:docChg chg="undo custSel addSld modSld">
+      <pc:chgData name="Quang-Nguyen Vo-Huynh" userId="6a1b2bcfbbb34c0c" providerId="LiveId" clId="{6486FCFF-8752-4976-86E7-4BDA6065866B}" dt="2025-04-03T19:16:50.096" v="775" actId="5793"/>
+      <pc:docMkLst>
+        <pc:docMk/>
+      </pc:docMkLst>
+      <pc:sldChg chg="addSp delSp modSp mod">
+        <pc:chgData name="Quang-Nguyen Vo-Huynh" userId="6a1b2bcfbbb34c0c" providerId="LiveId" clId="{6486FCFF-8752-4976-86E7-4BDA6065866B}" dt="2025-04-03T19:10:36.933" v="541" actId="14100"/>
+        <pc:sldMkLst>
+          <pc:docMk/>
+          <pc:sldMk cId="1045490457" sldId="257"/>
+        </pc:sldMkLst>
+        <pc:spChg chg="add del mod">
+          <ac:chgData name="Quang-Nguyen Vo-Huynh" userId="6a1b2bcfbbb34c0c" providerId="LiveId" clId="{6486FCFF-8752-4976-86E7-4BDA6065866B}" dt="2025-04-03T18:55:52.507" v="36" actId="478"/>
+          <ac:spMkLst>
+            <pc:docMk/>
+            <pc:sldMk cId="1045490457" sldId="257"/>
+            <ac:spMk id="4" creationId="{EEA810A0-6B0E-4732-AB76-997103DADB4A}"/>
+          </ac:spMkLst>
+        </pc:spChg>
+        <pc:spChg chg="add mod">
+          <ac:chgData name="Quang-Nguyen Vo-Huynh" userId="6a1b2bcfbbb34c0c" providerId="LiveId" clId="{6486FCFF-8752-4976-86E7-4BDA6065866B}" dt="2025-04-03T18:56:17.870" v="45" actId="1035"/>
+          <ac:spMkLst>
+            <pc:docMk/>
+            <pc:sldMk cId="1045490457" sldId="257"/>
+            <ac:spMk id="5" creationId="{5107C4F1-D4C6-FCE2-29C7-9A48E4A8DB7C}"/>
+          </ac:spMkLst>
+        </pc:spChg>
+        <pc:spChg chg="add mod">
+          <ac:chgData name="Quang-Nguyen Vo-Huynh" userId="6a1b2bcfbbb34c0c" providerId="LiveId" clId="{6486FCFF-8752-4976-86E7-4BDA6065866B}" dt="2025-04-03T18:56:34.691" v="53" actId="14100"/>
+          <ac:spMkLst>
+            <pc:docMk/>
+            <pc:sldMk cId="1045490457" sldId="257"/>
+            <ac:spMk id="6" creationId="{38A8E737-8A49-12A6-5C5E-716EAB874168}"/>
+          </ac:spMkLst>
+        </pc:spChg>
+        <pc:spChg chg="add mod">
+          <ac:chgData name="Quang-Nguyen Vo-Huynh" userId="6a1b2bcfbbb34c0c" providerId="LiveId" clId="{6486FCFF-8752-4976-86E7-4BDA6065866B}" dt="2025-04-03T19:07:49.032" v="272" actId="14100"/>
+          <ac:spMkLst>
+            <pc:docMk/>
+            <pc:sldMk cId="1045490457" sldId="257"/>
+            <ac:spMk id="8" creationId="{80820429-15C0-28A3-9B19-1F9BF67EF0F5}"/>
+          </ac:spMkLst>
+        </pc:spChg>
+        <pc:spChg chg="mod">
+          <ac:chgData name="Quang-Nguyen Vo-Huynh" userId="6a1b2bcfbbb34c0c" providerId="LiveId" clId="{6486FCFF-8752-4976-86E7-4BDA6065866B}" dt="2025-04-03T18:55:03.804" v="29" actId="1076"/>
+          <ac:spMkLst>
+            <pc:docMk/>
+            <pc:sldMk cId="1045490457" sldId="257"/>
+            <ac:spMk id="10" creationId="{9B71DA5C-13E2-A149-B419-F04D98AC3511}"/>
+          </ac:spMkLst>
+        </pc:spChg>
+        <pc:spChg chg="mod">
+          <ac:chgData name="Quang-Nguyen Vo-Huynh" userId="6a1b2bcfbbb34c0c" providerId="LiveId" clId="{6486FCFF-8752-4976-86E7-4BDA6065866B}" dt="2025-04-03T18:55:00.501" v="28" actId="1076"/>
+          <ac:spMkLst>
+            <pc:docMk/>
+            <pc:sldMk cId="1045490457" sldId="257"/>
+            <ac:spMk id="11" creationId="{DD074894-0E99-894A-9B1A-0D7C79F5F6D7}"/>
+          </ac:spMkLst>
+        </pc:spChg>
+        <pc:spChg chg="mod">
+          <ac:chgData name="Quang-Nguyen Vo-Huynh" userId="6a1b2bcfbbb34c0c" providerId="LiveId" clId="{6486FCFF-8752-4976-86E7-4BDA6065866B}" dt="2025-04-03T19:09:00.950" v="477" actId="20577"/>
+          <ac:spMkLst>
+            <pc:docMk/>
+            <pc:sldMk cId="1045490457" sldId="257"/>
+            <ac:spMk id="12" creationId="{B0E297CD-5450-7441-A033-60CDC02876B0}"/>
+          </ac:spMkLst>
+        </pc:spChg>
+        <pc:spChg chg="add mod">
+          <ac:chgData name="Quang-Nguyen Vo-Huynh" userId="6a1b2bcfbbb34c0c" providerId="LiveId" clId="{6486FCFF-8752-4976-86E7-4BDA6065866B}" dt="2025-04-03T19:06:59.815" v="267" actId="1076"/>
+          <ac:spMkLst>
+            <pc:docMk/>
+            <pc:sldMk cId="1045490457" sldId="257"/>
+            <ac:spMk id="13" creationId="{F64AC631-6E96-BDA2-0FE0-05BC812DD181}"/>
+          </ac:spMkLst>
+        </pc:spChg>
+        <pc:spChg chg="add mod">
+          <ac:chgData name="Quang-Nguyen Vo-Huynh" userId="6a1b2bcfbbb34c0c" providerId="LiveId" clId="{6486FCFF-8752-4976-86E7-4BDA6065866B}" dt="2025-04-03T19:10:36.933" v="541" actId="14100"/>
+          <ac:spMkLst>
+            <pc:docMk/>
+            <pc:sldMk cId="1045490457" sldId="257"/>
+            <ac:spMk id="18" creationId="{7125C2F2-3D54-0341-6B37-C4848752A90E}"/>
+          </ac:spMkLst>
+        </pc:spChg>
+        <pc:picChg chg="add mod">
+          <ac:chgData name="Quang-Nguyen Vo-Huynh" userId="6a1b2bcfbbb34c0c" providerId="LiveId" clId="{6486FCFF-8752-4976-86E7-4BDA6065866B}" dt="2025-04-03T18:55:16.612" v="32" actId="14100"/>
+          <ac:picMkLst>
+            <pc:docMk/>
+            <pc:sldMk cId="1045490457" sldId="257"/>
+            <ac:picMk id="3" creationId="{18B44170-16CA-B15C-93B3-6264D8ECB5C6}"/>
+          </ac:picMkLst>
+        </pc:picChg>
+        <pc:cxnChg chg="add mod">
+          <ac:chgData name="Quang-Nguyen Vo-Huynh" userId="6a1b2bcfbbb34c0c" providerId="LiveId" clId="{6486FCFF-8752-4976-86E7-4BDA6065866B}" dt="2025-04-03T19:07:13.969" v="269" actId="208"/>
+          <ac:cxnSpMkLst>
+            <pc:docMk/>
+            <pc:sldMk cId="1045490457" sldId="257"/>
+            <ac:cxnSpMk id="15" creationId="{0FBB2B1F-F5CE-4F23-BDB2-58AE3C0CA2A1}"/>
+          </ac:cxnSpMkLst>
+        </pc:cxnChg>
+        <pc:cxnChg chg="add mod">
+          <ac:chgData name="Quang-Nguyen Vo-Huynh" userId="6a1b2bcfbbb34c0c" providerId="LiveId" clId="{6486FCFF-8752-4976-86E7-4BDA6065866B}" dt="2025-04-03T19:07:28.785" v="271" actId="208"/>
+          <ac:cxnSpMkLst>
+            <pc:docMk/>
+            <pc:sldMk cId="1045490457" sldId="257"/>
+            <ac:cxnSpMk id="17" creationId="{54BFC188-5E64-7823-A8C3-C614F4729CAE}"/>
+          </ac:cxnSpMkLst>
+        </pc:cxnChg>
+      </pc:sldChg>
+      <pc:sldChg chg="mod modShow">
+        <pc:chgData name="Quang-Nguyen Vo-Huynh" userId="6a1b2bcfbbb34c0c" providerId="LiveId" clId="{6486FCFF-8752-4976-86E7-4BDA6065866B}" dt="2025-04-03T19:10:06.586" v="537" actId="729"/>
+        <pc:sldMkLst>
+          <pc:docMk/>
+          <pc:sldMk cId="1663129815" sldId="258"/>
+        </pc:sldMkLst>
+      </pc:sldChg>
+      <pc:sldChg chg="mod modShow">
+        <pc:chgData name="Quang-Nguyen Vo-Huynh" userId="6a1b2bcfbbb34c0c" providerId="LiveId" clId="{6486FCFF-8752-4976-86E7-4BDA6065866B}" dt="2025-04-03T19:10:06.586" v="537" actId="729"/>
+        <pc:sldMkLst>
+          <pc:docMk/>
+          <pc:sldMk cId="1779087438" sldId="259"/>
+        </pc:sldMkLst>
+      </pc:sldChg>
+      <pc:sldChg chg="mod modShow">
+        <pc:chgData name="Quang-Nguyen Vo-Huynh" userId="6a1b2bcfbbb34c0c" providerId="LiveId" clId="{6486FCFF-8752-4976-86E7-4BDA6065866B}" dt="2025-04-03T19:10:06.586" v="537" actId="729"/>
+        <pc:sldMkLst>
+          <pc:docMk/>
+          <pc:sldMk cId="1304093165" sldId="260"/>
+        </pc:sldMkLst>
+      </pc:sldChg>
+      <pc:sldChg chg="mod modShow">
+        <pc:chgData name="Quang-Nguyen Vo-Huynh" userId="6a1b2bcfbbb34c0c" providerId="LiveId" clId="{6486FCFF-8752-4976-86E7-4BDA6065866B}" dt="2025-04-03T19:10:06.586" v="537" actId="729"/>
+        <pc:sldMkLst>
+          <pc:docMk/>
+          <pc:sldMk cId="756621199" sldId="261"/>
+        </pc:sldMkLst>
+      </pc:sldChg>
+      <pc:sldChg chg="mod modShow">
+        <pc:chgData name="Quang-Nguyen Vo-Huynh" userId="6a1b2bcfbbb34c0c" providerId="LiveId" clId="{6486FCFF-8752-4976-86E7-4BDA6065866B}" dt="2025-04-03T19:10:06.586" v="537" actId="729"/>
+        <pc:sldMkLst>
+          <pc:docMk/>
+          <pc:sldMk cId="3019877112" sldId="262"/>
+        </pc:sldMkLst>
+      </pc:sldChg>
+      <pc:sldChg chg="mod modShow">
+        <pc:chgData name="Quang-Nguyen Vo-Huynh" userId="6a1b2bcfbbb34c0c" providerId="LiveId" clId="{6486FCFF-8752-4976-86E7-4BDA6065866B}" dt="2025-04-03T19:10:06.586" v="537" actId="729"/>
+        <pc:sldMkLst>
+          <pc:docMk/>
+          <pc:sldMk cId="3546150263" sldId="263"/>
+        </pc:sldMkLst>
+      </pc:sldChg>
+      <pc:sldChg chg="addSp delSp modSp mod">
+        <pc:chgData name="Quang-Nguyen Vo-Huynh" userId="6a1b2bcfbbb34c0c" providerId="LiveId" clId="{6486FCFF-8752-4976-86E7-4BDA6065866B}" dt="2025-04-03T19:11:27.349" v="573" actId="1076"/>
+        <pc:sldMkLst>
+          <pc:docMk/>
+          <pc:sldMk cId="1288842434" sldId="266"/>
+        </pc:sldMkLst>
+        <pc:spChg chg="add mod">
+          <ac:chgData name="Quang-Nguyen Vo-Huynh" userId="6a1b2bcfbbb34c0c" providerId="LiveId" clId="{6486FCFF-8752-4976-86E7-4BDA6065866B}" dt="2025-04-03T19:11:15.758" v="571"/>
+          <ac:spMkLst>
+            <pc:docMk/>
+            <pc:sldMk cId="1288842434" sldId="266"/>
+            <ac:spMk id="2" creationId="{B5541AB6-E9CA-F07D-355C-175DE376731B}"/>
+          </ac:spMkLst>
+        </pc:spChg>
+        <pc:spChg chg="add mod">
+          <ac:chgData name="Quang-Nguyen Vo-Huynh" userId="6a1b2bcfbbb34c0c" providerId="LiveId" clId="{6486FCFF-8752-4976-86E7-4BDA6065866B}" dt="2025-04-03T19:11:27.349" v="573" actId="1076"/>
+          <ac:spMkLst>
+            <pc:docMk/>
+            <pc:sldMk cId="1288842434" sldId="266"/>
+            <ac:spMk id="3" creationId="{C38B8077-CE6A-5385-81E5-F52A04C87B83}"/>
+          </ac:spMkLst>
+        </pc:spChg>
+        <pc:spChg chg="del mod">
+          <ac:chgData name="Quang-Nguyen Vo-Huynh" userId="6a1b2bcfbbb34c0c" providerId="LiveId" clId="{6486FCFF-8752-4976-86E7-4BDA6065866B}" dt="2025-04-03T19:11:15.447" v="570" actId="478"/>
+          <ac:spMkLst>
+            <pc:docMk/>
+            <pc:sldMk cId="1288842434" sldId="266"/>
+            <ac:spMk id="6" creationId="{1851FAA6-B02C-0841-8093-DB5B5E2D753C}"/>
+          </ac:spMkLst>
+        </pc:spChg>
+      </pc:sldChg>
+      <pc:sldChg chg="addSp delSp modSp add mod">
+        <pc:chgData name="Quang-Nguyen Vo-Huynh" userId="6a1b2bcfbbb34c0c" providerId="LiveId" clId="{6486FCFF-8752-4976-86E7-4BDA6065866B}" dt="2025-04-03T19:16:50.096" v="775" actId="5793"/>
+        <pc:sldMkLst>
+          <pc:docMk/>
+          <pc:sldMk cId="602613557" sldId="267"/>
+        </pc:sldMkLst>
+        <pc:spChg chg="add del">
+          <ac:chgData name="Quang-Nguyen Vo-Huynh" userId="6a1b2bcfbbb34c0c" providerId="LiveId" clId="{6486FCFF-8752-4976-86E7-4BDA6065866B}" dt="2025-04-03T19:09:56.506" v="536" actId="478"/>
+          <ac:spMkLst>
+            <pc:docMk/>
+            <pc:sldMk cId="602613557" sldId="267"/>
+            <ac:spMk id="5" creationId="{7AE297E6-6A52-F35E-EC49-7910EE6175FB}"/>
+          </ac:spMkLst>
+        </pc:spChg>
+        <pc:spChg chg="add del">
+          <ac:chgData name="Quang-Nguyen Vo-Huynh" userId="6a1b2bcfbbb34c0c" providerId="LiveId" clId="{6486FCFF-8752-4976-86E7-4BDA6065866B}" dt="2025-04-03T19:09:56.506" v="536" actId="478"/>
+          <ac:spMkLst>
+            <pc:docMk/>
+            <pc:sldMk cId="602613557" sldId="267"/>
+            <ac:spMk id="6" creationId="{8AD03BB7-B317-2B6E-ED24-A049EE6AC579}"/>
+          </ac:spMkLst>
+        </pc:spChg>
+        <pc:spChg chg="add del">
+          <ac:chgData name="Quang-Nguyen Vo-Huynh" userId="6a1b2bcfbbb34c0c" providerId="LiveId" clId="{6486FCFF-8752-4976-86E7-4BDA6065866B}" dt="2025-04-03T19:09:56.506" v="536" actId="478"/>
+          <ac:spMkLst>
+            <pc:docMk/>
+            <pc:sldMk cId="602613557" sldId="267"/>
+            <ac:spMk id="8" creationId="{3FA44690-92A7-D66A-22E9-FB55FCD14376}"/>
+          </ac:spMkLst>
+        </pc:spChg>
+        <pc:spChg chg="mod">
+          <ac:chgData name="Quang-Nguyen Vo-Huynh" userId="6a1b2bcfbbb34c0c" providerId="LiveId" clId="{6486FCFF-8752-4976-86E7-4BDA6065866B}" dt="2025-04-03T19:09:37.354" v="529" actId="20577"/>
+          <ac:spMkLst>
+            <pc:docMk/>
+            <pc:sldMk cId="602613557" sldId="267"/>
+            <ac:spMk id="11" creationId="{CEAB13F5-595C-8253-C197-5B1649ACF2E3}"/>
+          </ac:spMkLst>
+        </pc:spChg>
+        <pc:spChg chg="add del mod">
+          <ac:chgData name="Quang-Nguyen Vo-Huynh" userId="6a1b2bcfbbb34c0c" providerId="LiveId" clId="{6486FCFF-8752-4976-86E7-4BDA6065866B}" dt="2025-04-03T19:16:50.096" v="775" actId="5793"/>
+          <ac:spMkLst>
+            <pc:docMk/>
+            <pc:sldMk cId="602613557" sldId="267"/>
+            <ac:spMk id="12" creationId="{0068D70A-C8DB-EDA1-501E-9F46F17FC28D}"/>
+          </ac:spMkLst>
+        </pc:spChg>
+        <pc:spChg chg="add del">
+          <ac:chgData name="Quang-Nguyen Vo-Huynh" userId="6a1b2bcfbbb34c0c" providerId="LiveId" clId="{6486FCFF-8752-4976-86E7-4BDA6065866B}" dt="2025-04-03T19:09:56.506" v="536" actId="478"/>
+          <ac:spMkLst>
+            <pc:docMk/>
+            <pc:sldMk cId="602613557" sldId="267"/>
+            <ac:spMk id="13" creationId="{480E0BC6-C543-423F-5D82-4D0D0242CBF9}"/>
+          </ac:spMkLst>
+        </pc:spChg>
+        <pc:spChg chg="add del">
+          <ac:chgData name="Quang-Nguyen Vo-Huynh" userId="6a1b2bcfbbb34c0c" providerId="LiveId" clId="{6486FCFF-8752-4976-86E7-4BDA6065866B}" dt="2025-04-03T19:09:56.506" v="536" actId="478"/>
+          <ac:spMkLst>
+            <pc:docMk/>
+            <pc:sldMk cId="602613557" sldId="267"/>
+            <ac:spMk id="18" creationId="{01E9ECFE-B656-A991-E9D1-9E67EF01F3A9}"/>
+          </ac:spMkLst>
+        </pc:spChg>
+        <pc:picChg chg="add del">
+          <ac:chgData name="Quang-Nguyen Vo-Huynh" userId="6a1b2bcfbbb34c0c" providerId="LiveId" clId="{6486FCFF-8752-4976-86E7-4BDA6065866B}" dt="2025-04-03T19:09:56.506" v="536" actId="478"/>
+          <ac:picMkLst>
+            <pc:docMk/>
+            <pc:sldMk cId="602613557" sldId="267"/>
+            <ac:picMk id="3" creationId="{44B00FAD-AD31-5183-6AFF-920245E63F84}"/>
+          </ac:picMkLst>
+        </pc:picChg>
+        <pc:cxnChg chg="add del mod">
+          <ac:chgData name="Quang-Nguyen Vo-Huynh" userId="6a1b2bcfbbb34c0c" providerId="LiveId" clId="{6486FCFF-8752-4976-86E7-4BDA6065866B}" dt="2025-04-03T19:09:56.506" v="536" actId="478"/>
+          <ac:cxnSpMkLst>
+            <pc:docMk/>
+            <pc:sldMk cId="602613557" sldId="267"/>
+            <ac:cxnSpMk id="15" creationId="{8F386B0F-ADB2-7A38-4977-44267ECDDB31}"/>
+          </ac:cxnSpMkLst>
+        </pc:cxnChg>
+        <pc:cxnChg chg="add del mod">
+          <ac:chgData name="Quang-Nguyen Vo-Huynh" userId="6a1b2bcfbbb34c0c" providerId="LiveId" clId="{6486FCFF-8752-4976-86E7-4BDA6065866B}" dt="2025-04-03T19:09:56.506" v="536" actId="478"/>
+          <ac:cxnSpMkLst>
+            <pc:docMk/>
+            <pc:sldMk cId="602613557" sldId="267"/>
+            <ac:cxnSpMk id="17" creationId="{7F19AB58-58AB-4C0F-8A98-82D9B9446C01}"/>
+          </ac:cxnSpMkLst>
+        </pc:cxnChg>
+      </pc:sldChg>
+    </pc:docChg>
+  </pc:docChgLst>
+</pc:chgInfo>
+</file>
+
 <file path=ppt/slideLayouts/slideLayout1.xml><?xml version="1.0" encoding="utf-8"?>
 <p:sldLayout xmlns:a="http://schemas.openxmlformats.org/drawingml/2006/main" xmlns:r="http://schemas.openxmlformats.org/officeDocument/2006/relationships" xmlns:p="http://schemas.openxmlformats.org/presentationml/2006/main" type="title" preserve="1">
   <p:cSld name="Title Slide">
@@ -281,7 +567,7 @@
           <a:p>
             <a:fld id="{8F923C7D-B11C-8E43-A742-35D7D77F5333}" type="datetimeFigureOut">
               <a:rPr lang="en-US" smtClean="0"/>
-              <a:t>4/2/25</a:t>
+              <a:t>4/3/2025</a:t>
             </a:fld>
             <a:endParaRPr lang="en-US"/>
           </a:p>
@@ -495,7 +781,7 @@
           <a:p>
             <a:fld id="{8F923C7D-B11C-8E43-A742-35D7D77F5333}" type="datetimeFigureOut">
               <a:rPr lang="en-US" smtClean="0"/>
-              <a:t>4/2/25</a:t>
+              <a:t>4/3/2025</a:t>
             </a:fld>
             <a:endParaRPr lang="en-US"/>
           </a:p>
@@ -714,7 +1000,7 @@
           <a:p>
             <a:fld id="{8F923C7D-B11C-8E43-A742-35D7D77F5333}" type="datetimeFigureOut">
               <a:rPr lang="en-US" smtClean="0"/>
-              <a:t>4/2/25</a:t>
+              <a:t>4/3/2025</a:t>
             </a:fld>
             <a:endParaRPr lang="en-US"/>
           </a:p>
@@ -928,7 +1214,7 @@
           <a:p>
             <a:fld id="{8F923C7D-B11C-8E43-A742-35D7D77F5333}" type="datetimeFigureOut">
               <a:rPr lang="en-US" smtClean="0"/>
-              <a:t>4/2/25</a:t>
+              <a:t>4/3/2025</a:t>
             </a:fld>
             <a:endParaRPr lang="en-US"/>
           </a:p>
@@ -1214,7 +1500,7 @@
           <a:p>
             <a:fld id="{8F923C7D-B11C-8E43-A742-35D7D77F5333}" type="datetimeFigureOut">
               <a:rPr lang="en-US" smtClean="0"/>
-              <a:t>4/2/25</a:t>
+              <a:t>4/3/2025</a:t>
             </a:fld>
             <a:endParaRPr lang="en-US"/>
           </a:p>
@@ -1495,7 +1781,7 @@
           <a:p>
             <a:fld id="{8F923C7D-B11C-8E43-A742-35D7D77F5333}" type="datetimeFigureOut">
               <a:rPr lang="en-US" smtClean="0"/>
-              <a:t>4/2/25</a:t>
+              <a:t>4/3/2025</a:t>
             </a:fld>
             <a:endParaRPr lang="en-US"/>
           </a:p>
@@ -1918,7 +2204,7 @@
           <a:p>
             <a:fld id="{8F923C7D-B11C-8E43-A742-35D7D77F5333}" type="datetimeFigureOut">
               <a:rPr lang="en-US" smtClean="0"/>
-              <a:t>4/2/25</a:t>
+              <a:t>4/3/2025</a:t>
             </a:fld>
             <a:endParaRPr lang="en-US"/>
           </a:p>
@@ -2075,7 +2361,7 @@
           <a:p>
             <a:fld id="{8F923C7D-B11C-8E43-A742-35D7D77F5333}" type="datetimeFigureOut">
               <a:rPr lang="en-US" smtClean="0"/>
-              <a:t>4/2/25</a:t>
+              <a:t>4/3/2025</a:t>
             </a:fld>
             <a:endParaRPr lang="en-US"/>
           </a:p>
@@ -2196,7 +2482,7 @@
           <a:p>
             <a:fld id="{8F923C7D-B11C-8E43-A742-35D7D77F5333}" type="datetimeFigureOut">
               <a:rPr lang="en-US" smtClean="0"/>
-              <a:t>4/2/25</a:t>
+              <a:t>4/3/2025</a:t>
             </a:fld>
             <a:endParaRPr lang="en-US"/>
           </a:p>
@@ -2518,7 +2804,7 @@
           <a:p>
             <a:fld id="{8F923C7D-B11C-8E43-A742-35D7D77F5333}" type="datetimeFigureOut">
               <a:rPr lang="en-US" smtClean="0"/>
-              <a:t>4/2/25</a:t>
+              <a:t>4/3/2025</a:t>
             </a:fld>
             <a:endParaRPr lang="en-US"/>
           </a:p>
@@ -2820,7 +3106,7 @@
           <a:p>
             <a:fld id="{8F923C7D-B11C-8E43-A742-35D7D77F5333}" type="datetimeFigureOut">
               <a:rPr lang="en-US" smtClean="0"/>
-              <a:t>4/2/25</a:t>
+              <a:t>4/3/2025</a:t>
             </a:fld>
             <a:endParaRPr lang="en-US"/>
           </a:p>
@@ -3031,7 +3317,7 @@
           <a:p>
             <a:fld id="{8F923C7D-B11C-8E43-A742-35D7D77F5333}" type="datetimeFigureOut">
               <a:rPr lang="en-US" smtClean="0"/>
-              <a:t>4/2/25</a:t>
+              <a:t>4/3/2025</a:t>
             </a:fld>
             <a:endParaRPr lang="en-US"/>
           </a:p>
@@ -3499,10 +3785,10 @@
       </p:sp>
       <p:sp>
         <p:nvSpPr>
-          <p:cNvPr id="6" name="TextBox 5">
-            <a:extLst>
-              <a:ext uri="{FF2B5EF4-FFF2-40B4-BE49-F238E27FC236}">
-                <a16:creationId xmlns:a16="http://schemas.microsoft.com/office/drawing/2014/main" id="{1851FAA6-B02C-0841-8093-DB5B5E2D753C}"/>
+          <p:cNvPr id="2" name="TextBox 1">
+            <a:extLst>
+              <a:ext uri="{FF2B5EF4-FFF2-40B4-BE49-F238E27FC236}">
+                <a16:creationId xmlns:a16="http://schemas.microsoft.com/office/drawing/2014/main" id="{B5541AB6-E9CA-F07D-355C-175DE376731B}"/>
               </a:ext>
             </a:extLst>
           </p:cNvPr>
@@ -3511,8 +3797,8 @@
         </p:nvSpPr>
         <p:spPr>
           <a:xfrm>
-            <a:off x="3874957" y="3693084"/>
-            <a:ext cx="7922300" cy="461665"/>
+            <a:off x="3605646" y="3429000"/>
+            <a:ext cx="5974287" cy="830997"/>
           </a:xfrm>
           <a:prstGeom prst="rect">
             <a:avLst/>
@@ -3526,11 +3812,101 @@
           <a:lstStyle/>
           <a:p>
             <a:r>
-              <a:rPr lang="en-US" sz="2400" b="1" dirty="0">
+              <a:rPr lang="en-US" sz="1600" b="1" dirty="0">
                 <a:latin typeface="Gotham Narrow Bold" pitchFamily="2" charset="0"/>
                 <a:cs typeface="Rubik" panose="02000604000000020004" pitchFamily="2" charset="-79"/>
               </a:rPr>
-              <a:t>SUBHEAD (OR NAME OF PRESENTER)</a:t>
+              <a:t>Huynh Q. N. Vo</a:t>
+            </a:r>
+            <a:br>
+              <a:rPr lang="en-US" sz="1600" b="1" dirty="0">
+                <a:latin typeface="Gotham Narrow Bold" pitchFamily="2" charset="0"/>
+                <a:cs typeface="Rubik" panose="02000604000000020004" pitchFamily="2" charset="-79"/>
+              </a:rPr>
+            </a:br>
+            <a:r>
+              <a:rPr lang="en-US" sz="1600" b="1" dirty="0">
+                <a:latin typeface="Gotham Narrow Bold" pitchFamily="2" charset="0"/>
+                <a:cs typeface="Rubik" panose="02000604000000020004" pitchFamily="2" charset="-79"/>
+              </a:rPr>
+              <a:t>School of Industrial Engineering and Management</a:t>
+            </a:r>
+            <a:br>
+              <a:rPr lang="en-US" sz="1600" b="1" dirty="0">
+                <a:latin typeface="Gotham Narrow Bold" pitchFamily="2" charset="0"/>
+                <a:cs typeface="Rubik" panose="02000604000000020004" pitchFamily="2" charset="-79"/>
+              </a:rPr>
+            </a:br>
+            <a:r>
+              <a:rPr lang="en-US" sz="1600" b="1" dirty="0">
+                <a:latin typeface="Gotham Narrow Bold" pitchFamily="2" charset="0"/>
+                <a:cs typeface="Rubik" panose="02000604000000020004" pitchFamily="2" charset="-79"/>
+              </a:rPr>
+              <a:t>Oklahoma State University</a:t>
+            </a:r>
+          </a:p>
+        </p:txBody>
+      </p:sp>
+      <p:sp>
+        <p:nvSpPr>
+          <p:cNvPr id="3" name="TextBox 2">
+            <a:extLst>
+              <a:ext uri="{FF2B5EF4-FFF2-40B4-BE49-F238E27FC236}">
+                <a16:creationId xmlns:a16="http://schemas.microsoft.com/office/drawing/2014/main" id="{C38B8077-CE6A-5385-81E5-F52A04C87B83}"/>
+              </a:ext>
+            </a:extLst>
+          </p:cNvPr>
+          <p:cNvSpPr txBox="1"/>
+          <p:nvPr/>
+        </p:nvSpPr>
+        <p:spPr>
+          <a:xfrm>
+            <a:off x="3605646" y="4259997"/>
+            <a:ext cx="5974286" cy="830997"/>
+          </a:xfrm>
+          <a:prstGeom prst="rect">
+            <a:avLst/>
+          </a:prstGeom>
+          <a:noFill/>
+        </p:spPr>
+        <p:txBody>
+          <a:bodyPr wrap="square" rtlCol="0">
+            <a:spAutoFit/>
+          </a:bodyPr>
+          <a:lstStyle/>
+          <a:p>
+            <a:r>
+              <a:rPr lang="en-US" sz="1600" b="1" dirty="0">
+                <a:latin typeface="Gotham Narrow Bold" pitchFamily="2" charset="0"/>
+                <a:cs typeface="Rubik" panose="02000604000000020004" pitchFamily="2" charset="-79"/>
+              </a:rPr>
+              <a:t>Paritosh Ramanan</a:t>
+            </a:r>
+            <a:br>
+              <a:rPr lang="en-US" sz="1600" b="1" dirty="0">
+                <a:latin typeface="Gotham Narrow Bold" pitchFamily="2" charset="0"/>
+                <a:cs typeface="Rubik" panose="02000604000000020004" pitchFamily="2" charset="-79"/>
+              </a:rPr>
+            </a:br>
+            <a:r>
+              <a:rPr lang="en-US" sz="1600" b="1" dirty="0">
+                <a:latin typeface="Gotham Narrow Bold" pitchFamily="2" charset="0"/>
+                <a:cs typeface="Rubik" panose="02000604000000020004" pitchFamily="2" charset="-79"/>
+              </a:rPr>
+              <a:t>School of Industrial Engineering and Management</a:t>
+            </a:r>
+            <a:br>
+              <a:rPr lang="en-US" sz="1600" b="1" dirty="0">
+                <a:latin typeface="Gotham Narrow Bold" pitchFamily="2" charset="0"/>
+                <a:cs typeface="Rubik" panose="02000604000000020004" pitchFamily="2" charset="-79"/>
+              </a:rPr>
+            </a:br>
+            <a:r>
+              <a:rPr lang="en-US" sz="1600" b="1" dirty="0">
+                <a:latin typeface="Gotham Narrow Bold" pitchFamily="2" charset="0"/>
+                <a:cs typeface="Rubik" panose="02000604000000020004" pitchFamily="2" charset="-79"/>
+              </a:rPr>
+              <a:t>Oklahoma State University</a:t>
             </a:r>
           </a:p>
         </p:txBody>
@@ -3539,6 +3915,265 @@
     <p:extLst>
       <p:ext uri="{BB962C8B-B14F-4D97-AF65-F5344CB8AC3E}">
         <p14:creationId xmlns:p14="http://schemas.microsoft.com/office/powerpoint/2010/main" val="1288842434"/>
+      </p:ext>
+    </p:extLst>
+  </p:cSld>
+  <p:clrMapOvr>
+    <a:masterClrMapping/>
+  </p:clrMapOvr>
+</p:sld>
+</file>
+
+<file path=ppt/slides/slide10.xml><?xml version="1.0" encoding="utf-8"?>
+<p:sld xmlns:a="http://schemas.openxmlformats.org/drawingml/2006/main" xmlns:r="http://schemas.openxmlformats.org/officeDocument/2006/relationships" xmlns:p="http://schemas.openxmlformats.org/presentationml/2006/main" show="0">
+  <p:cSld>
+    <p:bg>
+      <p:bgPr>
+        <a:blipFill dpi="0" rotWithShape="1">
+          <a:blip r:embed="rId2">
+            <a:lum/>
+          </a:blip>
+          <a:srcRect/>
+          <a:stretch>
+            <a:fillRect/>
+          </a:stretch>
+        </a:blipFill>
+        <a:effectLst/>
+      </p:bgPr>
+    </p:bg>
+    <p:spTree>
+      <p:nvGrpSpPr>
+        <p:cNvPr id="1" name=""/>
+        <p:cNvGrpSpPr/>
+        <p:nvPr/>
+      </p:nvGrpSpPr>
+      <p:grpSpPr>
+        <a:xfrm>
+          <a:off x="0" y="0"/>
+          <a:ext cx="0" cy="0"/>
+          <a:chOff x="0" y="0"/>
+          <a:chExt cx="0" cy="0"/>
+        </a:xfrm>
+      </p:grpSpPr>
+      <p:sp>
+        <p:nvSpPr>
+          <p:cNvPr id="6" name="TextBox 5">
+            <a:extLst>
+              <a:ext uri="{FF2B5EF4-FFF2-40B4-BE49-F238E27FC236}">
+                <a16:creationId xmlns:a16="http://schemas.microsoft.com/office/drawing/2014/main" id="{CEE4DA18-37A0-3344-B583-9790FEFF58AA}"/>
+              </a:ext>
+            </a:extLst>
+          </p:cNvPr>
+          <p:cNvSpPr txBox="1"/>
+          <p:nvPr/>
+        </p:nvSpPr>
+        <p:spPr>
+          <a:xfrm>
+            <a:off x="571500" y="2294175"/>
+            <a:ext cx="11040127" cy="3077925"/>
+          </a:xfrm>
+          <a:prstGeom prst="rect">
+            <a:avLst/>
+          </a:prstGeom>
+          <a:noFill/>
+        </p:spPr>
+        <p:txBody>
+          <a:bodyPr wrap="square" rtlCol="0">
+            <a:noAutofit/>
+          </a:bodyPr>
+          <a:lstStyle/>
+          <a:p>
+            <a:r>
+              <a:rPr lang="en-US" sz="2400" b="1" dirty="0">
+                <a:solidFill>
+                  <a:srgbClr val="63666A"/>
+                </a:solidFill>
+                <a:latin typeface="Gotham Narrow Bold" pitchFamily="2" charset="0"/>
+              </a:rPr>
+              <a:t>O | </a:t>
+            </a:r>
+            <a:r>
+              <a:rPr lang="en-US" sz="2400" dirty="0">
+                <a:solidFill>
+                  <a:srgbClr val="63666A"/>
+                </a:solidFill>
+                <a:latin typeface="Gotham Narrow Book" pitchFamily="2" charset="0"/>
+              </a:rPr>
+              <a:t>405.744.0000</a:t>
+            </a:r>
+          </a:p>
+          <a:p>
+            <a:r>
+              <a:rPr lang="en-US" sz="2400" b="1" dirty="0">
+                <a:solidFill>
+                  <a:srgbClr val="63666A"/>
+                </a:solidFill>
+                <a:latin typeface="Gotham Narrow Bold" pitchFamily="2" charset="0"/>
+              </a:rPr>
+              <a:t>C | </a:t>
+            </a:r>
+            <a:r>
+              <a:rPr lang="en-US" sz="2400" dirty="0">
+                <a:solidFill>
+                  <a:srgbClr val="63666A"/>
+                </a:solidFill>
+                <a:latin typeface="Gotham Narrow Book" pitchFamily="2" charset="0"/>
+              </a:rPr>
+              <a:t>405.744.0000</a:t>
+            </a:r>
+          </a:p>
+          <a:p>
+            <a:r>
+              <a:rPr lang="en-US" sz="2400" b="1" dirty="0">
+                <a:solidFill>
+                  <a:srgbClr val="63666A"/>
+                </a:solidFill>
+                <a:latin typeface="Gotham Narrow Bold" pitchFamily="2" charset="0"/>
+              </a:rPr>
+              <a:t>E | </a:t>
+            </a:r>
+            <a:r>
+              <a:rPr lang="en-US" sz="2400" dirty="0" err="1">
+                <a:solidFill>
+                  <a:srgbClr val="63666A"/>
+                </a:solidFill>
+                <a:latin typeface="Gotham Narrow Book" pitchFamily="2" charset="0"/>
+              </a:rPr>
+              <a:t>name.presenter@okstate.edu</a:t>
+            </a:r>
+            <a:endParaRPr lang="en-US" sz="2400" dirty="0">
+              <a:solidFill>
+                <a:srgbClr val="63666A"/>
+              </a:solidFill>
+              <a:latin typeface="Gotham Narrow Book" pitchFamily="2" charset="0"/>
+            </a:endParaRPr>
+          </a:p>
+          <a:p>
+            <a:r>
+              <a:rPr lang="en-US" sz="2400" dirty="0">
+                <a:solidFill>
+                  <a:srgbClr val="63666A"/>
+                </a:solidFill>
+                <a:latin typeface="Gotham Narrow Book" pitchFamily="2" charset="0"/>
+              </a:rPr>
+              <a:t>307 Whitehurst</a:t>
+            </a:r>
+          </a:p>
+          <a:p>
+            <a:endParaRPr lang="en-US" sz="2400" dirty="0">
+              <a:solidFill>
+                <a:schemeClr val="accent6"/>
+              </a:solidFill>
+              <a:latin typeface="Gotham Narrow Book" pitchFamily="2" charset="0"/>
+            </a:endParaRPr>
+          </a:p>
+          <a:p>
+            <a:r>
+              <a:rPr lang="en-US" sz="2400" b="1" dirty="0" err="1">
+                <a:solidFill>
+                  <a:srgbClr val="FB6400"/>
+                </a:solidFill>
+                <a:latin typeface="Gotham Narrow Bold" pitchFamily="2" charset="0"/>
+              </a:rPr>
+              <a:t>brand.okstate.edu</a:t>
+            </a:r>
+            <a:r>
+              <a:rPr lang="en-US" sz="2400" b="1" dirty="0">
+                <a:solidFill>
+                  <a:srgbClr val="FB6400"/>
+                </a:solidFill>
+                <a:latin typeface="Gotham Narrow Bold" pitchFamily="2" charset="0"/>
+              </a:rPr>
+              <a:t> (do not include http://www.)</a:t>
+            </a:r>
+          </a:p>
+        </p:txBody>
+      </p:sp>
+      <p:sp>
+        <p:nvSpPr>
+          <p:cNvPr id="7" name="TextBox 6">
+            <a:extLst>
+              <a:ext uri="{FF2B5EF4-FFF2-40B4-BE49-F238E27FC236}">
+                <a16:creationId xmlns:a16="http://schemas.microsoft.com/office/drawing/2014/main" id="{4DE87CE4-7B09-1C4B-A222-C9D7591ECB9C}"/>
+              </a:ext>
+            </a:extLst>
+          </p:cNvPr>
+          <p:cNvSpPr txBox="1"/>
+          <p:nvPr/>
+        </p:nvSpPr>
+        <p:spPr>
+          <a:xfrm>
+            <a:off x="584026" y="538619"/>
+            <a:ext cx="11040127" cy="1061829"/>
+          </a:xfrm>
+          <a:prstGeom prst="rect">
+            <a:avLst/>
+          </a:prstGeom>
+          <a:noFill/>
+        </p:spPr>
+        <p:txBody>
+          <a:bodyPr wrap="square" rtlCol="0">
+            <a:spAutoFit/>
+          </a:bodyPr>
+          <a:lstStyle/>
+          <a:p>
+            <a:r>
+              <a:rPr lang="en-US" sz="6300" dirty="0">
+                <a:solidFill>
+                  <a:srgbClr val="63666A"/>
+                </a:solidFill>
+                <a:latin typeface="FjallaOne" panose="02000506040000020004" pitchFamily="2" charset="77"/>
+              </a:rPr>
+              <a:t>NAME OF PRESENTER</a:t>
+            </a:r>
+          </a:p>
+        </p:txBody>
+      </p:sp>
+      <p:sp>
+        <p:nvSpPr>
+          <p:cNvPr id="8" name="TextBox 7">
+            <a:extLst>
+              <a:ext uri="{FF2B5EF4-FFF2-40B4-BE49-F238E27FC236}">
+                <a16:creationId xmlns:a16="http://schemas.microsoft.com/office/drawing/2014/main" id="{20E472A1-9D64-6A42-AD56-94BD6B8EEEA3}"/>
+              </a:ext>
+            </a:extLst>
+          </p:cNvPr>
+          <p:cNvSpPr txBox="1"/>
+          <p:nvPr/>
+        </p:nvSpPr>
+        <p:spPr>
+          <a:xfrm>
+            <a:off x="584026" y="1463179"/>
+            <a:ext cx="11040127" cy="553998"/>
+          </a:xfrm>
+          <a:prstGeom prst="rect">
+            <a:avLst/>
+          </a:prstGeom>
+          <a:noFill/>
+        </p:spPr>
+        <p:txBody>
+          <a:bodyPr wrap="square" rtlCol="0">
+            <a:spAutoFit/>
+          </a:bodyPr>
+          <a:lstStyle/>
+          <a:p>
+            <a:r>
+              <a:rPr lang="en-US" sz="3000" b="1" dirty="0">
+                <a:solidFill>
+                  <a:srgbClr val="FB6400"/>
+                </a:solidFill>
+                <a:latin typeface="Rubik" panose="02000604000000020004" pitchFamily="2" charset="-79"/>
+                <a:cs typeface="Rubik" panose="02000604000000020004" pitchFamily="2" charset="-79"/>
+              </a:rPr>
+              <a:t>Department of …</a:t>
+            </a:r>
+          </a:p>
+        </p:txBody>
+      </p:sp>
+    </p:spTree>
+    <p:extLst>
+      <p:ext uri="{BB962C8B-B14F-4D97-AF65-F5344CB8AC3E}">
+        <p14:creationId xmlns:p14="http://schemas.microsoft.com/office/powerpoint/2010/main" val="3546150263"/>
       </p:ext>
     </p:extLst>
   </p:cSld>
@@ -3678,7 +4313,7 @@
         </p:nvSpPr>
         <p:spPr>
           <a:xfrm>
-            <a:off x="584026" y="273150"/>
+            <a:off x="567836" y="0"/>
             <a:ext cx="11040127" cy="830997"/>
           </a:xfrm>
           <a:prstGeom prst="rect">
@@ -3718,7 +4353,7 @@
         </p:nvSpPr>
         <p:spPr>
           <a:xfrm>
-            <a:off x="571500" y="1104147"/>
+            <a:off x="584037" y="658618"/>
             <a:ext cx="11040127" cy="461665"/>
           </a:xfrm>
           <a:prstGeom prst="rect">
@@ -3760,7 +4395,7 @@
             </p:nvSpPr>
             <p:spPr>
               <a:xfrm>
-                <a:off x="584026" y="1777862"/>
+                <a:off x="567836" y="1120283"/>
                 <a:ext cx="11027600" cy="3515581"/>
               </a:xfrm>
               <a:prstGeom prst="rect">
@@ -3863,7 +4498,7 @@
                   <a:rPr lang="en-US" dirty="0">
                     <a:latin typeface="Gotham Narrow Book" pitchFamily="2" charset="0"/>
                   </a:rPr>
-                  <a:t>The Power Iteration method is a simple tool to provide a good estimation of </a:t>
+                  <a:t>The Power Iteration (PI) method is a simple tool to provide a good estimation of </a:t>
                 </a:r>
                 <a14:m>
                   <m:oMath xmlns:m="http://schemas.openxmlformats.org/officeDocument/2006/math">
@@ -3939,14 +4574,11 @@
                   <a:buChar char="§"/>
                 </a:pPr>
                 <a:r>
-                  <a:rPr lang="en-US">
+                  <a:rPr lang="en-US" dirty="0">
                     <a:latin typeface="Gotham Narrow Book" pitchFamily="2" charset="0"/>
                   </a:rPr>
                   <a:t>Algorithm: </a:t>
                 </a:r>
-                <a:endParaRPr lang="en-US" dirty="0">
-                  <a:latin typeface="Gotham Narrow Book" pitchFamily="2" charset="0"/>
-                </a:endParaRPr>
               </a:p>
             </p:txBody>
           </p:sp>
@@ -3968,7 +4600,7 @@
             </p:nvSpPr>
             <p:spPr>
               <a:xfrm>
-                <a:off x="584026" y="1777862"/>
+                <a:off x="567836" y="1120283"/>
                 <a:ext cx="11027600" cy="3515581"/>
               </a:xfrm>
               <a:prstGeom prst="rect">
@@ -3977,7 +4609,7 @@
               <a:blipFill>
                 <a:blip r:embed="rId3"/>
                 <a:stretch>
-                  <a:fillRect l="-460" t="-361"/>
+                  <a:fillRect l="-332" t="-174"/>
                 </a:stretch>
               </a:blipFill>
             </p:spPr>
@@ -3996,6 +4628,421 @@
           </p:sp>
         </mc:Fallback>
       </mc:AlternateContent>
+      <p:pic>
+        <p:nvPicPr>
+          <p:cNvPr id="3" name="Picture 2">
+            <a:extLst>
+              <a:ext uri="{FF2B5EF4-FFF2-40B4-BE49-F238E27FC236}">
+                <a16:creationId xmlns:a16="http://schemas.microsoft.com/office/drawing/2014/main" id="{18B44170-16CA-B15C-93B3-6264D8ECB5C6}"/>
+              </a:ext>
+            </a:extLst>
+          </p:cNvPr>
+          <p:cNvPicPr>
+            <a:picLocks noChangeAspect="1"/>
+          </p:cNvPicPr>
+          <p:nvPr/>
+        </p:nvPicPr>
+        <p:blipFill>
+          <a:blip r:embed="rId4"/>
+          <a:stretch>
+            <a:fillRect/>
+          </a:stretch>
+        </p:blipFill>
+        <p:spPr>
+          <a:xfrm>
+            <a:off x="596564" y="3257415"/>
+            <a:ext cx="7431548" cy="2480302"/>
+          </a:xfrm>
+          <a:prstGeom prst="rect">
+            <a:avLst/>
+          </a:prstGeom>
+        </p:spPr>
+      </p:pic>
+      <p:sp>
+        <p:nvSpPr>
+          <p:cNvPr id="5" name="Rectangle 4">
+            <a:extLst>
+              <a:ext uri="{FF2B5EF4-FFF2-40B4-BE49-F238E27FC236}">
+                <a16:creationId xmlns:a16="http://schemas.microsoft.com/office/drawing/2014/main" id="{5107C4F1-D4C6-FCE2-29C7-9A48E4A8DB7C}"/>
+              </a:ext>
+            </a:extLst>
+          </p:cNvPr>
+          <p:cNvSpPr/>
+          <p:nvPr/>
+        </p:nvSpPr>
+        <p:spPr>
+          <a:xfrm>
+            <a:off x="1621308" y="4259580"/>
+            <a:ext cx="533400" cy="259080"/>
+          </a:xfrm>
+          <a:prstGeom prst="rect">
+            <a:avLst/>
+          </a:prstGeom>
+          <a:noFill/>
+          <a:ln>
+            <a:solidFill>
+              <a:srgbClr val="FF0000"/>
+            </a:solidFill>
+          </a:ln>
+        </p:spPr>
+        <p:style>
+          <a:lnRef idx="2">
+            <a:schemeClr val="accent2"/>
+          </a:lnRef>
+          <a:fillRef idx="1">
+            <a:schemeClr val="lt1"/>
+          </a:fillRef>
+          <a:effectRef idx="0">
+            <a:schemeClr val="accent2"/>
+          </a:effectRef>
+          <a:fontRef idx="minor">
+            <a:schemeClr val="dk1"/>
+          </a:fontRef>
+        </p:style>
+        <p:txBody>
+          <a:bodyPr rtlCol="0" anchor="ctr"/>
+          <a:lstStyle/>
+          <a:p>
+            <a:pPr algn="ctr"/>
+            <a:endParaRPr lang="en-US"/>
+          </a:p>
+        </p:txBody>
+      </p:sp>
+      <p:sp>
+        <p:nvSpPr>
+          <p:cNvPr id="6" name="Rectangle 5">
+            <a:extLst>
+              <a:ext uri="{FF2B5EF4-FFF2-40B4-BE49-F238E27FC236}">
+                <a16:creationId xmlns:a16="http://schemas.microsoft.com/office/drawing/2014/main" id="{38A8E737-8A49-12A6-5C5E-716EAB874168}"/>
+              </a:ext>
+            </a:extLst>
+          </p:cNvPr>
+          <p:cNvSpPr/>
+          <p:nvPr/>
+        </p:nvSpPr>
+        <p:spPr>
+          <a:xfrm>
+            <a:off x="1762584" y="4701540"/>
+            <a:ext cx="607236" cy="259080"/>
+          </a:xfrm>
+          <a:prstGeom prst="rect">
+            <a:avLst/>
+          </a:prstGeom>
+          <a:noFill/>
+          <a:ln>
+            <a:solidFill>
+              <a:srgbClr val="FF0000"/>
+            </a:solidFill>
+          </a:ln>
+        </p:spPr>
+        <p:style>
+          <a:lnRef idx="2">
+            <a:schemeClr val="accent2"/>
+          </a:lnRef>
+          <a:fillRef idx="1">
+            <a:schemeClr val="lt1"/>
+          </a:fillRef>
+          <a:effectRef idx="0">
+            <a:schemeClr val="accent2"/>
+          </a:effectRef>
+          <a:fontRef idx="minor">
+            <a:schemeClr val="dk1"/>
+          </a:fontRef>
+        </p:style>
+        <p:txBody>
+          <a:bodyPr rtlCol="0" anchor="ctr"/>
+          <a:lstStyle/>
+          <a:p>
+            <a:pPr algn="ctr"/>
+            <a:endParaRPr lang="en-US"/>
+          </a:p>
+        </p:txBody>
+      </p:sp>
+      <p:sp>
+        <p:nvSpPr>
+          <p:cNvPr id="8" name="TextBox 7">
+            <a:extLst>
+              <a:ext uri="{FF2B5EF4-FFF2-40B4-BE49-F238E27FC236}">
+                <a16:creationId xmlns:a16="http://schemas.microsoft.com/office/drawing/2014/main" id="{80820429-15C0-28A3-9B19-1F9BF67EF0F5}"/>
+              </a:ext>
+            </a:extLst>
+          </p:cNvPr>
+          <p:cNvSpPr txBox="1"/>
+          <p:nvPr/>
+        </p:nvSpPr>
+        <p:spPr>
+          <a:xfrm>
+            <a:off x="596563" y="5981623"/>
+            <a:ext cx="6617037" cy="1200329"/>
+          </a:xfrm>
+          <a:prstGeom prst="rect">
+            <a:avLst/>
+          </a:prstGeom>
+          <a:noFill/>
+        </p:spPr>
+        <p:txBody>
+          <a:bodyPr wrap="square">
+            <a:spAutoFit/>
+          </a:bodyPr>
+          <a:lstStyle/>
+          <a:p>
+            <a:r>
+              <a:rPr lang="en-US" sz="1200" dirty="0">
+                <a:latin typeface="Gotham Narrow Book" pitchFamily="2" charset="0"/>
+              </a:rPr>
+              <a:t>Reference:</a:t>
+            </a:r>
+          </a:p>
+          <a:p>
+            <a:pPr marL="228600" indent="-228600">
+              <a:buFont typeface="+mj-lt"/>
+              <a:buAutoNum type="arabicPeriod"/>
+            </a:pPr>
+            <a:r>
+              <a:rPr lang="en-US" sz="1200" dirty="0">
+                <a:latin typeface="Gotham Narrow Book" pitchFamily="2" charset="0"/>
+              </a:rPr>
+              <a:t>Trefethen, Bau III (2022). Numerical Linear Algebra - 25th Anniversary Edition, Chapter 27.</a:t>
+            </a:r>
+          </a:p>
+          <a:p>
+            <a:pPr marL="228600" indent="-228600">
+              <a:buFont typeface="+mj-lt"/>
+              <a:buAutoNum type="arabicPeriod"/>
+            </a:pPr>
+            <a:r>
+              <a:rPr lang="fr-FR" sz="1200" dirty="0" err="1">
+                <a:latin typeface="Gotham Narrow Book" pitchFamily="2" charset="0"/>
+              </a:rPr>
+              <a:t>Golub</a:t>
+            </a:r>
+            <a:r>
+              <a:rPr lang="fr-FR" sz="1200" dirty="0">
+                <a:latin typeface="Gotham Narrow Book" pitchFamily="2" charset="0"/>
+              </a:rPr>
+              <a:t>, Van Loan (2013). Matrix Computations</a:t>
+            </a:r>
+            <a:r>
+              <a:rPr lang="en-US" sz="1200" dirty="0">
+                <a:latin typeface="Gotham Narrow Book" pitchFamily="2" charset="0"/>
+              </a:rPr>
+              <a:t>, Chapter 8.</a:t>
+            </a:r>
+          </a:p>
+          <a:p>
+            <a:pPr marL="228600" indent="-228600">
+              <a:buFont typeface="+mj-lt"/>
+              <a:buAutoNum type="arabicPeriod"/>
+            </a:pPr>
+            <a:endParaRPr lang="en-US" sz="1200" dirty="0">
+              <a:latin typeface="Gotham Narrow Book" pitchFamily="2" charset="0"/>
+            </a:endParaRPr>
+          </a:p>
+          <a:p>
+            <a:pPr marL="228600" indent="-228600">
+              <a:buFont typeface="+mj-lt"/>
+              <a:buAutoNum type="arabicPeriod"/>
+            </a:pPr>
+            <a:endParaRPr lang="en-US" sz="1200" dirty="0">
+              <a:latin typeface="Gotham Narrow Book" pitchFamily="2" charset="0"/>
+            </a:endParaRPr>
+          </a:p>
+          <a:p>
+            <a:pPr marL="285750" indent="-285750">
+              <a:buFont typeface="Arial" panose="020B0604020202020204" pitchFamily="34" charset="0"/>
+              <a:buChar char="•"/>
+            </a:pPr>
+            <a:endParaRPr lang="en-US" sz="1200" dirty="0"/>
+          </a:p>
+        </p:txBody>
+      </p:sp>
+      <p:sp>
+        <p:nvSpPr>
+          <p:cNvPr id="13" name="TextBox 12">
+            <a:extLst>
+              <a:ext uri="{FF2B5EF4-FFF2-40B4-BE49-F238E27FC236}">
+                <a16:creationId xmlns:a16="http://schemas.microsoft.com/office/drawing/2014/main" id="{F64AC631-6E96-BDA2-0FE0-05BC812DD181}"/>
+              </a:ext>
+            </a:extLst>
+          </p:cNvPr>
+          <p:cNvSpPr txBox="1"/>
+          <p:nvPr/>
+        </p:nvSpPr>
+        <p:spPr>
+          <a:xfrm>
+            <a:off x="5795492" y="4288493"/>
+            <a:ext cx="3158008" cy="646331"/>
+          </a:xfrm>
+          <a:prstGeom prst="rect">
+            <a:avLst/>
+          </a:prstGeom>
+        </p:spPr>
+        <p:style>
+          <a:lnRef idx="2">
+            <a:schemeClr val="accent2">
+              <a:shade val="15000"/>
+            </a:schemeClr>
+          </a:lnRef>
+          <a:fillRef idx="1">
+            <a:schemeClr val="accent2"/>
+          </a:fillRef>
+          <a:effectRef idx="0">
+            <a:schemeClr val="accent2"/>
+          </a:effectRef>
+          <a:fontRef idx="minor">
+            <a:schemeClr val="lt1"/>
+          </a:fontRef>
+        </p:style>
+        <p:txBody>
+          <a:bodyPr wrap="square">
+            <a:spAutoFit/>
+          </a:bodyPr>
+          <a:lstStyle/>
+          <a:p>
+            <a:pPr algn="ctr"/>
+            <a:r>
+              <a:rPr lang="en-US" dirty="0">
+                <a:latin typeface="Gotham Narrow Book" pitchFamily="2" charset="0"/>
+              </a:rPr>
+              <a:t>This method involves matrix-vector multiplication (MVM)</a:t>
+            </a:r>
+          </a:p>
+        </p:txBody>
+      </p:sp>
+      <p:cxnSp>
+        <p:nvCxnSpPr>
+          <p:cNvPr id="15" name="Straight Arrow Connector 14">
+            <a:extLst>
+              <a:ext uri="{FF2B5EF4-FFF2-40B4-BE49-F238E27FC236}">
+                <a16:creationId xmlns:a16="http://schemas.microsoft.com/office/drawing/2014/main" id="{0FBB2B1F-F5CE-4F23-BDB2-58AE3C0CA2A1}"/>
+              </a:ext>
+            </a:extLst>
+          </p:cNvPr>
+          <p:cNvCxnSpPr>
+            <a:stCxn id="5" idx="3"/>
+            <a:endCxn id="13" idx="1"/>
+          </p:cNvCxnSpPr>
+          <p:nvPr/>
+        </p:nvCxnSpPr>
+        <p:spPr>
+          <a:xfrm>
+            <a:off x="2154708" y="4389120"/>
+            <a:ext cx="3640784" cy="222539"/>
+          </a:xfrm>
+          <a:prstGeom prst="straightConnector1">
+            <a:avLst/>
+          </a:prstGeom>
+          <a:ln>
+            <a:solidFill>
+              <a:srgbClr val="FF0000"/>
+            </a:solidFill>
+            <a:tailEnd type="triangle"/>
+          </a:ln>
+        </p:spPr>
+        <p:style>
+          <a:lnRef idx="1">
+            <a:schemeClr val="accent1"/>
+          </a:lnRef>
+          <a:fillRef idx="0">
+            <a:schemeClr val="accent1"/>
+          </a:fillRef>
+          <a:effectRef idx="0">
+            <a:schemeClr val="accent1"/>
+          </a:effectRef>
+          <a:fontRef idx="minor">
+            <a:schemeClr val="tx1"/>
+          </a:fontRef>
+        </p:style>
+      </p:cxnSp>
+      <p:cxnSp>
+        <p:nvCxnSpPr>
+          <p:cNvPr id="17" name="Straight Arrow Connector 16">
+            <a:extLst>
+              <a:ext uri="{FF2B5EF4-FFF2-40B4-BE49-F238E27FC236}">
+                <a16:creationId xmlns:a16="http://schemas.microsoft.com/office/drawing/2014/main" id="{54BFC188-5E64-7823-A8C3-C614F4729CAE}"/>
+              </a:ext>
+            </a:extLst>
+          </p:cNvPr>
+          <p:cNvCxnSpPr>
+            <a:stCxn id="6" idx="3"/>
+            <a:endCxn id="13" idx="1"/>
+          </p:cNvCxnSpPr>
+          <p:nvPr/>
+        </p:nvCxnSpPr>
+        <p:spPr>
+          <a:xfrm flipV="1">
+            <a:off x="2369820" y="4611659"/>
+            <a:ext cx="3425672" cy="219421"/>
+          </a:xfrm>
+          <a:prstGeom prst="straightConnector1">
+            <a:avLst/>
+          </a:prstGeom>
+          <a:ln>
+            <a:solidFill>
+              <a:srgbClr val="FF0000"/>
+            </a:solidFill>
+            <a:tailEnd type="triangle"/>
+          </a:ln>
+        </p:spPr>
+        <p:style>
+          <a:lnRef idx="1">
+            <a:schemeClr val="accent1"/>
+          </a:lnRef>
+          <a:fillRef idx="0">
+            <a:schemeClr val="accent1"/>
+          </a:fillRef>
+          <a:effectRef idx="0">
+            <a:schemeClr val="accent1"/>
+          </a:effectRef>
+          <a:fontRef idx="minor">
+            <a:schemeClr val="tx1"/>
+          </a:fontRef>
+        </p:style>
+      </p:cxnSp>
+      <p:sp>
+        <p:nvSpPr>
+          <p:cNvPr id="18" name="TextBox 17">
+            <a:extLst>
+              <a:ext uri="{FF2B5EF4-FFF2-40B4-BE49-F238E27FC236}">
+                <a16:creationId xmlns:a16="http://schemas.microsoft.com/office/drawing/2014/main" id="{7125C2F2-3D54-0341-6B37-C4848752A90E}"/>
+              </a:ext>
+            </a:extLst>
+          </p:cNvPr>
+          <p:cNvSpPr txBox="1"/>
+          <p:nvPr/>
+        </p:nvSpPr>
+        <p:spPr>
+          <a:xfrm>
+            <a:off x="7213601" y="5981623"/>
+            <a:ext cx="4410564" cy="830997"/>
+          </a:xfrm>
+          <a:prstGeom prst="rect">
+            <a:avLst/>
+          </a:prstGeom>
+          <a:noFill/>
+        </p:spPr>
+        <p:txBody>
+          <a:bodyPr wrap="square">
+            <a:spAutoFit/>
+          </a:bodyPr>
+          <a:lstStyle/>
+          <a:p>
+            <a:r>
+              <a:rPr lang="en-US" sz="1200" dirty="0">
+                <a:latin typeface="Gotham Narrow Book" pitchFamily="2" charset="0"/>
+              </a:rPr>
+              <a:t>Note: The original algorithm accommodates for squared matrices. For rectangular matrices, we used a modified version of PI.</a:t>
+            </a:r>
+          </a:p>
+          <a:p>
+            <a:pPr marL="285750" indent="-285750">
+              <a:buFont typeface="Arial" panose="020B0604020202020204" pitchFamily="34" charset="0"/>
+              <a:buChar char="•"/>
+            </a:pPr>
+            <a:endParaRPr lang="en-US" sz="1200" dirty="0"/>
+          </a:p>
+        </p:txBody>
+      </p:sp>
     </p:spTree>
     <p:extLst>
       <p:ext uri="{BB962C8B-B14F-4D97-AF65-F5344CB8AC3E}">
@@ -4028,7 +5075,13 @@
     </p:bg>
     <p:spTree>
       <p:nvGrpSpPr>
-        <p:cNvPr id="1" name=""/>
+        <p:cNvPr id="1" name="">
+          <a:extLst>
+            <a:ext uri="{FF2B5EF4-FFF2-40B4-BE49-F238E27FC236}">
+              <a16:creationId xmlns:a16="http://schemas.microsoft.com/office/drawing/2014/main" id="{054FC081-E6C7-0F47-09A0-37DABF2E3CB9}"/>
+            </a:ext>
+          </a:extLst>
+        </p:cNvPr>
         <p:cNvGrpSpPr/>
         <p:nvPr/>
       </p:nvGrpSpPr>
@@ -4042,10 +5095,10 @@
       </p:grpSpPr>
       <p:sp>
         <p:nvSpPr>
-          <p:cNvPr id="5" name="TextBox 4">
-            <a:extLst>
-              <a:ext uri="{FF2B5EF4-FFF2-40B4-BE49-F238E27FC236}">
-                <a16:creationId xmlns:a16="http://schemas.microsoft.com/office/drawing/2014/main" id="{44B7E921-4FB7-284B-9679-627B0D7126F5}"/>
+          <p:cNvPr id="10" name="TextBox 9">
+            <a:extLst>
+              <a:ext uri="{FF2B5EF4-FFF2-40B4-BE49-F238E27FC236}">
+                <a16:creationId xmlns:a16="http://schemas.microsoft.com/office/drawing/2014/main" id="{A2F8641F-3E6E-D726-340F-1BA79C221B79}"/>
               </a:ext>
             </a:extLst>
           </p:cNvPr>
@@ -4054,7 +5107,47 @@
         </p:nvSpPr>
         <p:spPr>
           <a:xfrm>
-            <a:off x="571500" y="538619"/>
+            <a:off x="567836" y="0"/>
+            <a:ext cx="11040127" cy="830997"/>
+          </a:xfrm>
+          <a:prstGeom prst="rect">
+            <a:avLst/>
+          </a:prstGeom>
+          <a:noFill/>
+        </p:spPr>
+        <p:txBody>
+          <a:bodyPr wrap="square" rtlCol="0">
+            <a:spAutoFit/>
+          </a:bodyPr>
+          <a:lstStyle/>
+          <a:p>
+            <a:r>
+              <a:rPr lang="en-US" sz="4800" dirty="0">
+                <a:solidFill>
+                  <a:srgbClr val="FB6400"/>
+                </a:solidFill>
+                <a:latin typeface="FjallaOne" panose="02000506040000020004" pitchFamily="2" charset="77"/>
+              </a:rPr>
+              <a:t>Power Iteration</a:t>
+            </a:r>
+          </a:p>
+        </p:txBody>
+      </p:sp>
+      <p:sp>
+        <p:nvSpPr>
+          <p:cNvPr id="11" name="TextBox 10">
+            <a:extLst>
+              <a:ext uri="{FF2B5EF4-FFF2-40B4-BE49-F238E27FC236}">
+                <a16:creationId xmlns:a16="http://schemas.microsoft.com/office/drawing/2014/main" id="{CEAB13F5-595C-8253-C197-5B1649ACF2E3}"/>
+              </a:ext>
+            </a:extLst>
+          </p:cNvPr>
+          <p:cNvSpPr txBox="1"/>
+          <p:nvPr/>
+        </p:nvSpPr>
+        <p:spPr>
+          <a:xfrm>
+            <a:off x="584037" y="658618"/>
             <a:ext cx="11040127" cy="461665"/>
           </a:xfrm>
           <a:prstGeom prst="rect">
@@ -4075,17 +5168,17 @@
                 </a:solidFill>
                 <a:latin typeface="Gotham Narrow Bold" pitchFamily="2" charset="0"/>
               </a:rPr>
-              <a:t>SECTION SUBHEAD</a:t>
-            </a:r>
-          </a:p>
-        </p:txBody>
-      </p:sp>
-      <p:sp>
-        <p:nvSpPr>
-          <p:cNvPr id="6" name="TextBox 5">
-            <a:extLst>
-              <a:ext uri="{FF2B5EF4-FFF2-40B4-BE49-F238E27FC236}">
-                <a16:creationId xmlns:a16="http://schemas.microsoft.com/office/drawing/2014/main" id="{A87927AC-8429-D242-9F31-193EE99C1A6C}"/>
+              <a:t>Methods &amp; Results</a:t>
+            </a:r>
+          </a:p>
+        </p:txBody>
+      </p:sp>
+      <p:sp>
+        <p:nvSpPr>
+          <p:cNvPr id="12" name="TextBox 11">
+            <a:extLst>
+              <a:ext uri="{FF2B5EF4-FFF2-40B4-BE49-F238E27FC236}">
+                <a16:creationId xmlns:a16="http://schemas.microsoft.com/office/drawing/2014/main" id="{0068D70A-C8DB-EDA1-501E-9F46F17FC28D}"/>
               </a:ext>
             </a:extLst>
           </p:cNvPr>
@@ -4094,8 +5187,8 @@
         </p:nvSpPr>
         <p:spPr>
           <a:xfrm>
-            <a:off x="876822" y="1115395"/>
-            <a:ext cx="10734804" cy="4256705"/>
+            <a:off x="567836" y="1120283"/>
+            <a:ext cx="11027600" cy="3515581"/>
           </a:xfrm>
           <a:prstGeom prst="rect">
             <a:avLst/>
@@ -4108,512 +5201,117 @@
           </a:bodyPr>
           <a:lstStyle/>
           <a:p>
+            <a:pPr marL="285750" indent="-285750">
+              <a:lnSpc>
+                <a:spcPct val="125000"/>
+              </a:lnSpc>
+              <a:buFont typeface="Wingdings" pitchFamily="2" charset="2"/>
+              <a:buChar char="§"/>
+            </a:pPr>
+            <a:r>
+              <a:rPr lang="en-US" dirty="0">
+                <a:latin typeface="Gotham Narrow Book" pitchFamily="2" charset="0"/>
+              </a:rPr>
+              <a:t>We implement the PI method on GPU and memristive devices (simulated by MELISO).</a:t>
+            </a:r>
+          </a:p>
+          <a:p>
+            <a:pPr marL="285750" indent="-285750">
+              <a:lnSpc>
+                <a:spcPct val="125000"/>
+              </a:lnSpc>
+              <a:buFont typeface="Wingdings" pitchFamily="2" charset="2"/>
+              <a:buChar char="§"/>
+            </a:pPr>
+            <a:r>
+              <a:rPr lang="en-US" dirty="0">
+                <a:latin typeface="Gotham Narrow Book" pitchFamily="2" charset="0"/>
+              </a:rPr>
+              <a:t>The memristive devices were made from </a:t>
+            </a:r>
+            <a:r>
+              <a:rPr lang="en-US" sz="1800" kern="100" dirty="0" err="1">
+                <a:effectLst/>
+                <a:latin typeface="Aptos" panose="020B0004020202020204" pitchFamily="34" charset="0"/>
+                <a:ea typeface="Aptos" panose="020B0004020202020204" pitchFamily="34" charset="0"/>
+                <a:cs typeface="Times New Roman" panose="02020603050405020304" pitchFamily="18" charset="0"/>
+              </a:rPr>
+              <a:t>TaO</a:t>
+            </a:r>
+            <a:r>
+              <a:rPr lang="en-US" sz="1800" kern="100" baseline="-25000" dirty="0" err="1">
+                <a:effectLst/>
+                <a:latin typeface="Aptos" panose="020B0004020202020204" pitchFamily="34" charset="0"/>
+                <a:ea typeface="Aptos" panose="020B0004020202020204" pitchFamily="34" charset="0"/>
+                <a:cs typeface="Times New Roman" panose="02020603050405020304" pitchFamily="18" charset="0"/>
+              </a:rPr>
+              <a:t>x</a:t>
+            </a:r>
+            <a:r>
+              <a:rPr lang="en-US" sz="1800" kern="100" dirty="0">
+                <a:effectLst/>
+                <a:latin typeface="Aptos" panose="020B0004020202020204" pitchFamily="34" charset="0"/>
+                <a:ea typeface="Aptos" panose="020B0004020202020204" pitchFamily="34" charset="0"/>
+                <a:cs typeface="Times New Roman" panose="02020603050405020304" pitchFamily="18" charset="0"/>
+              </a:rPr>
+              <a:t>/</a:t>
+            </a:r>
+            <a:r>
+              <a:rPr lang="en-US" sz="1800" kern="100" dirty="0" err="1">
+                <a:effectLst/>
+                <a:latin typeface="Aptos" panose="020B0004020202020204" pitchFamily="34" charset="0"/>
+                <a:ea typeface="Aptos" panose="020B0004020202020204" pitchFamily="34" charset="0"/>
+                <a:cs typeface="Times New Roman" panose="02020603050405020304" pitchFamily="18" charset="0"/>
+              </a:rPr>
+              <a:t>HfO</a:t>
+            </a:r>
+            <a:r>
+              <a:rPr lang="en-US" sz="1800" kern="100" baseline="-25000" dirty="0" err="1">
+                <a:effectLst/>
+                <a:latin typeface="Aptos" panose="020B0004020202020204" pitchFamily="34" charset="0"/>
+                <a:ea typeface="Aptos" panose="020B0004020202020204" pitchFamily="34" charset="0"/>
+                <a:cs typeface="Times New Roman" panose="02020603050405020304" pitchFamily="18" charset="0"/>
+              </a:rPr>
+              <a:t>x</a:t>
+            </a:r>
+            <a:r>
+              <a:rPr lang="en-US" dirty="0">
+                <a:latin typeface="Gotham Narrow Book" pitchFamily="2" charset="0"/>
+              </a:rPr>
+              <a:t>.</a:t>
+            </a:r>
+          </a:p>
+          <a:p>
+            <a:pPr marL="285750" indent="-285750">
+              <a:lnSpc>
+                <a:spcPct val="125000"/>
+              </a:lnSpc>
+              <a:buFont typeface="Wingdings" pitchFamily="2" charset="2"/>
+              <a:buChar char="§"/>
+            </a:pPr>
+            <a:r>
+              <a:rPr lang="en-US">
+                <a:latin typeface="Gotham Narrow Book" pitchFamily="2" charset="0"/>
+              </a:rPr>
+              <a:t>  Results:</a:t>
+            </a:r>
+          </a:p>
+          <a:p>
             <a:pPr>
               <a:lnSpc>
                 <a:spcPct val="125000"/>
               </a:lnSpc>
             </a:pPr>
-            <a:r>
-              <a:rPr lang="en-US" dirty="0">
-                <a:latin typeface="Gotham Narrow Book" pitchFamily="2" charset="0"/>
-              </a:rPr>
-              <a:t>Body copy goes here. Lorem ipsum dolor sit </a:t>
-            </a:r>
-            <a:r>
-              <a:rPr lang="en-US" dirty="0" err="1">
-                <a:latin typeface="Gotham Narrow Book" pitchFamily="2" charset="0"/>
-              </a:rPr>
-              <a:t>amet</a:t>
-            </a:r>
-            <a:r>
-              <a:rPr lang="en-US" dirty="0">
-                <a:latin typeface="Gotham Narrow Book" pitchFamily="2" charset="0"/>
-              </a:rPr>
-              <a:t>, </a:t>
-            </a:r>
-            <a:r>
-              <a:rPr lang="en-US" dirty="0" err="1">
-                <a:latin typeface="Gotham Narrow Book" pitchFamily="2" charset="0"/>
-              </a:rPr>
-              <a:t>consectetur</a:t>
-            </a:r>
-            <a:r>
-              <a:rPr lang="en-US" dirty="0">
-                <a:latin typeface="Gotham Narrow Book" pitchFamily="2" charset="0"/>
-              </a:rPr>
-              <a:t> </a:t>
-            </a:r>
-            <a:r>
-              <a:rPr lang="en-US" dirty="0" err="1">
-                <a:latin typeface="Gotham Narrow Book" pitchFamily="2" charset="0"/>
-              </a:rPr>
-              <a:t>adipiscing</a:t>
-            </a:r>
-            <a:r>
-              <a:rPr lang="en-US" dirty="0">
-                <a:latin typeface="Gotham Narrow Book" pitchFamily="2" charset="0"/>
-              </a:rPr>
-              <a:t> </a:t>
-            </a:r>
-            <a:r>
-              <a:rPr lang="en-US" dirty="0" err="1">
-                <a:latin typeface="Gotham Narrow Book" pitchFamily="2" charset="0"/>
-              </a:rPr>
-              <a:t>elit</a:t>
-            </a:r>
-            <a:r>
-              <a:rPr lang="en-US" dirty="0">
-                <a:latin typeface="Gotham Narrow Book" pitchFamily="2" charset="0"/>
-              </a:rPr>
-              <a:t>, sed do </a:t>
-            </a:r>
-            <a:r>
-              <a:rPr lang="en-US" dirty="0" err="1">
-                <a:latin typeface="Gotham Narrow Book" pitchFamily="2" charset="0"/>
-              </a:rPr>
-              <a:t>eiusmod</a:t>
-            </a:r>
-            <a:r>
-              <a:rPr lang="en-US" dirty="0">
-                <a:latin typeface="Gotham Narrow Book" pitchFamily="2" charset="0"/>
-              </a:rPr>
-              <a:t> </a:t>
-            </a:r>
-            <a:r>
-              <a:rPr lang="en-US" dirty="0" err="1">
-                <a:latin typeface="Gotham Narrow Book" pitchFamily="2" charset="0"/>
-              </a:rPr>
-              <a:t>tempor</a:t>
-            </a:r>
-            <a:r>
-              <a:rPr lang="en-US" dirty="0">
-                <a:latin typeface="Gotham Narrow Book" pitchFamily="2" charset="0"/>
-              </a:rPr>
-              <a:t> </a:t>
-            </a:r>
-            <a:r>
-              <a:rPr lang="en-US" dirty="0" err="1">
-                <a:latin typeface="Gotham Narrow Book" pitchFamily="2" charset="0"/>
-              </a:rPr>
-              <a:t>incididunt</a:t>
-            </a:r>
-            <a:r>
-              <a:rPr lang="en-US" dirty="0">
-                <a:latin typeface="Gotham Narrow Book" pitchFamily="2" charset="0"/>
-              </a:rPr>
-              <a:t> </a:t>
-            </a:r>
-            <a:r>
-              <a:rPr lang="en-US" dirty="0" err="1">
-                <a:latin typeface="Gotham Narrow Book" pitchFamily="2" charset="0"/>
-              </a:rPr>
-              <a:t>ut</a:t>
-            </a:r>
-            <a:r>
-              <a:rPr lang="en-US" dirty="0">
-                <a:latin typeface="Gotham Narrow Book" pitchFamily="2" charset="0"/>
-              </a:rPr>
-              <a:t> </a:t>
-            </a:r>
-            <a:r>
-              <a:rPr lang="en-US" dirty="0" err="1">
-                <a:latin typeface="Gotham Narrow Book" pitchFamily="2" charset="0"/>
-              </a:rPr>
-              <a:t>labore</a:t>
-            </a:r>
-            <a:r>
-              <a:rPr lang="en-US" dirty="0">
-                <a:latin typeface="Gotham Narrow Book" pitchFamily="2" charset="0"/>
-              </a:rPr>
-              <a:t> et dolore magna </a:t>
-            </a:r>
-            <a:r>
-              <a:rPr lang="en-US" dirty="0" err="1">
-                <a:latin typeface="Gotham Narrow Book" pitchFamily="2" charset="0"/>
-              </a:rPr>
-              <a:t>aliqua</a:t>
-            </a:r>
-            <a:r>
-              <a:rPr lang="en-US" dirty="0">
-                <a:latin typeface="Gotham Narrow Book" pitchFamily="2" charset="0"/>
-              </a:rPr>
-              <a:t>. Ut </a:t>
-            </a:r>
-            <a:r>
-              <a:rPr lang="en-US" dirty="0" err="1">
-                <a:latin typeface="Gotham Narrow Book" pitchFamily="2" charset="0"/>
-              </a:rPr>
-              <a:t>enim</a:t>
-            </a:r>
-            <a:r>
-              <a:rPr lang="en-US" dirty="0">
-                <a:latin typeface="Gotham Narrow Book" pitchFamily="2" charset="0"/>
-              </a:rPr>
-              <a:t> ad minim </a:t>
-            </a:r>
-            <a:r>
-              <a:rPr lang="en-US" dirty="0" err="1">
-                <a:latin typeface="Gotham Narrow Book" pitchFamily="2" charset="0"/>
-              </a:rPr>
-              <a:t>veniam</a:t>
-            </a:r>
-            <a:r>
-              <a:rPr lang="en-US" dirty="0">
-                <a:latin typeface="Gotham Narrow Book" pitchFamily="2" charset="0"/>
-              </a:rPr>
-              <a:t>, </a:t>
-            </a:r>
-            <a:r>
-              <a:rPr lang="en-US" dirty="0" err="1">
-                <a:latin typeface="Gotham Narrow Book" pitchFamily="2" charset="0"/>
-              </a:rPr>
-              <a:t>quis</a:t>
-            </a:r>
-            <a:r>
-              <a:rPr lang="en-US" dirty="0">
-                <a:latin typeface="Gotham Narrow Book" pitchFamily="2" charset="0"/>
-              </a:rPr>
-              <a:t> </a:t>
-            </a:r>
-            <a:r>
-              <a:rPr lang="en-US" dirty="0" err="1">
-                <a:latin typeface="Gotham Narrow Book" pitchFamily="2" charset="0"/>
-              </a:rPr>
-              <a:t>nostrud</a:t>
-            </a:r>
-            <a:r>
-              <a:rPr lang="en-US" dirty="0">
-                <a:latin typeface="Gotham Narrow Book" pitchFamily="2" charset="0"/>
-              </a:rPr>
-              <a:t> exercitation </a:t>
-            </a:r>
-            <a:r>
-              <a:rPr lang="en-US" dirty="0" err="1">
-                <a:latin typeface="Gotham Narrow Book" pitchFamily="2" charset="0"/>
-              </a:rPr>
-              <a:t>ullamco</a:t>
-            </a:r>
-            <a:r>
-              <a:rPr lang="en-US" dirty="0">
-                <a:latin typeface="Gotham Narrow Book" pitchFamily="2" charset="0"/>
-              </a:rPr>
-              <a:t> </a:t>
-            </a:r>
-            <a:r>
-              <a:rPr lang="en-US" dirty="0" err="1">
-                <a:latin typeface="Gotham Narrow Book" pitchFamily="2" charset="0"/>
-              </a:rPr>
-              <a:t>laboris</a:t>
-            </a:r>
-            <a:r>
-              <a:rPr lang="en-US" dirty="0">
-                <a:latin typeface="Gotham Narrow Book" pitchFamily="2" charset="0"/>
-              </a:rPr>
-              <a:t> nisi </a:t>
-            </a:r>
-            <a:r>
-              <a:rPr lang="en-US" dirty="0" err="1">
-                <a:latin typeface="Gotham Narrow Book" pitchFamily="2" charset="0"/>
-              </a:rPr>
-              <a:t>ut</a:t>
-            </a:r>
-            <a:r>
-              <a:rPr lang="en-US" dirty="0">
-                <a:latin typeface="Gotham Narrow Book" pitchFamily="2" charset="0"/>
-              </a:rPr>
-              <a:t> </a:t>
-            </a:r>
-            <a:r>
-              <a:rPr lang="en-US" dirty="0" err="1">
-                <a:latin typeface="Gotham Narrow Book" pitchFamily="2" charset="0"/>
-              </a:rPr>
-              <a:t>aliquip</a:t>
-            </a:r>
-            <a:r>
-              <a:rPr lang="en-US" dirty="0">
-                <a:latin typeface="Gotham Narrow Book" pitchFamily="2" charset="0"/>
-              </a:rPr>
-              <a:t> ex </a:t>
-            </a:r>
-            <a:r>
-              <a:rPr lang="en-US" dirty="0" err="1">
-                <a:latin typeface="Gotham Narrow Book" pitchFamily="2" charset="0"/>
-              </a:rPr>
-              <a:t>ea</a:t>
-            </a:r>
-            <a:r>
-              <a:rPr lang="en-US" dirty="0">
-                <a:latin typeface="Gotham Narrow Book" pitchFamily="2" charset="0"/>
-              </a:rPr>
-              <a:t> </a:t>
-            </a:r>
-            <a:r>
-              <a:rPr lang="en-US" dirty="0" err="1">
-                <a:latin typeface="Gotham Narrow Book" pitchFamily="2" charset="0"/>
-              </a:rPr>
-              <a:t>commodo</a:t>
-            </a:r>
-            <a:r>
-              <a:rPr lang="en-US" dirty="0">
-                <a:latin typeface="Gotham Narrow Book" pitchFamily="2" charset="0"/>
-              </a:rPr>
-              <a:t> </a:t>
-            </a:r>
-            <a:r>
-              <a:rPr lang="en-US" dirty="0" err="1">
-                <a:latin typeface="Gotham Narrow Book" pitchFamily="2" charset="0"/>
-              </a:rPr>
-              <a:t>consequat</a:t>
-            </a:r>
-            <a:r>
-              <a:rPr lang="en-US" dirty="0">
-                <a:latin typeface="Gotham Narrow Book" pitchFamily="2" charset="0"/>
-              </a:rPr>
-              <a:t>. Duis </a:t>
-            </a:r>
-            <a:r>
-              <a:rPr lang="en-US" dirty="0" err="1">
-                <a:latin typeface="Gotham Narrow Book" pitchFamily="2" charset="0"/>
-              </a:rPr>
-              <a:t>aute</a:t>
-            </a:r>
-            <a:r>
-              <a:rPr lang="en-US" dirty="0">
-                <a:latin typeface="Gotham Narrow Book" pitchFamily="2" charset="0"/>
-              </a:rPr>
-              <a:t> </a:t>
-            </a:r>
-            <a:r>
-              <a:rPr lang="en-US" dirty="0" err="1">
-                <a:latin typeface="Gotham Narrow Book" pitchFamily="2" charset="0"/>
-              </a:rPr>
-              <a:t>irure</a:t>
-            </a:r>
-            <a:r>
-              <a:rPr lang="en-US" dirty="0">
-                <a:latin typeface="Gotham Narrow Book" pitchFamily="2" charset="0"/>
-              </a:rPr>
-              <a:t> dolor in </a:t>
-            </a:r>
-            <a:r>
-              <a:rPr lang="en-US" dirty="0" err="1">
-                <a:latin typeface="Gotham Narrow Book" pitchFamily="2" charset="0"/>
-              </a:rPr>
-              <a:t>reprehenderit</a:t>
-            </a:r>
-            <a:r>
-              <a:rPr lang="en-US" dirty="0">
-                <a:latin typeface="Gotham Narrow Book" pitchFamily="2" charset="0"/>
-              </a:rPr>
-              <a:t> in </a:t>
-            </a:r>
-            <a:r>
-              <a:rPr lang="en-US" dirty="0" err="1">
-                <a:latin typeface="Gotham Narrow Book" pitchFamily="2" charset="0"/>
-              </a:rPr>
-              <a:t>voluptate</a:t>
-            </a:r>
-            <a:r>
-              <a:rPr lang="en-US" dirty="0">
-                <a:latin typeface="Gotham Narrow Book" pitchFamily="2" charset="0"/>
-              </a:rPr>
-              <a:t> </a:t>
-            </a:r>
-            <a:r>
-              <a:rPr lang="en-US" dirty="0" err="1">
-                <a:latin typeface="Gotham Narrow Book" pitchFamily="2" charset="0"/>
-              </a:rPr>
-              <a:t>velit</a:t>
-            </a:r>
-            <a:r>
-              <a:rPr lang="en-US" dirty="0">
-                <a:latin typeface="Gotham Narrow Book" pitchFamily="2" charset="0"/>
-              </a:rPr>
-              <a:t> </a:t>
-            </a:r>
-            <a:r>
-              <a:rPr lang="en-US" dirty="0" err="1">
-                <a:latin typeface="Gotham Narrow Book" pitchFamily="2" charset="0"/>
-              </a:rPr>
-              <a:t>esse</a:t>
-            </a:r>
-            <a:r>
-              <a:rPr lang="en-US" dirty="0">
-                <a:latin typeface="Gotham Narrow Book" pitchFamily="2" charset="0"/>
-              </a:rPr>
-              <a:t> </a:t>
-            </a:r>
-            <a:r>
-              <a:rPr lang="en-US" dirty="0" err="1">
-                <a:latin typeface="Gotham Narrow Book" pitchFamily="2" charset="0"/>
-              </a:rPr>
-              <a:t>cillum</a:t>
-            </a:r>
-            <a:r>
-              <a:rPr lang="en-US" dirty="0">
-                <a:latin typeface="Gotham Narrow Book" pitchFamily="2" charset="0"/>
-              </a:rPr>
-              <a:t> dolore </a:t>
-            </a:r>
-            <a:r>
-              <a:rPr lang="en-US" dirty="0" err="1">
-                <a:latin typeface="Gotham Narrow Book" pitchFamily="2" charset="0"/>
-              </a:rPr>
-              <a:t>eu</a:t>
-            </a:r>
-            <a:r>
-              <a:rPr lang="en-US" dirty="0">
-                <a:latin typeface="Gotham Narrow Book" pitchFamily="2" charset="0"/>
-              </a:rPr>
-              <a:t> </a:t>
-            </a:r>
-            <a:r>
-              <a:rPr lang="en-US" dirty="0" err="1">
-                <a:latin typeface="Gotham Narrow Book" pitchFamily="2" charset="0"/>
-              </a:rPr>
-              <a:t>fugiat</a:t>
-            </a:r>
-            <a:r>
-              <a:rPr lang="en-US" dirty="0">
-                <a:latin typeface="Gotham Narrow Book" pitchFamily="2" charset="0"/>
-              </a:rPr>
-              <a:t> </a:t>
-            </a:r>
-            <a:r>
-              <a:rPr lang="en-US" dirty="0" err="1">
-                <a:latin typeface="Gotham Narrow Book" pitchFamily="2" charset="0"/>
-              </a:rPr>
-              <a:t>nulla</a:t>
-            </a:r>
-            <a:r>
-              <a:rPr lang="en-US" dirty="0">
-                <a:latin typeface="Gotham Narrow Book" pitchFamily="2" charset="0"/>
-              </a:rPr>
-              <a:t> </a:t>
-            </a:r>
-            <a:r>
-              <a:rPr lang="en-US" dirty="0" err="1">
-                <a:latin typeface="Gotham Narrow Book" pitchFamily="2" charset="0"/>
-              </a:rPr>
-              <a:t>pariature</a:t>
-            </a:r>
-            <a:r>
-              <a:rPr lang="en-US" dirty="0">
-                <a:latin typeface="Gotham Narrow Book" pitchFamily="2" charset="0"/>
-              </a:rPr>
-              <a:t>.</a:t>
-            </a:r>
-          </a:p>
-          <a:p>
-            <a:pPr>
-              <a:lnSpc>
-                <a:spcPct val="125000"/>
-              </a:lnSpc>
-            </a:pPr>
-            <a:r>
-              <a:rPr lang="en-US" dirty="0">
-                <a:latin typeface="Gotham Narrow Book" pitchFamily="2" charset="0"/>
-              </a:rPr>
-              <a:t>	</a:t>
-            </a:r>
-          </a:p>
-          <a:p>
-            <a:pPr>
-              <a:lnSpc>
-                <a:spcPct val="125000"/>
-              </a:lnSpc>
-            </a:pPr>
-            <a:r>
-              <a:rPr lang="en-US" dirty="0">
-                <a:latin typeface="Gotham Narrow Book" pitchFamily="2" charset="0"/>
-              </a:rPr>
-              <a:t>	• Secondary Slide</a:t>
-            </a:r>
-          </a:p>
-          <a:p>
-            <a:pPr>
-              <a:lnSpc>
-                <a:spcPct val="125000"/>
-              </a:lnSpc>
-            </a:pPr>
-            <a:r>
-              <a:rPr lang="en-US" dirty="0">
-                <a:latin typeface="Gotham Narrow Book" pitchFamily="2" charset="0"/>
-              </a:rPr>
-              <a:t>	• Secondary Slide</a:t>
-            </a:r>
-          </a:p>
-          <a:p>
-            <a:pPr>
-              <a:lnSpc>
-                <a:spcPct val="125000"/>
-              </a:lnSpc>
-            </a:pPr>
-            <a:r>
-              <a:rPr lang="en-US" dirty="0">
-                <a:latin typeface="Gotham Narrow Book" pitchFamily="2" charset="0"/>
-              </a:rPr>
-              <a:t>	• Secondary Slide</a:t>
-            </a:r>
-          </a:p>
-          <a:p>
-            <a:pPr>
-              <a:lnSpc>
-                <a:spcPct val="125000"/>
-              </a:lnSpc>
-            </a:pPr>
-            <a:r>
-              <a:rPr lang="en-US" dirty="0">
-                <a:latin typeface="Gotham Narrow Book" pitchFamily="2" charset="0"/>
-              </a:rPr>
-              <a:t>	• Secondary Slide</a:t>
-            </a:r>
-          </a:p>
-          <a:p>
-            <a:pPr>
-              <a:lnSpc>
-                <a:spcPct val="125000"/>
-              </a:lnSpc>
-            </a:pPr>
-            <a:r>
-              <a:rPr lang="en-US" dirty="0">
-                <a:latin typeface="Gotham Narrow Book" pitchFamily="2" charset="0"/>
-              </a:rPr>
-              <a:t>	• Secondary Slide</a:t>
-            </a:r>
-          </a:p>
-          <a:p>
-            <a:pPr>
-              <a:lnSpc>
-                <a:spcPct val="125000"/>
-              </a:lnSpc>
-            </a:pPr>
-            <a:r>
-              <a:rPr lang="en-US" dirty="0">
-                <a:latin typeface="Gotham Narrow Book" pitchFamily="2" charset="0"/>
-              </a:rPr>
-              <a:t>	• Secondary Slide</a:t>
-            </a:r>
-          </a:p>
-          <a:p>
-            <a:pPr>
-              <a:lnSpc>
-                <a:spcPct val="125000"/>
-              </a:lnSpc>
-            </a:pPr>
-            <a:r>
-              <a:rPr lang="en-US" dirty="0">
-                <a:latin typeface="Gotham Narrow Book" pitchFamily="2" charset="0"/>
-              </a:rPr>
-              <a:t>	• Secondary Slide</a:t>
-            </a:r>
+            <a:endParaRPr lang="en-US" dirty="0">
+              <a:latin typeface="Gotham Narrow Book" pitchFamily="2" charset="0"/>
+            </a:endParaRPr>
           </a:p>
         </p:txBody>
       </p:sp>
     </p:spTree>
     <p:extLst>
       <p:ext uri="{BB962C8B-B14F-4D97-AF65-F5344CB8AC3E}">
-        <p14:creationId xmlns:p14="http://schemas.microsoft.com/office/powerpoint/2010/main" val="1779087438"/>
+        <p14:creationId xmlns:p14="http://schemas.microsoft.com/office/powerpoint/2010/main" val="602613557"/>
       </p:ext>
     </p:extLst>
   </p:cSld>
@@ -4624,7 +5322,7 @@
 </file>
 
 <file path=ppt/slides/slide5.xml><?xml version="1.0" encoding="utf-8"?>
-<p:sld xmlns:a="http://schemas.openxmlformats.org/drawingml/2006/main" xmlns:r="http://schemas.openxmlformats.org/officeDocument/2006/relationships" xmlns:p="http://schemas.openxmlformats.org/presentationml/2006/main">
+<p:sld xmlns:a="http://schemas.openxmlformats.org/drawingml/2006/main" xmlns:r="http://schemas.openxmlformats.org/officeDocument/2006/relationships" xmlns:p="http://schemas.openxmlformats.org/presentationml/2006/main" show="0">
   <p:cSld>
     <p:bg>
       <p:bgPr>
@@ -4708,8 +5406,8 @@
         </p:nvSpPr>
         <p:spPr>
           <a:xfrm>
-            <a:off x="5107708" y="1115395"/>
-            <a:ext cx="6503917" cy="4256705"/>
+            <a:off x="876822" y="1115395"/>
+            <a:ext cx="10734804" cy="4256705"/>
           </a:xfrm>
           <a:prstGeom prst="rect">
             <a:avLst/>
@@ -5141,7 +5839,7 @@
               <a:rPr lang="en-US" dirty="0">
                 <a:latin typeface="Gotham Narrow Book" pitchFamily="2" charset="0"/>
               </a:rPr>
-              <a:t>	• When single image is necessary</a:t>
+              <a:t>	• Secondary Slide</a:t>
             </a:r>
           </a:p>
           <a:p>
@@ -5154,7 +5852,7 @@
               <a:rPr lang="en-US" dirty="0">
                 <a:latin typeface="Gotham Narrow Book" pitchFamily="2" charset="0"/>
               </a:rPr>
-              <a:t>	• Use this as a reference for appropriate style</a:t>
+              <a:t>	• Secondary Slide</a:t>
             </a:r>
           </a:p>
           <a:p>
@@ -5167,61 +5865,67 @@
               <a:rPr lang="en-US" dirty="0">
                 <a:latin typeface="Gotham Narrow Book" pitchFamily="2" charset="0"/>
               </a:rPr>
-              <a:t>	• Images. Images. Images.</a:t>
-            </a:r>
-          </a:p>
-        </p:txBody>
-      </p:sp>
-      <p:sp>
-        <p:nvSpPr>
-          <p:cNvPr id="2" name="Rectangle 1">
-            <a:extLst>
-              <a:ext uri="{FF2B5EF4-FFF2-40B4-BE49-F238E27FC236}">
-                <a16:creationId xmlns:a16="http://schemas.microsoft.com/office/drawing/2014/main" id="{97ABE370-7C49-B54D-BC97-DC52776CBD47}"/>
-              </a:ext>
-            </a:extLst>
-          </p:cNvPr>
-          <p:cNvSpPr/>
-          <p:nvPr/>
-        </p:nvSpPr>
-        <p:spPr>
-          <a:xfrm>
-            <a:off x="988291" y="1115395"/>
-            <a:ext cx="3888509" cy="4256705"/>
-          </a:xfrm>
-          <a:prstGeom prst="rect">
-            <a:avLst/>
-          </a:prstGeom>
-        </p:spPr>
-        <p:style>
-          <a:lnRef idx="2">
-            <a:schemeClr val="accent1">
-              <a:shade val="50000"/>
-            </a:schemeClr>
-          </a:lnRef>
-          <a:fillRef idx="1">
-            <a:schemeClr val="accent1"/>
-          </a:fillRef>
-          <a:effectRef idx="0">
-            <a:schemeClr val="accent1"/>
-          </a:effectRef>
-          <a:fontRef idx="minor">
-            <a:schemeClr val="lt1"/>
-          </a:fontRef>
-        </p:style>
-        <p:txBody>
-          <a:bodyPr rtlCol="0" anchor="ctr"/>
-          <a:lstStyle/>
-          <a:p>
-            <a:pPr algn="ctr"/>
-            <a:endParaRPr lang="en-US"/>
+              <a:t>	• Secondary Slide</a:t>
+            </a:r>
+          </a:p>
+          <a:p>
+            <a:pPr>
+              <a:lnSpc>
+                <a:spcPct val="125000"/>
+              </a:lnSpc>
+            </a:pPr>
+            <a:r>
+              <a:rPr lang="en-US" dirty="0">
+                <a:latin typeface="Gotham Narrow Book" pitchFamily="2" charset="0"/>
+              </a:rPr>
+              <a:t>	• Secondary Slide</a:t>
+            </a:r>
+          </a:p>
+          <a:p>
+            <a:pPr>
+              <a:lnSpc>
+                <a:spcPct val="125000"/>
+              </a:lnSpc>
+            </a:pPr>
+            <a:r>
+              <a:rPr lang="en-US" dirty="0">
+                <a:latin typeface="Gotham Narrow Book" pitchFamily="2" charset="0"/>
+              </a:rPr>
+              <a:t>	• Secondary Slide</a:t>
+            </a:r>
+          </a:p>
+          <a:p>
+            <a:pPr>
+              <a:lnSpc>
+                <a:spcPct val="125000"/>
+              </a:lnSpc>
+            </a:pPr>
+            <a:r>
+              <a:rPr lang="en-US" dirty="0">
+                <a:latin typeface="Gotham Narrow Book" pitchFamily="2" charset="0"/>
+              </a:rPr>
+              <a:t>	• Secondary Slide</a:t>
+            </a:r>
+          </a:p>
+          <a:p>
+            <a:pPr>
+              <a:lnSpc>
+                <a:spcPct val="125000"/>
+              </a:lnSpc>
+            </a:pPr>
+            <a:r>
+              <a:rPr lang="en-US" dirty="0">
+                <a:latin typeface="Gotham Narrow Book" pitchFamily="2" charset="0"/>
+              </a:rPr>
+              <a:t>	• Secondary Slide</a:t>
+            </a:r>
           </a:p>
         </p:txBody>
       </p:sp>
     </p:spTree>
     <p:extLst>
       <p:ext uri="{BB962C8B-B14F-4D97-AF65-F5344CB8AC3E}">
-        <p14:creationId xmlns:p14="http://schemas.microsoft.com/office/powerpoint/2010/main" val="1304093165"/>
+        <p14:creationId xmlns:p14="http://schemas.microsoft.com/office/powerpoint/2010/main" val="1779087438"/>
       </p:ext>
     </p:extLst>
   </p:cSld>
@@ -5232,7 +5936,7 @@
 </file>
 
 <file path=ppt/slides/slide6.xml><?xml version="1.0" encoding="utf-8"?>
-<p:sld xmlns:a="http://schemas.openxmlformats.org/drawingml/2006/main" xmlns:r="http://schemas.openxmlformats.org/officeDocument/2006/relationships" xmlns:p="http://schemas.openxmlformats.org/presentationml/2006/main">
+<p:sld xmlns:a="http://schemas.openxmlformats.org/drawingml/2006/main" xmlns:r="http://schemas.openxmlformats.org/officeDocument/2006/relationships" xmlns:p="http://schemas.openxmlformats.org/presentationml/2006/main" show="0">
   <p:cSld>
     <p:bg>
       <p:bgPr>
@@ -5316,8 +6020,8 @@
         </p:nvSpPr>
         <p:spPr>
           <a:xfrm>
-            <a:off x="8635999" y="1115394"/>
-            <a:ext cx="2975628" cy="4256705"/>
+            <a:off x="5107708" y="1115395"/>
+            <a:ext cx="6503917" cy="4256705"/>
           </a:xfrm>
           <a:prstGeom prst="rect">
             <a:avLst/>
@@ -5345,6 +6049,246 @@
               <a:rPr lang="en-US" dirty="0" err="1">
                 <a:latin typeface="Gotham Narrow Book" pitchFamily="2" charset="0"/>
               </a:rPr>
+              <a:t>amet</a:t>
+            </a:r>
+            <a:r>
+              <a:rPr lang="en-US" dirty="0">
+                <a:latin typeface="Gotham Narrow Book" pitchFamily="2" charset="0"/>
+              </a:rPr>
+              <a:t>, </a:t>
+            </a:r>
+            <a:r>
+              <a:rPr lang="en-US" dirty="0" err="1">
+                <a:latin typeface="Gotham Narrow Book" pitchFamily="2" charset="0"/>
+              </a:rPr>
+              <a:t>consectetur</a:t>
+            </a:r>
+            <a:r>
+              <a:rPr lang="en-US" dirty="0">
+                <a:latin typeface="Gotham Narrow Book" pitchFamily="2" charset="0"/>
+              </a:rPr>
+              <a:t> </a:t>
+            </a:r>
+            <a:r>
+              <a:rPr lang="en-US" dirty="0" err="1">
+                <a:latin typeface="Gotham Narrow Book" pitchFamily="2" charset="0"/>
+              </a:rPr>
+              <a:t>adipiscing</a:t>
+            </a:r>
+            <a:r>
+              <a:rPr lang="en-US" dirty="0">
+                <a:latin typeface="Gotham Narrow Book" pitchFamily="2" charset="0"/>
+              </a:rPr>
+              <a:t> </a:t>
+            </a:r>
+            <a:r>
+              <a:rPr lang="en-US" dirty="0" err="1">
+                <a:latin typeface="Gotham Narrow Book" pitchFamily="2" charset="0"/>
+              </a:rPr>
+              <a:t>elit</a:t>
+            </a:r>
+            <a:r>
+              <a:rPr lang="en-US" dirty="0">
+                <a:latin typeface="Gotham Narrow Book" pitchFamily="2" charset="0"/>
+              </a:rPr>
+              <a:t>, sed do </a:t>
+            </a:r>
+            <a:r>
+              <a:rPr lang="en-US" dirty="0" err="1">
+                <a:latin typeface="Gotham Narrow Book" pitchFamily="2" charset="0"/>
+              </a:rPr>
+              <a:t>eiusmod</a:t>
+            </a:r>
+            <a:r>
+              <a:rPr lang="en-US" dirty="0">
+                <a:latin typeface="Gotham Narrow Book" pitchFamily="2" charset="0"/>
+              </a:rPr>
+              <a:t> </a:t>
+            </a:r>
+            <a:r>
+              <a:rPr lang="en-US" dirty="0" err="1">
+                <a:latin typeface="Gotham Narrow Book" pitchFamily="2" charset="0"/>
+              </a:rPr>
+              <a:t>tempor</a:t>
+            </a:r>
+            <a:r>
+              <a:rPr lang="en-US" dirty="0">
+                <a:latin typeface="Gotham Narrow Book" pitchFamily="2" charset="0"/>
+              </a:rPr>
+              <a:t> </a:t>
+            </a:r>
+            <a:r>
+              <a:rPr lang="en-US" dirty="0" err="1">
+                <a:latin typeface="Gotham Narrow Book" pitchFamily="2" charset="0"/>
+              </a:rPr>
+              <a:t>incididunt</a:t>
+            </a:r>
+            <a:r>
+              <a:rPr lang="en-US" dirty="0">
+                <a:latin typeface="Gotham Narrow Book" pitchFamily="2" charset="0"/>
+              </a:rPr>
+              <a:t> </a:t>
+            </a:r>
+            <a:r>
+              <a:rPr lang="en-US" dirty="0" err="1">
+                <a:latin typeface="Gotham Narrow Book" pitchFamily="2" charset="0"/>
+              </a:rPr>
+              <a:t>ut</a:t>
+            </a:r>
+            <a:r>
+              <a:rPr lang="en-US" dirty="0">
+                <a:latin typeface="Gotham Narrow Book" pitchFamily="2" charset="0"/>
+              </a:rPr>
+              <a:t> </a:t>
+            </a:r>
+            <a:r>
+              <a:rPr lang="en-US" dirty="0" err="1">
+                <a:latin typeface="Gotham Narrow Book" pitchFamily="2" charset="0"/>
+              </a:rPr>
+              <a:t>labore</a:t>
+            </a:r>
+            <a:r>
+              <a:rPr lang="en-US" dirty="0">
+                <a:latin typeface="Gotham Narrow Book" pitchFamily="2" charset="0"/>
+              </a:rPr>
+              <a:t> et dolore magna </a:t>
+            </a:r>
+            <a:r>
+              <a:rPr lang="en-US" dirty="0" err="1">
+                <a:latin typeface="Gotham Narrow Book" pitchFamily="2" charset="0"/>
+              </a:rPr>
+              <a:t>aliqua</a:t>
+            </a:r>
+            <a:r>
+              <a:rPr lang="en-US" dirty="0">
+                <a:latin typeface="Gotham Narrow Book" pitchFamily="2" charset="0"/>
+              </a:rPr>
+              <a:t>. Ut </a:t>
+            </a:r>
+            <a:r>
+              <a:rPr lang="en-US" dirty="0" err="1">
+                <a:latin typeface="Gotham Narrow Book" pitchFamily="2" charset="0"/>
+              </a:rPr>
+              <a:t>enim</a:t>
+            </a:r>
+            <a:r>
+              <a:rPr lang="en-US" dirty="0">
+                <a:latin typeface="Gotham Narrow Book" pitchFamily="2" charset="0"/>
+              </a:rPr>
+              <a:t> ad minim </a:t>
+            </a:r>
+            <a:r>
+              <a:rPr lang="en-US" dirty="0" err="1">
+                <a:latin typeface="Gotham Narrow Book" pitchFamily="2" charset="0"/>
+              </a:rPr>
+              <a:t>veniam</a:t>
+            </a:r>
+            <a:r>
+              <a:rPr lang="en-US" dirty="0">
+                <a:latin typeface="Gotham Narrow Book" pitchFamily="2" charset="0"/>
+              </a:rPr>
+              <a:t>, </a:t>
+            </a:r>
+            <a:r>
+              <a:rPr lang="en-US" dirty="0" err="1">
+                <a:latin typeface="Gotham Narrow Book" pitchFamily="2" charset="0"/>
+              </a:rPr>
+              <a:t>quis</a:t>
+            </a:r>
+            <a:r>
+              <a:rPr lang="en-US" dirty="0">
+                <a:latin typeface="Gotham Narrow Book" pitchFamily="2" charset="0"/>
+              </a:rPr>
+              <a:t> </a:t>
+            </a:r>
+            <a:r>
+              <a:rPr lang="en-US" dirty="0" err="1">
+                <a:latin typeface="Gotham Narrow Book" pitchFamily="2" charset="0"/>
+              </a:rPr>
+              <a:t>nostrud</a:t>
+            </a:r>
+            <a:r>
+              <a:rPr lang="en-US" dirty="0">
+                <a:latin typeface="Gotham Narrow Book" pitchFamily="2" charset="0"/>
+              </a:rPr>
+              <a:t> exercitation </a:t>
+            </a:r>
+            <a:r>
+              <a:rPr lang="en-US" dirty="0" err="1">
+                <a:latin typeface="Gotham Narrow Book" pitchFamily="2" charset="0"/>
+              </a:rPr>
+              <a:t>ullamco</a:t>
+            </a:r>
+            <a:r>
+              <a:rPr lang="en-US" dirty="0">
+                <a:latin typeface="Gotham Narrow Book" pitchFamily="2" charset="0"/>
+              </a:rPr>
+              <a:t> </a:t>
+            </a:r>
+            <a:r>
+              <a:rPr lang="en-US" dirty="0" err="1">
+                <a:latin typeface="Gotham Narrow Book" pitchFamily="2" charset="0"/>
+              </a:rPr>
+              <a:t>laboris</a:t>
+            </a:r>
+            <a:r>
+              <a:rPr lang="en-US" dirty="0">
+                <a:latin typeface="Gotham Narrow Book" pitchFamily="2" charset="0"/>
+              </a:rPr>
+              <a:t> nisi </a:t>
+            </a:r>
+            <a:r>
+              <a:rPr lang="en-US" dirty="0" err="1">
+                <a:latin typeface="Gotham Narrow Book" pitchFamily="2" charset="0"/>
+              </a:rPr>
+              <a:t>ut</a:t>
+            </a:r>
+            <a:r>
+              <a:rPr lang="en-US" dirty="0">
+                <a:latin typeface="Gotham Narrow Book" pitchFamily="2" charset="0"/>
+              </a:rPr>
+              <a:t> </a:t>
+            </a:r>
+            <a:r>
+              <a:rPr lang="en-US" dirty="0" err="1">
+                <a:latin typeface="Gotham Narrow Book" pitchFamily="2" charset="0"/>
+              </a:rPr>
+              <a:t>aliquip</a:t>
+            </a:r>
+            <a:r>
+              <a:rPr lang="en-US" dirty="0">
+                <a:latin typeface="Gotham Narrow Book" pitchFamily="2" charset="0"/>
+              </a:rPr>
+              <a:t> ex </a:t>
+            </a:r>
+            <a:r>
+              <a:rPr lang="en-US" dirty="0" err="1">
+                <a:latin typeface="Gotham Narrow Book" pitchFamily="2" charset="0"/>
+              </a:rPr>
+              <a:t>ea</a:t>
+            </a:r>
+            <a:r>
+              <a:rPr lang="en-US" dirty="0">
+                <a:latin typeface="Gotham Narrow Book" pitchFamily="2" charset="0"/>
+              </a:rPr>
+              <a:t> </a:t>
+            </a:r>
+            <a:r>
+              <a:rPr lang="en-US" dirty="0" err="1">
+                <a:latin typeface="Gotham Narrow Book" pitchFamily="2" charset="0"/>
+              </a:rPr>
+              <a:t>commodo</a:t>
+            </a:r>
+            <a:r>
+              <a:rPr lang="en-US" dirty="0">
+                <a:latin typeface="Gotham Narrow Book" pitchFamily="2" charset="0"/>
+              </a:rPr>
+              <a:t> </a:t>
+            </a:r>
+            <a:r>
+              <a:rPr lang="en-US" dirty="0" err="1">
+                <a:latin typeface="Gotham Narrow Book" pitchFamily="2" charset="0"/>
+              </a:rPr>
               <a:t>consequat</a:t>
             </a:r>
             <a:r>
@@ -5381,7 +6325,103 @@
               <a:rPr lang="en-US" dirty="0" err="1">
                 <a:latin typeface="Gotham Narrow Book" pitchFamily="2" charset="0"/>
               </a:rPr>
-              <a:t>reprehende</a:t>
+              <a:t>reprehenderit</a:t>
+            </a:r>
+            <a:r>
+              <a:rPr lang="en-US" dirty="0">
+                <a:latin typeface="Gotham Narrow Book" pitchFamily="2" charset="0"/>
+              </a:rPr>
+              <a:t> in </a:t>
+            </a:r>
+            <a:r>
+              <a:rPr lang="en-US" dirty="0" err="1">
+                <a:latin typeface="Gotham Narrow Book" pitchFamily="2" charset="0"/>
+              </a:rPr>
+              <a:t>voluptate</a:t>
+            </a:r>
+            <a:r>
+              <a:rPr lang="en-US" dirty="0">
+                <a:latin typeface="Gotham Narrow Book" pitchFamily="2" charset="0"/>
+              </a:rPr>
+              <a:t> </a:t>
+            </a:r>
+            <a:r>
+              <a:rPr lang="en-US" dirty="0" err="1">
+                <a:latin typeface="Gotham Narrow Book" pitchFamily="2" charset="0"/>
+              </a:rPr>
+              <a:t>velit</a:t>
+            </a:r>
+            <a:r>
+              <a:rPr lang="en-US" dirty="0">
+                <a:latin typeface="Gotham Narrow Book" pitchFamily="2" charset="0"/>
+              </a:rPr>
+              <a:t> </a:t>
+            </a:r>
+            <a:r>
+              <a:rPr lang="en-US" dirty="0" err="1">
+                <a:latin typeface="Gotham Narrow Book" pitchFamily="2" charset="0"/>
+              </a:rPr>
+              <a:t>esse</a:t>
+            </a:r>
+            <a:r>
+              <a:rPr lang="en-US" dirty="0">
+                <a:latin typeface="Gotham Narrow Book" pitchFamily="2" charset="0"/>
+              </a:rPr>
+              <a:t> </a:t>
+            </a:r>
+            <a:r>
+              <a:rPr lang="en-US" dirty="0" err="1">
+                <a:latin typeface="Gotham Narrow Book" pitchFamily="2" charset="0"/>
+              </a:rPr>
+              <a:t>cillum</a:t>
+            </a:r>
+            <a:r>
+              <a:rPr lang="en-US" dirty="0">
+                <a:latin typeface="Gotham Narrow Book" pitchFamily="2" charset="0"/>
+              </a:rPr>
+              <a:t> dolore </a:t>
+            </a:r>
+            <a:r>
+              <a:rPr lang="en-US" dirty="0" err="1">
+                <a:latin typeface="Gotham Narrow Book" pitchFamily="2" charset="0"/>
+              </a:rPr>
+              <a:t>eu</a:t>
+            </a:r>
+            <a:r>
+              <a:rPr lang="en-US" dirty="0">
+                <a:latin typeface="Gotham Narrow Book" pitchFamily="2" charset="0"/>
+              </a:rPr>
+              <a:t> </a:t>
+            </a:r>
+            <a:r>
+              <a:rPr lang="en-US" dirty="0" err="1">
+                <a:latin typeface="Gotham Narrow Book" pitchFamily="2" charset="0"/>
+              </a:rPr>
+              <a:t>fugiat</a:t>
+            </a:r>
+            <a:r>
+              <a:rPr lang="en-US" dirty="0">
+                <a:latin typeface="Gotham Narrow Book" pitchFamily="2" charset="0"/>
+              </a:rPr>
+              <a:t> </a:t>
+            </a:r>
+            <a:r>
+              <a:rPr lang="en-US" dirty="0" err="1">
+                <a:latin typeface="Gotham Narrow Book" pitchFamily="2" charset="0"/>
+              </a:rPr>
+              <a:t>nulla</a:t>
+            </a:r>
+            <a:r>
+              <a:rPr lang="en-US" dirty="0">
+                <a:latin typeface="Gotham Narrow Book" pitchFamily="2" charset="0"/>
+              </a:rPr>
+              <a:t> </a:t>
+            </a:r>
+            <a:r>
+              <a:rPr lang="en-US" dirty="0" err="1">
+                <a:latin typeface="Gotham Narrow Book" pitchFamily="2" charset="0"/>
+              </a:rPr>
+              <a:t>pariature</a:t>
             </a:r>
             <a:r>
               <a:rPr lang="en-US" dirty="0">
@@ -5396,9 +6436,12 @@
                 <a:spcPct val="125000"/>
               </a:lnSpc>
             </a:pPr>
-            <a:endParaRPr lang="en-US" dirty="0">
-              <a:latin typeface="Gotham Narrow Book" pitchFamily="2" charset="0"/>
-            </a:endParaRPr>
+            <a:r>
+              <a:rPr lang="en-US" dirty="0">
+                <a:latin typeface="Gotham Narrow Book" pitchFamily="2" charset="0"/>
+              </a:rPr>
+              <a:t>	</a:t>
+            </a:r>
           </a:p>
           <a:p>
             <a:pPr>
@@ -5410,7 +6453,7 @@
               <a:rPr lang="en-US" dirty="0">
                 <a:latin typeface="Gotham Narrow Book" pitchFamily="2" charset="0"/>
               </a:rPr>
-              <a:t>• Use this slide for multiple images</a:t>
+              <a:t>	• When single image is necessary</a:t>
             </a:r>
           </a:p>
           <a:p>
@@ -5423,7 +6466,7 @@
               <a:rPr lang="en-US" dirty="0">
                 <a:latin typeface="Gotham Narrow Book" pitchFamily="2" charset="0"/>
               </a:rPr>
-              <a:t>• If they absolutely require text</a:t>
+              <a:t>	• Use this as a reference for appropriate style</a:t>
             </a:r>
           </a:p>
           <a:p>
@@ -5436,27 +6479,17 @@
               <a:rPr lang="en-US" dirty="0">
                 <a:latin typeface="Gotham Narrow Book" pitchFamily="2" charset="0"/>
               </a:rPr>
-              <a:t>• Otherwise, use next slide for multiples</a:t>
-            </a:r>
-          </a:p>
-          <a:p>
-            <a:pPr>
-              <a:lnSpc>
-                <a:spcPct val="125000"/>
-              </a:lnSpc>
-            </a:pPr>
-            <a:endParaRPr lang="en-US" dirty="0">
-              <a:latin typeface="Gotham Narrow Book" pitchFamily="2" charset="0"/>
-            </a:endParaRPr>
-          </a:p>
-        </p:txBody>
-      </p:sp>
-      <p:sp>
-        <p:nvSpPr>
-          <p:cNvPr id="8" name="Rectangle 7">
-            <a:extLst>
-              <a:ext uri="{FF2B5EF4-FFF2-40B4-BE49-F238E27FC236}">
-                <a16:creationId xmlns:a16="http://schemas.microsoft.com/office/drawing/2014/main" id="{EC0271BB-6B97-9749-9D88-A5CC3B86D619}"/>
+              <a:t>	• Images. Images. Images.</a:t>
+            </a:r>
+          </a:p>
+        </p:txBody>
+      </p:sp>
+      <p:sp>
+        <p:nvSpPr>
+          <p:cNvPr id="2" name="Rectangle 1">
+            <a:extLst>
+              <a:ext uri="{FF2B5EF4-FFF2-40B4-BE49-F238E27FC236}">
+                <a16:creationId xmlns:a16="http://schemas.microsoft.com/office/drawing/2014/main" id="{97ABE370-7C49-B54D-BC97-DC52776CBD47}"/>
               </a:ext>
             </a:extLst>
           </p:cNvPr>
@@ -5465,8 +6498,8 @@
         </p:nvSpPr>
         <p:spPr>
           <a:xfrm>
-            <a:off x="988292" y="1115394"/>
-            <a:ext cx="3592946" cy="4256705"/>
+            <a:off x="988291" y="1115395"/>
+            <a:ext cx="3888509" cy="4256705"/>
           </a:xfrm>
           <a:prstGeom prst="rect">
             <a:avLst/>
@@ -5497,56 +6530,10 @@
           </a:p>
         </p:txBody>
       </p:sp>
-      <p:sp>
-        <p:nvSpPr>
-          <p:cNvPr id="9" name="Rectangle 8">
-            <a:extLst>
-              <a:ext uri="{FF2B5EF4-FFF2-40B4-BE49-F238E27FC236}">
-                <a16:creationId xmlns:a16="http://schemas.microsoft.com/office/drawing/2014/main" id="{38B83EF9-3F52-B145-A21A-EA0D8AC181A0}"/>
-              </a:ext>
-            </a:extLst>
-          </p:cNvPr>
-          <p:cNvSpPr/>
-          <p:nvPr/>
-        </p:nvSpPr>
-        <p:spPr>
-          <a:xfrm>
-            <a:off x="4812146" y="1115394"/>
-            <a:ext cx="3592946" cy="4256705"/>
-          </a:xfrm>
-          <a:prstGeom prst="rect">
-            <a:avLst/>
-          </a:prstGeom>
-        </p:spPr>
-        <p:style>
-          <a:lnRef idx="2">
-            <a:schemeClr val="accent1">
-              <a:shade val="50000"/>
-            </a:schemeClr>
-          </a:lnRef>
-          <a:fillRef idx="1">
-            <a:schemeClr val="accent1"/>
-          </a:fillRef>
-          <a:effectRef idx="0">
-            <a:schemeClr val="accent1"/>
-          </a:effectRef>
-          <a:fontRef idx="minor">
-            <a:schemeClr val="lt1"/>
-          </a:fontRef>
-        </p:style>
-        <p:txBody>
-          <a:bodyPr rtlCol="0" anchor="ctr"/>
-          <a:lstStyle/>
-          <a:p>
-            <a:pPr algn="ctr"/>
-            <a:endParaRPr lang="en-US"/>
-          </a:p>
-        </p:txBody>
-      </p:sp>
     </p:spTree>
     <p:extLst>
       <p:ext uri="{BB962C8B-B14F-4D97-AF65-F5344CB8AC3E}">
-        <p14:creationId xmlns:p14="http://schemas.microsoft.com/office/powerpoint/2010/main" val="3019877112"/>
+        <p14:creationId xmlns:p14="http://schemas.microsoft.com/office/powerpoint/2010/main" val="1304093165"/>
       </p:ext>
     </p:extLst>
   </p:cSld>
@@ -5557,7 +6544,7 @@
 </file>
 
 <file path=ppt/slides/slide7.xml><?xml version="1.0" encoding="utf-8"?>
-<p:sld xmlns:a="http://schemas.openxmlformats.org/drawingml/2006/main" xmlns:r="http://schemas.openxmlformats.org/officeDocument/2006/relationships" xmlns:p="http://schemas.openxmlformats.org/presentationml/2006/main">
+<p:sld xmlns:a="http://schemas.openxmlformats.org/drawingml/2006/main" xmlns:r="http://schemas.openxmlformats.org/officeDocument/2006/relationships" xmlns:p="http://schemas.openxmlformats.org/presentationml/2006/main" show="0">
   <p:cSld>
     <p:bg>
       <p:bgPr>
@@ -5629,10 +6616,159 @@
       </p:sp>
       <p:sp>
         <p:nvSpPr>
-          <p:cNvPr id="2" name="Rectangle 1">
-            <a:extLst>
-              <a:ext uri="{FF2B5EF4-FFF2-40B4-BE49-F238E27FC236}">
-                <a16:creationId xmlns:a16="http://schemas.microsoft.com/office/drawing/2014/main" id="{97ABE370-7C49-B54D-BC97-DC52776CBD47}"/>
+          <p:cNvPr id="6" name="TextBox 5">
+            <a:extLst>
+              <a:ext uri="{FF2B5EF4-FFF2-40B4-BE49-F238E27FC236}">
+                <a16:creationId xmlns:a16="http://schemas.microsoft.com/office/drawing/2014/main" id="{A87927AC-8429-D242-9F31-193EE99C1A6C}"/>
+              </a:ext>
+            </a:extLst>
+          </p:cNvPr>
+          <p:cNvSpPr txBox="1"/>
+          <p:nvPr/>
+        </p:nvSpPr>
+        <p:spPr>
+          <a:xfrm>
+            <a:off x="8635999" y="1115394"/>
+            <a:ext cx="2975628" cy="4256705"/>
+          </a:xfrm>
+          <a:prstGeom prst="rect">
+            <a:avLst/>
+          </a:prstGeom>
+          <a:noFill/>
+        </p:spPr>
+        <p:txBody>
+          <a:bodyPr wrap="square" rtlCol="0">
+            <a:noAutofit/>
+          </a:bodyPr>
+          <a:lstStyle/>
+          <a:p>
+            <a:pPr>
+              <a:lnSpc>
+                <a:spcPct val="125000"/>
+              </a:lnSpc>
+            </a:pPr>
+            <a:r>
+              <a:rPr lang="en-US" dirty="0">
+                <a:latin typeface="Gotham Narrow Book" pitchFamily="2" charset="0"/>
+              </a:rPr>
+              <a:t>Body copy goes here. Lorem ipsum dolor sit </a:t>
+            </a:r>
+            <a:r>
+              <a:rPr lang="en-US" dirty="0" err="1">
+                <a:latin typeface="Gotham Narrow Book" pitchFamily="2" charset="0"/>
+              </a:rPr>
+              <a:t>consequat</a:t>
+            </a:r>
+            <a:r>
+              <a:rPr lang="en-US" dirty="0">
+                <a:latin typeface="Gotham Narrow Book" pitchFamily="2" charset="0"/>
+              </a:rPr>
+              <a:t>. Duis </a:t>
+            </a:r>
+            <a:r>
+              <a:rPr lang="en-US" dirty="0" err="1">
+                <a:latin typeface="Gotham Narrow Book" pitchFamily="2" charset="0"/>
+              </a:rPr>
+              <a:t>aute</a:t>
+            </a:r>
+            <a:r>
+              <a:rPr lang="en-US" dirty="0">
+                <a:latin typeface="Gotham Narrow Book" pitchFamily="2" charset="0"/>
+              </a:rPr>
+              <a:t> </a:t>
+            </a:r>
+            <a:r>
+              <a:rPr lang="en-US" dirty="0" err="1">
+                <a:latin typeface="Gotham Narrow Book" pitchFamily="2" charset="0"/>
+              </a:rPr>
+              <a:t>irure</a:t>
+            </a:r>
+            <a:r>
+              <a:rPr lang="en-US" dirty="0">
+                <a:latin typeface="Gotham Narrow Book" pitchFamily="2" charset="0"/>
+              </a:rPr>
+              <a:t> dolor in </a:t>
+            </a:r>
+            <a:r>
+              <a:rPr lang="en-US" dirty="0" err="1">
+                <a:latin typeface="Gotham Narrow Book" pitchFamily="2" charset="0"/>
+              </a:rPr>
+              <a:t>reprehende</a:t>
+            </a:r>
+            <a:r>
+              <a:rPr lang="en-US" dirty="0">
+                <a:latin typeface="Gotham Narrow Book" pitchFamily="2" charset="0"/>
+              </a:rPr>
+              <a:t>.</a:t>
+            </a:r>
+          </a:p>
+          <a:p>
+            <a:pPr>
+              <a:lnSpc>
+                <a:spcPct val="125000"/>
+              </a:lnSpc>
+            </a:pPr>
+            <a:endParaRPr lang="en-US" dirty="0">
+              <a:latin typeface="Gotham Narrow Book" pitchFamily="2" charset="0"/>
+            </a:endParaRPr>
+          </a:p>
+          <a:p>
+            <a:pPr>
+              <a:lnSpc>
+                <a:spcPct val="125000"/>
+              </a:lnSpc>
+            </a:pPr>
+            <a:r>
+              <a:rPr lang="en-US" dirty="0">
+                <a:latin typeface="Gotham Narrow Book" pitchFamily="2" charset="0"/>
+              </a:rPr>
+              <a:t>• Use this slide for multiple images</a:t>
+            </a:r>
+          </a:p>
+          <a:p>
+            <a:pPr>
+              <a:lnSpc>
+                <a:spcPct val="125000"/>
+              </a:lnSpc>
+            </a:pPr>
+            <a:r>
+              <a:rPr lang="en-US" dirty="0">
+                <a:latin typeface="Gotham Narrow Book" pitchFamily="2" charset="0"/>
+              </a:rPr>
+              <a:t>• If they absolutely require text</a:t>
+            </a:r>
+          </a:p>
+          <a:p>
+            <a:pPr>
+              <a:lnSpc>
+                <a:spcPct val="125000"/>
+              </a:lnSpc>
+            </a:pPr>
+            <a:r>
+              <a:rPr lang="en-US" dirty="0">
+                <a:latin typeface="Gotham Narrow Book" pitchFamily="2" charset="0"/>
+              </a:rPr>
+              <a:t>• Otherwise, use next slide for multiples</a:t>
+            </a:r>
+          </a:p>
+          <a:p>
+            <a:pPr>
+              <a:lnSpc>
+                <a:spcPct val="125000"/>
+              </a:lnSpc>
+            </a:pPr>
+            <a:endParaRPr lang="en-US" dirty="0">
+              <a:latin typeface="Gotham Narrow Book" pitchFamily="2" charset="0"/>
+            </a:endParaRPr>
+          </a:p>
+        </p:txBody>
+      </p:sp>
+      <p:sp>
+        <p:nvSpPr>
+          <p:cNvPr id="8" name="Rectangle 7">
+            <a:extLst>
+              <a:ext uri="{FF2B5EF4-FFF2-40B4-BE49-F238E27FC236}">
+                <a16:creationId xmlns:a16="http://schemas.microsoft.com/office/drawing/2014/main" id="{EC0271BB-6B97-9749-9D88-A5CC3B86D619}"/>
               </a:ext>
             </a:extLst>
           </p:cNvPr>
@@ -5641,8 +6777,8 @@
         </p:nvSpPr>
         <p:spPr>
           <a:xfrm>
-            <a:off x="988292" y="1115395"/>
-            <a:ext cx="6503917" cy="4256705"/>
+            <a:off x="988292" y="1115394"/>
+            <a:ext cx="3592946" cy="4256705"/>
           </a:xfrm>
           <a:prstGeom prst="rect">
             <a:avLst/>
@@ -5669,16 +6805,16 @@
           <a:lstStyle/>
           <a:p>
             <a:pPr algn="ctr"/>
-            <a:endParaRPr lang="en-US" dirty="0"/>
-          </a:p>
-        </p:txBody>
-      </p:sp>
-      <p:sp>
-        <p:nvSpPr>
-          <p:cNvPr id="7" name="Rectangle 6">
-            <a:extLst>
-              <a:ext uri="{FF2B5EF4-FFF2-40B4-BE49-F238E27FC236}">
-                <a16:creationId xmlns:a16="http://schemas.microsoft.com/office/drawing/2014/main" id="{DFE81E64-7A57-7845-BEE2-C07904F7A7D8}"/>
+            <a:endParaRPr lang="en-US"/>
+          </a:p>
+        </p:txBody>
+      </p:sp>
+      <p:sp>
+        <p:nvSpPr>
+          <p:cNvPr id="9" name="Rectangle 8">
+            <a:extLst>
+              <a:ext uri="{FF2B5EF4-FFF2-40B4-BE49-F238E27FC236}">
+                <a16:creationId xmlns:a16="http://schemas.microsoft.com/office/drawing/2014/main" id="{38B83EF9-3F52-B145-A21A-EA0D8AC181A0}"/>
               </a:ext>
             </a:extLst>
           </p:cNvPr>
@@ -5687,8 +6823,8 @@
         </p:nvSpPr>
         <p:spPr>
           <a:xfrm>
-            <a:off x="7723117" y="1115395"/>
-            <a:ext cx="3888509" cy="2015732"/>
+            <a:off x="4812146" y="1115394"/>
+            <a:ext cx="3592946" cy="4256705"/>
           </a:xfrm>
           <a:prstGeom prst="rect">
             <a:avLst/>
@@ -5719,56 +6855,10 @@
           </a:p>
         </p:txBody>
       </p:sp>
-      <p:sp>
-        <p:nvSpPr>
-          <p:cNvPr id="8" name="Rectangle 7">
-            <a:extLst>
-              <a:ext uri="{FF2B5EF4-FFF2-40B4-BE49-F238E27FC236}">
-                <a16:creationId xmlns:a16="http://schemas.microsoft.com/office/drawing/2014/main" id="{A07ECD11-F74C-3D42-8A2D-B2538B33996C}"/>
-              </a:ext>
-            </a:extLst>
-          </p:cNvPr>
-          <p:cNvSpPr/>
-          <p:nvPr/>
-        </p:nvSpPr>
-        <p:spPr>
-          <a:xfrm>
-            <a:off x="7723116" y="3356368"/>
-            <a:ext cx="3888509" cy="2015732"/>
-          </a:xfrm>
-          <a:prstGeom prst="rect">
-            <a:avLst/>
-          </a:prstGeom>
-        </p:spPr>
-        <p:style>
-          <a:lnRef idx="2">
-            <a:schemeClr val="accent1">
-              <a:shade val="50000"/>
-            </a:schemeClr>
-          </a:lnRef>
-          <a:fillRef idx="1">
-            <a:schemeClr val="accent1"/>
-          </a:fillRef>
-          <a:effectRef idx="0">
-            <a:schemeClr val="accent1"/>
-          </a:effectRef>
-          <a:fontRef idx="minor">
-            <a:schemeClr val="lt1"/>
-          </a:fontRef>
-        </p:style>
-        <p:txBody>
-          <a:bodyPr rtlCol="0" anchor="ctr"/>
-          <a:lstStyle/>
-          <a:p>
-            <a:pPr algn="ctr"/>
-            <a:endParaRPr lang="en-US"/>
-          </a:p>
-        </p:txBody>
-      </p:sp>
     </p:spTree>
     <p:extLst>
       <p:ext uri="{BB962C8B-B14F-4D97-AF65-F5344CB8AC3E}">
-        <p14:creationId xmlns:p14="http://schemas.microsoft.com/office/powerpoint/2010/main" val="756621199"/>
+        <p14:creationId xmlns:p14="http://schemas.microsoft.com/office/powerpoint/2010/main" val="3019877112"/>
       </p:ext>
     </p:extLst>
   </p:cSld>
@@ -5779,7 +6869,7 @@
 </file>
 
 <file path=ppt/slides/slide8.xml><?xml version="1.0" encoding="utf-8"?>
-<p:sld xmlns:a="http://schemas.openxmlformats.org/drawingml/2006/main" xmlns:r="http://schemas.openxmlformats.org/officeDocument/2006/relationships" xmlns:p="http://schemas.openxmlformats.org/presentationml/2006/main">
+<p:sld xmlns:a="http://schemas.openxmlformats.org/drawingml/2006/main" xmlns:r="http://schemas.openxmlformats.org/officeDocument/2006/relationships" xmlns:p="http://schemas.openxmlformats.org/presentationml/2006/main" show="0">
   <p:cSld>
     <p:bg>
       <p:bgPr>
@@ -5811,10 +6901,10 @@
       </p:grpSpPr>
       <p:sp>
         <p:nvSpPr>
-          <p:cNvPr id="11" name="TextBox 10">
-            <a:extLst>
-              <a:ext uri="{FF2B5EF4-FFF2-40B4-BE49-F238E27FC236}">
-                <a16:creationId xmlns:a16="http://schemas.microsoft.com/office/drawing/2014/main" id="{DD074894-0E99-894A-9B1A-0D7C79F5F6D7}"/>
+          <p:cNvPr id="5" name="TextBox 4">
+            <a:extLst>
+              <a:ext uri="{FF2B5EF4-FFF2-40B4-BE49-F238E27FC236}">
+                <a16:creationId xmlns:a16="http://schemas.microsoft.com/office/drawing/2014/main" id="{44B7E921-4FB7-284B-9679-627B0D7126F5}"/>
               </a:ext>
             </a:extLst>
           </p:cNvPr>
@@ -5851,112 +6941,146 @@
       </p:sp>
       <p:sp>
         <p:nvSpPr>
-          <p:cNvPr id="12" name="TextBox 11">
-            <a:extLst>
-              <a:ext uri="{FF2B5EF4-FFF2-40B4-BE49-F238E27FC236}">
-                <a16:creationId xmlns:a16="http://schemas.microsoft.com/office/drawing/2014/main" id="{B0E297CD-5450-7441-A033-60CDC02876B0}"/>
-              </a:ext>
-            </a:extLst>
-          </p:cNvPr>
-          <p:cNvSpPr txBox="1"/>
+          <p:cNvPr id="2" name="Rectangle 1">
+            <a:extLst>
+              <a:ext uri="{FF2B5EF4-FFF2-40B4-BE49-F238E27FC236}">
+                <a16:creationId xmlns:a16="http://schemas.microsoft.com/office/drawing/2014/main" id="{97ABE370-7C49-B54D-BC97-DC52776CBD47}"/>
+              </a:ext>
+            </a:extLst>
+          </p:cNvPr>
+          <p:cNvSpPr/>
           <p:nvPr/>
         </p:nvSpPr>
         <p:spPr>
           <a:xfrm>
-            <a:off x="876822" y="1115395"/>
-            <a:ext cx="10734804" cy="4256705"/>
+            <a:off x="988292" y="1115395"/>
+            <a:ext cx="6503917" cy="4256705"/>
           </a:xfrm>
           <a:prstGeom prst="rect">
             <a:avLst/>
           </a:prstGeom>
-          <a:noFill/>
         </p:spPr>
-        <p:txBody>
-          <a:bodyPr wrap="square" rtlCol="0">
-            <a:noAutofit/>
-          </a:bodyPr>
-          <a:lstStyle/>
-          <a:p>
-            <a:pPr>
-              <a:lnSpc>
-                <a:spcPct val="125000"/>
-              </a:lnSpc>
-            </a:pPr>
-            <a:r>
-              <a:rPr lang="en-US" dirty="0">
-                <a:latin typeface="Gotham Narrow Book" pitchFamily="2" charset="0"/>
-              </a:rPr>
-              <a:t>Body copy goes here. Last slide in a section. Last slide in a section. Last slide in a section. Last slide in a section. Last slide in a section. Last slide in a section. Last slide in a section. Last slide in a section. Last slide in a section. Last slide in a section. Last slide in a section. Last slide in a section. Last slide in a section. Last slide in a section. Last slide in a section. Last slide in a section. Last slide in a section. Last slide in a section. </a:t>
-            </a:r>
-          </a:p>
-          <a:p>
-            <a:pPr>
-              <a:lnSpc>
-                <a:spcPct val="125000"/>
-              </a:lnSpc>
-            </a:pPr>
-            <a:r>
-              <a:rPr lang="en-US" dirty="0">
-                <a:latin typeface="Gotham Narrow Book" pitchFamily="2" charset="0"/>
-              </a:rPr>
-              <a:t>	</a:t>
-            </a:r>
-          </a:p>
-          <a:p>
-            <a:pPr>
-              <a:lnSpc>
-                <a:spcPct val="125000"/>
-              </a:lnSpc>
-            </a:pPr>
-            <a:r>
-              <a:rPr lang="en-US" dirty="0">
-                <a:latin typeface="Gotham Narrow Book" pitchFamily="2" charset="0"/>
-              </a:rPr>
-              <a:t>Body copy goes here. Last slide in a section. Last slide in a section. Last slide in a section. Last slide in a section. Last slide in a section. Last slide in a section. Last slide in a section. Last slide in a section. Last slide in a section. Last slide in a section. Last slide in a section. Last slide in a section. Last slide in a section. Last slide in a section. Last slide in a section. Last slide in a section. Last slide in a section. Last slide in a section. </a:t>
-            </a:r>
-          </a:p>
-          <a:p>
-            <a:pPr>
-              <a:lnSpc>
-                <a:spcPct val="125000"/>
-              </a:lnSpc>
-            </a:pPr>
-            <a:endParaRPr lang="en-US" dirty="0">
-              <a:latin typeface="Gotham Narrow Book" pitchFamily="2" charset="0"/>
-            </a:endParaRPr>
-          </a:p>
-          <a:p>
-            <a:pPr>
-              <a:lnSpc>
-                <a:spcPct val="125000"/>
-              </a:lnSpc>
-            </a:pPr>
-            <a:r>
-              <a:rPr lang="en-US" dirty="0">
-                <a:latin typeface="Gotham Narrow Book" pitchFamily="2" charset="0"/>
-              </a:rPr>
-              <a:t>	• Last slide in each section</a:t>
-            </a:r>
-          </a:p>
-          <a:p>
-            <a:pPr>
-              <a:lnSpc>
-                <a:spcPct val="125000"/>
-              </a:lnSpc>
-            </a:pPr>
-            <a:r>
-              <a:rPr lang="en-US" dirty="0">
-                <a:latin typeface="Gotham Narrow Book" pitchFamily="2" charset="0"/>
-              </a:rPr>
-              <a:t>	• Last slide in each section</a:t>
-            </a:r>
+        <p:style>
+          <a:lnRef idx="2">
+            <a:schemeClr val="accent1">
+              <a:shade val="50000"/>
+            </a:schemeClr>
+          </a:lnRef>
+          <a:fillRef idx="1">
+            <a:schemeClr val="accent1"/>
+          </a:fillRef>
+          <a:effectRef idx="0">
+            <a:schemeClr val="accent1"/>
+          </a:effectRef>
+          <a:fontRef idx="minor">
+            <a:schemeClr val="lt1"/>
+          </a:fontRef>
+        </p:style>
+        <p:txBody>
+          <a:bodyPr rtlCol="0" anchor="ctr"/>
+          <a:lstStyle/>
+          <a:p>
+            <a:pPr algn="ctr"/>
+            <a:endParaRPr lang="en-US" dirty="0"/>
+          </a:p>
+        </p:txBody>
+      </p:sp>
+      <p:sp>
+        <p:nvSpPr>
+          <p:cNvPr id="7" name="Rectangle 6">
+            <a:extLst>
+              <a:ext uri="{FF2B5EF4-FFF2-40B4-BE49-F238E27FC236}">
+                <a16:creationId xmlns:a16="http://schemas.microsoft.com/office/drawing/2014/main" id="{DFE81E64-7A57-7845-BEE2-C07904F7A7D8}"/>
+              </a:ext>
+            </a:extLst>
+          </p:cNvPr>
+          <p:cNvSpPr/>
+          <p:nvPr/>
+        </p:nvSpPr>
+        <p:spPr>
+          <a:xfrm>
+            <a:off x="7723117" y="1115395"/>
+            <a:ext cx="3888509" cy="2015732"/>
+          </a:xfrm>
+          <a:prstGeom prst="rect">
+            <a:avLst/>
+          </a:prstGeom>
+        </p:spPr>
+        <p:style>
+          <a:lnRef idx="2">
+            <a:schemeClr val="accent1">
+              <a:shade val="50000"/>
+            </a:schemeClr>
+          </a:lnRef>
+          <a:fillRef idx="1">
+            <a:schemeClr val="accent1"/>
+          </a:fillRef>
+          <a:effectRef idx="0">
+            <a:schemeClr val="accent1"/>
+          </a:effectRef>
+          <a:fontRef idx="minor">
+            <a:schemeClr val="lt1"/>
+          </a:fontRef>
+        </p:style>
+        <p:txBody>
+          <a:bodyPr rtlCol="0" anchor="ctr"/>
+          <a:lstStyle/>
+          <a:p>
+            <a:pPr algn="ctr"/>
+            <a:endParaRPr lang="en-US"/>
+          </a:p>
+        </p:txBody>
+      </p:sp>
+      <p:sp>
+        <p:nvSpPr>
+          <p:cNvPr id="8" name="Rectangle 7">
+            <a:extLst>
+              <a:ext uri="{FF2B5EF4-FFF2-40B4-BE49-F238E27FC236}">
+                <a16:creationId xmlns:a16="http://schemas.microsoft.com/office/drawing/2014/main" id="{A07ECD11-F74C-3D42-8A2D-B2538B33996C}"/>
+              </a:ext>
+            </a:extLst>
+          </p:cNvPr>
+          <p:cNvSpPr/>
+          <p:nvPr/>
+        </p:nvSpPr>
+        <p:spPr>
+          <a:xfrm>
+            <a:off x="7723116" y="3356368"/>
+            <a:ext cx="3888509" cy="2015732"/>
+          </a:xfrm>
+          <a:prstGeom prst="rect">
+            <a:avLst/>
+          </a:prstGeom>
+        </p:spPr>
+        <p:style>
+          <a:lnRef idx="2">
+            <a:schemeClr val="accent1">
+              <a:shade val="50000"/>
+            </a:schemeClr>
+          </a:lnRef>
+          <a:fillRef idx="1">
+            <a:schemeClr val="accent1"/>
+          </a:fillRef>
+          <a:effectRef idx="0">
+            <a:schemeClr val="accent1"/>
+          </a:effectRef>
+          <a:fontRef idx="minor">
+            <a:schemeClr val="lt1"/>
+          </a:fontRef>
+        </p:style>
+        <p:txBody>
+          <a:bodyPr rtlCol="0" anchor="ctr"/>
+          <a:lstStyle/>
+          <a:p>
+            <a:pPr algn="ctr"/>
+            <a:endParaRPr lang="en-US"/>
           </a:p>
         </p:txBody>
       </p:sp>
     </p:spTree>
     <p:extLst>
       <p:ext uri="{BB962C8B-B14F-4D97-AF65-F5344CB8AC3E}">
-        <p14:creationId xmlns:p14="http://schemas.microsoft.com/office/powerpoint/2010/main" val="1663129815"/>
+        <p14:creationId xmlns:p14="http://schemas.microsoft.com/office/powerpoint/2010/main" val="756621199"/>
       </p:ext>
     </p:extLst>
   </p:cSld>
@@ -5967,7 +7091,7 @@
 </file>
 
 <file path=ppt/slides/slide9.xml><?xml version="1.0" encoding="utf-8"?>
-<p:sld xmlns:a="http://schemas.openxmlformats.org/drawingml/2006/main" xmlns:r="http://schemas.openxmlformats.org/officeDocument/2006/relationships" xmlns:p="http://schemas.openxmlformats.org/presentationml/2006/main">
+<p:sld xmlns:a="http://schemas.openxmlformats.org/drawingml/2006/main" xmlns:r="http://schemas.openxmlformats.org/officeDocument/2006/relationships" xmlns:p="http://schemas.openxmlformats.org/presentationml/2006/main" show="0">
   <p:cSld>
     <p:bg>
       <p:bgPr>
@@ -5999,10 +7123,10 @@
       </p:grpSpPr>
       <p:sp>
         <p:nvSpPr>
-          <p:cNvPr id="6" name="TextBox 5">
-            <a:extLst>
-              <a:ext uri="{FF2B5EF4-FFF2-40B4-BE49-F238E27FC236}">
-                <a16:creationId xmlns:a16="http://schemas.microsoft.com/office/drawing/2014/main" id="{CEE4DA18-37A0-3344-B583-9790FEFF58AA}"/>
+          <p:cNvPr id="11" name="TextBox 10">
+            <a:extLst>
+              <a:ext uri="{FF2B5EF4-FFF2-40B4-BE49-F238E27FC236}">
+                <a16:creationId xmlns:a16="http://schemas.microsoft.com/office/drawing/2014/main" id="{DD074894-0E99-894A-9B1A-0D7C79F5F6D7}"/>
               </a:ext>
             </a:extLst>
           </p:cNvPr>
@@ -6011,8 +7135,8 @@
         </p:nvSpPr>
         <p:spPr>
           <a:xfrm>
-            <a:off x="571500" y="2294175"/>
-            <a:ext cx="11040127" cy="3077925"/>
+            <a:off x="571500" y="538619"/>
+            <a:ext cx="11040127" cy="461665"/>
           </a:xfrm>
           <a:prstGeom prst="rect">
             <a:avLst/>
@@ -6021,7 +7145,7 @@
         </p:spPr>
         <p:txBody>
           <a:bodyPr wrap="square" rtlCol="0">
-            <a:noAutofit/>
+            <a:spAutoFit/>
           </a:bodyPr>
           <a:lstStyle/>
           <a:p>
@@ -6032,111 +7156,17 @@
                 </a:solidFill>
                 <a:latin typeface="Gotham Narrow Bold" pitchFamily="2" charset="0"/>
               </a:rPr>
-              <a:t>O | </a:t>
-            </a:r>
-            <a:r>
-              <a:rPr lang="en-US" sz="2400" dirty="0">
-                <a:solidFill>
-                  <a:srgbClr val="63666A"/>
-                </a:solidFill>
-                <a:latin typeface="Gotham Narrow Book" pitchFamily="2" charset="0"/>
-              </a:rPr>
-              <a:t>405.744.0000</a:t>
-            </a:r>
-          </a:p>
-          <a:p>
-            <a:r>
-              <a:rPr lang="en-US" sz="2400" b="1" dirty="0">
-                <a:solidFill>
-                  <a:srgbClr val="63666A"/>
-                </a:solidFill>
-                <a:latin typeface="Gotham Narrow Bold" pitchFamily="2" charset="0"/>
-              </a:rPr>
-              <a:t>C | </a:t>
-            </a:r>
-            <a:r>
-              <a:rPr lang="en-US" sz="2400" dirty="0">
-                <a:solidFill>
-                  <a:srgbClr val="63666A"/>
-                </a:solidFill>
-                <a:latin typeface="Gotham Narrow Book" pitchFamily="2" charset="0"/>
-              </a:rPr>
-              <a:t>405.744.0000</a:t>
-            </a:r>
-          </a:p>
-          <a:p>
-            <a:r>
-              <a:rPr lang="en-US" sz="2400" b="1" dirty="0">
-                <a:solidFill>
-                  <a:srgbClr val="63666A"/>
-                </a:solidFill>
-                <a:latin typeface="Gotham Narrow Bold" pitchFamily="2" charset="0"/>
-              </a:rPr>
-              <a:t>E | </a:t>
-            </a:r>
-            <a:r>
-              <a:rPr lang="en-US" sz="2400" dirty="0" err="1">
-                <a:solidFill>
-                  <a:srgbClr val="63666A"/>
-                </a:solidFill>
-                <a:latin typeface="Gotham Narrow Book" pitchFamily="2" charset="0"/>
-              </a:rPr>
-              <a:t>name.presenter@okstate.edu</a:t>
-            </a:r>
-            <a:endParaRPr lang="en-US" sz="2400" dirty="0">
-              <a:solidFill>
-                <a:srgbClr val="63666A"/>
-              </a:solidFill>
-              <a:latin typeface="Gotham Narrow Book" pitchFamily="2" charset="0"/>
-            </a:endParaRPr>
-          </a:p>
-          <a:p>
-            <a:r>
-              <a:rPr lang="en-US" sz="2400" dirty="0">
-                <a:solidFill>
-                  <a:srgbClr val="63666A"/>
-                </a:solidFill>
-                <a:latin typeface="Gotham Narrow Book" pitchFamily="2" charset="0"/>
-              </a:rPr>
-              <a:t>307 Whitehurst</a:t>
-            </a:r>
-          </a:p>
-          <a:p>
-            <a:endParaRPr lang="en-US" sz="2400" dirty="0">
-              <a:solidFill>
-                <a:schemeClr val="accent6"/>
-              </a:solidFill>
-              <a:latin typeface="Gotham Narrow Book" pitchFamily="2" charset="0"/>
-            </a:endParaRPr>
-          </a:p>
-          <a:p>
-            <a:r>
-              <a:rPr lang="en-US" sz="2400" b="1" dirty="0" err="1">
-                <a:solidFill>
-                  <a:srgbClr val="FB6400"/>
-                </a:solidFill>
-                <a:latin typeface="Gotham Narrow Bold" pitchFamily="2" charset="0"/>
-              </a:rPr>
-              <a:t>brand.okstate.edu</a:t>
-            </a:r>
-            <a:r>
-              <a:rPr lang="en-US" sz="2400" b="1" dirty="0">
-                <a:solidFill>
-                  <a:srgbClr val="FB6400"/>
-                </a:solidFill>
-                <a:latin typeface="Gotham Narrow Bold" pitchFamily="2" charset="0"/>
-              </a:rPr>
-              <a:t> (do not include http://www.)</a:t>
-            </a:r>
-          </a:p>
-        </p:txBody>
-      </p:sp>
-      <p:sp>
-        <p:nvSpPr>
-          <p:cNvPr id="7" name="TextBox 6">
-            <a:extLst>
-              <a:ext uri="{FF2B5EF4-FFF2-40B4-BE49-F238E27FC236}">
-                <a16:creationId xmlns:a16="http://schemas.microsoft.com/office/drawing/2014/main" id="{4DE87CE4-7B09-1C4B-A222-C9D7591ECB9C}"/>
+              <a:t>SECTION SUBHEAD</a:t>
+            </a:r>
+          </a:p>
+        </p:txBody>
+      </p:sp>
+      <p:sp>
+        <p:nvSpPr>
+          <p:cNvPr id="12" name="TextBox 11">
+            <a:extLst>
+              <a:ext uri="{FF2B5EF4-FFF2-40B4-BE49-F238E27FC236}">
+                <a16:creationId xmlns:a16="http://schemas.microsoft.com/office/drawing/2014/main" id="{B0E297CD-5450-7441-A033-60CDC02876B0}"/>
               </a:ext>
             </a:extLst>
           </p:cNvPr>
@@ -6145,8 +7175,8 @@
         </p:nvSpPr>
         <p:spPr>
           <a:xfrm>
-            <a:off x="584026" y="538619"/>
-            <a:ext cx="11040127" cy="1061829"/>
+            <a:off x="876822" y="1115395"/>
+            <a:ext cx="10734804" cy="4256705"/>
           </a:xfrm>
           <a:prstGeom prst="rect">
             <a:avLst/>
@@ -6155,59 +7185,82 @@
         </p:spPr>
         <p:txBody>
           <a:bodyPr wrap="square" rtlCol="0">
-            <a:spAutoFit/>
+            <a:noAutofit/>
           </a:bodyPr>
           <a:lstStyle/>
           <a:p>
-            <a:r>
-              <a:rPr lang="en-US" sz="6300" dirty="0">
-                <a:solidFill>
-                  <a:srgbClr val="63666A"/>
-                </a:solidFill>
-                <a:latin typeface="FjallaOne" panose="02000506040000020004" pitchFamily="2" charset="77"/>
-              </a:rPr>
-              <a:t>NAME OF PRESENTER</a:t>
-            </a:r>
-          </a:p>
-        </p:txBody>
-      </p:sp>
-      <p:sp>
-        <p:nvSpPr>
-          <p:cNvPr id="8" name="TextBox 7">
-            <a:extLst>
-              <a:ext uri="{FF2B5EF4-FFF2-40B4-BE49-F238E27FC236}">
-                <a16:creationId xmlns:a16="http://schemas.microsoft.com/office/drawing/2014/main" id="{20E472A1-9D64-6A42-AD56-94BD6B8EEEA3}"/>
-              </a:ext>
-            </a:extLst>
-          </p:cNvPr>
-          <p:cNvSpPr txBox="1"/>
-          <p:nvPr/>
-        </p:nvSpPr>
-        <p:spPr>
-          <a:xfrm>
-            <a:off x="584026" y="1463179"/>
-            <a:ext cx="11040127" cy="553998"/>
-          </a:xfrm>
-          <a:prstGeom prst="rect">
-            <a:avLst/>
-          </a:prstGeom>
-          <a:noFill/>
-        </p:spPr>
-        <p:txBody>
-          <a:bodyPr wrap="square" rtlCol="0">
-            <a:spAutoFit/>
-          </a:bodyPr>
-          <a:lstStyle/>
-          <a:p>
-            <a:r>
-              <a:rPr lang="en-US" sz="3000" b="1" dirty="0">
-                <a:solidFill>
-                  <a:srgbClr val="FB6400"/>
-                </a:solidFill>
-                <a:latin typeface="Rubik" panose="02000604000000020004" pitchFamily="2" charset="-79"/>
-                <a:cs typeface="Rubik" panose="02000604000000020004" pitchFamily="2" charset="-79"/>
-              </a:rPr>
-              <a:t>Department of …</a:t>
+            <a:pPr>
+              <a:lnSpc>
+                <a:spcPct val="125000"/>
+              </a:lnSpc>
+            </a:pPr>
+            <a:r>
+              <a:rPr lang="en-US" dirty="0">
+                <a:latin typeface="Gotham Narrow Book" pitchFamily="2" charset="0"/>
+              </a:rPr>
+              <a:t>Body copy goes here. Last slide in a section. Last slide in a section. Last slide in a section. Last slide in a section. Last slide in a section. Last slide in a section. Last slide in a section. Last slide in a section. Last slide in a section. Last slide in a section. Last slide in a section. Last slide in a section. Last slide in a section. Last slide in a section. Last slide in a section. Last slide in a section. Last slide in a section. Last slide in a section. </a:t>
+            </a:r>
+          </a:p>
+          <a:p>
+            <a:pPr>
+              <a:lnSpc>
+                <a:spcPct val="125000"/>
+              </a:lnSpc>
+            </a:pPr>
+            <a:r>
+              <a:rPr lang="en-US" dirty="0">
+                <a:latin typeface="Gotham Narrow Book" pitchFamily="2" charset="0"/>
+              </a:rPr>
+              <a:t>	</a:t>
+            </a:r>
+          </a:p>
+          <a:p>
+            <a:pPr>
+              <a:lnSpc>
+                <a:spcPct val="125000"/>
+              </a:lnSpc>
+            </a:pPr>
+            <a:r>
+              <a:rPr lang="en-US" dirty="0">
+                <a:latin typeface="Gotham Narrow Book" pitchFamily="2" charset="0"/>
+              </a:rPr>
+              <a:t>Body copy goes here. Last slide in a section. Last slide in a section. Last slide in a section. Last slide in a section. Last slide in a section. Last slide in a section. Last slide in a section. Last slide in a section. Last slide in a section. Last slide in a section. Last slide in a section. Last slide in a section. Last slide in a section. Last slide in a section. Last slide in a section. Last slide in a section. Last slide in a section. Last slide in a section. </a:t>
+            </a:r>
+          </a:p>
+          <a:p>
+            <a:pPr>
+              <a:lnSpc>
+                <a:spcPct val="125000"/>
+              </a:lnSpc>
+            </a:pPr>
+            <a:endParaRPr lang="en-US" dirty="0">
+              <a:latin typeface="Gotham Narrow Book" pitchFamily="2" charset="0"/>
+            </a:endParaRPr>
+          </a:p>
+          <a:p>
+            <a:pPr>
+              <a:lnSpc>
+                <a:spcPct val="125000"/>
+              </a:lnSpc>
+            </a:pPr>
+            <a:r>
+              <a:rPr lang="en-US" dirty="0">
+                <a:latin typeface="Gotham Narrow Book" pitchFamily="2" charset="0"/>
+              </a:rPr>
+              <a:t>	• Last slide in each section</a:t>
+            </a:r>
+          </a:p>
+          <a:p>
+            <a:pPr>
+              <a:lnSpc>
+                <a:spcPct val="125000"/>
+              </a:lnSpc>
+            </a:pPr>
+            <a:r>
+              <a:rPr lang="en-US" dirty="0">
+                <a:latin typeface="Gotham Narrow Book" pitchFamily="2" charset="0"/>
+              </a:rPr>
+              <a:t>	• Last slide in each section</a:t>
             </a:r>
           </a:p>
         </p:txBody>
@@ -6215,7 +7268,7 @@
     </p:spTree>
     <p:extLst>
       <p:ext uri="{BB962C8B-B14F-4D97-AF65-F5344CB8AC3E}">
-        <p14:creationId xmlns:p14="http://schemas.microsoft.com/office/powerpoint/2010/main" val="3546150263"/>
+        <p14:creationId xmlns:p14="http://schemas.microsoft.com/office/powerpoint/2010/main" val="1663129815"/>
       </p:ext>
     </p:extLst>
   </p:cSld>

--- a/MELISOvsGPU.pptx
+++ b/MELISOvsGPU.pptx
@@ -567,7 +567,7 @@
           <a:p>
             <a:fld id="{8F923C7D-B11C-8E43-A742-35D7D77F5333}" type="datetimeFigureOut">
               <a:rPr lang="en-US" smtClean="0"/>
-              <a:t>4/3/2025</a:t>
+              <a:t>4/3/25</a:t>
             </a:fld>
             <a:endParaRPr lang="en-US"/>
           </a:p>
@@ -781,7 +781,7 @@
           <a:p>
             <a:fld id="{8F923C7D-B11C-8E43-A742-35D7D77F5333}" type="datetimeFigureOut">
               <a:rPr lang="en-US" smtClean="0"/>
-              <a:t>4/3/2025</a:t>
+              <a:t>4/3/25</a:t>
             </a:fld>
             <a:endParaRPr lang="en-US"/>
           </a:p>
@@ -1000,7 +1000,7 @@
           <a:p>
             <a:fld id="{8F923C7D-B11C-8E43-A742-35D7D77F5333}" type="datetimeFigureOut">
               <a:rPr lang="en-US" smtClean="0"/>
-              <a:t>4/3/2025</a:t>
+              <a:t>4/3/25</a:t>
             </a:fld>
             <a:endParaRPr lang="en-US"/>
           </a:p>
@@ -1214,7 +1214,7 @@
           <a:p>
             <a:fld id="{8F923C7D-B11C-8E43-A742-35D7D77F5333}" type="datetimeFigureOut">
               <a:rPr lang="en-US" smtClean="0"/>
-              <a:t>4/3/2025</a:t>
+              <a:t>4/3/25</a:t>
             </a:fld>
             <a:endParaRPr lang="en-US"/>
           </a:p>
@@ -1500,7 +1500,7 @@
           <a:p>
             <a:fld id="{8F923C7D-B11C-8E43-A742-35D7D77F5333}" type="datetimeFigureOut">
               <a:rPr lang="en-US" smtClean="0"/>
-              <a:t>4/3/2025</a:t>
+              <a:t>4/3/25</a:t>
             </a:fld>
             <a:endParaRPr lang="en-US"/>
           </a:p>
@@ -1781,7 +1781,7 @@
           <a:p>
             <a:fld id="{8F923C7D-B11C-8E43-A742-35D7D77F5333}" type="datetimeFigureOut">
               <a:rPr lang="en-US" smtClean="0"/>
-              <a:t>4/3/2025</a:t>
+              <a:t>4/3/25</a:t>
             </a:fld>
             <a:endParaRPr lang="en-US"/>
           </a:p>
@@ -2204,7 +2204,7 @@
           <a:p>
             <a:fld id="{8F923C7D-B11C-8E43-A742-35D7D77F5333}" type="datetimeFigureOut">
               <a:rPr lang="en-US" smtClean="0"/>
-              <a:t>4/3/2025</a:t>
+              <a:t>4/3/25</a:t>
             </a:fld>
             <a:endParaRPr lang="en-US"/>
           </a:p>
@@ -2361,7 +2361,7 @@
           <a:p>
             <a:fld id="{8F923C7D-B11C-8E43-A742-35D7D77F5333}" type="datetimeFigureOut">
               <a:rPr lang="en-US" smtClean="0"/>
-              <a:t>4/3/2025</a:t>
+              <a:t>4/3/25</a:t>
             </a:fld>
             <a:endParaRPr lang="en-US"/>
           </a:p>
@@ -2482,7 +2482,7 @@
           <a:p>
             <a:fld id="{8F923C7D-B11C-8E43-A742-35D7D77F5333}" type="datetimeFigureOut">
               <a:rPr lang="en-US" smtClean="0"/>
-              <a:t>4/3/2025</a:t>
+              <a:t>4/3/25</a:t>
             </a:fld>
             <a:endParaRPr lang="en-US"/>
           </a:p>
@@ -2804,7 +2804,7 @@
           <a:p>
             <a:fld id="{8F923C7D-B11C-8E43-A742-35D7D77F5333}" type="datetimeFigureOut">
               <a:rPr lang="en-US" smtClean="0"/>
-              <a:t>4/3/2025</a:t>
+              <a:t>4/3/25</a:t>
             </a:fld>
             <a:endParaRPr lang="en-US"/>
           </a:p>
@@ -3106,7 +3106,7 @@
           <a:p>
             <a:fld id="{8F923C7D-B11C-8E43-A742-35D7D77F5333}" type="datetimeFigureOut">
               <a:rPr lang="en-US" smtClean="0"/>
-              <a:t>4/3/2025</a:t>
+              <a:t>4/3/25</a:t>
             </a:fld>
             <a:endParaRPr lang="en-US"/>
           </a:p>
@@ -3317,7 +3317,7 @@
           <a:p>
             <a:fld id="{8F923C7D-B11C-8E43-A742-35D7D77F5333}" type="datetimeFigureOut">
               <a:rPr lang="en-US" smtClean="0"/>
-              <a:t>4/3/2025</a:t>
+              <a:t>4/3/25</a:t>
             </a:fld>
             <a:endParaRPr lang="en-US"/>
           </a:p>
@@ -3911,6 +3911,70 @@
           </a:p>
         </p:txBody>
       </p:sp>
+      <p:sp>
+        <p:nvSpPr>
+          <p:cNvPr id="4" name="TextBox 3">
+            <a:extLst>
+              <a:ext uri="{FF2B5EF4-FFF2-40B4-BE49-F238E27FC236}">
+                <a16:creationId xmlns:a16="http://schemas.microsoft.com/office/drawing/2014/main" id="{415D81C0-9210-1D09-B64C-1577EF7FA558}"/>
+              </a:ext>
+            </a:extLst>
+          </p:cNvPr>
+          <p:cNvSpPr txBox="1"/>
+          <p:nvPr/>
+        </p:nvSpPr>
+        <p:spPr>
+          <a:xfrm>
+            <a:off x="3605646" y="5090994"/>
+            <a:ext cx="5974286" cy="830997"/>
+          </a:xfrm>
+          <a:prstGeom prst="rect">
+            <a:avLst/>
+          </a:prstGeom>
+          <a:noFill/>
+        </p:spPr>
+        <p:txBody>
+          <a:bodyPr wrap="square" rtlCol="0">
+            <a:spAutoFit/>
+          </a:bodyPr>
+          <a:lstStyle/>
+          <a:p>
+            <a:r>
+              <a:rPr lang="en-US" sz="1600" b="1" dirty="0">
+                <a:latin typeface="Gotham Narrow Bold" pitchFamily="2" charset="0"/>
+                <a:cs typeface="Rubik" panose="02000604000000020004" pitchFamily="2" charset="-79"/>
+              </a:rPr>
+              <a:t>Murat Yildirim</a:t>
+            </a:r>
+            <a:br>
+              <a:rPr lang="en-US" sz="1600" b="1" dirty="0">
+                <a:latin typeface="Gotham Narrow Bold" pitchFamily="2" charset="0"/>
+                <a:cs typeface="Rubik" panose="02000604000000020004" pitchFamily="2" charset="-79"/>
+              </a:rPr>
+            </a:br>
+            <a:r>
+              <a:rPr lang="en-US" sz="1600" b="1" dirty="0">
+                <a:latin typeface="Gotham Narrow Bold" pitchFamily="2" charset="0"/>
+                <a:cs typeface="Rubik" panose="02000604000000020004" pitchFamily="2" charset="-79"/>
+              </a:rPr>
+              <a:t>School of Industrial Engineering and Management</a:t>
+            </a:r>
+            <a:br>
+              <a:rPr lang="en-US" sz="1600" b="1" dirty="0">
+                <a:latin typeface="Gotham Narrow Bold" pitchFamily="2" charset="0"/>
+                <a:cs typeface="Rubik" panose="02000604000000020004" pitchFamily="2" charset="-79"/>
+              </a:rPr>
+            </a:br>
+            <a:r>
+              <a:rPr lang="en-US" sz="1600" b="1" dirty="0">
+                <a:latin typeface="Gotham Narrow Bold" pitchFamily="2" charset="0"/>
+                <a:cs typeface="Rubik" panose="02000604000000020004" pitchFamily="2" charset="-79"/>
+              </a:rPr>
+              <a:t>Wayne State University</a:t>
+            </a:r>
+          </a:p>
+        </p:txBody>
+      </p:sp>
     </p:spTree>
     <p:extLst>
       <p:ext uri="{BB962C8B-B14F-4D97-AF65-F5344CB8AC3E}">
@@ -4379,8 +4443,8 @@
           </a:p>
         </p:txBody>
       </p:sp>
-      <mc:AlternateContent xmlns:mc="http://schemas.openxmlformats.org/markup-compatibility/2006">
-        <mc:Choice xmlns:a14="http://schemas.microsoft.com/office/drawing/2010/main" Requires="a14">
+      <mc:AlternateContent xmlns:mc="http://schemas.openxmlformats.org/markup-compatibility/2006" xmlns:a14="http://schemas.microsoft.com/office/drawing/2010/main">
+        <mc:Choice Requires="a14">
           <p:sp>
             <p:nvSpPr>
               <p:cNvPr id="12" name="TextBox 11">
@@ -4583,7 +4647,7 @@
             </p:txBody>
           </p:sp>
         </mc:Choice>
-        <mc:Fallback>
+        <mc:Fallback xmlns="">
           <p:sp>
             <p:nvSpPr>
               <p:cNvPr id="12" name="TextBox 11">
@@ -5290,7 +5354,22 @@
               <a:buChar char="§"/>
             </a:pPr>
             <a:r>
-              <a:rPr lang="en-US">
+              <a:rPr lang="en-US" dirty="0">
+                <a:latin typeface="Gotham Narrow Book" pitchFamily="2" charset="0"/>
+              </a:rPr>
+              <a:t>We benchmarked on multiple matrices.</a:t>
+            </a:r>
+          </a:p>
+          <a:p>
+            <a:pPr marL="285750" indent="-285750">
+              <a:lnSpc>
+                <a:spcPct val="125000"/>
+              </a:lnSpc>
+              <a:buFont typeface="Wingdings" pitchFamily="2" charset="2"/>
+              <a:buChar char="§"/>
+            </a:pPr>
+            <a:r>
+              <a:rPr lang="en-US" dirty="0">
                 <a:latin typeface="Gotham Narrow Book" pitchFamily="2" charset="0"/>
               </a:rPr>
               <a:t>  Results:</a:t>

--- a/MELISOvsGPU.pptx
+++ b/MELISOvsGPU.pptx
@@ -9,12 +9,13 @@
     <p:sldId id="265" r:id="rId3"/>
     <p:sldId id="257" r:id="rId4"/>
     <p:sldId id="267" r:id="rId5"/>
-    <p:sldId id="259" r:id="rId6"/>
-    <p:sldId id="260" r:id="rId7"/>
-    <p:sldId id="262" r:id="rId8"/>
-    <p:sldId id="261" r:id="rId9"/>
-    <p:sldId id="258" r:id="rId10"/>
-    <p:sldId id="263" r:id="rId11"/>
+    <p:sldId id="268" r:id="rId6"/>
+    <p:sldId id="259" r:id="rId7"/>
+    <p:sldId id="260" r:id="rId8"/>
+    <p:sldId id="262" r:id="rId9"/>
+    <p:sldId id="261" r:id="rId10"/>
+    <p:sldId id="258" r:id="rId11"/>
+    <p:sldId id="263" r:id="rId12"/>
   </p:sldIdLst>
   <p:sldSz cx="12192000" cy="6858000"/>
   <p:notesSz cx="6858000" cy="9144000"/>
@@ -135,7 +136,7 @@
 <file path=ppt/revisionInfo.xml><?xml version="1.0" encoding="utf-8"?>
 <p1510:revInfo xmlns:a="http://schemas.openxmlformats.org/drawingml/2006/main" xmlns:r="http://schemas.openxmlformats.org/officeDocument/2006/relationships" xmlns:p1510="http://schemas.microsoft.com/office/powerpoint/2015/10/main">
   <p1510:revLst>
-    <p1510:client id="{6486FCFF-8752-4976-86E7-4BDA6065866B}" v="12" dt="2025-04-03T19:15:18.422"/>
+    <p1510:client id="{6486FCFF-8752-4976-86E7-4BDA6065866B}" v="37" dt="2025-04-03T23:44:35.071"/>
   </p1510:revLst>
 </p1510:revInfo>
 </file>
@@ -144,8 +145,8 @@
 <pc:chgInfo xmlns:a="http://schemas.openxmlformats.org/drawingml/2006/main" xmlns:r="http://schemas.openxmlformats.org/officeDocument/2006/relationships" xmlns:ac="http://schemas.microsoft.com/office/drawing/2013/main/command" xmlns:pc="http://schemas.microsoft.com/office/powerpoint/2013/main/command">
   <pc:docChgLst>
     <pc:chgData name="Quang-Nguyen Vo-Huynh" userId="6a1b2bcfbbb34c0c" providerId="LiveId" clId="{6486FCFF-8752-4976-86E7-4BDA6065866B}"/>
-    <pc:docChg chg="undo custSel addSld modSld">
-      <pc:chgData name="Quang-Nguyen Vo-Huynh" userId="6a1b2bcfbbb34c0c" providerId="LiveId" clId="{6486FCFF-8752-4976-86E7-4BDA6065866B}" dt="2025-04-03T19:16:50.096" v="775" actId="5793"/>
+    <pc:docChg chg="undo redo custSel addSld modSld">
+      <pc:chgData name="Quang-Nguyen Vo-Huynh" userId="6a1b2bcfbbb34c0c" providerId="LiveId" clId="{6486FCFF-8752-4976-86E7-4BDA6065866B}" dt="2025-04-03T23:44:48.056" v="1185" actId="14100"/>
       <pc:docMkLst>
         <pc:docMk/>
       </pc:docMkLst>
@@ -326,7 +327,7 @@
         </pc:spChg>
       </pc:sldChg>
       <pc:sldChg chg="addSp delSp modSp add mod">
-        <pc:chgData name="Quang-Nguyen Vo-Huynh" userId="6a1b2bcfbbb34c0c" providerId="LiveId" clId="{6486FCFF-8752-4976-86E7-4BDA6065866B}" dt="2025-04-03T19:16:50.096" v="775" actId="5793"/>
+        <pc:chgData name="Quang-Nguyen Vo-Huynh" userId="6a1b2bcfbbb34c0c" providerId="LiveId" clId="{6486FCFF-8752-4976-86E7-4BDA6065866B}" dt="2025-04-03T23:38:27.971" v="1162" actId="14734"/>
         <pc:sldMkLst>
           <pc:docMk/>
           <pc:sldMk cId="602613557" sldId="267"/>
@@ -364,7 +365,7 @@
           </ac:spMkLst>
         </pc:spChg>
         <pc:spChg chg="add del mod">
-          <ac:chgData name="Quang-Nguyen Vo-Huynh" userId="6a1b2bcfbbb34c0c" providerId="LiveId" clId="{6486FCFF-8752-4976-86E7-4BDA6065866B}" dt="2025-04-03T19:16:50.096" v="775" actId="5793"/>
+          <ac:chgData name="Quang-Nguyen Vo-Huynh" userId="6a1b2bcfbbb34c0c" providerId="LiveId" clId="{6486FCFF-8752-4976-86E7-4BDA6065866B}" dt="2025-04-03T23:06:57.744" v="900" actId="20577"/>
           <ac:spMkLst>
             <pc:docMk/>
             <pc:sldMk cId="602613557" sldId="267"/>
@@ -387,6 +388,14 @@
             <ac:spMk id="18" creationId="{01E9ECFE-B656-A991-E9D1-9E67EF01F3A9}"/>
           </ac:spMkLst>
         </pc:spChg>
+        <pc:graphicFrameChg chg="add mod modGraphic">
+          <ac:chgData name="Quang-Nguyen Vo-Huynh" userId="6a1b2bcfbbb34c0c" providerId="LiveId" clId="{6486FCFF-8752-4976-86E7-4BDA6065866B}" dt="2025-04-03T23:38:27.971" v="1162" actId="14734"/>
+          <ac:graphicFrameMkLst>
+            <pc:docMk/>
+            <pc:sldMk cId="602613557" sldId="267"/>
+            <ac:graphicFrameMk id="2" creationId="{98974048-6FED-9403-D4AC-9B4AB925BC9B}"/>
+          </ac:graphicFrameMkLst>
+        </pc:graphicFrameChg>
         <pc:picChg chg="add del">
           <ac:chgData name="Quang-Nguyen Vo-Huynh" userId="6a1b2bcfbbb34c0c" providerId="LiveId" clId="{6486FCFF-8752-4976-86E7-4BDA6065866B}" dt="2025-04-03T19:09:56.506" v="536" actId="478"/>
           <ac:picMkLst>
@@ -409,6 +418,101 @@
             <pc:docMk/>
             <pc:sldMk cId="602613557" sldId="267"/>
             <ac:cxnSpMk id="17" creationId="{7F19AB58-58AB-4C0F-8A98-82D9B9446C01}"/>
+          </ac:cxnSpMkLst>
+        </pc:cxnChg>
+      </pc:sldChg>
+      <pc:sldChg chg="addSp delSp modSp add mod">
+        <pc:chgData name="Quang-Nguyen Vo-Huynh" userId="6a1b2bcfbbb34c0c" providerId="LiveId" clId="{6486FCFF-8752-4976-86E7-4BDA6065866B}" dt="2025-04-03T23:44:48.056" v="1185" actId="14100"/>
+        <pc:sldMkLst>
+          <pc:docMk/>
+          <pc:sldMk cId="3020415987" sldId="268"/>
+        </pc:sldMkLst>
+        <pc:spChg chg="add mod">
+          <ac:chgData name="Quang-Nguyen Vo-Huynh" userId="6a1b2bcfbbb34c0c" providerId="LiveId" clId="{6486FCFF-8752-4976-86E7-4BDA6065866B}" dt="2025-04-03T23:38:46.750" v="1167" actId="1076"/>
+          <ac:spMkLst>
+            <pc:docMk/>
+            <pc:sldMk cId="3020415987" sldId="268"/>
+            <ac:spMk id="4" creationId="{E4EF3038-17B3-FB14-10BE-2E7446ECFE2D}"/>
+          </ac:spMkLst>
+        </pc:spChg>
+        <pc:spChg chg="add mod">
+          <ac:chgData name="Quang-Nguyen Vo-Huynh" userId="6a1b2bcfbbb34c0c" providerId="LiveId" clId="{6486FCFF-8752-4976-86E7-4BDA6065866B}" dt="2025-04-03T23:38:38.157" v="1165" actId="1076"/>
+          <ac:spMkLst>
+            <pc:docMk/>
+            <pc:sldMk cId="3020415987" sldId="268"/>
+            <ac:spMk id="7" creationId="{AB94BE8C-777C-A307-9AF5-D49FD09495F6}"/>
+          </ac:spMkLst>
+        </pc:spChg>
+        <pc:spChg chg="mod">
+          <ac:chgData name="Quang-Nguyen Vo-Huynh" userId="6a1b2bcfbbb34c0c" providerId="LiveId" clId="{6486FCFF-8752-4976-86E7-4BDA6065866B}" dt="2025-04-03T23:19:31.144" v="1096" actId="20577"/>
+          <ac:spMkLst>
+            <pc:docMk/>
+            <pc:sldMk cId="3020415987" sldId="268"/>
+            <ac:spMk id="11" creationId="{AEFFBD17-43B7-894F-AFEA-8E0E6A5F7E98}"/>
+          </ac:spMkLst>
+        </pc:spChg>
+        <pc:spChg chg="del">
+          <ac:chgData name="Quang-Nguyen Vo-Huynh" userId="6a1b2bcfbbb34c0c" providerId="LiveId" clId="{6486FCFF-8752-4976-86E7-4BDA6065866B}" dt="2025-04-03T23:19:36.040" v="1097" actId="478"/>
+          <ac:spMkLst>
+            <pc:docMk/>
+            <pc:sldMk cId="3020415987" sldId="268"/>
+            <ac:spMk id="12" creationId="{1D34D478-FA91-8E2E-FCE2-933ECEF9B13F}"/>
+          </ac:spMkLst>
+        </pc:spChg>
+        <pc:grpChg chg="add mod">
+          <ac:chgData name="Quang-Nguyen Vo-Huynh" userId="6a1b2bcfbbb34c0c" providerId="LiveId" clId="{6486FCFF-8752-4976-86E7-4BDA6065866B}" dt="2025-04-03T23:38:46.750" v="1167" actId="1076"/>
+          <ac:grpSpMkLst>
+            <pc:docMk/>
+            <pc:sldMk cId="3020415987" sldId="268"/>
+            <ac:grpSpMk id="5" creationId="{59795E21-DA31-A5BA-B12B-96D86AC4F108}"/>
+          </ac:grpSpMkLst>
+        </pc:grpChg>
+        <pc:graphicFrameChg chg="del">
+          <ac:chgData name="Quang-Nguyen Vo-Huynh" userId="6a1b2bcfbbb34c0c" providerId="LiveId" clId="{6486FCFF-8752-4976-86E7-4BDA6065866B}" dt="2025-04-03T23:19:39.078" v="1098" actId="478"/>
+          <ac:graphicFrameMkLst>
+            <pc:docMk/>
+            <pc:sldMk cId="3020415987" sldId="268"/>
+            <ac:graphicFrameMk id="2" creationId="{C9600E8E-A314-1D51-255C-1AEA58EC0404}"/>
+          </ac:graphicFrameMkLst>
+        </pc:graphicFrameChg>
+        <pc:picChg chg="add del mod">
+          <ac:chgData name="Quang-Nguyen Vo-Huynh" userId="6a1b2bcfbbb34c0c" providerId="LiveId" clId="{6486FCFF-8752-4976-86E7-4BDA6065866B}" dt="2025-04-03T23:39:40.821" v="1174" actId="478"/>
+          <ac:picMkLst>
+            <pc:docMk/>
+            <pc:sldMk cId="3020415987" sldId="268"/>
+            <ac:picMk id="9" creationId="{7D8BFFDD-A0A0-518E-6FD9-6097521502F0}"/>
+          </ac:picMkLst>
+        </pc:picChg>
+        <pc:picChg chg="add mod">
+          <ac:chgData name="Quang-Nguyen Vo-Huynh" userId="6a1b2bcfbbb34c0c" providerId="LiveId" clId="{6486FCFF-8752-4976-86E7-4BDA6065866B}" dt="2025-04-03T23:38:46.750" v="1167" actId="1076"/>
+          <ac:picMkLst>
+            <pc:docMk/>
+            <pc:sldMk cId="3020415987" sldId="268"/>
+            <ac:picMk id="1026" creationId="{071D94FC-373A-CE1C-3F78-8F30A9E048A5}"/>
+          </ac:picMkLst>
+        </pc:picChg>
+        <pc:picChg chg="add mod">
+          <ac:chgData name="Quang-Nguyen Vo-Huynh" userId="6a1b2bcfbbb34c0c" providerId="LiveId" clId="{6486FCFF-8752-4976-86E7-4BDA6065866B}" dt="2025-04-03T23:38:42.036" v="1166" actId="1076"/>
+          <ac:picMkLst>
+            <pc:docMk/>
+            <pc:sldMk cId="3020415987" sldId="268"/>
+            <ac:picMk id="1028" creationId="{201F9ED0-7E72-FE07-157E-4F6D5A0D09B3}"/>
+          </ac:picMkLst>
+        </pc:picChg>
+        <pc:picChg chg="add mod">
+          <ac:chgData name="Quang-Nguyen Vo-Huynh" userId="6a1b2bcfbbb34c0c" providerId="LiveId" clId="{6486FCFF-8752-4976-86E7-4BDA6065866B}" dt="2025-04-03T23:44:35.071" v="1182" actId="1076"/>
+          <ac:picMkLst>
+            <pc:docMk/>
+            <pc:sldMk cId="3020415987" sldId="268"/>
+            <ac:picMk id="1030" creationId="{480BDE92-0965-5E2F-02E8-ED525B946677}"/>
+          </ac:picMkLst>
+        </pc:picChg>
+        <pc:cxnChg chg="add mod">
+          <ac:chgData name="Quang-Nguyen Vo-Huynh" userId="6a1b2bcfbbb34c0c" providerId="LiveId" clId="{6486FCFF-8752-4976-86E7-4BDA6065866B}" dt="2025-04-03T23:44:48.056" v="1185" actId="14100"/>
+          <ac:cxnSpMkLst>
+            <pc:docMk/>
+            <pc:sldMk cId="3020415987" sldId="268"/>
+            <ac:cxnSpMk id="14" creationId="{3446585D-C4EE-0497-C15B-8677B711D0C1}"/>
           </ac:cxnSpMkLst>
         </pc:cxnChg>
       </pc:sldChg>
@@ -3957,6 +4061,194 @@
       </p:grpSpPr>
       <p:sp>
         <p:nvSpPr>
+          <p:cNvPr id="11" name="TextBox 10">
+            <a:extLst>
+              <a:ext uri="{FF2B5EF4-FFF2-40B4-BE49-F238E27FC236}">
+                <a16:creationId xmlns:a16="http://schemas.microsoft.com/office/drawing/2014/main" id="{DD074894-0E99-894A-9B1A-0D7C79F5F6D7}"/>
+              </a:ext>
+            </a:extLst>
+          </p:cNvPr>
+          <p:cNvSpPr txBox="1"/>
+          <p:nvPr/>
+        </p:nvSpPr>
+        <p:spPr>
+          <a:xfrm>
+            <a:off x="571500" y="538619"/>
+            <a:ext cx="11040127" cy="461665"/>
+          </a:xfrm>
+          <a:prstGeom prst="rect">
+            <a:avLst/>
+          </a:prstGeom>
+          <a:noFill/>
+        </p:spPr>
+        <p:txBody>
+          <a:bodyPr wrap="square" rtlCol="0">
+            <a:spAutoFit/>
+          </a:bodyPr>
+          <a:lstStyle/>
+          <a:p>
+            <a:r>
+              <a:rPr lang="en-US" sz="2400" b="1" dirty="0">
+                <a:solidFill>
+                  <a:srgbClr val="63666A"/>
+                </a:solidFill>
+                <a:latin typeface="Gotham Narrow Bold" pitchFamily="2" charset="0"/>
+              </a:rPr>
+              <a:t>SECTION SUBHEAD</a:t>
+            </a:r>
+          </a:p>
+        </p:txBody>
+      </p:sp>
+      <p:sp>
+        <p:nvSpPr>
+          <p:cNvPr id="12" name="TextBox 11">
+            <a:extLst>
+              <a:ext uri="{FF2B5EF4-FFF2-40B4-BE49-F238E27FC236}">
+                <a16:creationId xmlns:a16="http://schemas.microsoft.com/office/drawing/2014/main" id="{B0E297CD-5450-7441-A033-60CDC02876B0}"/>
+              </a:ext>
+            </a:extLst>
+          </p:cNvPr>
+          <p:cNvSpPr txBox="1"/>
+          <p:nvPr/>
+        </p:nvSpPr>
+        <p:spPr>
+          <a:xfrm>
+            <a:off x="876822" y="1115395"/>
+            <a:ext cx="10734804" cy="4256705"/>
+          </a:xfrm>
+          <a:prstGeom prst="rect">
+            <a:avLst/>
+          </a:prstGeom>
+          <a:noFill/>
+        </p:spPr>
+        <p:txBody>
+          <a:bodyPr wrap="square" rtlCol="0">
+            <a:noAutofit/>
+          </a:bodyPr>
+          <a:lstStyle/>
+          <a:p>
+            <a:pPr>
+              <a:lnSpc>
+                <a:spcPct val="125000"/>
+              </a:lnSpc>
+            </a:pPr>
+            <a:r>
+              <a:rPr lang="en-US" dirty="0">
+                <a:latin typeface="Gotham Narrow Book" pitchFamily="2" charset="0"/>
+              </a:rPr>
+              <a:t>Body copy goes here. Last slide in a section. Last slide in a section. Last slide in a section. Last slide in a section. Last slide in a section. Last slide in a section. Last slide in a section. Last slide in a section. Last slide in a section. Last slide in a section. Last slide in a section. Last slide in a section. Last slide in a section. Last slide in a section. Last slide in a section. Last slide in a section. Last slide in a section. Last slide in a section. </a:t>
+            </a:r>
+          </a:p>
+          <a:p>
+            <a:pPr>
+              <a:lnSpc>
+                <a:spcPct val="125000"/>
+              </a:lnSpc>
+            </a:pPr>
+            <a:r>
+              <a:rPr lang="en-US" dirty="0">
+                <a:latin typeface="Gotham Narrow Book" pitchFamily="2" charset="0"/>
+              </a:rPr>
+              <a:t>	</a:t>
+            </a:r>
+          </a:p>
+          <a:p>
+            <a:pPr>
+              <a:lnSpc>
+                <a:spcPct val="125000"/>
+              </a:lnSpc>
+            </a:pPr>
+            <a:r>
+              <a:rPr lang="en-US" dirty="0">
+                <a:latin typeface="Gotham Narrow Book" pitchFamily="2" charset="0"/>
+              </a:rPr>
+              <a:t>Body copy goes here. Last slide in a section. Last slide in a section. Last slide in a section. Last slide in a section. Last slide in a section. Last slide in a section. Last slide in a section. Last slide in a section. Last slide in a section. Last slide in a section. Last slide in a section. Last slide in a section. Last slide in a section. Last slide in a section. Last slide in a section. Last slide in a section. Last slide in a section. Last slide in a section. </a:t>
+            </a:r>
+          </a:p>
+          <a:p>
+            <a:pPr>
+              <a:lnSpc>
+                <a:spcPct val="125000"/>
+              </a:lnSpc>
+            </a:pPr>
+            <a:endParaRPr lang="en-US" dirty="0">
+              <a:latin typeface="Gotham Narrow Book" pitchFamily="2" charset="0"/>
+            </a:endParaRPr>
+          </a:p>
+          <a:p>
+            <a:pPr>
+              <a:lnSpc>
+                <a:spcPct val="125000"/>
+              </a:lnSpc>
+            </a:pPr>
+            <a:r>
+              <a:rPr lang="en-US" dirty="0">
+                <a:latin typeface="Gotham Narrow Book" pitchFamily="2" charset="0"/>
+              </a:rPr>
+              <a:t>	• Last slide in each section</a:t>
+            </a:r>
+          </a:p>
+          <a:p>
+            <a:pPr>
+              <a:lnSpc>
+                <a:spcPct val="125000"/>
+              </a:lnSpc>
+            </a:pPr>
+            <a:r>
+              <a:rPr lang="en-US" dirty="0">
+                <a:latin typeface="Gotham Narrow Book" pitchFamily="2" charset="0"/>
+              </a:rPr>
+              <a:t>	• Last slide in each section</a:t>
+            </a:r>
+          </a:p>
+        </p:txBody>
+      </p:sp>
+    </p:spTree>
+    <p:extLst>
+      <p:ext uri="{BB962C8B-B14F-4D97-AF65-F5344CB8AC3E}">
+        <p14:creationId xmlns:p14="http://schemas.microsoft.com/office/powerpoint/2010/main" val="1663129815"/>
+      </p:ext>
+    </p:extLst>
+  </p:cSld>
+  <p:clrMapOvr>
+    <a:masterClrMapping/>
+  </p:clrMapOvr>
+</p:sld>
+</file>
+
+<file path=ppt/slides/slide11.xml><?xml version="1.0" encoding="utf-8"?>
+<p:sld xmlns:a="http://schemas.openxmlformats.org/drawingml/2006/main" xmlns:r="http://schemas.openxmlformats.org/officeDocument/2006/relationships" xmlns:p="http://schemas.openxmlformats.org/presentationml/2006/main" show="0">
+  <p:cSld>
+    <p:bg>
+      <p:bgPr>
+        <a:blipFill dpi="0" rotWithShape="1">
+          <a:blip r:embed="rId2">
+            <a:lum/>
+          </a:blip>
+          <a:srcRect/>
+          <a:stretch>
+            <a:fillRect/>
+          </a:stretch>
+        </a:blipFill>
+        <a:effectLst/>
+      </p:bgPr>
+    </p:bg>
+    <p:spTree>
+      <p:nvGrpSpPr>
+        <p:cNvPr id="1" name=""/>
+        <p:cNvGrpSpPr/>
+        <p:nvPr/>
+      </p:nvGrpSpPr>
+      <p:grpSpPr>
+        <a:xfrm>
+          <a:off x="0" y="0"/>
+          <a:ext cx="0" cy="0"/>
+          <a:chOff x="0" y="0"/>
+          <a:chExt cx="0" cy="0"/>
+        </a:xfrm>
+      </p:grpSpPr>
+      <p:sp>
+        <p:nvSpPr>
           <p:cNvPr id="6" name="TextBox 5">
             <a:extLst>
               <a:ext uri="{FF2B5EF4-FFF2-40B4-BE49-F238E27FC236}">
@@ -4379,8 +4671,8 @@
           </a:p>
         </p:txBody>
       </p:sp>
-      <mc:AlternateContent xmlns:mc="http://schemas.openxmlformats.org/markup-compatibility/2006">
-        <mc:Choice xmlns:a14="http://schemas.microsoft.com/office/drawing/2010/main" Requires="a14">
+      <mc:AlternateContent xmlns:mc="http://schemas.openxmlformats.org/markup-compatibility/2006" xmlns:a14="http://schemas.microsoft.com/office/drawing/2010/main">
+        <mc:Choice Requires="a14">
           <p:sp>
             <p:nvSpPr>
               <p:cNvPr id="12" name="TextBox 11">
@@ -4583,7 +4875,7 @@
             </p:txBody>
           </p:sp>
         </mc:Choice>
-        <mc:Fallback>
+        <mc:Fallback xmlns="">
           <p:sp>
             <p:nvSpPr>
               <p:cNvPr id="12" name="TextBox 11">
@@ -5278,7 +5570,7 @@
               <a:rPr lang="en-US" dirty="0">
                 <a:latin typeface="Gotham Narrow Book" pitchFamily="2" charset="0"/>
               </a:rPr>
-              <a:t>.</a:t>
+              <a:t>. To improve the device performance, we applied our proposed error correction methods.</a:t>
             </a:r>
           </a:p>
           <a:p>
@@ -5290,7 +5582,7 @@
               <a:buChar char="§"/>
             </a:pPr>
             <a:r>
-              <a:rPr lang="en-US">
+              <a:rPr lang="en-US" dirty="0">
                 <a:latin typeface="Gotham Narrow Book" pitchFamily="2" charset="0"/>
               </a:rPr>
               <a:t>  Results:</a:t>
@@ -5308,6 +5600,301 @@
           </a:p>
         </p:txBody>
       </p:sp>
+      <p:graphicFrame>
+        <p:nvGraphicFramePr>
+          <p:cNvPr id="2" name="Table 1">
+            <a:extLst>
+              <a:ext uri="{FF2B5EF4-FFF2-40B4-BE49-F238E27FC236}">
+                <a16:creationId xmlns:a16="http://schemas.microsoft.com/office/drawing/2014/main" id="{98974048-6FED-9403-D4AC-9B4AB925BC9B}"/>
+              </a:ext>
+            </a:extLst>
+          </p:cNvPr>
+          <p:cNvGraphicFramePr>
+            <a:graphicFrameLocks noGrp="1"/>
+          </p:cNvGraphicFramePr>
+          <p:nvPr>
+            <p:extLst>
+              <p:ext uri="{D42A27DB-BD31-4B8C-83A1-F6EECF244321}">
+                <p14:modId xmlns:p14="http://schemas.microsoft.com/office/powerpoint/2010/main" val="2981715266"/>
+              </p:ext>
+            </p:extLst>
+          </p:nvPr>
+        </p:nvGraphicFramePr>
+        <p:xfrm>
+          <a:off x="596564" y="2658334"/>
+          <a:ext cx="8127999" cy="1752600"/>
+        </p:xfrm>
+        <a:graphic>
+          <a:graphicData uri="http://schemas.openxmlformats.org/drawingml/2006/table">
+            <a:tbl>
+              <a:tblPr firstRow="1" bandRow="1">
+                <a:tableStyleId>{5C22544A-7EE6-4342-B048-85BDC9FD1C3A}</a:tableStyleId>
+              </a:tblPr>
+              <a:tblGrid>
+                <a:gridCol w="2774165">
+                  <a:extLst>
+                    <a:ext uri="{9D8B030D-6E8A-4147-A177-3AD203B41FA5}">
+                      <a16:colId xmlns:a16="http://schemas.microsoft.com/office/drawing/2014/main" val="3715258470"/>
+                    </a:ext>
+                  </a:extLst>
+                </a:gridCol>
+                <a:gridCol w="2644501">
+                  <a:extLst>
+                    <a:ext uri="{9D8B030D-6E8A-4147-A177-3AD203B41FA5}">
+                      <a16:colId xmlns:a16="http://schemas.microsoft.com/office/drawing/2014/main" val="2837321965"/>
+                    </a:ext>
+                  </a:extLst>
+                </a:gridCol>
+                <a:gridCol w="2709333">
+                  <a:extLst>
+                    <a:ext uri="{9D8B030D-6E8A-4147-A177-3AD203B41FA5}">
+                      <a16:colId xmlns:a16="http://schemas.microsoft.com/office/drawing/2014/main" val="113310370"/>
+                    </a:ext>
+                  </a:extLst>
+                </a:gridCol>
+              </a:tblGrid>
+              <a:tr h="370840">
+                <a:tc>
+                  <a:txBody>
+                    <a:bodyPr/>
+                    <a:lstStyle/>
+                    <a:p>
+                      <a:pPr algn="ctr"/>
+                      <a:r>
+                        <a:rPr lang="en-US" dirty="0">
+                          <a:latin typeface="Gotham Narrow Book"/>
+                        </a:rPr>
+                        <a:t>Matrix</a:t>
+                      </a:r>
+                    </a:p>
+                  </a:txBody>
+                  <a:tcPr/>
+                </a:tc>
+                <a:tc>
+                  <a:txBody>
+                    <a:bodyPr/>
+                    <a:lstStyle/>
+                    <a:p>
+                      <a:pPr algn="ctr"/>
+                      <a:r>
+                        <a:rPr lang="en-US" dirty="0">
+                          <a:latin typeface="Gotham Narrow Book"/>
+                        </a:rPr>
+                        <a:t>GPU</a:t>
+                      </a:r>
+                    </a:p>
+                  </a:txBody>
+                  <a:tcPr/>
+                </a:tc>
+                <a:tc>
+                  <a:txBody>
+                    <a:bodyPr/>
+                    <a:lstStyle/>
+                    <a:p>
+                      <a:pPr algn="ctr"/>
+                      <a:r>
+                        <a:rPr lang="en-US" dirty="0">
+                          <a:latin typeface="Gotham Narrow Book"/>
+                        </a:rPr>
+                        <a:t>MELISO-simulated Devices</a:t>
+                      </a:r>
+                    </a:p>
+                  </a:txBody>
+                  <a:tcPr/>
+                </a:tc>
+                <a:extLst>
+                  <a:ext uri="{0D108BD9-81ED-4DB2-BD59-A6C34878D82A}">
+                    <a16:rowId xmlns:a16="http://schemas.microsoft.com/office/drawing/2014/main" val="3939403022"/>
+                  </a:ext>
+                </a:extLst>
+              </a:tr>
+              <a:tr h="370840">
+                <a:tc>
+                  <a:txBody>
+                    <a:bodyPr/>
+                    <a:lstStyle/>
+                    <a:p>
+                      <a:r>
+                        <a:rPr lang="en-US" dirty="0">
+                          <a:latin typeface="Gotham Narrow Book"/>
+                        </a:rPr>
+                        <a:t>Symmetric tridiagonal [1]</a:t>
+                      </a:r>
+                    </a:p>
+                  </a:txBody>
+                  <a:tcPr/>
+                </a:tc>
+                <a:tc>
+                  <a:txBody>
+                    <a:bodyPr/>
+                    <a:lstStyle/>
+                    <a:p>
+                      <a:pPr algn="ctr" fontAlgn="b"/>
+                      <a:r>
+                        <a:rPr lang="en-US" dirty="0">
+                          <a:latin typeface="Gotham Narrow Book"/>
+                        </a:rPr>
+                        <a:t>0.4030</a:t>
+                      </a:r>
+                    </a:p>
+                  </a:txBody>
+                  <a:tcPr marL="9525" marR="9525" marT="9525" marB="0" anchor="b"/>
+                </a:tc>
+                <a:tc>
+                  <a:txBody>
+                    <a:bodyPr/>
+                    <a:lstStyle/>
+                    <a:p>
+                      <a:pPr algn="ctr"/>
+                      <a:r>
+                        <a:rPr lang="en-US" dirty="0">
+                          <a:latin typeface="Gotham Narrow Book"/>
+                        </a:rPr>
+                        <a:t>0.1782</a:t>
+                      </a:r>
+                    </a:p>
+                  </a:txBody>
+                  <a:tcPr/>
+                </a:tc>
+                <a:extLst>
+                  <a:ext uri="{0D108BD9-81ED-4DB2-BD59-A6C34878D82A}">
+                    <a16:rowId xmlns:a16="http://schemas.microsoft.com/office/drawing/2014/main" val="3484688066"/>
+                  </a:ext>
+                </a:extLst>
+              </a:tr>
+              <a:tr h="370840">
+                <a:tc>
+                  <a:txBody>
+                    <a:bodyPr/>
+                    <a:lstStyle/>
+                    <a:p>
+                      <a:r>
+                        <a:rPr lang="en-US" dirty="0">
+                          <a:latin typeface="Gotham Narrow Book"/>
+                        </a:rPr>
+                        <a:t>Constraint matrix [2]</a:t>
+                      </a:r>
+                    </a:p>
+                  </a:txBody>
+                  <a:tcPr/>
+                </a:tc>
+                <a:tc>
+                  <a:txBody>
+                    <a:bodyPr/>
+                    <a:lstStyle/>
+                    <a:p>
+                      <a:pPr marL="0" marR="0" lvl="0" indent="0" algn="ctr" defTabSz="914400" rtl="0" eaLnBrk="1" fontAlgn="auto" latinLnBrk="0" hangingPunct="1">
+                        <a:lnSpc>
+                          <a:spcPct val="100000"/>
+                        </a:lnSpc>
+                        <a:spcBef>
+                          <a:spcPts val="0"/>
+                        </a:spcBef>
+                        <a:spcAft>
+                          <a:spcPts val="0"/>
+                        </a:spcAft>
+                        <a:buClrTx/>
+                        <a:buSzTx/>
+                        <a:buFontTx/>
+                        <a:buNone/>
+                        <a:tabLst/>
+                        <a:defRPr/>
+                      </a:pPr>
+                      <a:r>
+                        <a:rPr lang="en-US" dirty="0">
+                          <a:latin typeface="Gotham Narrow Book"/>
+                        </a:rPr>
+                        <a:t>0.24673</a:t>
+                      </a:r>
+                    </a:p>
+                  </a:txBody>
+                  <a:tcPr/>
+                </a:tc>
+                <a:tc>
+                  <a:txBody>
+                    <a:bodyPr/>
+                    <a:lstStyle/>
+                    <a:p>
+                      <a:endParaRPr lang="en-US" dirty="0">
+                        <a:latin typeface="Gotham Narrow Book"/>
+                      </a:endParaRPr>
+                    </a:p>
+                  </a:txBody>
+                  <a:tcPr/>
+                </a:tc>
+                <a:extLst>
+                  <a:ext uri="{0D108BD9-81ED-4DB2-BD59-A6C34878D82A}">
+                    <a16:rowId xmlns:a16="http://schemas.microsoft.com/office/drawing/2014/main" val="1255951861"/>
+                  </a:ext>
+                </a:extLst>
+              </a:tr>
+              <a:tr h="370840">
+                <a:tc>
+                  <a:txBody>
+                    <a:bodyPr/>
+                    <a:lstStyle/>
+                    <a:p>
+                      <a:pPr marL="0" marR="0" lvl="0" indent="0" algn="l" defTabSz="914400" rtl="0" eaLnBrk="1" fontAlgn="auto" latinLnBrk="0" hangingPunct="1">
+                        <a:lnSpc>
+                          <a:spcPct val="100000"/>
+                        </a:lnSpc>
+                        <a:spcBef>
+                          <a:spcPts val="0"/>
+                        </a:spcBef>
+                        <a:spcAft>
+                          <a:spcPts val="0"/>
+                        </a:spcAft>
+                        <a:buClrTx/>
+                        <a:buSzTx/>
+                        <a:buFontTx/>
+                        <a:buNone/>
+                        <a:tabLst/>
+                        <a:defRPr/>
+                      </a:pPr>
+                      <a:r>
+                        <a:rPr lang="en-US" dirty="0">
+                          <a:latin typeface="Gotham Narrow Book"/>
+                        </a:rPr>
+                        <a:t>Constraint matrix [3]</a:t>
+                      </a:r>
+                    </a:p>
+                  </a:txBody>
+                  <a:tcPr/>
+                </a:tc>
+                <a:tc>
+                  <a:txBody>
+                    <a:bodyPr/>
+                    <a:lstStyle/>
+                    <a:p>
+                      <a:endParaRPr lang="en-US" dirty="0">
+                        <a:latin typeface="Gotham Narrow Book"/>
+                      </a:endParaRPr>
+                    </a:p>
+                  </a:txBody>
+                  <a:tcPr/>
+                </a:tc>
+                <a:tc>
+                  <a:txBody>
+                    <a:bodyPr/>
+                    <a:lstStyle/>
+                    <a:p>
+                      <a:endParaRPr lang="en-US" dirty="0">
+                        <a:latin typeface="Gotham Narrow Book"/>
+                      </a:endParaRPr>
+                    </a:p>
+                  </a:txBody>
+                  <a:tcPr/>
+                </a:tc>
+                <a:extLst>
+                  <a:ext uri="{0D108BD9-81ED-4DB2-BD59-A6C34878D82A}">
+                    <a16:rowId xmlns:a16="http://schemas.microsoft.com/office/drawing/2014/main" val="1489652481"/>
+                  </a:ext>
+                </a:extLst>
+              </a:tr>
+            </a:tbl>
+          </a:graphicData>
+        </a:graphic>
+      </p:graphicFrame>
     </p:spTree>
     <p:extLst>
       <p:ext uri="{BB962C8B-B14F-4D97-AF65-F5344CB8AC3E}">
@@ -5322,7 +5909,7 @@
 </file>
 
 <file path=ppt/slides/slide5.xml><?xml version="1.0" encoding="utf-8"?>
-<p:sld xmlns:a="http://schemas.openxmlformats.org/drawingml/2006/main" xmlns:r="http://schemas.openxmlformats.org/officeDocument/2006/relationships" xmlns:p="http://schemas.openxmlformats.org/presentationml/2006/main" show="0">
+<p:sld xmlns:a="http://schemas.openxmlformats.org/drawingml/2006/main" xmlns:r="http://schemas.openxmlformats.org/officeDocument/2006/relationships" xmlns:p="http://schemas.openxmlformats.org/presentationml/2006/main">
   <p:cSld>
     <p:bg>
       <p:bgPr>
@@ -5340,7 +5927,13 @@
     </p:bg>
     <p:spTree>
       <p:nvGrpSpPr>
-        <p:cNvPr id="1" name=""/>
+        <p:cNvPr id="1" name="">
+          <a:extLst>
+            <a:ext uri="{FF2B5EF4-FFF2-40B4-BE49-F238E27FC236}">
+              <a16:creationId xmlns:a16="http://schemas.microsoft.com/office/drawing/2014/main" id="{67EC2B82-D0D6-A7DC-EC57-EE0645E69EFC}"/>
+            </a:ext>
+          </a:extLst>
+        </p:cNvPr>
         <p:cNvGrpSpPr/>
         <p:nvPr/>
       </p:nvGrpSpPr>
@@ -5354,10 +5947,10 @@
       </p:grpSpPr>
       <p:sp>
         <p:nvSpPr>
-          <p:cNvPr id="5" name="TextBox 4">
-            <a:extLst>
-              <a:ext uri="{FF2B5EF4-FFF2-40B4-BE49-F238E27FC236}">
-                <a16:creationId xmlns:a16="http://schemas.microsoft.com/office/drawing/2014/main" id="{44B7E921-4FB7-284B-9679-627B0D7126F5}"/>
+          <p:cNvPr id="10" name="TextBox 9">
+            <a:extLst>
+              <a:ext uri="{FF2B5EF4-FFF2-40B4-BE49-F238E27FC236}">
+                <a16:creationId xmlns:a16="http://schemas.microsoft.com/office/drawing/2014/main" id="{FC97913B-4178-C8E1-B704-DD3F44C7BF07}"/>
               </a:ext>
             </a:extLst>
           </p:cNvPr>
@@ -5366,7 +5959,47 @@
         </p:nvSpPr>
         <p:spPr>
           <a:xfrm>
-            <a:off x="571500" y="538619"/>
+            <a:off x="567836" y="0"/>
+            <a:ext cx="11040127" cy="830997"/>
+          </a:xfrm>
+          <a:prstGeom prst="rect">
+            <a:avLst/>
+          </a:prstGeom>
+          <a:noFill/>
+        </p:spPr>
+        <p:txBody>
+          <a:bodyPr wrap="square" rtlCol="0">
+            <a:spAutoFit/>
+          </a:bodyPr>
+          <a:lstStyle/>
+          <a:p>
+            <a:r>
+              <a:rPr lang="en-US" sz="4800" dirty="0">
+                <a:solidFill>
+                  <a:srgbClr val="FB6400"/>
+                </a:solidFill>
+                <a:latin typeface="FjallaOne" panose="02000506040000020004" pitchFamily="2" charset="77"/>
+              </a:rPr>
+              <a:t>Power Iteration</a:t>
+            </a:r>
+          </a:p>
+        </p:txBody>
+      </p:sp>
+      <p:sp>
+        <p:nvSpPr>
+          <p:cNvPr id="11" name="TextBox 10">
+            <a:extLst>
+              <a:ext uri="{FF2B5EF4-FFF2-40B4-BE49-F238E27FC236}">
+                <a16:creationId xmlns:a16="http://schemas.microsoft.com/office/drawing/2014/main" id="{AEFFBD17-43B7-894F-AFEA-8E0E6A5F7E98}"/>
+              </a:ext>
+            </a:extLst>
+          </p:cNvPr>
+          <p:cNvSpPr txBox="1"/>
+          <p:nvPr/>
+        </p:nvSpPr>
+        <p:spPr>
+          <a:xfrm>
+            <a:off x="584037" y="658618"/>
             <a:ext cx="11040127" cy="461665"/>
           </a:xfrm>
           <a:prstGeom prst="rect">
@@ -5387,17 +6020,169 @@
                 </a:solidFill>
                 <a:latin typeface="Gotham Narrow Bold" pitchFamily="2" charset="0"/>
               </a:rPr>
-              <a:t>SECTION SUBHEAD</a:t>
-            </a:r>
-          </a:p>
-        </p:txBody>
-      </p:sp>
-      <p:sp>
-        <p:nvSpPr>
-          <p:cNvPr id="6" name="TextBox 5">
-            <a:extLst>
-              <a:ext uri="{FF2B5EF4-FFF2-40B4-BE49-F238E27FC236}">
-                <a16:creationId xmlns:a16="http://schemas.microsoft.com/office/drawing/2014/main" id="{A87927AC-8429-D242-9F31-193EE99C1A6C}"/>
+              <a:t>Supplementary Information</a:t>
+            </a:r>
+          </a:p>
+        </p:txBody>
+      </p:sp>
+      <p:grpSp>
+        <p:nvGrpSpPr>
+          <p:cNvPr id="5" name="Group 4">
+            <a:extLst>
+              <a:ext uri="{FF2B5EF4-FFF2-40B4-BE49-F238E27FC236}">
+                <a16:creationId xmlns:a16="http://schemas.microsoft.com/office/drawing/2014/main" id="{59795E21-DA31-A5BA-B12B-96D86AC4F108}"/>
+              </a:ext>
+            </a:extLst>
+          </p:cNvPr>
+          <p:cNvGrpSpPr/>
+          <p:nvPr/>
+        </p:nvGrpSpPr>
+        <p:grpSpPr>
+          <a:xfrm>
+            <a:off x="3384037" y="830997"/>
+            <a:ext cx="2286000" cy="1883626"/>
+            <a:chOff x="3240741" y="881375"/>
+            <a:chExt cx="2286000" cy="1883626"/>
+          </a:xfrm>
+        </p:grpSpPr>
+        <p:pic>
+          <p:nvPicPr>
+            <p:cNvPr id="1026" name="Picture 2">
+              <a:extLst>
+                <a:ext uri="{FF2B5EF4-FFF2-40B4-BE49-F238E27FC236}">
+                  <a16:creationId xmlns:a16="http://schemas.microsoft.com/office/drawing/2014/main" id="{071D94FC-373A-CE1C-3F78-8F30A9E048A5}"/>
+                </a:ext>
+              </a:extLst>
+            </p:cNvPr>
+            <p:cNvPicPr>
+              <a:picLocks noChangeAspect="1" noChangeArrowheads="1"/>
+            </p:cNvPicPr>
+            <p:nvPr/>
+          </p:nvPicPr>
+          <p:blipFill>
+            <a:blip r:embed="rId3">
+              <a:extLst>
+                <a:ext uri="{28A0092B-C50C-407E-A947-70E740481C1C}">
+                  <a14:useLocalDpi xmlns:a14="http://schemas.microsoft.com/office/drawing/2010/main" val="0"/>
+                </a:ext>
+              </a:extLst>
+            </a:blip>
+            <a:srcRect/>
+            <a:stretch>
+              <a:fillRect/>
+            </a:stretch>
+          </p:blipFill>
+          <p:spPr bwMode="auto">
+            <a:xfrm>
+              <a:off x="3384037" y="881375"/>
+              <a:ext cx="1999408" cy="1875551"/>
+            </a:xfrm>
+            <a:prstGeom prst="rect">
+              <a:avLst/>
+            </a:prstGeom>
+            <a:noFill/>
+            <a:extLst>
+              <a:ext uri="{909E8E84-426E-40DD-AFC4-6F175D3DCCD1}">
+                <a14:hiddenFill xmlns:a14="http://schemas.microsoft.com/office/drawing/2010/main">
+                  <a:solidFill>
+                    <a:srgbClr val="FFFFFF"/>
+                  </a:solidFill>
+                </a14:hiddenFill>
+              </a:ext>
+            </a:extLst>
+          </p:spPr>
+        </p:pic>
+        <p:sp>
+          <p:nvSpPr>
+            <p:cNvPr id="4" name="TextBox 3">
+              <a:extLst>
+                <a:ext uri="{FF2B5EF4-FFF2-40B4-BE49-F238E27FC236}">
+                  <a16:creationId xmlns:a16="http://schemas.microsoft.com/office/drawing/2014/main" id="{E4EF3038-17B3-FB14-10BE-2E7446ECFE2D}"/>
+                </a:ext>
+              </a:extLst>
+            </p:cNvPr>
+            <p:cNvSpPr txBox="1"/>
+            <p:nvPr/>
+          </p:nvSpPr>
+          <p:spPr>
+            <a:xfrm>
+              <a:off x="3240741" y="2395669"/>
+              <a:ext cx="2286000" cy="369332"/>
+            </a:xfrm>
+            <a:prstGeom prst="rect">
+              <a:avLst/>
+            </a:prstGeom>
+            <a:noFill/>
+          </p:spPr>
+          <p:txBody>
+            <a:bodyPr wrap="square">
+              <a:spAutoFit/>
+            </a:bodyPr>
+            <a:lstStyle/>
+            <a:p>
+              <a:r>
+                <a:rPr lang="en-US" dirty="0">
+                  <a:latin typeface="Gotham Narrow Book"/>
+                </a:rPr>
+                <a:t>Constraint matrix [2]</a:t>
+              </a:r>
+            </a:p>
+          </p:txBody>
+        </p:sp>
+      </p:grpSp>
+      <p:pic>
+        <p:nvPicPr>
+          <p:cNvPr id="1028" name="Picture 4">
+            <a:extLst>
+              <a:ext uri="{FF2B5EF4-FFF2-40B4-BE49-F238E27FC236}">
+                <a16:creationId xmlns:a16="http://schemas.microsoft.com/office/drawing/2014/main" id="{201F9ED0-7E72-FE07-157E-4F6D5A0D09B3}"/>
+              </a:ext>
+            </a:extLst>
+          </p:cNvPr>
+          <p:cNvPicPr>
+            <a:picLocks noChangeAspect="1" noChangeArrowheads="1"/>
+          </p:cNvPicPr>
+          <p:nvPr/>
+        </p:nvPicPr>
+        <p:blipFill>
+          <a:blip r:embed="rId4">
+            <a:extLst>
+              <a:ext uri="{28A0092B-C50C-407E-A947-70E740481C1C}">
+                <a14:useLocalDpi xmlns:a14="http://schemas.microsoft.com/office/drawing/2010/main" val="0"/>
+              </a:ext>
+            </a:extLst>
+          </a:blip>
+          <a:srcRect/>
+          <a:stretch>
+            <a:fillRect/>
+          </a:stretch>
+        </p:blipFill>
+        <p:spPr bwMode="auto">
+          <a:xfrm>
+            <a:off x="940487" y="790529"/>
+            <a:ext cx="1821449" cy="1875551"/>
+          </a:xfrm>
+          <a:prstGeom prst="rect">
+            <a:avLst/>
+          </a:prstGeom>
+          <a:noFill/>
+          <a:extLst>
+            <a:ext uri="{909E8E84-426E-40DD-AFC4-6F175D3DCCD1}">
+              <a14:hiddenFill xmlns:a14="http://schemas.microsoft.com/office/drawing/2010/main">
+                <a:solidFill>
+                  <a:srgbClr val="FFFFFF"/>
+                </a:solidFill>
+              </a14:hiddenFill>
+            </a:ext>
+          </a:extLst>
+        </p:spPr>
+      </p:pic>
+      <p:sp>
+        <p:nvSpPr>
+          <p:cNvPr id="7" name="TextBox 6">
+            <a:extLst>
+              <a:ext uri="{FF2B5EF4-FFF2-40B4-BE49-F238E27FC236}">
+                <a16:creationId xmlns:a16="http://schemas.microsoft.com/office/drawing/2014/main" id="{AB94BE8C-777C-A307-9AF5-D49FD09495F6}"/>
               </a:ext>
             </a:extLst>
           </p:cNvPr>
@@ -5406,8 +6191,8 @@
         </p:nvSpPr>
         <p:spPr>
           <a:xfrm>
-            <a:off x="876822" y="1115395"/>
-            <a:ext cx="10734804" cy="4256705"/>
+            <a:off x="461682" y="2336326"/>
+            <a:ext cx="2779059" cy="369332"/>
           </a:xfrm>
           <a:prstGeom prst="rect">
             <a:avLst/>
@@ -5415,517 +6200,116 @@
           <a:noFill/>
         </p:spPr>
         <p:txBody>
-          <a:bodyPr wrap="square" rtlCol="0">
-            <a:noAutofit/>
+          <a:bodyPr wrap="square">
+            <a:spAutoFit/>
           </a:bodyPr>
           <a:lstStyle/>
           <a:p>
-            <a:pPr>
-              <a:lnSpc>
-                <a:spcPct val="125000"/>
-              </a:lnSpc>
-            </a:pPr>
-            <a:r>
-              <a:rPr lang="en-US" dirty="0">
-                <a:latin typeface="Gotham Narrow Book" pitchFamily="2" charset="0"/>
-              </a:rPr>
-              <a:t>Body copy goes here. Lorem ipsum dolor sit </a:t>
-            </a:r>
-            <a:r>
-              <a:rPr lang="en-US" dirty="0" err="1">
-                <a:latin typeface="Gotham Narrow Book" pitchFamily="2" charset="0"/>
-              </a:rPr>
-              <a:t>amet</a:t>
-            </a:r>
-            <a:r>
-              <a:rPr lang="en-US" dirty="0">
-                <a:latin typeface="Gotham Narrow Book" pitchFamily="2" charset="0"/>
-              </a:rPr>
-              <a:t>, </a:t>
-            </a:r>
-            <a:r>
-              <a:rPr lang="en-US" dirty="0" err="1">
-                <a:latin typeface="Gotham Narrow Book" pitchFamily="2" charset="0"/>
-              </a:rPr>
-              <a:t>consectetur</a:t>
-            </a:r>
-            <a:r>
-              <a:rPr lang="en-US" dirty="0">
-                <a:latin typeface="Gotham Narrow Book" pitchFamily="2" charset="0"/>
-              </a:rPr>
-              <a:t> </a:t>
-            </a:r>
-            <a:r>
-              <a:rPr lang="en-US" dirty="0" err="1">
-                <a:latin typeface="Gotham Narrow Book" pitchFamily="2" charset="0"/>
-              </a:rPr>
-              <a:t>adipiscing</a:t>
-            </a:r>
-            <a:r>
-              <a:rPr lang="en-US" dirty="0">
-                <a:latin typeface="Gotham Narrow Book" pitchFamily="2" charset="0"/>
-              </a:rPr>
-              <a:t> </a:t>
-            </a:r>
-            <a:r>
-              <a:rPr lang="en-US" dirty="0" err="1">
-                <a:latin typeface="Gotham Narrow Book" pitchFamily="2" charset="0"/>
-              </a:rPr>
-              <a:t>elit</a:t>
-            </a:r>
-            <a:r>
-              <a:rPr lang="en-US" dirty="0">
-                <a:latin typeface="Gotham Narrow Book" pitchFamily="2" charset="0"/>
-              </a:rPr>
-              <a:t>, sed do </a:t>
-            </a:r>
-            <a:r>
-              <a:rPr lang="en-US" dirty="0" err="1">
-                <a:latin typeface="Gotham Narrow Book" pitchFamily="2" charset="0"/>
-              </a:rPr>
-              <a:t>eiusmod</a:t>
-            </a:r>
-            <a:r>
-              <a:rPr lang="en-US" dirty="0">
-                <a:latin typeface="Gotham Narrow Book" pitchFamily="2" charset="0"/>
-              </a:rPr>
-              <a:t> </a:t>
-            </a:r>
-            <a:r>
-              <a:rPr lang="en-US" dirty="0" err="1">
-                <a:latin typeface="Gotham Narrow Book" pitchFamily="2" charset="0"/>
-              </a:rPr>
-              <a:t>tempor</a:t>
-            </a:r>
-            <a:r>
-              <a:rPr lang="en-US" dirty="0">
-                <a:latin typeface="Gotham Narrow Book" pitchFamily="2" charset="0"/>
-              </a:rPr>
-              <a:t> </a:t>
-            </a:r>
-            <a:r>
-              <a:rPr lang="en-US" dirty="0" err="1">
-                <a:latin typeface="Gotham Narrow Book" pitchFamily="2" charset="0"/>
-              </a:rPr>
-              <a:t>incididunt</a:t>
-            </a:r>
-            <a:r>
-              <a:rPr lang="en-US" dirty="0">
-                <a:latin typeface="Gotham Narrow Book" pitchFamily="2" charset="0"/>
-              </a:rPr>
-              <a:t> </a:t>
-            </a:r>
-            <a:r>
-              <a:rPr lang="en-US" dirty="0" err="1">
-                <a:latin typeface="Gotham Narrow Book" pitchFamily="2" charset="0"/>
-              </a:rPr>
-              <a:t>ut</a:t>
-            </a:r>
-            <a:r>
-              <a:rPr lang="en-US" dirty="0">
-                <a:latin typeface="Gotham Narrow Book" pitchFamily="2" charset="0"/>
-              </a:rPr>
-              <a:t> </a:t>
-            </a:r>
-            <a:r>
-              <a:rPr lang="en-US" dirty="0" err="1">
-                <a:latin typeface="Gotham Narrow Book" pitchFamily="2" charset="0"/>
-              </a:rPr>
-              <a:t>labore</a:t>
-            </a:r>
-            <a:r>
-              <a:rPr lang="en-US" dirty="0">
-                <a:latin typeface="Gotham Narrow Book" pitchFamily="2" charset="0"/>
-              </a:rPr>
-              <a:t> et dolore magna </a:t>
-            </a:r>
-            <a:r>
-              <a:rPr lang="en-US" dirty="0" err="1">
-                <a:latin typeface="Gotham Narrow Book" pitchFamily="2" charset="0"/>
-              </a:rPr>
-              <a:t>aliqua</a:t>
-            </a:r>
-            <a:r>
-              <a:rPr lang="en-US" dirty="0">
-                <a:latin typeface="Gotham Narrow Book" pitchFamily="2" charset="0"/>
-              </a:rPr>
-              <a:t>. Ut </a:t>
-            </a:r>
-            <a:r>
-              <a:rPr lang="en-US" dirty="0" err="1">
-                <a:latin typeface="Gotham Narrow Book" pitchFamily="2" charset="0"/>
-              </a:rPr>
-              <a:t>enim</a:t>
-            </a:r>
-            <a:r>
-              <a:rPr lang="en-US" dirty="0">
-                <a:latin typeface="Gotham Narrow Book" pitchFamily="2" charset="0"/>
-              </a:rPr>
-              <a:t> ad minim </a:t>
-            </a:r>
-            <a:r>
-              <a:rPr lang="en-US" dirty="0" err="1">
-                <a:latin typeface="Gotham Narrow Book" pitchFamily="2" charset="0"/>
-              </a:rPr>
-              <a:t>veniam</a:t>
-            </a:r>
-            <a:r>
-              <a:rPr lang="en-US" dirty="0">
-                <a:latin typeface="Gotham Narrow Book" pitchFamily="2" charset="0"/>
-              </a:rPr>
-              <a:t>, </a:t>
-            </a:r>
-            <a:r>
-              <a:rPr lang="en-US" dirty="0" err="1">
-                <a:latin typeface="Gotham Narrow Book" pitchFamily="2" charset="0"/>
-              </a:rPr>
-              <a:t>quis</a:t>
-            </a:r>
-            <a:r>
-              <a:rPr lang="en-US" dirty="0">
-                <a:latin typeface="Gotham Narrow Book" pitchFamily="2" charset="0"/>
-              </a:rPr>
-              <a:t> </a:t>
-            </a:r>
-            <a:r>
-              <a:rPr lang="en-US" dirty="0" err="1">
-                <a:latin typeface="Gotham Narrow Book" pitchFamily="2" charset="0"/>
-              </a:rPr>
-              <a:t>nostrud</a:t>
-            </a:r>
-            <a:r>
-              <a:rPr lang="en-US" dirty="0">
-                <a:latin typeface="Gotham Narrow Book" pitchFamily="2" charset="0"/>
-              </a:rPr>
-              <a:t> exercitation </a:t>
-            </a:r>
-            <a:r>
-              <a:rPr lang="en-US" dirty="0" err="1">
-                <a:latin typeface="Gotham Narrow Book" pitchFamily="2" charset="0"/>
-              </a:rPr>
-              <a:t>ullamco</a:t>
-            </a:r>
-            <a:r>
-              <a:rPr lang="en-US" dirty="0">
-                <a:latin typeface="Gotham Narrow Book" pitchFamily="2" charset="0"/>
-              </a:rPr>
-              <a:t> </a:t>
-            </a:r>
-            <a:r>
-              <a:rPr lang="en-US" dirty="0" err="1">
-                <a:latin typeface="Gotham Narrow Book" pitchFamily="2" charset="0"/>
-              </a:rPr>
-              <a:t>laboris</a:t>
-            </a:r>
-            <a:r>
-              <a:rPr lang="en-US" dirty="0">
-                <a:latin typeface="Gotham Narrow Book" pitchFamily="2" charset="0"/>
-              </a:rPr>
-              <a:t> nisi </a:t>
-            </a:r>
-            <a:r>
-              <a:rPr lang="en-US" dirty="0" err="1">
-                <a:latin typeface="Gotham Narrow Book" pitchFamily="2" charset="0"/>
-              </a:rPr>
-              <a:t>ut</a:t>
-            </a:r>
-            <a:r>
-              <a:rPr lang="en-US" dirty="0">
-                <a:latin typeface="Gotham Narrow Book" pitchFamily="2" charset="0"/>
-              </a:rPr>
-              <a:t> </a:t>
-            </a:r>
-            <a:r>
-              <a:rPr lang="en-US" dirty="0" err="1">
-                <a:latin typeface="Gotham Narrow Book" pitchFamily="2" charset="0"/>
-              </a:rPr>
-              <a:t>aliquip</a:t>
-            </a:r>
-            <a:r>
-              <a:rPr lang="en-US" dirty="0">
-                <a:latin typeface="Gotham Narrow Book" pitchFamily="2" charset="0"/>
-              </a:rPr>
-              <a:t> ex </a:t>
-            </a:r>
-            <a:r>
-              <a:rPr lang="en-US" dirty="0" err="1">
-                <a:latin typeface="Gotham Narrow Book" pitchFamily="2" charset="0"/>
-              </a:rPr>
-              <a:t>ea</a:t>
-            </a:r>
-            <a:r>
-              <a:rPr lang="en-US" dirty="0">
-                <a:latin typeface="Gotham Narrow Book" pitchFamily="2" charset="0"/>
-              </a:rPr>
-              <a:t> </a:t>
-            </a:r>
-            <a:r>
-              <a:rPr lang="en-US" dirty="0" err="1">
-                <a:latin typeface="Gotham Narrow Book" pitchFamily="2" charset="0"/>
-              </a:rPr>
-              <a:t>commodo</a:t>
-            </a:r>
-            <a:r>
-              <a:rPr lang="en-US" dirty="0">
-                <a:latin typeface="Gotham Narrow Book" pitchFamily="2" charset="0"/>
-              </a:rPr>
-              <a:t> </a:t>
-            </a:r>
-            <a:r>
-              <a:rPr lang="en-US" dirty="0" err="1">
-                <a:latin typeface="Gotham Narrow Book" pitchFamily="2" charset="0"/>
-              </a:rPr>
-              <a:t>consequat</a:t>
-            </a:r>
-            <a:r>
-              <a:rPr lang="en-US" dirty="0">
-                <a:latin typeface="Gotham Narrow Book" pitchFamily="2" charset="0"/>
-              </a:rPr>
-              <a:t>. Duis </a:t>
-            </a:r>
-            <a:r>
-              <a:rPr lang="en-US" dirty="0" err="1">
-                <a:latin typeface="Gotham Narrow Book" pitchFamily="2" charset="0"/>
-              </a:rPr>
-              <a:t>aute</a:t>
-            </a:r>
-            <a:r>
-              <a:rPr lang="en-US" dirty="0">
-                <a:latin typeface="Gotham Narrow Book" pitchFamily="2" charset="0"/>
-              </a:rPr>
-              <a:t> </a:t>
-            </a:r>
-            <a:r>
-              <a:rPr lang="en-US" dirty="0" err="1">
-                <a:latin typeface="Gotham Narrow Book" pitchFamily="2" charset="0"/>
-              </a:rPr>
-              <a:t>irure</a:t>
-            </a:r>
-            <a:r>
-              <a:rPr lang="en-US" dirty="0">
-                <a:latin typeface="Gotham Narrow Book" pitchFamily="2" charset="0"/>
-              </a:rPr>
-              <a:t> dolor in </a:t>
-            </a:r>
-            <a:r>
-              <a:rPr lang="en-US" dirty="0" err="1">
-                <a:latin typeface="Gotham Narrow Book" pitchFamily="2" charset="0"/>
-              </a:rPr>
-              <a:t>reprehenderit</a:t>
-            </a:r>
-            <a:r>
-              <a:rPr lang="en-US" dirty="0">
-                <a:latin typeface="Gotham Narrow Book" pitchFamily="2" charset="0"/>
-              </a:rPr>
-              <a:t> in </a:t>
-            </a:r>
-            <a:r>
-              <a:rPr lang="en-US" dirty="0" err="1">
-                <a:latin typeface="Gotham Narrow Book" pitchFamily="2" charset="0"/>
-              </a:rPr>
-              <a:t>voluptate</a:t>
-            </a:r>
-            <a:r>
-              <a:rPr lang="en-US" dirty="0">
-                <a:latin typeface="Gotham Narrow Book" pitchFamily="2" charset="0"/>
-              </a:rPr>
-              <a:t> </a:t>
-            </a:r>
-            <a:r>
-              <a:rPr lang="en-US" dirty="0" err="1">
-                <a:latin typeface="Gotham Narrow Book" pitchFamily="2" charset="0"/>
-              </a:rPr>
-              <a:t>velit</a:t>
-            </a:r>
-            <a:r>
-              <a:rPr lang="en-US" dirty="0">
-                <a:latin typeface="Gotham Narrow Book" pitchFamily="2" charset="0"/>
-              </a:rPr>
-              <a:t> </a:t>
-            </a:r>
-            <a:r>
-              <a:rPr lang="en-US" dirty="0" err="1">
-                <a:latin typeface="Gotham Narrow Book" pitchFamily="2" charset="0"/>
-              </a:rPr>
-              <a:t>esse</a:t>
-            </a:r>
-            <a:r>
-              <a:rPr lang="en-US" dirty="0">
-                <a:latin typeface="Gotham Narrow Book" pitchFamily="2" charset="0"/>
-              </a:rPr>
-              <a:t> </a:t>
-            </a:r>
-            <a:r>
-              <a:rPr lang="en-US" dirty="0" err="1">
-                <a:latin typeface="Gotham Narrow Book" pitchFamily="2" charset="0"/>
-              </a:rPr>
-              <a:t>cillum</a:t>
-            </a:r>
-            <a:r>
-              <a:rPr lang="en-US" dirty="0">
-                <a:latin typeface="Gotham Narrow Book" pitchFamily="2" charset="0"/>
-              </a:rPr>
-              <a:t> dolore </a:t>
-            </a:r>
-            <a:r>
-              <a:rPr lang="en-US" dirty="0" err="1">
-                <a:latin typeface="Gotham Narrow Book" pitchFamily="2" charset="0"/>
-              </a:rPr>
-              <a:t>eu</a:t>
-            </a:r>
-            <a:r>
-              <a:rPr lang="en-US" dirty="0">
-                <a:latin typeface="Gotham Narrow Book" pitchFamily="2" charset="0"/>
-              </a:rPr>
-              <a:t> </a:t>
-            </a:r>
-            <a:r>
-              <a:rPr lang="en-US" dirty="0" err="1">
-                <a:latin typeface="Gotham Narrow Book" pitchFamily="2" charset="0"/>
-              </a:rPr>
-              <a:t>fugiat</a:t>
-            </a:r>
-            <a:r>
-              <a:rPr lang="en-US" dirty="0">
-                <a:latin typeface="Gotham Narrow Book" pitchFamily="2" charset="0"/>
-              </a:rPr>
-              <a:t> </a:t>
-            </a:r>
-            <a:r>
-              <a:rPr lang="en-US" dirty="0" err="1">
-                <a:latin typeface="Gotham Narrow Book" pitchFamily="2" charset="0"/>
-              </a:rPr>
-              <a:t>nulla</a:t>
-            </a:r>
-            <a:r>
-              <a:rPr lang="en-US" dirty="0">
-                <a:latin typeface="Gotham Narrow Book" pitchFamily="2" charset="0"/>
-              </a:rPr>
-              <a:t> </a:t>
-            </a:r>
-            <a:r>
-              <a:rPr lang="en-US" dirty="0" err="1">
-                <a:latin typeface="Gotham Narrow Book" pitchFamily="2" charset="0"/>
-              </a:rPr>
-              <a:t>pariature</a:t>
-            </a:r>
-            <a:r>
-              <a:rPr lang="en-US" dirty="0">
-                <a:latin typeface="Gotham Narrow Book" pitchFamily="2" charset="0"/>
-              </a:rPr>
-              <a:t>.</a:t>
-            </a:r>
-          </a:p>
-          <a:p>
-            <a:pPr>
-              <a:lnSpc>
-                <a:spcPct val="125000"/>
-              </a:lnSpc>
-            </a:pPr>
-            <a:r>
-              <a:rPr lang="en-US" dirty="0">
-                <a:latin typeface="Gotham Narrow Book" pitchFamily="2" charset="0"/>
-              </a:rPr>
-              <a:t>	</a:t>
-            </a:r>
-          </a:p>
-          <a:p>
-            <a:pPr>
-              <a:lnSpc>
-                <a:spcPct val="125000"/>
-              </a:lnSpc>
-            </a:pPr>
-            <a:r>
-              <a:rPr lang="en-US" dirty="0">
-                <a:latin typeface="Gotham Narrow Book" pitchFamily="2" charset="0"/>
-              </a:rPr>
-              <a:t>	• Secondary Slide</a:t>
-            </a:r>
-          </a:p>
-          <a:p>
-            <a:pPr>
-              <a:lnSpc>
-                <a:spcPct val="125000"/>
-              </a:lnSpc>
-            </a:pPr>
-            <a:r>
-              <a:rPr lang="en-US" dirty="0">
-                <a:latin typeface="Gotham Narrow Book" pitchFamily="2" charset="0"/>
-              </a:rPr>
-              <a:t>	• Secondary Slide</a:t>
-            </a:r>
-          </a:p>
-          <a:p>
-            <a:pPr>
-              <a:lnSpc>
-                <a:spcPct val="125000"/>
-              </a:lnSpc>
-            </a:pPr>
-            <a:r>
-              <a:rPr lang="en-US" dirty="0">
-                <a:latin typeface="Gotham Narrow Book" pitchFamily="2" charset="0"/>
-              </a:rPr>
-              <a:t>	• Secondary Slide</a:t>
-            </a:r>
-          </a:p>
-          <a:p>
-            <a:pPr>
-              <a:lnSpc>
-                <a:spcPct val="125000"/>
-              </a:lnSpc>
-            </a:pPr>
-            <a:r>
-              <a:rPr lang="en-US" dirty="0">
-                <a:latin typeface="Gotham Narrow Book" pitchFamily="2" charset="0"/>
-              </a:rPr>
-              <a:t>	• Secondary Slide</a:t>
-            </a:r>
-          </a:p>
-          <a:p>
-            <a:pPr>
-              <a:lnSpc>
-                <a:spcPct val="125000"/>
-              </a:lnSpc>
-            </a:pPr>
-            <a:r>
-              <a:rPr lang="en-US" dirty="0">
-                <a:latin typeface="Gotham Narrow Book" pitchFamily="2" charset="0"/>
-              </a:rPr>
-              <a:t>	• Secondary Slide</a:t>
-            </a:r>
-          </a:p>
-          <a:p>
-            <a:pPr>
-              <a:lnSpc>
-                <a:spcPct val="125000"/>
-              </a:lnSpc>
-            </a:pPr>
-            <a:r>
-              <a:rPr lang="en-US" dirty="0">
-                <a:latin typeface="Gotham Narrow Book" pitchFamily="2" charset="0"/>
-              </a:rPr>
-              <a:t>	• Secondary Slide</a:t>
-            </a:r>
-          </a:p>
-          <a:p>
-            <a:pPr>
-              <a:lnSpc>
-                <a:spcPct val="125000"/>
-              </a:lnSpc>
-            </a:pPr>
-            <a:r>
-              <a:rPr lang="en-US" dirty="0">
-                <a:latin typeface="Gotham Narrow Book" pitchFamily="2" charset="0"/>
-              </a:rPr>
-              <a:t>	• Secondary Slide</a:t>
-            </a:r>
-          </a:p>
-        </p:txBody>
-      </p:sp>
+            <a:r>
+              <a:rPr lang="en-US" dirty="0">
+                <a:latin typeface="Gotham Narrow Book"/>
+              </a:rPr>
+              <a:t>Symmetric tridiagonal [1]</a:t>
+            </a:r>
+          </a:p>
+        </p:txBody>
+      </p:sp>
+      <p:pic>
+        <p:nvPicPr>
+          <p:cNvPr id="1030" name="Picture 6">
+            <a:extLst>
+              <a:ext uri="{FF2B5EF4-FFF2-40B4-BE49-F238E27FC236}">
+                <a16:creationId xmlns:a16="http://schemas.microsoft.com/office/drawing/2014/main" id="{480BDE92-0965-5E2F-02E8-ED525B946677}"/>
+              </a:ext>
+            </a:extLst>
+          </p:cNvPr>
+          <p:cNvPicPr>
+            <a:picLocks noChangeAspect="1" noChangeArrowheads="1"/>
+          </p:cNvPicPr>
+          <p:nvPr/>
+        </p:nvPicPr>
+        <p:blipFill>
+          <a:blip r:embed="rId5">
+            <a:extLst>
+              <a:ext uri="{28A0092B-C50C-407E-A947-70E740481C1C}">
+                <a14:useLocalDpi xmlns:a14="http://schemas.microsoft.com/office/drawing/2010/main" val="0"/>
+              </a:ext>
+            </a:extLst>
+          </a:blip>
+          <a:srcRect/>
+          <a:stretch>
+            <a:fillRect/>
+          </a:stretch>
+        </p:blipFill>
+        <p:spPr bwMode="auto">
+          <a:xfrm>
+            <a:off x="2848326" y="3177988"/>
+            <a:ext cx="3357422" cy="2672575"/>
+          </a:xfrm>
+          <a:prstGeom prst="rect">
+            <a:avLst/>
+          </a:prstGeom>
+          <a:noFill/>
+          <a:extLst>
+            <a:ext uri="{909E8E84-426E-40DD-AFC4-6F175D3DCCD1}">
+              <a14:hiddenFill xmlns:a14="http://schemas.microsoft.com/office/drawing/2010/main">
+                <a:solidFill>
+                  <a:srgbClr val="FFFFFF"/>
+                </a:solidFill>
+              </a14:hiddenFill>
+            </a:ext>
+          </a:extLst>
+        </p:spPr>
+      </p:pic>
+      <p:cxnSp>
+        <p:nvCxnSpPr>
+          <p:cNvPr id="14" name="Straight Arrow Connector 13">
+            <a:extLst>
+              <a:ext uri="{FF2B5EF4-FFF2-40B4-BE49-F238E27FC236}">
+                <a16:creationId xmlns:a16="http://schemas.microsoft.com/office/drawing/2014/main" id="{3446585D-C4EE-0497-C15B-8677B711D0C1}"/>
+              </a:ext>
+            </a:extLst>
+          </p:cNvPr>
+          <p:cNvCxnSpPr>
+            <a:cxnSpLocks/>
+            <a:endCxn id="4" idx="2"/>
+          </p:cNvCxnSpPr>
+          <p:nvPr/>
+        </p:nvCxnSpPr>
+        <p:spPr>
+          <a:xfrm flipV="1">
+            <a:off x="4527037" y="2714623"/>
+            <a:ext cx="0" cy="714377"/>
+          </a:xfrm>
+          <a:prstGeom prst="straightConnector1">
+            <a:avLst/>
+          </a:prstGeom>
+          <a:ln w="28575">
+            <a:solidFill>
+              <a:srgbClr val="FF0000"/>
+            </a:solidFill>
+            <a:tailEnd type="triangle"/>
+          </a:ln>
+        </p:spPr>
+        <p:style>
+          <a:lnRef idx="1">
+            <a:schemeClr val="accent1"/>
+          </a:lnRef>
+          <a:fillRef idx="0">
+            <a:schemeClr val="accent1"/>
+          </a:fillRef>
+          <a:effectRef idx="0">
+            <a:schemeClr val="accent1"/>
+          </a:effectRef>
+          <a:fontRef idx="minor">
+            <a:schemeClr val="tx1"/>
+          </a:fontRef>
+        </p:style>
+      </p:cxnSp>
     </p:spTree>
     <p:extLst>
       <p:ext uri="{BB962C8B-B14F-4D97-AF65-F5344CB8AC3E}">
-        <p14:creationId xmlns:p14="http://schemas.microsoft.com/office/powerpoint/2010/main" val="1779087438"/>
+        <p14:creationId xmlns:p14="http://schemas.microsoft.com/office/powerpoint/2010/main" val="3020415987"/>
       </p:ext>
     </p:extLst>
   </p:cSld>
@@ -6020,8 +6404,8 @@
         </p:nvSpPr>
         <p:spPr>
           <a:xfrm>
-            <a:off x="5107708" y="1115395"/>
-            <a:ext cx="6503917" cy="4256705"/>
+            <a:off x="876822" y="1115395"/>
+            <a:ext cx="10734804" cy="4256705"/>
           </a:xfrm>
           <a:prstGeom prst="rect">
             <a:avLst/>
@@ -6453,7 +6837,7 @@
               <a:rPr lang="en-US" dirty="0">
                 <a:latin typeface="Gotham Narrow Book" pitchFamily="2" charset="0"/>
               </a:rPr>
-              <a:t>	• When single image is necessary</a:t>
+              <a:t>	• Secondary Slide</a:t>
             </a:r>
           </a:p>
           <a:p>
@@ -6466,7 +6850,7 @@
               <a:rPr lang="en-US" dirty="0">
                 <a:latin typeface="Gotham Narrow Book" pitchFamily="2" charset="0"/>
               </a:rPr>
-              <a:t>	• Use this as a reference for appropriate style</a:t>
+              <a:t>	• Secondary Slide</a:t>
             </a:r>
           </a:p>
           <a:p>
@@ -6479,61 +6863,67 @@
               <a:rPr lang="en-US" dirty="0">
                 <a:latin typeface="Gotham Narrow Book" pitchFamily="2" charset="0"/>
               </a:rPr>
-              <a:t>	• Images. Images. Images.</a:t>
-            </a:r>
-          </a:p>
-        </p:txBody>
-      </p:sp>
-      <p:sp>
-        <p:nvSpPr>
-          <p:cNvPr id="2" name="Rectangle 1">
-            <a:extLst>
-              <a:ext uri="{FF2B5EF4-FFF2-40B4-BE49-F238E27FC236}">
-                <a16:creationId xmlns:a16="http://schemas.microsoft.com/office/drawing/2014/main" id="{97ABE370-7C49-B54D-BC97-DC52776CBD47}"/>
-              </a:ext>
-            </a:extLst>
-          </p:cNvPr>
-          <p:cNvSpPr/>
-          <p:nvPr/>
-        </p:nvSpPr>
-        <p:spPr>
-          <a:xfrm>
-            <a:off x="988291" y="1115395"/>
-            <a:ext cx="3888509" cy="4256705"/>
-          </a:xfrm>
-          <a:prstGeom prst="rect">
-            <a:avLst/>
-          </a:prstGeom>
-        </p:spPr>
-        <p:style>
-          <a:lnRef idx="2">
-            <a:schemeClr val="accent1">
-              <a:shade val="50000"/>
-            </a:schemeClr>
-          </a:lnRef>
-          <a:fillRef idx="1">
-            <a:schemeClr val="accent1"/>
-          </a:fillRef>
-          <a:effectRef idx="0">
-            <a:schemeClr val="accent1"/>
-          </a:effectRef>
-          <a:fontRef idx="minor">
-            <a:schemeClr val="lt1"/>
-          </a:fontRef>
-        </p:style>
-        <p:txBody>
-          <a:bodyPr rtlCol="0" anchor="ctr"/>
-          <a:lstStyle/>
-          <a:p>
-            <a:pPr algn="ctr"/>
-            <a:endParaRPr lang="en-US"/>
+              <a:t>	• Secondary Slide</a:t>
+            </a:r>
+          </a:p>
+          <a:p>
+            <a:pPr>
+              <a:lnSpc>
+                <a:spcPct val="125000"/>
+              </a:lnSpc>
+            </a:pPr>
+            <a:r>
+              <a:rPr lang="en-US" dirty="0">
+                <a:latin typeface="Gotham Narrow Book" pitchFamily="2" charset="0"/>
+              </a:rPr>
+              <a:t>	• Secondary Slide</a:t>
+            </a:r>
+          </a:p>
+          <a:p>
+            <a:pPr>
+              <a:lnSpc>
+                <a:spcPct val="125000"/>
+              </a:lnSpc>
+            </a:pPr>
+            <a:r>
+              <a:rPr lang="en-US" dirty="0">
+                <a:latin typeface="Gotham Narrow Book" pitchFamily="2" charset="0"/>
+              </a:rPr>
+              <a:t>	• Secondary Slide</a:t>
+            </a:r>
+          </a:p>
+          <a:p>
+            <a:pPr>
+              <a:lnSpc>
+                <a:spcPct val="125000"/>
+              </a:lnSpc>
+            </a:pPr>
+            <a:r>
+              <a:rPr lang="en-US" dirty="0">
+                <a:latin typeface="Gotham Narrow Book" pitchFamily="2" charset="0"/>
+              </a:rPr>
+              <a:t>	• Secondary Slide</a:t>
+            </a:r>
+          </a:p>
+          <a:p>
+            <a:pPr>
+              <a:lnSpc>
+                <a:spcPct val="125000"/>
+              </a:lnSpc>
+            </a:pPr>
+            <a:r>
+              <a:rPr lang="en-US" dirty="0">
+                <a:latin typeface="Gotham Narrow Book" pitchFamily="2" charset="0"/>
+              </a:rPr>
+              <a:t>	• Secondary Slide</a:t>
+            </a:r>
           </a:p>
         </p:txBody>
       </p:sp>
     </p:spTree>
     <p:extLst>
       <p:ext uri="{BB962C8B-B14F-4D97-AF65-F5344CB8AC3E}">
-        <p14:creationId xmlns:p14="http://schemas.microsoft.com/office/powerpoint/2010/main" val="1304093165"/>
+        <p14:creationId xmlns:p14="http://schemas.microsoft.com/office/powerpoint/2010/main" val="1779087438"/>
       </p:ext>
     </p:extLst>
   </p:cSld>
@@ -6628,8 +7018,8 @@
         </p:nvSpPr>
         <p:spPr>
           <a:xfrm>
-            <a:off x="8635999" y="1115394"/>
-            <a:ext cx="2975628" cy="4256705"/>
+            <a:off x="5107708" y="1115395"/>
+            <a:ext cx="6503917" cy="4256705"/>
           </a:xfrm>
           <a:prstGeom prst="rect">
             <a:avLst/>
@@ -6657,6 +7047,246 @@
               <a:rPr lang="en-US" dirty="0" err="1">
                 <a:latin typeface="Gotham Narrow Book" pitchFamily="2" charset="0"/>
               </a:rPr>
+              <a:t>amet</a:t>
+            </a:r>
+            <a:r>
+              <a:rPr lang="en-US" dirty="0">
+                <a:latin typeface="Gotham Narrow Book" pitchFamily="2" charset="0"/>
+              </a:rPr>
+              <a:t>, </a:t>
+            </a:r>
+            <a:r>
+              <a:rPr lang="en-US" dirty="0" err="1">
+                <a:latin typeface="Gotham Narrow Book" pitchFamily="2" charset="0"/>
+              </a:rPr>
+              <a:t>consectetur</a:t>
+            </a:r>
+            <a:r>
+              <a:rPr lang="en-US" dirty="0">
+                <a:latin typeface="Gotham Narrow Book" pitchFamily="2" charset="0"/>
+              </a:rPr>
+              <a:t> </a:t>
+            </a:r>
+            <a:r>
+              <a:rPr lang="en-US" dirty="0" err="1">
+                <a:latin typeface="Gotham Narrow Book" pitchFamily="2" charset="0"/>
+              </a:rPr>
+              <a:t>adipiscing</a:t>
+            </a:r>
+            <a:r>
+              <a:rPr lang="en-US" dirty="0">
+                <a:latin typeface="Gotham Narrow Book" pitchFamily="2" charset="0"/>
+              </a:rPr>
+              <a:t> </a:t>
+            </a:r>
+            <a:r>
+              <a:rPr lang="en-US" dirty="0" err="1">
+                <a:latin typeface="Gotham Narrow Book" pitchFamily="2" charset="0"/>
+              </a:rPr>
+              <a:t>elit</a:t>
+            </a:r>
+            <a:r>
+              <a:rPr lang="en-US" dirty="0">
+                <a:latin typeface="Gotham Narrow Book" pitchFamily="2" charset="0"/>
+              </a:rPr>
+              <a:t>, sed do </a:t>
+            </a:r>
+            <a:r>
+              <a:rPr lang="en-US" dirty="0" err="1">
+                <a:latin typeface="Gotham Narrow Book" pitchFamily="2" charset="0"/>
+              </a:rPr>
+              <a:t>eiusmod</a:t>
+            </a:r>
+            <a:r>
+              <a:rPr lang="en-US" dirty="0">
+                <a:latin typeface="Gotham Narrow Book" pitchFamily="2" charset="0"/>
+              </a:rPr>
+              <a:t> </a:t>
+            </a:r>
+            <a:r>
+              <a:rPr lang="en-US" dirty="0" err="1">
+                <a:latin typeface="Gotham Narrow Book" pitchFamily="2" charset="0"/>
+              </a:rPr>
+              <a:t>tempor</a:t>
+            </a:r>
+            <a:r>
+              <a:rPr lang="en-US" dirty="0">
+                <a:latin typeface="Gotham Narrow Book" pitchFamily="2" charset="0"/>
+              </a:rPr>
+              <a:t> </a:t>
+            </a:r>
+            <a:r>
+              <a:rPr lang="en-US" dirty="0" err="1">
+                <a:latin typeface="Gotham Narrow Book" pitchFamily="2" charset="0"/>
+              </a:rPr>
+              <a:t>incididunt</a:t>
+            </a:r>
+            <a:r>
+              <a:rPr lang="en-US" dirty="0">
+                <a:latin typeface="Gotham Narrow Book" pitchFamily="2" charset="0"/>
+              </a:rPr>
+              <a:t> </a:t>
+            </a:r>
+            <a:r>
+              <a:rPr lang="en-US" dirty="0" err="1">
+                <a:latin typeface="Gotham Narrow Book" pitchFamily="2" charset="0"/>
+              </a:rPr>
+              <a:t>ut</a:t>
+            </a:r>
+            <a:r>
+              <a:rPr lang="en-US" dirty="0">
+                <a:latin typeface="Gotham Narrow Book" pitchFamily="2" charset="0"/>
+              </a:rPr>
+              <a:t> </a:t>
+            </a:r>
+            <a:r>
+              <a:rPr lang="en-US" dirty="0" err="1">
+                <a:latin typeface="Gotham Narrow Book" pitchFamily="2" charset="0"/>
+              </a:rPr>
+              <a:t>labore</a:t>
+            </a:r>
+            <a:r>
+              <a:rPr lang="en-US" dirty="0">
+                <a:latin typeface="Gotham Narrow Book" pitchFamily="2" charset="0"/>
+              </a:rPr>
+              <a:t> et dolore magna </a:t>
+            </a:r>
+            <a:r>
+              <a:rPr lang="en-US" dirty="0" err="1">
+                <a:latin typeface="Gotham Narrow Book" pitchFamily="2" charset="0"/>
+              </a:rPr>
+              <a:t>aliqua</a:t>
+            </a:r>
+            <a:r>
+              <a:rPr lang="en-US" dirty="0">
+                <a:latin typeface="Gotham Narrow Book" pitchFamily="2" charset="0"/>
+              </a:rPr>
+              <a:t>. Ut </a:t>
+            </a:r>
+            <a:r>
+              <a:rPr lang="en-US" dirty="0" err="1">
+                <a:latin typeface="Gotham Narrow Book" pitchFamily="2" charset="0"/>
+              </a:rPr>
+              <a:t>enim</a:t>
+            </a:r>
+            <a:r>
+              <a:rPr lang="en-US" dirty="0">
+                <a:latin typeface="Gotham Narrow Book" pitchFamily="2" charset="0"/>
+              </a:rPr>
+              <a:t> ad minim </a:t>
+            </a:r>
+            <a:r>
+              <a:rPr lang="en-US" dirty="0" err="1">
+                <a:latin typeface="Gotham Narrow Book" pitchFamily="2" charset="0"/>
+              </a:rPr>
+              <a:t>veniam</a:t>
+            </a:r>
+            <a:r>
+              <a:rPr lang="en-US" dirty="0">
+                <a:latin typeface="Gotham Narrow Book" pitchFamily="2" charset="0"/>
+              </a:rPr>
+              <a:t>, </a:t>
+            </a:r>
+            <a:r>
+              <a:rPr lang="en-US" dirty="0" err="1">
+                <a:latin typeface="Gotham Narrow Book" pitchFamily="2" charset="0"/>
+              </a:rPr>
+              <a:t>quis</a:t>
+            </a:r>
+            <a:r>
+              <a:rPr lang="en-US" dirty="0">
+                <a:latin typeface="Gotham Narrow Book" pitchFamily="2" charset="0"/>
+              </a:rPr>
+              <a:t> </a:t>
+            </a:r>
+            <a:r>
+              <a:rPr lang="en-US" dirty="0" err="1">
+                <a:latin typeface="Gotham Narrow Book" pitchFamily="2" charset="0"/>
+              </a:rPr>
+              <a:t>nostrud</a:t>
+            </a:r>
+            <a:r>
+              <a:rPr lang="en-US" dirty="0">
+                <a:latin typeface="Gotham Narrow Book" pitchFamily="2" charset="0"/>
+              </a:rPr>
+              <a:t> exercitation </a:t>
+            </a:r>
+            <a:r>
+              <a:rPr lang="en-US" dirty="0" err="1">
+                <a:latin typeface="Gotham Narrow Book" pitchFamily="2" charset="0"/>
+              </a:rPr>
+              <a:t>ullamco</a:t>
+            </a:r>
+            <a:r>
+              <a:rPr lang="en-US" dirty="0">
+                <a:latin typeface="Gotham Narrow Book" pitchFamily="2" charset="0"/>
+              </a:rPr>
+              <a:t> </a:t>
+            </a:r>
+            <a:r>
+              <a:rPr lang="en-US" dirty="0" err="1">
+                <a:latin typeface="Gotham Narrow Book" pitchFamily="2" charset="0"/>
+              </a:rPr>
+              <a:t>laboris</a:t>
+            </a:r>
+            <a:r>
+              <a:rPr lang="en-US" dirty="0">
+                <a:latin typeface="Gotham Narrow Book" pitchFamily="2" charset="0"/>
+              </a:rPr>
+              <a:t> nisi </a:t>
+            </a:r>
+            <a:r>
+              <a:rPr lang="en-US" dirty="0" err="1">
+                <a:latin typeface="Gotham Narrow Book" pitchFamily="2" charset="0"/>
+              </a:rPr>
+              <a:t>ut</a:t>
+            </a:r>
+            <a:r>
+              <a:rPr lang="en-US" dirty="0">
+                <a:latin typeface="Gotham Narrow Book" pitchFamily="2" charset="0"/>
+              </a:rPr>
+              <a:t> </a:t>
+            </a:r>
+            <a:r>
+              <a:rPr lang="en-US" dirty="0" err="1">
+                <a:latin typeface="Gotham Narrow Book" pitchFamily="2" charset="0"/>
+              </a:rPr>
+              <a:t>aliquip</a:t>
+            </a:r>
+            <a:r>
+              <a:rPr lang="en-US" dirty="0">
+                <a:latin typeface="Gotham Narrow Book" pitchFamily="2" charset="0"/>
+              </a:rPr>
+              <a:t> ex </a:t>
+            </a:r>
+            <a:r>
+              <a:rPr lang="en-US" dirty="0" err="1">
+                <a:latin typeface="Gotham Narrow Book" pitchFamily="2" charset="0"/>
+              </a:rPr>
+              <a:t>ea</a:t>
+            </a:r>
+            <a:r>
+              <a:rPr lang="en-US" dirty="0">
+                <a:latin typeface="Gotham Narrow Book" pitchFamily="2" charset="0"/>
+              </a:rPr>
+              <a:t> </a:t>
+            </a:r>
+            <a:r>
+              <a:rPr lang="en-US" dirty="0" err="1">
+                <a:latin typeface="Gotham Narrow Book" pitchFamily="2" charset="0"/>
+              </a:rPr>
+              <a:t>commodo</a:t>
+            </a:r>
+            <a:r>
+              <a:rPr lang="en-US" dirty="0">
+                <a:latin typeface="Gotham Narrow Book" pitchFamily="2" charset="0"/>
+              </a:rPr>
+              <a:t> </a:t>
+            </a:r>
+            <a:r>
+              <a:rPr lang="en-US" dirty="0" err="1">
+                <a:latin typeface="Gotham Narrow Book" pitchFamily="2" charset="0"/>
+              </a:rPr>
               <a:t>consequat</a:t>
             </a:r>
             <a:r>
@@ -6693,7 +7323,103 @@
               <a:rPr lang="en-US" dirty="0" err="1">
                 <a:latin typeface="Gotham Narrow Book" pitchFamily="2" charset="0"/>
               </a:rPr>
-              <a:t>reprehende</a:t>
+              <a:t>reprehenderit</a:t>
+            </a:r>
+            <a:r>
+              <a:rPr lang="en-US" dirty="0">
+                <a:latin typeface="Gotham Narrow Book" pitchFamily="2" charset="0"/>
+              </a:rPr>
+              <a:t> in </a:t>
+            </a:r>
+            <a:r>
+              <a:rPr lang="en-US" dirty="0" err="1">
+                <a:latin typeface="Gotham Narrow Book" pitchFamily="2" charset="0"/>
+              </a:rPr>
+              <a:t>voluptate</a:t>
+            </a:r>
+            <a:r>
+              <a:rPr lang="en-US" dirty="0">
+                <a:latin typeface="Gotham Narrow Book" pitchFamily="2" charset="0"/>
+              </a:rPr>
+              <a:t> </a:t>
+            </a:r>
+            <a:r>
+              <a:rPr lang="en-US" dirty="0" err="1">
+                <a:latin typeface="Gotham Narrow Book" pitchFamily="2" charset="0"/>
+              </a:rPr>
+              <a:t>velit</a:t>
+            </a:r>
+            <a:r>
+              <a:rPr lang="en-US" dirty="0">
+                <a:latin typeface="Gotham Narrow Book" pitchFamily="2" charset="0"/>
+              </a:rPr>
+              <a:t> </a:t>
+            </a:r>
+            <a:r>
+              <a:rPr lang="en-US" dirty="0" err="1">
+                <a:latin typeface="Gotham Narrow Book" pitchFamily="2" charset="0"/>
+              </a:rPr>
+              <a:t>esse</a:t>
+            </a:r>
+            <a:r>
+              <a:rPr lang="en-US" dirty="0">
+                <a:latin typeface="Gotham Narrow Book" pitchFamily="2" charset="0"/>
+              </a:rPr>
+              <a:t> </a:t>
+            </a:r>
+            <a:r>
+              <a:rPr lang="en-US" dirty="0" err="1">
+                <a:latin typeface="Gotham Narrow Book" pitchFamily="2" charset="0"/>
+              </a:rPr>
+              <a:t>cillum</a:t>
+            </a:r>
+            <a:r>
+              <a:rPr lang="en-US" dirty="0">
+                <a:latin typeface="Gotham Narrow Book" pitchFamily="2" charset="0"/>
+              </a:rPr>
+              <a:t> dolore </a:t>
+            </a:r>
+            <a:r>
+              <a:rPr lang="en-US" dirty="0" err="1">
+                <a:latin typeface="Gotham Narrow Book" pitchFamily="2" charset="0"/>
+              </a:rPr>
+              <a:t>eu</a:t>
+            </a:r>
+            <a:r>
+              <a:rPr lang="en-US" dirty="0">
+                <a:latin typeface="Gotham Narrow Book" pitchFamily="2" charset="0"/>
+              </a:rPr>
+              <a:t> </a:t>
+            </a:r>
+            <a:r>
+              <a:rPr lang="en-US" dirty="0" err="1">
+                <a:latin typeface="Gotham Narrow Book" pitchFamily="2" charset="0"/>
+              </a:rPr>
+              <a:t>fugiat</a:t>
+            </a:r>
+            <a:r>
+              <a:rPr lang="en-US" dirty="0">
+                <a:latin typeface="Gotham Narrow Book" pitchFamily="2" charset="0"/>
+              </a:rPr>
+              <a:t> </a:t>
+            </a:r>
+            <a:r>
+              <a:rPr lang="en-US" dirty="0" err="1">
+                <a:latin typeface="Gotham Narrow Book" pitchFamily="2" charset="0"/>
+              </a:rPr>
+              <a:t>nulla</a:t>
+            </a:r>
+            <a:r>
+              <a:rPr lang="en-US" dirty="0">
+                <a:latin typeface="Gotham Narrow Book" pitchFamily="2" charset="0"/>
+              </a:rPr>
+              <a:t> </a:t>
+            </a:r>
+            <a:r>
+              <a:rPr lang="en-US" dirty="0" err="1">
+                <a:latin typeface="Gotham Narrow Book" pitchFamily="2" charset="0"/>
+              </a:rPr>
+              <a:t>pariature</a:t>
             </a:r>
             <a:r>
               <a:rPr lang="en-US" dirty="0">
@@ -6708,9 +7434,12 @@
                 <a:spcPct val="125000"/>
               </a:lnSpc>
             </a:pPr>
-            <a:endParaRPr lang="en-US" dirty="0">
-              <a:latin typeface="Gotham Narrow Book" pitchFamily="2" charset="0"/>
-            </a:endParaRPr>
+            <a:r>
+              <a:rPr lang="en-US" dirty="0">
+                <a:latin typeface="Gotham Narrow Book" pitchFamily="2" charset="0"/>
+              </a:rPr>
+              <a:t>	</a:t>
+            </a:r>
           </a:p>
           <a:p>
             <a:pPr>
@@ -6722,7 +7451,7 @@
               <a:rPr lang="en-US" dirty="0">
                 <a:latin typeface="Gotham Narrow Book" pitchFamily="2" charset="0"/>
               </a:rPr>
-              <a:t>• Use this slide for multiple images</a:t>
+              <a:t>	• When single image is necessary</a:t>
             </a:r>
           </a:p>
           <a:p>
@@ -6735,7 +7464,7 @@
               <a:rPr lang="en-US" dirty="0">
                 <a:latin typeface="Gotham Narrow Book" pitchFamily="2" charset="0"/>
               </a:rPr>
-              <a:t>• If they absolutely require text</a:t>
+              <a:t>	• Use this as a reference for appropriate style</a:t>
             </a:r>
           </a:p>
           <a:p>
@@ -6748,27 +7477,17 @@
               <a:rPr lang="en-US" dirty="0">
                 <a:latin typeface="Gotham Narrow Book" pitchFamily="2" charset="0"/>
               </a:rPr>
-              <a:t>• Otherwise, use next slide for multiples</a:t>
-            </a:r>
-          </a:p>
-          <a:p>
-            <a:pPr>
-              <a:lnSpc>
-                <a:spcPct val="125000"/>
-              </a:lnSpc>
-            </a:pPr>
-            <a:endParaRPr lang="en-US" dirty="0">
-              <a:latin typeface="Gotham Narrow Book" pitchFamily="2" charset="0"/>
-            </a:endParaRPr>
-          </a:p>
-        </p:txBody>
-      </p:sp>
-      <p:sp>
-        <p:nvSpPr>
-          <p:cNvPr id="8" name="Rectangle 7">
-            <a:extLst>
-              <a:ext uri="{FF2B5EF4-FFF2-40B4-BE49-F238E27FC236}">
-                <a16:creationId xmlns:a16="http://schemas.microsoft.com/office/drawing/2014/main" id="{EC0271BB-6B97-9749-9D88-A5CC3B86D619}"/>
+              <a:t>	• Images. Images. Images.</a:t>
+            </a:r>
+          </a:p>
+        </p:txBody>
+      </p:sp>
+      <p:sp>
+        <p:nvSpPr>
+          <p:cNvPr id="2" name="Rectangle 1">
+            <a:extLst>
+              <a:ext uri="{FF2B5EF4-FFF2-40B4-BE49-F238E27FC236}">
+                <a16:creationId xmlns:a16="http://schemas.microsoft.com/office/drawing/2014/main" id="{97ABE370-7C49-B54D-BC97-DC52776CBD47}"/>
               </a:ext>
             </a:extLst>
           </p:cNvPr>
@@ -6777,8 +7496,8 @@
         </p:nvSpPr>
         <p:spPr>
           <a:xfrm>
-            <a:off x="988292" y="1115394"/>
-            <a:ext cx="3592946" cy="4256705"/>
+            <a:off x="988291" y="1115395"/>
+            <a:ext cx="3888509" cy="4256705"/>
           </a:xfrm>
           <a:prstGeom prst="rect">
             <a:avLst/>
@@ -6809,56 +7528,10 @@
           </a:p>
         </p:txBody>
       </p:sp>
-      <p:sp>
-        <p:nvSpPr>
-          <p:cNvPr id="9" name="Rectangle 8">
-            <a:extLst>
-              <a:ext uri="{FF2B5EF4-FFF2-40B4-BE49-F238E27FC236}">
-                <a16:creationId xmlns:a16="http://schemas.microsoft.com/office/drawing/2014/main" id="{38B83EF9-3F52-B145-A21A-EA0D8AC181A0}"/>
-              </a:ext>
-            </a:extLst>
-          </p:cNvPr>
-          <p:cNvSpPr/>
-          <p:nvPr/>
-        </p:nvSpPr>
-        <p:spPr>
-          <a:xfrm>
-            <a:off x="4812146" y="1115394"/>
-            <a:ext cx="3592946" cy="4256705"/>
-          </a:xfrm>
-          <a:prstGeom prst="rect">
-            <a:avLst/>
-          </a:prstGeom>
-        </p:spPr>
-        <p:style>
-          <a:lnRef idx="2">
-            <a:schemeClr val="accent1">
-              <a:shade val="50000"/>
-            </a:schemeClr>
-          </a:lnRef>
-          <a:fillRef idx="1">
-            <a:schemeClr val="accent1"/>
-          </a:fillRef>
-          <a:effectRef idx="0">
-            <a:schemeClr val="accent1"/>
-          </a:effectRef>
-          <a:fontRef idx="minor">
-            <a:schemeClr val="lt1"/>
-          </a:fontRef>
-        </p:style>
-        <p:txBody>
-          <a:bodyPr rtlCol="0" anchor="ctr"/>
-          <a:lstStyle/>
-          <a:p>
-            <a:pPr algn="ctr"/>
-            <a:endParaRPr lang="en-US"/>
-          </a:p>
-        </p:txBody>
-      </p:sp>
     </p:spTree>
     <p:extLst>
       <p:ext uri="{BB962C8B-B14F-4D97-AF65-F5344CB8AC3E}">
-        <p14:creationId xmlns:p14="http://schemas.microsoft.com/office/powerpoint/2010/main" val="3019877112"/>
+        <p14:creationId xmlns:p14="http://schemas.microsoft.com/office/powerpoint/2010/main" val="1304093165"/>
       </p:ext>
     </p:extLst>
   </p:cSld>
@@ -6941,10 +7614,159 @@
       </p:sp>
       <p:sp>
         <p:nvSpPr>
-          <p:cNvPr id="2" name="Rectangle 1">
-            <a:extLst>
-              <a:ext uri="{FF2B5EF4-FFF2-40B4-BE49-F238E27FC236}">
-                <a16:creationId xmlns:a16="http://schemas.microsoft.com/office/drawing/2014/main" id="{97ABE370-7C49-B54D-BC97-DC52776CBD47}"/>
+          <p:cNvPr id="6" name="TextBox 5">
+            <a:extLst>
+              <a:ext uri="{FF2B5EF4-FFF2-40B4-BE49-F238E27FC236}">
+                <a16:creationId xmlns:a16="http://schemas.microsoft.com/office/drawing/2014/main" id="{A87927AC-8429-D242-9F31-193EE99C1A6C}"/>
+              </a:ext>
+            </a:extLst>
+          </p:cNvPr>
+          <p:cNvSpPr txBox="1"/>
+          <p:nvPr/>
+        </p:nvSpPr>
+        <p:spPr>
+          <a:xfrm>
+            <a:off x="8635999" y="1115394"/>
+            <a:ext cx="2975628" cy="4256705"/>
+          </a:xfrm>
+          <a:prstGeom prst="rect">
+            <a:avLst/>
+          </a:prstGeom>
+          <a:noFill/>
+        </p:spPr>
+        <p:txBody>
+          <a:bodyPr wrap="square" rtlCol="0">
+            <a:noAutofit/>
+          </a:bodyPr>
+          <a:lstStyle/>
+          <a:p>
+            <a:pPr>
+              <a:lnSpc>
+                <a:spcPct val="125000"/>
+              </a:lnSpc>
+            </a:pPr>
+            <a:r>
+              <a:rPr lang="en-US" dirty="0">
+                <a:latin typeface="Gotham Narrow Book" pitchFamily="2" charset="0"/>
+              </a:rPr>
+              <a:t>Body copy goes here. Lorem ipsum dolor sit </a:t>
+            </a:r>
+            <a:r>
+              <a:rPr lang="en-US" dirty="0" err="1">
+                <a:latin typeface="Gotham Narrow Book" pitchFamily="2" charset="0"/>
+              </a:rPr>
+              <a:t>consequat</a:t>
+            </a:r>
+            <a:r>
+              <a:rPr lang="en-US" dirty="0">
+                <a:latin typeface="Gotham Narrow Book" pitchFamily="2" charset="0"/>
+              </a:rPr>
+              <a:t>. Duis </a:t>
+            </a:r>
+            <a:r>
+              <a:rPr lang="en-US" dirty="0" err="1">
+                <a:latin typeface="Gotham Narrow Book" pitchFamily="2" charset="0"/>
+              </a:rPr>
+              <a:t>aute</a:t>
+            </a:r>
+            <a:r>
+              <a:rPr lang="en-US" dirty="0">
+                <a:latin typeface="Gotham Narrow Book" pitchFamily="2" charset="0"/>
+              </a:rPr>
+              <a:t> </a:t>
+            </a:r>
+            <a:r>
+              <a:rPr lang="en-US" dirty="0" err="1">
+                <a:latin typeface="Gotham Narrow Book" pitchFamily="2" charset="0"/>
+              </a:rPr>
+              <a:t>irure</a:t>
+            </a:r>
+            <a:r>
+              <a:rPr lang="en-US" dirty="0">
+                <a:latin typeface="Gotham Narrow Book" pitchFamily="2" charset="0"/>
+              </a:rPr>
+              <a:t> dolor in </a:t>
+            </a:r>
+            <a:r>
+              <a:rPr lang="en-US" dirty="0" err="1">
+                <a:latin typeface="Gotham Narrow Book" pitchFamily="2" charset="0"/>
+              </a:rPr>
+              <a:t>reprehende</a:t>
+            </a:r>
+            <a:r>
+              <a:rPr lang="en-US" dirty="0">
+                <a:latin typeface="Gotham Narrow Book" pitchFamily="2" charset="0"/>
+              </a:rPr>
+              <a:t>.</a:t>
+            </a:r>
+          </a:p>
+          <a:p>
+            <a:pPr>
+              <a:lnSpc>
+                <a:spcPct val="125000"/>
+              </a:lnSpc>
+            </a:pPr>
+            <a:endParaRPr lang="en-US" dirty="0">
+              <a:latin typeface="Gotham Narrow Book" pitchFamily="2" charset="0"/>
+            </a:endParaRPr>
+          </a:p>
+          <a:p>
+            <a:pPr>
+              <a:lnSpc>
+                <a:spcPct val="125000"/>
+              </a:lnSpc>
+            </a:pPr>
+            <a:r>
+              <a:rPr lang="en-US" dirty="0">
+                <a:latin typeface="Gotham Narrow Book" pitchFamily="2" charset="0"/>
+              </a:rPr>
+              <a:t>• Use this slide for multiple images</a:t>
+            </a:r>
+          </a:p>
+          <a:p>
+            <a:pPr>
+              <a:lnSpc>
+                <a:spcPct val="125000"/>
+              </a:lnSpc>
+            </a:pPr>
+            <a:r>
+              <a:rPr lang="en-US" dirty="0">
+                <a:latin typeface="Gotham Narrow Book" pitchFamily="2" charset="0"/>
+              </a:rPr>
+              <a:t>• If they absolutely require text</a:t>
+            </a:r>
+          </a:p>
+          <a:p>
+            <a:pPr>
+              <a:lnSpc>
+                <a:spcPct val="125000"/>
+              </a:lnSpc>
+            </a:pPr>
+            <a:r>
+              <a:rPr lang="en-US" dirty="0">
+                <a:latin typeface="Gotham Narrow Book" pitchFamily="2" charset="0"/>
+              </a:rPr>
+              <a:t>• Otherwise, use next slide for multiples</a:t>
+            </a:r>
+          </a:p>
+          <a:p>
+            <a:pPr>
+              <a:lnSpc>
+                <a:spcPct val="125000"/>
+              </a:lnSpc>
+            </a:pPr>
+            <a:endParaRPr lang="en-US" dirty="0">
+              <a:latin typeface="Gotham Narrow Book" pitchFamily="2" charset="0"/>
+            </a:endParaRPr>
+          </a:p>
+        </p:txBody>
+      </p:sp>
+      <p:sp>
+        <p:nvSpPr>
+          <p:cNvPr id="8" name="Rectangle 7">
+            <a:extLst>
+              <a:ext uri="{FF2B5EF4-FFF2-40B4-BE49-F238E27FC236}">
+                <a16:creationId xmlns:a16="http://schemas.microsoft.com/office/drawing/2014/main" id="{EC0271BB-6B97-9749-9D88-A5CC3B86D619}"/>
               </a:ext>
             </a:extLst>
           </p:cNvPr>
@@ -6953,8 +7775,8 @@
         </p:nvSpPr>
         <p:spPr>
           <a:xfrm>
-            <a:off x="988292" y="1115395"/>
-            <a:ext cx="6503917" cy="4256705"/>
+            <a:off x="988292" y="1115394"/>
+            <a:ext cx="3592946" cy="4256705"/>
           </a:xfrm>
           <a:prstGeom prst="rect">
             <a:avLst/>
@@ -6981,16 +7803,16 @@
           <a:lstStyle/>
           <a:p>
             <a:pPr algn="ctr"/>
-            <a:endParaRPr lang="en-US" dirty="0"/>
-          </a:p>
-        </p:txBody>
-      </p:sp>
-      <p:sp>
-        <p:nvSpPr>
-          <p:cNvPr id="7" name="Rectangle 6">
-            <a:extLst>
-              <a:ext uri="{FF2B5EF4-FFF2-40B4-BE49-F238E27FC236}">
-                <a16:creationId xmlns:a16="http://schemas.microsoft.com/office/drawing/2014/main" id="{DFE81E64-7A57-7845-BEE2-C07904F7A7D8}"/>
+            <a:endParaRPr lang="en-US"/>
+          </a:p>
+        </p:txBody>
+      </p:sp>
+      <p:sp>
+        <p:nvSpPr>
+          <p:cNvPr id="9" name="Rectangle 8">
+            <a:extLst>
+              <a:ext uri="{FF2B5EF4-FFF2-40B4-BE49-F238E27FC236}">
+                <a16:creationId xmlns:a16="http://schemas.microsoft.com/office/drawing/2014/main" id="{38B83EF9-3F52-B145-A21A-EA0D8AC181A0}"/>
               </a:ext>
             </a:extLst>
           </p:cNvPr>
@@ -6999,8 +7821,8 @@
         </p:nvSpPr>
         <p:spPr>
           <a:xfrm>
-            <a:off x="7723117" y="1115395"/>
-            <a:ext cx="3888509" cy="2015732"/>
+            <a:off x="4812146" y="1115394"/>
+            <a:ext cx="3592946" cy="4256705"/>
           </a:xfrm>
           <a:prstGeom prst="rect">
             <a:avLst/>
@@ -7031,56 +7853,10 @@
           </a:p>
         </p:txBody>
       </p:sp>
-      <p:sp>
-        <p:nvSpPr>
-          <p:cNvPr id="8" name="Rectangle 7">
-            <a:extLst>
-              <a:ext uri="{FF2B5EF4-FFF2-40B4-BE49-F238E27FC236}">
-                <a16:creationId xmlns:a16="http://schemas.microsoft.com/office/drawing/2014/main" id="{A07ECD11-F74C-3D42-8A2D-B2538B33996C}"/>
-              </a:ext>
-            </a:extLst>
-          </p:cNvPr>
-          <p:cNvSpPr/>
-          <p:nvPr/>
-        </p:nvSpPr>
-        <p:spPr>
-          <a:xfrm>
-            <a:off x="7723116" y="3356368"/>
-            <a:ext cx="3888509" cy="2015732"/>
-          </a:xfrm>
-          <a:prstGeom prst="rect">
-            <a:avLst/>
-          </a:prstGeom>
-        </p:spPr>
-        <p:style>
-          <a:lnRef idx="2">
-            <a:schemeClr val="accent1">
-              <a:shade val="50000"/>
-            </a:schemeClr>
-          </a:lnRef>
-          <a:fillRef idx="1">
-            <a:schemeClr val="accent1"/>
-          </a:fillRef>
-          <a:effectRef idx="0">
-            <a:schemeClr val="accent1"/>
-          </a:effectRef>
-          <a:fontRef idx="minor">
-            <a:schemeClr val="lt1"/>
-          </a:fontRef>
-        </p:style>
-        <p:txBody>
-          <a:bodyPr rtlCol="0" anchor="ctr"/>
-          <a:lstStyle/>
-          <a:p>
-            <a:pPr algn="ctr"/>
-            <a:endParaRPr lang="en-US"/>
-          </a:p>
-        </p:txBody>
-      </p:sp>
     </p:spTree>
     <p:extLst>
       <p:ext uri="{BB962C8B-B14F-4D97-AF65-F5344CB8AC3E}">
-        <p14:creationId xmlns:p14="http://schemas.microsoft.com/office/powerpoint/2010/main" val="756621199"/>
+        <p14:creationId xmlns:p14="http://schemas.microsoft.com/office/powerpoint/2010/main" val="3019877112"/>
       </p:ext>
     </p:extLst>
   </p:cSld>
@@ -7123,10 +7899,10 @@
       </p:grpSpPr>
       <p:sp>
         <p:nvSpPr>
-          <p:cNvPr id="11" name="TextBox 10">
-            <a:extLst>
-              <a:ext uri="{FF2B5EF4-FFF2-40B4-BE49-F238E27FC236}">
-                <a16:creationId xmlns:a16="http://schemas.microsoft.com/office/drawing/2014/main" id="{DD074894-0E99-894A-9B1A-0D7C79F5F6D7}"/>
+          <p:cNvPr id="5" name="TextBox 4">
+            <a:extLst>
+              <a:ext uri="{FF2B5EF4-FFF2-40B4-BE49-F238E27FC236}">
+                <a16:creationId xmlns:a16="http://schemas.microsoft.com/office/drawing/2014/main" id="{44B7E921-4FB7-284B-9679-627B0D7126F5}"/>
               </a:ext>
             </a:extLst>
           </p:cNvPr>
@@ -7163,112 +7939,146 @@
       </p:sp>
       <p:sp>
         <p:nvSpPr>
-          <p:cNvPr id="12" name="TextBox 11">
-            <a:extLst>
-              <a:ext uri="{FF2B5EF4-FFF2-40B4-BE49-F238E27FC236}">
-                <a16:creationId xmlns:a16="http://schemas.microsoft.com/office/drawing/2014/main" id="{B0E297CD-5450-7441-A033-60CDC02876B0}"/>
-              </a:ext>
-            </a:extLst>
-          </p:cNvPr>
-          <p:cNvSpPr txBox="1"/>
+          <p:cNvPr id="2" name="Rectangle 1">
+            <a:extLst>
+              <a:ext uri="{FF2B5EF4-FFF2-40B4-BE49-F238E27FC236}">
+                <a16:creationId xmlns:a16="http://schemas.microsoft.com/office/drawing/2014/main" id="{97ABE370-7C49-B54D-BC97-DC52776CBD47}"/>
+              </a:ext>
+            </a:extLst>
+          </p:cNvPr>
+          <p:cNvSpPr/>
           <p:nvPr/>
         </p:nvSpPr>
         <p:spPr>
           <a:xfrm>
-            <a:off x="876822" y="1115395"/>
-            <a:ext cx="10734804" cy="4256705"/>
+            <a:off x="988292" y="1115395"/>
+            <a:ext cx="6503917" cy="4256705"/>
           </a:xfrm>
           <a:prstGeom prst="rect">
             <a:avLst/>
           </a:prstGeom>
-          <a:noFill/>
         </p:spPr>
-        <p:txBody>
-          <a:bodyPr wrap="square" rtlCol="0">
-            <a:noAutofit/>
-          </a:bodyPr>
+        <p:style>
+          <a:lnRef idx="2">
+            <a:schemeClr val="accent1">
+              <a:shade val="50000"/>
+            </a:schemeClr>
+          </a:lnRef>
+          <a:fillRef idx="1">
+            <a:schemeClr val="accent1"/>
+          </a:fillRef>
+          <a:effectRef idx="0">
+            <a:schemeClr val="accent1"/>
+          </a:effectRef>
+          <a:fontRef idx="minor">
+            <a:schemeClr val="lt1"/>
+          </a:fontRef>
+        </p:style>
+        <p:txBody>
+          <a:bodyPr rtlCol="0" anchor="ctr"/>
           <a:lstStyle/>
           <a:p>
-            <a:pPr>
-              <a:lnSpc>
-                <a:spcPct val="125000"/>
-              </a:lnSpc>
-            </a:pPr>
-            <a:r>
-              <a:rPr lang="en-US" dirty="0">
-                <a:latin typeface="Gotham Narrow Book" pitchFamily="2" charset="0"/>
-              </a:rPr>
-              <a:t>Body copy goes here. Last slide in a section. Last slide in a section. Last slide in a section. Last slide in a section. Last slide in a section. Last slide in a section. Last slide in a section. Last slide in a section. Last slide in a section. Last slide in a section. Last slide in a section. Last slide in a section. Last slide in a section. Last slide in a section. Last slide in a section. Last slide in a section. Last slide in a section. Last slide in a section. </a:t>
-            </a:r>
-          </a:p>
-          <a:p>
-            <a:pPr>
-              <a:lnSpc>
-                <a:spcPct val="125000"/>
-              </a:lnSpc>
-            </a:pPr>
-            <a:r>
-              <a:rPr lang="en-US" dirty="0">
-                <a:latin typeface="Gotham Narrow Book" pitchFamily="2" charset="0"/>
-              </a:rPr>
-              <a:t>	</a:t>
-            </a:r>
-          </a:p>
-          <a:p>
-            <a:pPr>
-              <a:lnSpc>
-                <a:spcPct val="125000"/>
-              </a:lnSpc>
-            </a:pPr>
-            <a:r>
-              <a:rPr lang="en-US" dirty="0">
-                <a:latin typeface="Gotham Narrow Book" pitchFamily="2" charset="0"/>
-              </a:rPr>
-              <a:t>Body copy goes here. Last slide in a section. Last slide in a section. Last slide in a section. Last slide in a section. Last slide in a section. Last slide in a section. Last slide in a section. Last slide in a section. Last slide in a section. Last slide in a section. Last slide in a section. Last slide in a section. Last slide in a section. Last slide in a section. Last slide in a section. Last slide in a section. Last slide in a section. Last slide in a section. </a:t>
-            </a:r>
-          </a:p>
-          <a:p>
-            <a:pPr>
-              <a:lnSpc>
-                <a:spcPct val="125000"/>
-              </a:lnSpc>
-            </a:pPr>
-            <a:endParaRPr lang="en-US" dirty="0">
-              <a:latin typeface="Gotham Narrow Book" pitchFamily="2" charset="0"/>
-            </a:endParaRPr>
-          </a:p>
-          <a:p>
-            <a:pPr>
-              <a:lnSpc>
-                <a:spcPct val="125000"/>
-              </a:lnSpc>
-            </a:pPr>
-            <a:r>
-              <a:rPr lang="en-US" dirty="0">
-                <a:latin typeface="Gotham Narrow Book" pitchFamily="2" charset="0"/>
-              </a:rPr>
-              <a:t>	• Last slide in each section</a:t>
-            </a:r>
-          </a:p>
-          <a:p>
-            <a:pPr>
-              <a:lnSpc>
-                <a:spcPct val="125000"/>
-              </a:lnSpc>
-            </a:pPr>
-            <a:r>
-              <a:rPr lang="en-US" dirty="0">
-                <a:latin typeface="Gotham Narrow Book" pitchFamily="2" charset="0"/>
-              </a:rPr>
-              <a:t>	• Last slide in each section</a:t>
-            </a:r>
+            <a:pPr algn="ctr"/>
+            <a:endParaRPr lang="en-US" dirty="0"/>
+          </a:p>
+        </p:txBody>
+      </p:sp>
+      <p:sp>
+        <p:nvSpPr>
+          <p:cNvPr id="7" name="Rectangle 6">
+            <a:extLst>
+              <a:ext uri="{FF2B5EF4-FFF2-40B4-BE49-F238E27FC236}">
+                <a16:creationId xmlns:a16="http://schemas.microsoft.com/office/drawing/2014/main" id="{DFE81E64-7A57-7845-BEE2-C07904F7A7D8}"/>
+              </a:ext>
+            </a:extLst>
+          </p:cNvPr>
+          <p:cNvSpPr/>
+          <p:nvPr/>
+        </p:nvSpPr>
+        <p:spPr>
+          <a:xfrm>
+            <a:off x="7723117" y="1115395"/>
+            <a:ext cx="3888509" cy="2015732"/>
+          </a:xfrm>
+          <a:prstGeom prst="rect">
+            <a:avLst/>
+          </a:prstGeom>
+        </p:spPr>
+        <p:style>
+          <a:lnRef idx="2">
+            <a:schemeClr val="accent1">
+              <a:shade val="50000"/>
+            </a:schemeClr>
+          </a:lnRef>
+          <a:fillRef idx="1">
+            <a:schemeClr val="accent1"/>
+          </a:fillRef>
+          <a:effectRef idx="0">
+            <a:schemeClr val="accent1"/>
+          </a:effectRef>
+          <a:fontRef idx="minor">
+            <a:schemeClr val="lt1"/>
+          </a:fontRef>
+        </p:style>
+        <p:txBody>
+          <a:bodyPr rtlCol="0" anchor="ctr"/>
+          <a:lstStyle/>
+          <a:p>
+            <a:pPr algn="ctr"/>
+            <a:endParaRPr lang="en-US"/>
+          </a:p>
+        </p:txBody>
+      </p:sp>
+      <p:sp>
+        <p:nvSpPr>
+          <p:cNvPr id="8" name="Rectangle 7">
+            <a:extLst>
+              <a:ext uri="{FF2B5EF4-FFF2-40B4-BE49-F238E27FC236}">
+                <a16:creationId xmlns:a16="http://schemas.microsoft.com/office/drawing/2014/main" id="{A07ECD11-F74C-3D42-8A2D-B2538B33996C}"/>
+              </a:ext>
+            </a:extLst>
+          </p:cNvPr>
+          <p:cNvSpPr/>
+          <p:nvPr/>
+        </p:nvSpPr>
+        <p:spPr>
+          <a:xfrm>
+            <a:off x="7723116" y="3356368"/>
+            <a:ext cx="3888509" cy="2015732"/>
+          </a:xfrm>
+          <a:prstGeom prst="rect">
+            <a:avLst/>
+          </a:prstGeom>
+        </p:spPr>
+        <p:style>
+          <a:lnRef idx="2">
+            <a:schemeClr val="accent1">
+              <a:shade val="50000"/>
+            </a:schemeClr>
+          </a:lnRef>
+          <a:fillRef idx="1">
+            <a:schemeClr val="accent1"/>
+          </a:fillRef>
+          <a:effectRef idx="0">
+            <a:schemeClr val="accent1"/>
+          </a:effectRef>
+          <a:fontRef idx="minor">
+            <a:schemeClr val="lt1"/>
+          </a:fontRef>
+        </p:style>
+        <p:txBody>
+          <a:bodyPr rtlCol="0" anchor="ctr"/>
+          <a:lstStyle/>
+          <a:p>
+            <a:pPr algn="ctr"/>
+            <a:endParaRPr lang="en-US"/>
           </a:p>
         </p:txBody>
       </p:sp>
     </p:spTree>
     <p:extLst>
       <p:ext uri="{BB962C8B-B14F-4D97-AF65-F5344CB8AC3E}">
-        <p14:creationId xmlns:p14="http://schemas.microsoft.com/office/powerpoint/2010/main" val="1663129815"/>
+        <p14:creationId xmlns:p14="http://schemas.microsoft.com/office/powerpoint/2010/main" val="756621199"/>
       </p:ext>
     </p:extLst>
   </p:cSld>

--- a/MELISOvsGPU.pptx
+++ b/MELISOvsGPU.pptx
@@ -9,13 +9,14 @@
     <p:sldId id="265" r:id="rId3"/>
     <p:sldId id="257" r:id="rId4"/>
     <p:sldId id="267" r:id="rId5"/>
-    <p:sldId id="268" r:id="rId6"/>
-    <p:sldId id="259" r:id="rId7"/>
-    <p:sldId id="260" r:id="rId8"/>
-    <p:sldId id="262" r:id="rId9"/>
-    <p:sldId id="261" r:id="rId10"/>
-    <p:sldId id="258" r:id="rId11"/>
-    <p:sldId id="263" r:id="rId12"/>
+    <p:sldId id="269" r:id="rId6"/>
+    <p:sldId id="268" r:id="rId7"/>
+    <p:sldId id="259" r:id="rId8"/>
+    <p:sldId id="260" r:id="rId9"/>
+    <p:sldId id="262" r:id="rId10"/>
+    <p:sldId id="261" r:id="rId11"/>
+    <p:sldId id="258" r:id="rId12"/>
+    <p:sldId id="263" r:id="rId13"/>
   </p:sldIdLst>
   <p:sldSz cx="12192000" cy="6858000"/>
   <p:notesSz cx="6858000" cy="9144000"/>
@@ -136,7 +137,7 @@
 <file path=ppt/revisionInfo.xml><?xml version="1.0" encoding="utf-8"?>
 <p1510:revInfo xmlns:a="http://schemas.openxmlformats.org/drawingml/2006/main" xmlns:r="http://schemas.openxmlformats.org/officeDocument/2006/relationships" xmlns:p1510="http://schemas.microsoft.com/office/powerpoint/2015/10/main">
   <p1510:revLst>
-    <p1510:client id="{6486FCFF-8752-4976-86E7-4BDA6065866B}" v="37" dt="2025-04-03T23:44:35.071"/>
+    <p1510:client id="{6486FCFF-8752-4976-86E7-4BDA6065866B}" v="51" dt="2025-04-04T00:12:45.750"/>
   </p1510:revLst>
 </p1510:revInfo>
 </file>
@@ -146,7 +147,7 @@
   <pc:docChgLst>
     <pc:chgData name="Quang-Nguyen Vo-Huynh" userId="6a1b2bcfbbb34c0c" providerId="LiveId" clId="{6486FCFF-8752-4976-86E7-4BDA6065866B}"/>
     <pc:docChg chg="undo redo custSel addSld modSld">
-      <pc:chgData name="Quang-Nguyen Vo-Huynh" userId="6a1b2bcfbbb34c0c" providerId="LiveId" clId="{6486FCFF-8752-4976-86E7-4BDA6065866B}" dt="2025-04-03T23:44:48.056" v="1185" actId="14100"/>
+      <pc:chgData name="Quang-Nguyen Vo-Huynh" userId="6a1b2bcfbbb34c0c" providerId="LiveId" clId="{6486FCFF-8752-4976-86E7-4BDA6065866B}" dt="2025-04-04T00:12:59.976" v="1394" actId="20577"/>
       <pc:docMkLst>
         <pc:docMk/>
       </pc:docMkLst>
@@ -327,7 +328,7 @@
         </pc:spChg>
       </pc:sldChg>
       <pc:sldChg chg="addSp delSp modSp add mod">
-        <pc:chgData name="Quang-Nguyen Vo-Huynh" userId="6a1b2bcfbbb34c0c" providerId="LiveId" clId="{6486FCFF-8752-4976-86E7-4BDA6065866B}" dt="2025-04-03T23:38:27.971" v="1162" actId="14734"/>
+        <pc:chgData name="Quang-Nguyen Vo-Huynh" userId="6a1b2bcfbbb34c0c" providerId="LiveId" clId="{6486FCFF-8752-4976-86E7-4BDA6065866B}" dt="2025-04-04T00:05:24.605" v="1213" actId="20577"/>
         <pc:sldMkLst>
           <pc:docMk/>
           <pc:sldMk cId="602613557" sldId="267"/>
@@ -389,7 +390,7 @@
           </ac:spMkLst>
         </pc:spChg>
         <pc:graphicFrameChg chg="add mod modGraphic">
-          <ac:chgData name="Quang-Nguyen Vo-Huynh" userId="6a1b2bcfbbb34c0c" providerId="LiveId" clId="{6486FCFF-8752-4976-86E7-4BDA6065866B}" dt="2025-04-03T23:38:27.971" v="1162" actId="14734"/>
+          <ac:chgData name="Quang-Nguyen Vo-Huynh" userId="6a1b2bcfbbb34c0c" providerId="LiveId" clId="{6486FCFF-8752-4976-86E7-4BDA6065866B}" dt="2025-04-04T00:05:24.605" v="1213" actId="20577"/>
           <ac:graphicFrameMkLst>
             <pc:docMk/>
             <pc:sldMk cId="602613557" sldId="267"/>
@@ -422,7 +423,7 @@
         </pc:cxnChg>
       </pc:sldChg>
       <pc:sldChg chg="addSp delSp modSp add mod">
-        <pc:chgData name="Quang-Nguyen Vo-Huynh" userId="6a1b2bcfbbb34c0c" providerId="LiveId" clId="{6486FCFF-8752-4976-86E7-4BDA6065866B}" dt="2025-04-03T23:44:48.056" v="1185" actId="14100"/>
+        <pc:chgData name="Quang-Nguyen Vo-Huynh" userId="6a1b2bcfbbb34c0c" providerId="LiveId" clId="{6486FCFF-8752-4976-86E7-4BDA6065866B}" dt="2025-04-04T00:05:11.427" v="1212" actId="1076"/>
         <pc:sldMkLst>
           <pc:docMk/>
           <pc:sldMk cId="3020415987" sldId="268"/>
@@ -441,6 +442,14 @@
             <pc:docMk/>
             <pc:sldMk cId="3020415987" sldId="268"/>
             <ac:spMk id="7" creationId="{AB94BE8C-777C-A307-9AF5-D49FD09495F6}"/>
+          </ac:spMkLst>
+        </pc:spChg>
+        <pc:spChg chg="add mod">
+          <ac:chgData name="Quang-Nguyen Vo-Huynh" userId="6a1b2bcfbbb34c0c" providerId="LiveId" clId="{6486FCFF-8752-4976-86E7-4BDA6065866B}" dt="2025-04-04T00:00:48.929" v="1206" actId="14100"/>
+          <ac:spMkLst>
+            <pc:docMk/>
+            <pc:sldMk cId="3020415987" sldId="268"/>
+            <ac:spMk id="8" creationId="{5B378BF3-CBB3-3FB3-9F05-1BD5EDFD45E0}"/>
           </ac:spMkLst>
         </pc:spChg>
         <pc:spChg chg="mod">
@@ -476,11 +485,35 @@
           </ac:graphicFrameMkLst>
         </pc:graphicFrameChg>
         <pc:picChg chg="add del mod">
+          <ac:chgData name="Quang-Nguyen Vo-Huynh" userId="6a1b2bcfbbb34c0c" providerId="LiveId" clId="{6486FCFF-8752-4976-86E7-4BDA6065866B}" dt="2025-04-03T23:58:20.060" v="1197" actId="478"/>
+          <ac:picMkLst>
+            <pc:docMk/>
+            <pc:sldMk cId="3020415987" sldId="268"/>
+            <ac:picMk id="2" creationId="{91EE67DC-2AF2-AE58-E056-D6FAC6AE5C07}"/>
+          </ac:picMkLst>
+        </pc:picChg>
+        <pc:picChg chg="add mod">
+          <ac:chgData name="Quang-Nguyen Vo-Huynh" userId="6a1b2bcfbbb34c0c" providerId="LiveId" clId="{6486FCFF-8752-4976-86E7-4BDA6065866B}" dt="2025-04-04T00:00:24.095" v="1201" actId="1076"/>
+          <ac:picMkLst>
+            <pc:docMk/>
+            <pc:sldMk cId="3020415987" sldId="268"/>
+            <ac:picMk id="3" creationId="{1C132775-0121-69A6-4129-1D9BD186437B}"/>
+          </ac:picMkLst>
+        </pc:picChg>
+        <pc:picChg chg="add del mod">
           <ac:chgData name="Quang-Nguyen Vo-Huynh" userId="6a1b2bcfbbb34c0c" providerId="LiveId" clId="{6486FCFF-8752-4976-86E7-4BDA6065866B}" dt="2025-04-03T23:39:40.821" v="1174" actId="478"/>
           <ac:picMkLst>
             <pc:docMk/>
             <pc:sldMk cId="3020415987" sldId="268"/>
             <ac:picMk id="9" creationId="{7D8BFFDD-A0A0-518E-6FD9-6097521502F0}"/>
+          </ac:picMkLst>
+        </pc:picChg>
+        <pc:picChg chg="add mod">
+          <ac:chgData name="Quang-Nguyen Vo-Huynh" userId="6a1b2bcfbbb34c0c" providerId="LiveId" clId="{6486FCFF-8752-4976-86E7-4BDA6065866B}" dt="2025-04-04T00:04:59.689" v="1210" actId="1076"/>
+          <ac:picMkLst>
+            <pc:docMk/>
+            <pc:sldMk cId="3020415987" sldId="268"/>
+            <ac:picMk id="9" creationId="{99747D26-248E-CD85-DEBC-A15C12059DE5}"/>
           </ac:picMkLst>
         </pc:picChg>
         <pc:picChg chg="add mod">
@@ -508,6 +541,14 @@
           </ac:picMkLst>
         </pc:picChg>
         <pc:cxnChg chg="add mod">
+          <ac:chgData name="Quang-Nguyen Vo-Huynh" userId="6a1b2bcfbbb34c0c" providerId="LiveId" clId="{6486FCFF-8752-4976-86E7-4BDA6065866B}" dt="2025-04-04T00:05:11.427" v="1212" actId="1076"/>
+          <ac:cxnSpMkLst>
+            <pc:docMk/>
+            <pc:sldMk cId="3020415987" sldId="268"/>
+            <ac:cxnSpMk id="12" creationId="{0B25E909-E35D-2DB7-097B-F0E8F5849B77}"/>
+          </ac:cxnSpMkLst>
+        </pc:cxnChg>
+        <pc:cxnChg chg="add mod">
           <ac:chgData name="Quang-Nguyen Vo-Huynh" userId="6a1b2bcfbbb34c0c" providerId="LiveId" clId="{6486FCFF-8752-4976-86E7-4BDA6065866B}" dt="2025-04-03T23:44:48.056" v="1185" actId="14100"/>
           <ac:cxnSpMkLst>
             <pc:docMk/>
@@ -515,6 +556,37 @@
             <ac:cxnSpMk id="14" creationId="{3446585D-C4EE-0497-C15B-8677B711D0C1}"/>
           </ac:cxnSpMkLst>
         </pc:cxnChg>
+      </pc:sldChg>
+      <pc:sldChg chg="modSp add mod">
+        <pc:chgData name="Quang-Nguyen Vo-Huynh" userId="6a1b2bcfbbb34c0c" providerId="LiveId" clId="{6486FCFF-8752-4976-86E7-4BDA6065866B}" dt="2025-04-04T00:12:59.976" v="1394" actId="20577"/>
+        <pc:sldMkLst>
+          <pc:docMk/>
+          <pc:sldMk cId="151919946" sldId="269"/>
+        </pc:sldMkLst>
+        <pc:spChg chg="mod">
+          <ac:chgData name="Quang-Nguyen Vo-Huynh" userId="6a1b2bcfbbb34c0c" providerId="LiveId" clId="{6486FCFF-8752-4976-86E7-4BDA6065866B}" dt="2025-04-04T00:06:49.563" v="1224" actId="20577"/>
+          <ac:spMkLst>
+            <pc:docMk/>
+            <pc:sldMk cId="151919946" sldId="269"/>
+            <ac:spMk id="11" creationId="{7022E541-1F1E-8E1E-8F08-CE80A692C52A}"/>
+          </ac:spMkLst>
+        </pc:spChg>
+        <pc:spChg chg="mod">
+          <ac:chgData name="Quang-Nguyen Vo-Huynh" userId="6a1b2bcfbbb34c0c" providerId="LiveId" clId="{6486FCFF-8752-4976-86E7-4BDA6065866B}" dt="2025-04-04T00:07:20.773" v="1288" actId="20577"/>
+          <ac:spMkLst>
+            <pc:docMk/>
+            <pc:sldMk cId="151919946" sldId="269"/>
+            <ac:spMk id="12" creationId="{2E5AE24E-C91B-0AC3-6D2E-BA8F3D0C33CC}"/>
+          </ac:spMkLst>
+        </pc:spChg>
+        <pc:graphicFrameChg chg="mod modGraphic">
+          <ac:chgData name="Quang-Nguyen Vo-Huynh" userId="6a1b2bcfbbb34c0c" providerId="LiveId" clId="{6486FCFF-8752-4976-86E7-4BDA6065866B}" dt="2025-04-04T00:12:59.976" v="1394" actId="20577"/>
+          <ac:graphicFrameMkLst>
+            <pc:docMk/>
+            <pc:sldMk cId="151919946" sldId="269"/>
+            <ac:graphicFrameMk id="2" creationId="{B1F413A7-2DA7-24BB-E110-44F12CA37C1B}"/>
+          </ac:graphicFrameMkLst>
+        </pc:graphicFrameChg>
       </pc:sldChg>
     </pc:docChg>
   </pc:docChgLst>
@@ -4061,6 +4133,228 @@
       </p:grpSpPr>
       <p:sp>
         <p:nvSpPr>
+          <p:cNvPr id="5" name="TextBox 4">
+            <a:extLst>
+              <a:ext uri="{FF2B5EF4-FFF2-40B4-BE49-F238E27FC236}">
+                <a16:creationId xmlns:a16="http://schemas.microsoft.com/office/drawing/2014/main" id="{44B7E921-4FB7-284B-9679-627B0D7126F5}"/>
+              </a:ext>
+            </a:extLst>
+          </p:cNvPr>
+          <p:cNvSpPr txBox="1"/>
+          <p:nvPr/>
+        </p:nvSpPr>
+        <p:spPr>
+          <a:xfrm>
+            <a:off x="571500" y="538619"/>
+            <a:ext cx="11040127" cy="461665"/>
+          </a:xfrm>
+          <a:prstGeom prst="rect">
+            <a:avLst/>
+          </a:prstGeom>
+          <a:noFill/>
+        </p:spPr>
+        <p:txBody>
+          <a:bodyPr wrap="square" rtlCol="0">
+            <a:spAutoFit/>
+          </a:bodyPr>
+          <a:lstStyle/>
+          <a:p>
+            <a:r>
+              <a:rPr lang="en-US" sz="2400" b="1" dirty="0">
+                <a:solidFill>
+                  <a:srgbClr val="63666A"/>
+                </a:solidFill>
+                <a:latin typeface="Gotham Narrow Bold" pitchFamily="2" charset="0"/>
+              </a:rPr>
+              <a:t>SECTION SUBHEAD</a:t>
+            </a:r>
+          </a:p>
+        </p:txBody>
+      </p:sp>
+      <p:sp>
+        <p:nvSpPr>
+          <p:cNvPr id="2" name="Rectangle 1">
+            <a:extLst>
+              <a:ext uri="{FF2B5EF4-FFF2-40B4-BE49-F238E27FC236}">
+                <a16:creationId xmlns:a16="http://schemas.microsoft.com/office/drawing/2014/main" id="{97ABE370-7C49-B54D-BC97-DC52776CBD47}"/>
+              </a:ext>
+            </a:extLst>
+          </p:cNvPr>
+          <p:cNvSpPr/>
+          <p:nvPr/>
+        </p:nvSpPr>
+        <p:spPr>
+          <a:xfrm>
+            <a:off x="988292" y="1115395"/>
+            <a:ext cx="6503917" cy="4256705"/>
+          </a:xfrm>
+          <a:prstGeom prst="rect">
+            <a:avLst/>
+          </a:prstGeom>
+        </p:spPr>
+        <p:style>
+          <a:lnRef idx="2">
+            <a:schemeClr val="accent1">
+              <a:shade val="50000"/>
+            </a:schemeClr>
+          </a:lnRef>
+          <a:fillRef idx="1">
+            <a:schemeClr val="accent1"/>
+          </a:fillRef>
+          <a:effectRef idx="0">
+            <a:schemeClr val="accent1"/>
+          </a:effectRef>
+          <a:fontRef idx="minor">
+            <a:schemeClr val="lt1"/>
+          </a:fontRef>
+        </p:style>
+        <p:txBody>
+          <a:bodyPr rtlCol="0" anchor="ctr"/>
+          <a:lstStyle/>
+          <a:p>
+            <a:pPr algn="ctr"/>
+            <a:endParaRPr lang="en-US" dirty="0"/>
+          </a:p>
+        </p:txBody>
+      </p:sp>
+      <p:sp>
+        <p:nvSpPr>
+          <p:cNvPr id="7" name="Rectangle 6">
+            <a:extLst>
+              <a:ext uri="{FF2B5EF4-FFF2-40B4-BE49-F238E27FC236}">
+                <a16:creationId xmlns:a16="http://schemas.microsoft.com/office/drawing/2014/main" id="{DFE81E64-7A57-7845-BEE2-C07904F7A7D8}"/>
+              </a:ext>
+            </a:extLst>
+          </p:cNvPr>
+          <p:cNvSpPr/>
+          <p:nvPr/>
+        </p:nvSpPr>
+        <p:spPr>
+          <a:xfrm>
+            <a:off x="7723117" y="1115395"/>
+            <a:ext cx="3888509" cy="2015732"/>
+          </a:xfrm>
+          <a:prstGeom prst="rect">
+            <a:avLst/>
+          </a:prstGeom>
+        </p:spPr>
+        <p:style>
+          <a:lnRef idx="2">
+            <a:schemeClr val="accent1">
+              <a:shade val="50000"/>
+            </a:schemeClr>
+          </a:lnRef>
+          <a:fillRef idx="1">
+            <a:schemeClr val="accent1"/>
+          </a:fillRef>
+          <a:effectRef idx="0">
+            <a:schemeClr val="accent1"/>
+          </a:effectRef>
+          <a:fontRef idx="minor">
+            <a:schemeClr val="lt1"/>
+          </a:fontRef>
+        </p:style>
+        <p:txBody>
+          <a:bodyPr rtlCol="0" anchor="ctr"/>
+          <a:lstStyle/>
+          <a:p>
+            <a:pPr algn="ctr"/>
+            <a:endParaRPr lang="en-US"/>
+          </a:p>
+        </p:txBody>
+      </p:sp>
+      <p:sp>
+        <p:nvSpPr>
+          <p:cNvPr id="8" name="Rectangle 7">
+            <a:extLst>
+              <a:ext uri="{FF2B5EF4-FFF2-40B4-BE49-F238E27FC236}">
+                <a16:creationId xmlns:a16="http://schemas.microsoft.com/office/drawing/2014/main" id="{A07ECD11-F74C-3D42-8A2D-B2538B33996C}"/>
+              </a:ext>
+            </a:extLst>
+          </p:cNvPr>
+          <p:cNvSpPr/>
+          <p:nvPr/>
+        </p:nvSpPr>
+        <p:spPr>
+          <a:xfrm>
+            <a:off x="7723116" y="3356368"/>
+            <a:ext cx="3888509" cy="2015732"/>
+          </a:xfrm>
+          <a:prstGeom prst="rect">
+            <a:avLst/>
+          </a:prstGeom>
+        </p:spPr>
+        <p:style>
+          <a:lnRef idx="2">
+            <a:schemeClr val="accent1">
+              <a:shade val="50000"/>
+            </a:schemeClr>
+          </a:lnRef>
+          <a:fillRef idx="1">
+            <a:schemeClr val="accent1"/>
+          </a:fillRef>
+          <a:effectRef idx="0">
+            <a:schemeClr val="accent1"/>
+          </a:effectRef>
+          <a:fontRef idx="minor">
+            <a:schemeClr val="lt1"/>
+          </a:fontRef>
+        </p:style>
+        <p:txBody>
+          <a:bodyPr rtlCol="0" anchor="ctr"/>
+          <a:lstStyle/>
+          <a:p>
+            <a:pPr algn="ctr"/>
+            <a:endParaRPr lang="en-US"/>
+          </a:p>
+        </p:txBody>
+      </p:sp>
+    </p:spTree>
+    <p:extLst>
+      <p:ext uri="{BB962C8B-B14F-4D97-AF65-F5344CB8AC3E}">
+        <p14:creationId xmlns:p14="http://schemas.microsoft.com/office/powerpoint/2010/main" val="756621199"/>
+      </p:ext>
+    </p:extLst>
+  </p:cSld>
+  <p:clrMapOvr>
+    <a:masterClrMapping/>
+  </p:clrMapOvr>
+</p:sld>
+</file>
+
+<file path=ppt/slides/slide11.xml><?xml version="1.0" encoding="utf-8"?>
+<p:sld xmlns:a="http://schemas.openxmlformats.org/drawingml/2006/main" xmlns:r="http://schemas.openxmlformats.org/officeDocument/2006/relationships" xmlns:p="http://schemas.openxmlformats.org/presentationml/2006/main" show="0">
+  <p:cSld>
+    <p:bg>
+      <p:bgPr>
+        <a:blipFill dpi="0" rotWithShape="1">
+          <a:blip r:embed="rId2">
+            <a:lum/>
+          </a:blip>
+          <a:srcRect/>
+          <a:stretch>
+            <a:fillRect/>
+          </a:stretch>
+        </a:blipFill>
+        <a:effectLst/>
+      </p:bgPr>
+    </p:bg>
+    <p:spTree>
+      <p:nvGrpSpPr>
+        <p:cNvPr id="1" name=""/>
+        <p:cNvGrpSpPr/>
+        <p:nvPr/>
+      </p:nvGrpSpPr>
+      <p:grpSpPr>
+        <a:xfrm>
+          <a:off x="0" y="0"/>
+          <a:ext cx="0" cy="0"/>
+          <a:chOff x="0" y="0"/>
+          <a:chExt cx="0" cy="0"/>
+        </a:xfrm>
+      </p:grpSpPr>
+      <p:sp>
+        <p:nvSpPr>
           <p:cNvPr id="11" name="TextBox 10">
             <a:extLst>
               <a:ext uri="{FF2B5EF4-FFF2-40B4-BE49-F238E27FC236}">
@@ -4216,7 +4510,7 @@
 </p:sld>
 </file>
 
-<file path=ppt/slides/slide11.xml><?xml version="1.0" encoding="utf-8"?>
+<file path=ppt/slides/slide12.xml><?xml version="1.0" encoding="utf-8"?>
 <p:sld xmlns:a="http://schemas.openxmlformats.org/drawingml/2006/main" xmlns:r="http://schemas.openxmlformats.org/officeDocument/2006/relationships" xmlns:p="http://schemas.openxmlformats.org/presentationml/2006/main" show="0">
   <p:cSld>
     <p:bg>
@@ -5615,7 +5909,7 @@
           <p:nvPr>
             <p:extLst>
               <p:ext uri="{D42A27DB-BD31-4B8C-83A1-F6EECF244321}">
-                <p14:modId xmlns:p14="http://schemas.microsoft.com/office/powerpoint/2010/main" val="2981715266"/>
+                <p14:modId xmlns:p14="http://schemas.microsoft.com/office/powerpoint/2010/main" val="2342471373"/>
               </p:ext>
             </p:extLst>
           </p:nvPr>
@@ -5866,9 +6160,13 @@
                     <a:bodyPr/>
                     <a:lstStyle/>
                     <a:p>
-                      <a:endParaRPr lang="en-US" dirty="0">
-                        <a:latin typeface="Gotham Narrow Book"/>
-                      </a:endParaRPr>
+                      <a:pPr algn="ctr"/>
+                      <a:r>
+                        <a:rPr lang="en-US" dirty="0">
+                          <a:latin typeface="Gotham Narrow Book"/>
+                        </a:rPr>
+                        <a:t>0.26003</a:t>
+                      </a:r>
                     </a:p>
                   </a:txBody>
                   <a:tcPr/>
@@ -5930,6 +6228,618 @@
         <p:cNvPr id="1" name="">
           <a:extLst>
             <a:ext uri="{FF2B5EF4-FFF2-40B4-BE49-F238E27FC236}">
+              <a16:creationId xmlns:a16="http://schemas.microsoft.com/office/drawing/2014/main" id="{FF216D39-8AD6-94FE-8519-CE65B83E53DC}"/>
+            </a:ext>
+          </a:extLst>
+        </p:cNvPr>
+        <p:cNvGrpSpPr/>
+        <p:nvPr/>
+      </p:nvGrpSpPr>
+      <p:grpSpPr>
+        <a:xfrm>
+          <a:off x="0" y="0"/>
+          <a:ext cx="0" cy="0"/>
+          <a:chOff x="0" y="0"/>
+          <a:chExt cx="0" cy="0"/>
+        </a:xfrm>
+      </p:grpSpPr>
+      <p:sp>
+        <p:nvSpPr>
+          <p:cNvPr id="10" name="TextBox 9">
+            <a:extLst>
+              <a:ext uri="{FF2B5EF4-FFF2-40B4-BE49-F238E27FC236}">
+                <a16:creationId xmlns:a16="http://schemas.microsoft.com/office/drawing/2014/main" id="{A243B2C4-E005-331F-A864-3260B8EC4CB6}"/>
+              </a:ext>
+            </a:extLst>
+          </p:cNvPr>
+          <p:cNvSpPr txBox="1"/>
+          <p:nvPr/>
+        </p:nvSpPr>
+        <p:spPr>
+          <a:xfrm>
+            <a:off x="567836" y="0"/>
+            <a:ext cx="11040127" cy="830997"/>
+          </a:xfrm>
+          <a:prstGeom prst="rect">
+            <a:avLst/>
+          </a:prstGeom>
+          <a:noFill/>
+        </p:spPr>
+        <p:txBody>
+          <a:bodyPr wrap="square" rtlCol="0">
+            <a:spAutoFit/>
+          </a:bodyPr>
+          <a:lstStyle/>
+          <a:p>
+            <a:r>
+              <a:rPr lang="en-US" sz="4800" dirty="0">
+                <a:solidFill>
+                  <a:srgbClr val="FB6400"/>
+                </a:solidFill>
+                <a:latin typeface="FjallaOne" panose="02000506040000020004" pitchFamily="2" charset="77"/>
+              </a:rPr>
+              <a:t>Power Iteration</a:t>
+            </a:r>
+          </a:p>
+        </p:txBody>
+      </p:sp>
+      <p:sp>
+        <p:nvSpPr>
+          <p:cNvPr id="11" name="TextBox 10">
+            <a:extLst>
+              <a:ext uri="{FF2B5EF4-FFF2-40B4-BE49-F238E27FC236}">
+                <a16:creationId xmlns:a16="http://schemas.microsoft.com/office/drawing/2014/main" id="{7022E541-1F1E-8E1E-8F08-CE80A692C52A}"/>
+              </a:ext>
+            </a:extLst>
+          </p:cNvPr>
+          <p:cNvSpPr txBox="1"/>
+          <p:nvPr/>
+        </p:nvSpPr>
+        <p:spPr>
+          <a:xfrm>
+            <a:off x="584037" y="658618"/>
+            <a:ext cx="11040127" cy="461665"/>
+          </a:xfrm>
+          <a:prstGeom prst="rect">
+            <a:avLst/>
+          </a:prstGeom>
+          <a:noFill/>
+        </p:spPr>
+        <p:txBody>
+          <a:bodyPr wrap="square" rtlCol="0">
+            <a:spAutoFit/>
+          </a:bodyPr>
+          <a:lstStyle/>
+          <a:p>
+            <a:r>
+              <a:rPr lang="en-US" sz="2400" b="1" dirty="0">
+                <a:solidFill>
+                  <a:srgbClr val="63666A"/>
+                </a:solidFill>
+                <a:latin typeface="Gotham Narrow Bold" pitchFamily="2" charset="0"/>
+              </a:rPr>
+              <a:t>Methods &amp; Results (cont.)</a:t>
+            </a:r>
+          </a:p>
+        </p:txBody>
+      </p:sp>
+      <p:sp>
+        <p:nvSpPr>
+          <p:cNvPr id="12" name="TextBox 11">
+            <a:extLst>
+              <a:ext uri="{FF2B5EF4-FFF2-40B4-BE49-F238E27FC236}">
+                <a16:creationId xmlns:a16="http://schemas.microsoft.com/office/drawing/2014/main" id="{2E5AE24E-C91B-0AC3-6D2E-BA8F3D0C33CC}"/>
+              </a:ext>
+            </a:extLst>
+          </p:cNvPr>
+          <p:cNvSpPr txBox="1"/>
+          <p:nvPr/>
+        </p:nvSpPr>
+        <p:spPr>
+          <a:xfrm>
+            <a:off x="567836" y="1120283"/>
+            <a:ext cx="11027600" cy="3515581"/>
+          </a:xfrm>
+          <a:prstGeom prst="rect">
+            <a:avLst/>
+          </a:prstGeom>
+          <a:noFill/>
+        </p:spPr>
+        <p:txBody>
+          <a:bodyPr wrap="square" rtlCol="0">
+            <a:noAutofit/>
+          </a:bodyPr>
+          <a:lstStyle/>
+          <a:p>
+            <a:pPr marL="285750" indent="-285750">
+              <a:lnSpc>
+                <a:spcPct val="125000"/>
+              </a:lnSpc>
+              <a:buFont typeface="Wingdings" pitchFamily="2" charset="2"/>
+              <a:buChar char="§"/>
+            </a:pPr>
+            <a:r>
+              <a:rPr lang="en-US" dirty="0">
+                <a:latin typeface="Gotham Narrow Book" pitchFamily="2" charset="0"/>
+              </a:rPr>
+              <a:t>Breakdown results of MELISO-simulated devices:</a:t>
+            </a:r>
+          </a:p>
+          <a:p>
+            <a:pPr>
+              <a:lnSpc>
+                <a:spcPct val="125000"/>
+              </a:lnSpc>
+            </a:pPr>
+            <a:endParaRPr lang="en-US" dirty="0">
+              <a:latin typeface="Gotham Narrow Book" pitchFamily="2" charset="0"/>
+            </a:endParaRPr>
+          </a:p>
+        </p:txBody>
+      </p:sp>
+      <p:graphicFrame>
+        <p:nvGraphicFramePr>
+          <p:cNvPr id="2" name="Table 1">
+            <a:extLst>
+              <a:ext uri="{FF2B5EF4-FFF2-40B4-BE49-F238E27FC236}">
+                <a16:creationId xmlns:a16="http://schemas.microsoft.com/office/drawing/2014/main" id="{B1F413A7-2DA7-24BB-E110-44F12CA37C1B}"/>
+              </a:ext>
+            </a:extLst>
+          </p:cNvPr>
+          <p:cNvGraphicFramePr>
+            <a:graphicFrameLocks noGrp="1"/>
+          </p:cNvGraphicFramePr>
+          <p:nvPr>
+            <p:extLst>
+              <p:ext uri="{D42A27DB-BD31-4B8C-83A1-F6EECF244321}">
+                <p14:modId xmlns:p14="http://schemas.microsoft.com/office/powerpoint/2010/main" val="4049480215"/>
+              </p:ext>
+            </p:extLst>
+          </p:nvPr>
+        </p:nvGraphicFramePr>
+        <p:xfrm>
+          <a:off x="596564" y="1597913"/>
+          <a:ext cx="10179012" cy="1483360"/>
+        </p:xfrm>
+        <a:graphic>
+          <a:graphicData uri="http://schemas.openxmlformats.org/drawingml/2006/table">
+            <a:tbl>
+              <a:tblPr firstRow="1" bandRow="1">
+                <a:tableStyleId>{5C22544A-7EE6-4342-B048-85BDC9FD1C3A}</a:tableStyleId>
+              </a:tblPr>
+              <a:tblGrid>
+                <a:gridCol w="2818067">
+                  <a:extLst>
+                    <a:ext uri="{9D8B030D-6E8A-4147-A177-3AD203B41FA5}">
+                      <a16:colId xmlns:a16="http://schemas.microsoft.com/office/drawing/2014/main" val="3715258470"/>
+                    </a:ext>
+                  </a:extLst>
+                </a:gridCol>
+                <a:gridCol w="1797368">
+                  <a:extLst>
+                    <a:ext uri="{9D8B030D-6E8A-4147-A177-3AD203B41FA5}">
+                      <a16:colId xmlns:a16="http://schemas.microsoft.com/office/drawing/2014/main" val="2837321965"/>
+                    </a:ext>
+                  </a:extLst>
+                </a:gridCol>
+                <a:gridCol w="1698942">
+                  <a:extLst>
+                    <a:ext uri="{9D8B030D-6E8A-4147-A177-3AD203B41FA5}">
+                      <a16:colId xmlns:a16="http://schemas.microsoft.com/office/drawing/2014/main" val="113310370"/>
+                    </a:ext>
+                  </a:extLst>
+                </a:gridCol>
+                <a:gridCol w="1846580">
+                  <a:extLst>
+                    <a:ext uri="{9D8B030D-6E8A-4147-A177-3AD203B41FA5}">
+                      <a16:colId xmlns:a16="http://schemas.microsoft.com/office/drawing/2014/main" val="948298390"/>
+                    </a:ext>
+                  </a:extLst>
+                </a:gridCol>
+                <a:gridCol w="2018055">
+                  <a:extLst>
+                    <a:ext uri="{9D8B030D-6E8A-4147-A177-3AD203B41FA5}">
+                      <a16:colId xmlns:a16="http://schemas.microsoft.com/office/drawing/2014/main" val="1072541624"/>
+                    </a:ext>
+                  </a:extLst>
+                </a:gridCol>
+              </a:tblGrid>
+              <a:tr h="370840">
+                <a:tc>
+                  <a:txBody>
+                    <a:bodyPr/>
+                    <a:lstStyle/>
+                    <a:p>
+                      <a:pPr algn="ctr"/>
+                      <a:r>
+                        <a:rPr lang="en-US" dirty="0">
+                          <a:latin typeface="Gotham Narrow Book"/>
+                        </a:rPr>
+                        <a:t>Matrix</a:t>
+                      </a:r>
+                    </a:p>
+                  </a:txBody>
+                  <a:tcPr/>
+                </a:tc>
+                <a:tc>
+                  <a:txBody>
+                    <a:bodyPr/>
+                    <a:lstStyle/>
+                    <a:p>
+                      <a:pPr algn="ctr"/>
+                      <a:r>
+                        <a:rPr lang="en-US" dirty="0">
+                          <a:latin typeface="Gotham Narrow Book"/>
+                        </a:rPr>
+                        <a:t>Read Latency</a:t>
+                      </a:r>
+                    </a:p>
+                  </a:txBody>
+                  <a:tcPr/>
+                </a:tc>
+                <a:tc>
+                  <a:txBody>
+                    <a:bodyPr/>
+                    <a:lstStyle/>
+                    <a:p>
+                      <a:pPr algn="ctr"/>
+                      <a:r>
+                        <a:rPr lang="en-US" dirty="0">
+                          <a:latin typeface="Gotham Narrow Book"/>
+                        </a:rPr>
+                        <a:t>Read Energy</a:t>
+                      </a:r>
+                    </a:p>
+                  </a:txBody>
+                  <a:tcPr/>
+                </a:tc>
+                <a:tc>
+                  <a:txBody>
+                    <a:bodyPr/>
+                    <a:lstStyle/>
+                    <a:p>
+                      <a:pPr algn="ctr"/>
+                      <a:r>
+                        <a:rPr lang="en-US" dirty="0">
+                          <a:latin typeface="Gotham Narrow Book"/>
+                        </a:rPr>
+                        <a:t>Write Latency</a:t>
+                      </a:r>
+                    </a:p>
+                  </a:txBody>
+                  <a:tcPr/>
+                </a:tc>
+                <a:tc>
+                  <a:txBody>
+                    <a:bodyPr/>
+                    <a:lstStyle/>
+                    <a:p>
+                      <a:pPr algn="ctr"/>
+                      <a:r>
+                        <a:rPr lang="en-US" dirty="0">
+                          <a:latin typeface="Gotham Narrow Book"/>
+                        </a:rPr>
+                        <a:t>Write Energy</a:t>
+                      </a:r>
+                    </a:p>
+                  </a:txBody>
+                  <a:tcPr/>
+                </a:tc>
+                <a:extLst>
+                  <a:ext uri="{0D108BD9-81ED-4DB2-BD59-A6C34878D82A}">
+                    <a16:rowId xmlns:a16="http://schemas.microsoft.com/office/drawing/2014/main" val="3939403022"/>
+                  </a:ext>
+                </a:extLst>
+              </a:tr>
+              <a:tr h="370840">
+                <a:tc>
+                  <a:txBody>
+                    <a:bodyPr/>
+                    <a:lstStyle/>
+                    <a:p>
+                      <a:r>
+                        <a:rPr lang="en-US" dirty="0">
+                          <a:latin typeface="Gotham Narrow Book"/>
+                        </a:rPr>
+                        <a:t>Symmetric tridiagonal [1]</a:t>
+                      </a:r>
+                    </a:p>
+                  </a:txBody>
+                  <a:tcPr/>
+                </a:tc>
+                <a:tc>
+                  <a:txBody>
+                    <a:bodyPr/>
+                    <a:lstStyle/>
+                    <a:p>
+                      <a:pPr algn="ctr" fontAlgn="b"/>
+                      <a:r>
+                        <a:rPr lang="en-US" dirty="0">
+                          <a:latin typeface="Gotham Narrow Book"/>
+                        </a:rPr>
+                        <a:t>138.0613</a:t>
+                      </a:r>
+                    </a:p>
+                  </a:txBody>
+                  <a:tcPr marL="9525" marR="9525" marT="9525" marB="0" anchor="b"/>
+                </a:tc>
+                <a:tc>
+                  <a:txBody>
+                    <a:bodyPr/>
+                    <a:lstStyle/>
+                    <a:p>
+                      <a:pPr algn="ctr"/>
+                      <a:r>
+                        <a:rPr lang="en-US" dirty="0">
+                          <a:latin typeface="Gotham Narrow Book"/>
+                        </a:rPr>
+                        <a:t>0.1239</a:t>
+                      </a:r>
+                    </a:p>
+                  </a:txBody>
+                  <a:tcPr/>
+                </a:tc>
+                <a:tc>
+                  <a:txBody>
+                    <a:bodyPr/>
+                    <a:lstStyle/>
+                    <a:p>
+                      <a:pPr algn="ctr"/>
+                      <a:r>
+                        <a:rPr lang="en-US">
+                          <a:latin typeface="Gotham Narrow Book"/>
+                        </a:rPr>
+                        <a:t>189.6263</a:t>
+                      </a:r>
+                      <a:endParaRPr lang="en-US" dirty="0">
+                        <a:latin typeface="Gotham Narrow Book"/>
+                      </a:endParaRPr>
+                    </a:p>
+                  </a:txBody>
+                  <a:tcPr/>
+                </a:tc>
+                <a:tc>
+                  <a:txBody>
+                    <a:bodyPr/>
+                    <a:lstStyle/>
+                    <a:p>
+                      <a:pPr algn="ctr"/>
+                      <a:r>
+                        <a:rPr lang="en-US" dirty="0">
+                          <a:latin typeface="Gotham Narrow Book"/>
+                        </a:rPr>
+                        <a:t>0.0543</a:t>
+                      </a:r>
+                    </a:p>
+                  </a:txBody>
+                  <a:tcPr/>
+                </a:tc>
+                <a:extLst>
+                  <a:ext uri="{0D108BD9-81ED-4DB2-BD59-A6C34878D82A}">
+                    <a16:rowId xmlns:a16="http://schemas.microsoft.com/office/drawing/2014/main" val="3484688066"/>
+                  </a:ext>
+                </a:extLst>
+              </a:tr>
+              <a:tr h="370840">
+                <a:tc>
+                  <a:txBody>
+                    <a:bodyPr/>
+                    <a:lstStyle/>
+                    <a:p>
+                      <a:r>
+                        <a:rPr lang="en-US" dirty="0">
+                          <a:latin typeface="Gotham Narrow Book"/>
+                        </a:rPr>
+                        <a:t>Constraint matrix [2]</a:t>
+                      </a:r>
+                    </a:p>
+                  </a:txBody>
+                  <a:tcPr/>
+                </a:tc>
+                <a:tc>
+                  <a:txBody>
+                    <a:bodyPr/>
+                    <a:lstStyle/>
+                    <a:p>
+                      <a:pPr marL="0" marR="0" lvl="0" indent="0" algn="ctr" defTabSz="914400" rtl="0" eaLnBrk="1" fontAlgn="auto" latinLnBrk="0" hangingPunct="1">
+                        <a:lnSpc>
+                          <a:spcPct val="100000"/>
+                        </a:lnSpc>
+                        <a:spcBef>
+                          <a:spcPts val="0"/>
+                        </a:spcBef>
+                        <a:spcAft>
+                          <a:spcPts val="0"/>
+                        </a:spcAft>
+                        <a:buClrTx/>
+                        <a:buSzTx/>
+                        <a:buFontTx/>
+                        <a:buNone/>
+                        <a:tabLst/>
+                        <a:defRPr/>
+                      </a:pPr>
+                      <a:r>
+                        <a:rPr lang="en-US" dirty="0">
+                          <a:latin typeface="Gotham Narrow Book"/>
+                        </a:rPr>
+                        <a:t>0.24673</a:t>
+                      </a:r>
+                    </a:p>
+                  </a:txBody>
+                  <a:tcPr/>
+                </a:tc>
+                <a:tc>
+                  <a:txBody>
+                    <a:bodyPr/>
+                    <a:lstStyle/>
+                    <a:p>
+                      <a:endParaRPr lang="en-US" dirty="0">
+                        <a:latin typeface="Gotham Narrow Book"/>
+                      </a:endParaRPr>
+                    </a:p>
+                  </a:txBody>
+                  <a:tcPr/>
+                </a:tc>
+                <a:tc>
+                  <a:txBody>
+                    <a:bodyPr/>
+                    <a:lstStyle/>
+                    <a:p>
+                      <a:endParaRPr lang="en-US" dirty="0">
+                        <a:latin typeface="Gotham Narrow Book"/>
+                      </a:endParaRPr>
+                    </a:p>
+                  </a:txBody>
+                  <a:tcPr/>
+                </a:tc>
+                <a:tc>
+                  <a:txBody>
+                    <a:bodyPr/>
+                    <a:lstStyle/>
+                    <a:p>
+                      <a:endParaRPr lang="en-US" dirty="0">
+                        <a:latin typeface="Gotham Narrow Book"/>
+                      </a:endParaRPr>
+                    </a:p>
+                  </a:txBody>
+                  <a:tcPr/>
+                </a:tc>
+                <a:extLst>
+                  <a:ext uri="{0D108BD9-81ED-4DB2-BD59-A6C34878D82A}">
+                    <a16:rowId xmlns:a16="http://schemas.microsoft.com/office/drawing/2014/main" val="1255951861"/>
+                  </a:ext>
+                </a:extLst>
+              </a:tr>
+              <a:tr h="370840">
+                <a:tc>
+                  <a:txBody>
+                    <a:bodyPr/>
+                    <a:lstStyle/>
+                    <a:p>
+                      <a:pPr marL="0" marR="0" lvl="0" indent="0" algn="l" defTabSz="914400" rtl="0" eaLnBrk="1" fontAlgn="auto" latinLnBrk="0" hangingPunct="1">
+                        <a:lnSpc>
+                          <a:spcPct val="100000"/>
+                        </a:lnSpc>
+                        <a:spcBef>
+                          <a:spcPts val="0"/>
+                        </a:spcBef>
+                        <a:spcAft>
+                          <a:spcPts val="0"/>
+                        </a:spcAft>
+                        <a:buClrTx/>
+                        <a:buSzTx/>
+                        <a:buFontTx/>
+                        <a:buNone/>
+                        <a:tabLst/>
+                        <a:defRPr/>
+                      </a:pPr>
+                      <a:r>
+                        <a:rPr lang="en-US" dirty="0">
+                          <a:latin typeface="Gotham Narrow Book"/>
+                        </a:rPr>
+                        <a:t>Constraint matrix [3]</a:t>
+                      </a:r>
+                    </a:p>
+                  </a:txBody>
+                  <a:tcPr/>
+                </a:tc>
+                <a:tc>
+                  <a:txBody>
+                    <a:bodyPr/>
+                    <a:lstStyle/>
+                    <a:p>
+                      <a:pPr algn="ctr"/>
+                      <a:r>
+                        <a:rPr lang="en-US" dirty="0">
+                          <a:latin typeface="Gotham Narrow Book"/>
+                        </a:rPr>
+                        <a:t>0.26003</a:t>
+                      </a:r>
+                    </a:p>
+                  </a:txBody>
+                  <a:tcPr/>
+                </a:tc>
+                <a:tc>
+                  <a:txBody>
+                    <a:bodyPr/>
+                    <a:lstStyle/>
+                    <a:p>
+                      <a:endParaRPr lang="en-US" dirty="0">
+                        <a:latin typeface="Gotham Narrow Book"/>
+                      </a:endParaRPr>
+                    </a:p>
+                  </a:txBody>
+                  <a:tcPr/>
+                </a:tc>
+                <a:tc>
+                  <a:txBody>
+                    <a:bodyPr/>
+                    <a:lstStyle/>
+                    <a:p>
+                      <a:endParaRPr lang="en-US" dirty="0">
+                        <a:latin typeface="Gotham Narrow Book"/>
+                      </a:endParaRPr>
+                    </a:p>
+                  </a:txBody>
+                  <a:tcPr/>
+                </a:tc>
+                <a:tc>
+                  <a:txBody>
+                    <a:bodyPr/>
+                    <a:lstStyle/>
+                    <a:p>
+                      <a:endParaRPr lang="en-US" dirty="0">
+                        <a:latin typeface="Gotham Narrow Book"/>
+                      </a:endParaRPr>
+                    </a:p>
+                  </a:txBody>
+                  <a:tcPr/>
+                </a:tc>
+                <a:extLst>
+                  <a:ext uri="{0D108BD9-81ED-4DB2-BD59-A6C34878D82A}">
+                    <a16:rowId xmlns:a16="http://schemas.microsoft.com/office/drawing/2014/main" val="1489652481"/>
+                  </a:ext>
+                </a:extLst>
+              </a:tr>
+            </a:tbl>
+          </a:graphicData>
+        </a:graphic>
+      </p:graphicFrame>
+    </p:spTree>
+    <p:extLst>
+      <p:ext uri="{BB962C8B-B14F-4D97-AF65-F5344CB8AC3E}">
+        <p14:creationId xmlns:p14="http://schemas.microsoft.com/office/powerpoint/2010/main" val="151919946"/>
+      </p:ext>
+    </p:extLst>
+  </p:cSld>
+  <p:clrMapOvr>
+    <a:masterClrMapping/>
+  </p:clrMapOvr>
+</p:sld>
+</file>
+
+<file path=ppt/slides/slide6.xml><?xml version="1.0" encoding="utf-8"?>
+<p:sld xmlns:a="http://schemas.openxmlformats.org/drawingml/2006/main" xmlns:r="http://schemas.openxmlformats.org/officeDocument/2006/relationships" xmlns:p="http://schemas.openxmlformats.org/presentationml/2006/main">
+  <p:cSld>
+    <p:bg>
+      <p:bgPr>
+        <a:blipFill dpi="0" rotWithShape="1">
+          <a:blip r:embed="rId2">
+            <a:lum/>
+          </a:blip>
+          <a:srcRect/>
+          <a:stretch>
+            <a:fillRect/>
+          </a:stretch>
+        </a:blipFill>
+        <a:effectLst/>
+      </p:bgPr>
+    </p:bg>
+    <p:spTree>
+      <p:nvGrpSpPr>
+        <p:cNvPr id="1" name="">
+          <a:extLst>
+            <a:ext uri="{FF2B5EF4-FFF2-40B4-BE49-F238E27FC236}">
               <a16:creationId xmlns:a16="http://schemas.microsoft.com/office/drawing/2014/main" id="{67EC2B82-D0D6-A7DC-EC57-EE0645E69EFC}"/>
             </a:ext>
           </a:extLst>
@@ -6306,56 +7216,59 @@
           </a:fontRef>
         </p:style>
       </p:cxnSp>
-    </p:spTree>
-    <p:extLst>
-      <p:ext uri="{BB962C8B-B14F-4D97-AF65-F5344CB8AC3E}">
-        <p14:creationId xmlns:p14="http://schemas.microsoft.com/office/powerpoint/2010/main" val="3020415987"/>
-      </p:ext>
-    </p:extLst>
-  </p:cSld>
-  <p:clrMapOvr>
-    <a:masterClrMapping/>
-  </p:clrMapOvr>
-</p:sld>
-</file>
-
-<file path=ppt/slides/slide6.xml><?xml version="1.0" encoding="utf-8"?>
-<p:sld xmlns:a="http://schemas.openxmlformats.org/drawingml/2006/main" xmlns:r="http://schemas.openxmlformats.org/officeDocument/2006/relationships" xmlns:p="http://schemas.openxmlformats.org/presentationml/2006/main" show="0">
-  <p:cSld>
-    <p:bg>
-      <p:bgPr>
-        <a:blipFill dpi="0" rotWithShape="1">
-          <a:blip r:embed="rId2">
-            <a:lum/>
+      <p:pic>
+        <p:nvPicPr>
+          <p:cNvPr id="3" name="Picture 2">
+            <a:extLst>
+              <a:ext uri="{FF2B5EF4-FFF2-40B4-BE49-F238E27FC236}">
+                <a16:creationId xmlns:a16="http://schemas.microsoft.com/office/drawing/2014/main" id="{1C132775-0121-69A6-4129-1D9BD186437B}"/>
+              </a:ext>
+            </a:extLst>
+          </p:cNvPr>
+          <p:cNvPicPr>
+            <a:picLocks noChangeAspect="1" noChangeArrowheads="1"/>
+          </p:cNvPicPr>
+          <p:nvPr/>
+        </p:nvPicPr>
+        <p:blipFill>
+          <a:blip r:embed="rId6">
+            <a:extLst>
+              <a:ext uri="{28A0092B-C50C-407E-A947-70E740481C1C}">
+                <a14:useLocalDpi xmlns:a14="http://schemas.microsoft.com/office/drawing/2010/main" val="0"/>
+              </a:ext>
+            </a:extLst>
           </a:blip>
           <a:srcRect/>
           <a:stretch>
             <a:fillRect/>
           </a:stretch>
-        </a:blipFill>
-        <a:effectLst/>
-      </p:bgPr>
-    </p:bg>
-    <p:spTree>
-      <p:nvGrpSpPr>
-        <p:cNvPr id="1" name=""/>
-        <p:cNvGrpSpPr/>
-        <p:nvPr/>
-      </p:nvGrpSpPr>
-      <p:grpSpPr>
-        <a:xfrm>
-          <a:off x="0" y="0"/>
-          <a:ext cx="0" cy="0"/>
-          <a:chOff x="0" y="0"/>
-          <a:chExt cx="0" cy="0"/>
-        </a:xfrm>
-      </p:grpSpPr>
-      <p:sp>
-        <p:nvSpPr>
-          <p:cNvPr id="5" name="TextBox 4">
-            <a:extLst>
-              <a:ext uri="{FF2B5EF4-FFF2-40B4-BE49-F238E27FC236}">
-                <a16:creationId xmlns:a16="http://schemas.microsoft.com/office/drawing/2014/main" id="{44B7E921-4FB7-284B-9679-627B0D7126F5}"/>
+        </p:blipFill>
+        <p:spPr bwMode="auto">
+          <a:xfrm>
+            <a:off x="6137164" y="658618"/>
+            <a:ext cx="2095570" cy="1706128"/>
+          </a:xfrm>
+          <a:prstGeom prst="rect">
+            <a:avLst/>
+          </a:prstGeom>
+          <a:noFill/>
+          <a:extLst>
+            <a:ext uri="{909E8E84-426E-40DD-AFC4-6F175D3DCCD1}">
+              <a14:hiddenFill xmlns:a14="http://schemas.microsoft.com/office/drawing/2010/main">
+                <a:solidFill>
+                  <a:srgbClr val="FFFFFF"/>
+                </a:solidFill>
+              </a14:hiddenFill>
+            </a:ext>
+          </a:extLst>
+        </p:spPr>
+      </p:pic>
+      <p:sp>
+        <p:nvSpPr>
+          <p:cNvPr id="8" name="TextBox 7">
+            <a:extLst>
+              <a:ext uri="{FF2B5EF4-FFF2-40B4-BE49-F238E27FC236}">
+                <a16:creationId xmlns:a16="http://schemas.microsoft.com/office/drawing/2014/main" id="{5B378BF3-CBB3-3FB3-9F05-1BD5EDFD45E0}"/>
               </a:ext>
             </a:extLst>
           </p:cNvPr>
@@ -6364,8 +7277,8 @@
         </p:nvSpPr>
         <p:spPr>
           <a:xfrm>
-            <a:off x="571500" y="538619"/>
-            <a:ext cx="11040127" cy="461665"/>
+            <a:off x="6150611" y="2345291"/>
+            <a:ext cx="2286000" cy="369332"/>
           </a:xfrm>
           <a:prstGeom prst="rect">
             <a:avLst/>
@@ -6373,557 +7286,115 @@
           <a:noFill/>
         </p:spPr>
         <p:txBody>
-          <a:bodyPr wrap="square" rtlCol="0">
+          <a:bodyPr wrap="square">
             <a:spAutoFit/>
           </a:bodyPr>
           <a:lstStyle/>
           <a:p>
             <a:r>
-              <a:rPr lang="en-US" sz="2400" b="1" dirty="0">
-                <a:solidFill>
-                  <a:srgbClr val="63666A"/>
-                </a:solidFill>
-                <a:latin typeface="Gotham Narrow Bold" pitchFamily="2" charset="0"/>
-              </a:rPr>
-              <a:t>SECTION SUBHEAD</a:t>
-            </a:r>
-          </a:p>
-        </p:txBody>
-      </p:sp>
-      <p:sp>
-        <p:nvSpPr>
-          <p:cNvPr id="6" name="TextBox 5">
-            <a:extLst>
-              <a:ext uri="{FF2B5EF4-FFF2-40B4-BE49-F238E27FC236}">
-                <a16:creationId xmlns:a16="http://schemas.microsoft.com/office/drawing/2014/main" id="{A87927AC-8429-D242-9F31-193EE99C1A6C}"/>
-              </a:ext>
-            </a:extLst>
-          </p:cNvPr>
-          <p:cNvSpPr txBox="1"/>
+              <a:rPr lang="en-US" dirty="0">
+                <a:latin typeface="Gotham Narrow Book"/>
+              </a:rPr>
+              <a:t>Constraint matrix [3]</a:t>
+            </a:r>
+          </a:p>
+        </p:txBody>
+      </p:sp>
+      <p:pic>
+        <p:nvPicPr>
+          <p:cNvPr id="9" name="Picture 4">
+            <a:extLst>
+              <a:ext uri="{FF2B5EF4-FFF2-40B4-BE49-F238E27FC236}">
+                <a16:creationId xmlns:a16="http://schemas.microsoft.com/office/drawing/2014/main" id="{99747D26-248E-CD85-DEBC-A15C12059DE5}"/>
+              </a:ext>
+            </a:extLst>
+          </p:cNvPr>
+          <p:cNvPicPr>
+            <a:picLocks noChangeAspect="1" noChangeArrowheads="1"/>
+          </p:cNvPicPr>
           <p:nvPr/>
-        </p:nvSpPr>
-        <p:spPr>
+        </p:nvPicPr>
+        <p:blipFill>
+          <a:blip r:embed="rId7">
+            <a:extLst>
+              <a:ext uri="{28A0092B-C50C-407E-A947-70E740481C1C}">
+                <a14:useLocalDpi xmlns:a14="http://schemas.microsoft.com/office/drawing/2010/main" val="0"/>
+              </a:ext>
+            </a:extLst>
+          </a:blip>
+          <a:srcRect/>
+          <a:stretch>
+            <a:fillRect/>
+          </a:stretch>
+        </p:blipFill>
+        <p:spPr bwMode="auto">
           <a:xfrm>
-            <a:off x="876822" y="1115395"/>
-            <a:ext cx="10734804" cy="4256705"/>
+            <a:off x="5762064" y="3177988"/>
+            <a:ext cx="3340718" cy="2672574"/>
           </a:xfrm>
           <a:prstGeom prst="rect">
             <a:avLst/>
           </a:prstGeom>
           <a:noFill/>
+          <a:extLst>
+            <a:ext uri="{909E8E84-426E-40DD-AFC4-6F175D3DCCD1}">
+              <a14:hiddenFill xmlns:a14="http://schemas.microsoft.com/office/drawing/2010/main">
+                <a:solidFill>
+                  <a:srgbClr val="FFFFFF"/>
+                </a:solidFill>
+              </a14:hiddenFill>
+            </a:ext>
+          </a:extLst>
         </p:spPr>
-        <p:txBody>
-          <a:bodyPr wrap="square" rtlCol="0">
-            <a:noAutofit/>
-          </a:bodyPr>
-          <a:lstStyle/>
-          <a:p>
-            <a:pPr>
-              <a:lnSpc>
-                <a:spcPct val="125000"/>
-              </a:lnSpc>
-            </a:pPr>
-            <a:r>
-              <a:rPr lang="en-US" dirty="0">
-                <a:latin typeface="Gotham Narrow Book" pitchFamily="2" charset="0"/>
-              </a:rPr>
-              <a:t>Body copy goes here. Lorem ipsum dolor sit </a:t>
-            </a:r>
-            <a:r>
-              <a:rPr lang="en-US" dirty="0" err="1">
-                <a:latin typeface="Gotham Narrow Book" pitchFamily="2" charset="0"/>
-              </a:rPr>
-              <a:t>amet</a:t>
-            </a:r>
-            <a:r>
-              <a:rPr lang="en-US" dirty="0">
-                <a:latin typeface="Gotham Narrow Book" pitchFamily="2" charset="0"/>
-              </a:rPr>
-              <a:t>, </a:t>
-            </a:r>
-            <a:r>
-              <a:rPr lang="en-US" dirty="0" err="1">
-                <a:latin typeface="Gotham Narrow Book" pitchFamily="2" charset="0"/>
-              </a:rPr>
-              <a:t>consectetur</a:t>
-            </a:r>
-            <a:r>
-              <a:rPr lang="en-US" dirty="0">
-                <a:latin typeface="Gotham Narrow Book" pitchFamily="2" charset="0"/>
-              </a:rPr>
-              <a:t> </a:t>
-            </a:r>
-            <a:r>
-              <a:rPr lang="en-US" dirty="0" err="1">
-                <a:latin typeface="Gotham Narrow Book" pitchFamily="2" charset="0"/>
-              </a:rPr>
-              <a:t>adipiscing</a:t>
-            </a:r>
-            <a:r>
-              <a:rPr lang="en-US" dirty="0">
-                <a:latin typeface="Gotham Narrow Book" pitchFamily="2" charset="0"/>
-              </a:rPr>
-              <a:t> </a:t>
-            </a:r>
-            <a:r>
-              <a:rPr lang="en-US" dirty="0" err="1">
-                <a:latin typeface="Gotham Narrow Book" pitchFamily="2" charset="0"/>
-              </a:rPr>
-              <a:t>elit</a:t>
-            </a:r>
-            <a:r>
-              <a:rPr lang="en-US" dirty="0">
-                <a:latin typeface="Gotham Narrow Book" pitchFamily="2" charset="0"/>
-              </a:rPr>
-              <a:t>, sed do </a:t>
-            </a:r>
-            <a:r>
-              <a:rPr lang="en-US" dirty="0" err="1">
-                <a:latin typeface="Gotham Narrow Book" pitchFamily="2" charset="0"/>
-              </a:rPr>
-              <a:t>eiusmod</a:t>
-            </a:r>
-            <a:r>
-              <a:rPr lang="en-US" dirty="0">
-                <a:latin typeface="Gotham Narrow Book" pitchFamily="2" charset="0"/>
-              </a:rPr>
-              <a:t> </a:t>
-            </a:r>
-            <a:r>
-              <a:rPr lang="en-US" dirty="0" err="1">
-                <a:latin typeface="Gotham Narrow Book" pitchFamily="2" charset="0"/>
-              </a:rPr>
-              <a:t>tempor</a:t>
-            </a:r>
-            <a:r>
-              <a:rPr lang="en-US" dirty="0">
-                <a:latin typeface="Gotham Narrow Book" pitchFamily="2" charset="0"/>
-              </a:rPr>
-              <a:t> </a:t>
-            </a:r>
-            <a:r>
-              <a:rPr lang="en-US" dirty="0" err="1">
-                <a:latin typeface="Gotham Narrow Book" pitchFamily="2" charset="0"/>
-              </a:rPr>
-              <a:t>incididunt</a:t>
-            </a:r>
-            <a:r>
-              <a:rPr lang="en-US" dirty="0">
-                <a:latin typeface="Gotham Narrow Book" pitchFamily="2" charset="0"/>
-              </a:rPr>
-              <a:t> </a:t>
-            </a:r>
-            <a:r>
-              <a:rPr lang="en-US" dirty="0" err="1">
-                <a:latin typeface="Gotham Narrow Book" pitchFamily="2" charset="0"/>
-              </a:rPr>
-              <a:t>ut</a:t>
-            </a:r>
-            <a:r>
-              <a:rPr lang="en-US" dirty="0">
-                <a:latin typeface="Gotham Narrow Book" pitchFamily="2" charset="0"/>
-              </a:rPr>
-              <a:t> </a:t>
-            </a:r>
-            <a:r>
-              <a:rPr lang="en-US" dirty="0" err="1">
-                <a:latin typeface="Gotham Narrow Book" pitchFamily="2" charset="0"/>
-              </a:rPr>
-              <a:t>labore</a:t>
-            </a:r>
-            <a:r>
-              <a:rPr lang="en-US" dirty="0">
-                <a:latin typeface="Gotham Narrow Book" pitchFamily="2" charset="0"/>
-              </a:rPr>
-              <a:t> et dolore magna </a:t>
-            </a:r>
-            <a:r>
-              <a:rPr lang="en-US" dirty="0" err="1">
-                <a:latin typeface="Gotham Narrow Book" pitchFamily="2" charset="0"/>
-              </a:rPr>
-              <a:t>aliqua</a:t>
-            </a:r>
-            <a:r>
-              <a:rPr lang="en-US" dirty="0">
-                <a:latin typeface="Gotham Narrow Book" pitchFamily="2" charset="0"/>
-              </a:rPr>
-              <a:t>. Ut </a:t>
-            </a:r>
-            <a:r>
-              <a:rPr lang="en-US" dirty="0" err="1">
-                <a:latin typeface="Gotham Narrow Book" pitchFamily="2" charset="0"/>
-              </a:rPr>
-              <a:t>enim</a:t>
-            </a:r>
-            <a:r>
-              <a:rPr lang="en-US" dirty="0">
-                <a:latin typeface="Gotham Narrow Book" pitchFamily="2" charset="0"/>
-              </a:rPr>
-              <a:t> ad minim </a:t>
-            </a:r>
-            <a:r>
-              <a:rPr lang="en-US" dirty="0" err="1">
-                <a:latin typeface="Gotham Narrow Book" pitchFamily="2" charset="0"/>
-              </a:rPr>
-              <a:t>veniam</a:t>
-            </a:r>
-            <a:r>
-              <a:rPr lang="en-US" dirty="0">
-                <a:latin typeface="Gotham Narrow Book" pitchFamily="2" charset="0"/>
-              </a:rPr>
-              <a:t>, </a:t>
-            </a:r>
-            <a:r>
-              <a:rPr lang="en-US" dirty="0" err="1">
-                <a:latin typeface="Gotham Narrow Book" pitchFamily="2" charset="0"/>
-              </a:rPr>
-              <a:t>quis</a:t>
-            </a:r>
-            <a:r>
-              <a:rPr lang="en-US" dirty="0">
-                <a:latin typeface="Gotham Narrow Book" pitchFamily="2" charset="0"/>
-              </a:rPr>
-              <a:t> </a:t>
-            </a:r>
-            <a:r>
-              <a:rPr lang="en-US" dirty="0" err="1">
-                <a:latin typeface="Gotham Narrow Book" pitchFamily="2" charset="0"/>
-              </a:rPr>
-              <a:t>nostrud</a:t>
-            </a:r>
-            <a:r>
-              <a:rPr lang="en-US" dirty="0">
-                <a:latin typeface="Gotham Narrow Book" pitchFamily="2" charset="0"/>
-              </a:rPr>
-              <a:t> exercitation </a:t>
-            </a:r>
-            <a:r>
-              <a:rPr lang="en-US" dirty="0" err="1">
-                <a:latin typeface="Gotham Narrow Book" pitchFamily="2" charset="0"/>
-              </a:rPr>
-              <a:t>ullamco</a:t>
-            </a:r>
-            <a:r>
-              <a:rPr lang="en-US" dirty="0">
-                <a:latin typeface="Gotham Narrow Book" pitchFamily="2" charset="0"/>
-              </a:rPr>
-              <a:t> </a:t>
-            </a:r>
-            <a:r>
-              <a:rPr lang="en-US" dirty="0" err="1">
-                <a:latin typeface="Gotham Narrow Book" pitchFamily="2" charset="0"/>
-              </a:rPr>
-              <a:t>laboris</a:t>
-            </a:r>
-            <a:r>
-              <a:rPr lang="en-US" dirty="0">
-                <a:latin typeface="Gotham Narrow Book" pitchFamily="2" charset="0"/>
-              </a:rPr>
-              <a:t> nisi </a:t>
-            </a:r>
-            <a:r>
-              <a:rPr lang="en-US" dirty="0" err="1">
-                <a:latin typeface="Gotham Narrow Book" pitchFamily="2" charset="0"/>
-              </a:rPr>
-              <a:t>ut</a:t>
-            </a:r>
-            <a:r>
-              <a:rPr lang="en-US" dirty="0">
-                <a:latin typeface="Gotham Narrow Book" pitchFamily="2" charset="0"/>
-              </a:rPr>
-              <a:t> </a:t>
-            </a:r>
-            <a:r>
-              <a:rPr lang="en-US" dirty="0" err="1">
-                <a:latin typeface="Gotham Narrow Book" pitchFamily="2" charset="0"/>
-              </a:rPr>
-              <a:t>aliquip</a:t>
-            </a:r>
-            <a:r>
-              <a:rPr lang="en-US" dirty="0">
-                <a:latin typeface="Gotham Narrow Book" pitchFamily="2" charset="0"/>
-              </a:rPr>
-              <a:t> ex </a:t>
-            </a:r>
-            <a:r>
-              <a:rPr lang="en-US" dirty="0" err="1">
-                <a:latin typeface="Gotham Narrow Book" pitchFamily="2" charset="0"/>
-              </a:rPr>
-              <a:t>ea</a:t>
-            </a:r>
-            <a:r>
-              <a:rPr lang="en-US" dirty="0">
-                <a:latin typeface="Gotham Narrow Book" pitchFamily="2" charset="0"/>
-              </a:rPr>
-              <a:t> </a:t>
-            </a:r>
-            <a:r>
-              <a:rPr lang="en-US" dirty="0" err="1">
-                <a:latin typeface="Gotham Narrow Book" pitchFamily="2" charset="0"/>
-              </a:rPr>
-              <a:t>commodo</a:t>
-            </a:r>
-            <a:r>
-              <a:rPr lang="en-US" dirty="0">
-                <a:latin typeface="Gotham Narrow Book" pitchFamily="2" charset="0"/>
-              </a:rPr>
-              <a:t> </a:t>
-            </a:r>
-            <a:r>
-              <a:rPr lang="en-US" dirty="0" err="1">
-                <a:latin typeface="Gotham Narrow Book" pitchFamily="2" charset="0"/>
-              </a:rPr>
-              <a:t>consequat</a:t>
-            </a:r>
-            <a:r>
-              <a:rPr lang="en-US" dirty="0">
-                <a:latin typeface="Gotham Narrow Book" pitchFamily="2" charset="0"/>
-              </a:rPr>
-              <a:t>. Duis </a:t>
-            </a:r>
-            <a:r>
-              <a:rPr lang="en-US" dirty="0" err="1">
-                <a:latin typeface="Gotham Narrow Book" pitchFamily="2" charset="0"/>
-              </a:rPr>
-              <a:t>aute</a:t>
-            </a:r>
-            <a:r>
-              <a:rPr lang="en-US" dirty="0">
-                <a:latin typeface="Gotham Narrow Book" pitchFamily="2" charset="0"/>
-              </a:rPr>
-              <a:t> </a:t>
-            </a:r>
-            <a:r>
-              <a:rPr lang="en-US" dirty="0" err="1">
-                <a:latin typeface="Gotham Narrow Book" pitchFamily="2" charset="0"/>
-              </a:rPr>
-              <a:t>irure</a:t>
-            </a:r>
-            <a:r>
-              <a:rPr lang="en-US" dirty="0">
-                <a:latin typeface="Gotham Narrow Book" pitchFamily="2" charset="0"/>
-              </a:rPr>
-              <a:t> dolor in </a:t>
-            </a:r>
-            <a:r>
-              <a:rPr lang="en-US" dirty="0" err="1">
-                <a:latin typeface="Gotham Narrow Book" pitchFamily="2" charset="0"/>
-              </a:rPr>
-              <a:t>reprehenderit</a:t>
-            </a:r>
-            <a:r>
-              <a:rPr lang="en-US" dirty="0">
-                <a:latin typeface="Gotham Narrow Book" pitchFamily="2" charset="0"/>
-              </a:rPr>
-              <a:t> in </a:t>
-            </a:r>
-            <a:r>
-              <a:rPr lang="en-US" dirty="0" err="1">
-                <a:latin typeface="Gotham Narrow Book" pitchFamily="2" charset="0"/>
-              </a:rPr>
-              <a:t>voluptate</a:t>
-            </a:r>
-            <a:r>
-              <a:rPr lang="en-US" dirty="0">
-                <a:latin typeface="Gotham Narrow Book" pitchFamily="2" charset="0"/>
-              </a:rPr>
-              <a:t> </a:t>
-            </a:r>
-            <a:r>
-              <a:rPr lang="en-US" dirty="0" err="1">
-                <a:latin typeface="Gotham Narrow Book" pitchFamily="2" charset="0"/>
-              </a:rPr>
-              <a:t>velit</a:t>
-            </a:r>
-            <a:r>
-              <a:rPr lang="en-US" dirty="0">
-                <a:latin typeface="Gotham Narrow Book" pitchFamily="2" charset="0"/>
-              </a:rPr>
-              <a:t> </a:t>
-            </a:r>
-            <a:r>
-              <a:rPr lang="en-US" dirty="0" err="1">
-                <a:latin typeface="Gotham Narrow Book" pitchFamily="2" charset="0"/>
-              </a:rPr>
-              <a:t>esse</a:t>
-            </a:r>
-            <a:r>
-              <a:rPr lang="en-US" dirty="0">
-                <a:latin typeface="Gotham Narrow Book" pitchFamily="2" charset="0"/>
-              </a:rPr>
-              <a:t> </a:t>
-            </a:r>
-            <a:r>
-              <a:rPr lang="en-US" dirty="0" err="1">
-                <a:latin typeface="Gotham Narrow Book" pitchFamily="2" charset="0"/>
-              </a:rPr>
-              <a:t>cillum</a:t>
-            </a:r>
-            <a:r>
-              <a:rPr lang="en-US" dirty="0">
-                <a:latin typeface="Gotham Narrow Book" pitchFamily="2" charset="0"/>
-              </a:rPr>
-              <a:t> dolore </a:t>
-            </a:r>
-            <a:r>
-              <a:rPr lang="en-US" dirty="0" err="1">
-                <a:latin typeface="Gotham Narrow Book" pitchFamily="2" charset="0"/>
-              </a:rPr>
-              <a:t>eu</a:t>
-            </a:r>
-            <a:r>
-              <a:rPr lang="en-US" dirty="0">
-                <a:latin typeface="Gotham Narrow Book" pitchFamily="2" charset="0"/>
-              </a:rPr>
-              <a:t> </a:t>
-            </a:r>
-            <a:r>
-              <a:rPr lang="en-US" dirty="0" err="1">
-                <a:latin typeface="Gotham Narrow Book" pitchFamily="2" charset="0"/>
-              </a:rPr>
-              <a:t>fugiat</a:t>
-            </a:r>
-            <a:r>
-              <a:rPr lang="en-US" dirty="0">
-                <a:latin typeface="Gotham Narrow Book" pitchFamily="2" charset="0"/>
-              </a:rPr>
-              <a:t> </a:t>
-            </a:r>
-            <a:r>
-              <a:rPr lang="en-US" dirty="0" err="1">
-                <a:latin typeface="Gotham Narrow Book" pitchFamily="2" charset="0"/>
-              </a:rPr>
-              <a:t>nulla</a:t>
-            </a:r>
-            <a:r>
-              <a:rPr lang="en-US" dirty="0">
-                <a:latin typeface="Gotham Narrow Book" pitchFamily="2" charset="0"/>
-              </a:rPr>
-              <a:t> </a:t>
-            </a:r>
-            <a:r>
-              <a:rPr lang="en-US" dirty="0" err="1">
-                <a:latin typeface="Gotham Narrow Book" pitchFamily="2" charset="0"/>
-              </a:rPr>
-              <a:t>pariature</a:t>
-            </a:r>
-            <a:r>
-              <a:rPr lang="en-US" dirty="0">
-                <a:latin typeface="Gotham Narrow Book" pitchFamily="2" charset="0"/>
-              </a:rPr>
-              <a:t>.</a:t>
-            </a:r>
-          </a:p>
-          <a:p>
-            <a:pPr>
-              <a:lnSpc>
-                <a:spcPct val="125000"/>
-              </a:lnSpc>
-            </a:pPr>
-            <a:r>
-              <a:rPr lang="en-US" dirty="0">
-                <a:latin typeface="Gotham Narrow Book" pitchFamily="2" charset="0"/>
-              </a:rPr>
-              <a:t>	</a:t>
-            </a:r>
-          </a:p>
-          <a:p>
-            <a:pPr>
-              <a:lnSpc>
-                <a:spcPct val="125000"/>
-              </a:lnSpc>
-            </a:pPr>
-            <a:r>
-              <a:rPr lang="en-US" dirty="0">
-                <a:latin typeface="Gotham Narrow Book" pitchFamily="2" charset="0"/>
-              </a:rPr>
-              <a:t>	• Secondary Slide</a:t>
-            </a:r>
-          </a:p>
-          <a:p>
-            <a:pPr>
-              <a:lnSpc>
-                <a:spcPct val="125000"/>
-              </a:lnSpc>
-            </a:pPr>
-            <a:r>
-              <a:rPr lang="en-US" dirty="0">
-                <a:latin typeface="Gotham Narrow Book" pitchFamily="2" charset="0"/>
-              </a:rPr>
-              <a:t>	• Secondary Slide</a:t>
-            </a:r>
-          </a:p>
-          <a:p>
-            <a:pPr>
-              <a:lnSpc>
-                <a:spcPct val="125000"/>
-              </a:lnSpc>
-            </a:pPr>
-            <a:r>
-              <a:rPr lang="en-US" dirty="0">
-                <a:latin typeface="Gotham Narrow Book" pitchFamily="2" charset="0"/>
-              </a:rPr>
-              <a:t>	• Secondary Slide</a:t>
-            </a:r>
-          </a:p>
-          <a:p>
-            <a:pPr>
-              <a:lnSpc>
-                <a:spcPct val="125000"/>
-              </a:lnSpc>
-            </a:pPr>
-            <a:r>
-              <a:rPr lang="en-US" dirty="0">
-                <a:latin typeface="Gotham Narrow Book" pitchFamily="2" charset="0"/>
-              </a:rPr>
-              <a:t>	• Secondary Slide</a:t>
-            </a:r>
-          </a:p>
-          <a:p>
-            <a:pPr>
-              <a:lnSpc>
-                <a:spcPct val="125000"/>
-              </a:lnSpc>
-            </a:pPr>
-            <a:r>
-              <a:rPr lang="en-US" dirty="0">
-                <a:latin typeface="Gotham Narrow Book" pitchFamily="2" charset="0"/>
-              </a:rPr>
-              <a:t>	• Secondary Slide</a:t>
-            </a:r>
-          </a:p>
-          <a:p>
-            <a:pPr>
-              <a:lnSpc>
-                <a:spcPct val="125000"/>
-              </a:lnSpc>
-            </a:pPr>
-            <a:r>
-              <a:rPr lang="en-US" dirty="0">
-                <a:latin typeface="Gotham Narrow Book" pitchFamily="2" charset="0"/>
-              </a:rPr>
-              <a:t>	• Secondary Slide</a:t>
-            </a:r>
-          </a:p>
-          <a:p>
-            <a:pPr>
-              <a:lnSpc>
-                <a:spcPct val="125000"/>
-              </a:lnSpc>
-            </a:pPr>
-            <a:r>
-              <a:rPr lang="en-US" dirty="0">
-                <a:latin typeface="Gotham Narrow Book" pitchFamily="2" charset="0"/>
-              </a:rPr>
-              <a:t>	• Secondary Slide</a:t>
-            </a:r>
-          </a:p>
-        </p:txBody>
-      </p:sp>
+      </p:pic>
+      <p:cxnSp>
+        <p:nvCxnSpPr>
+          <p:cNvPr id="12" name="Straight Arrow Connector 11">
+            <a:extLst>
+              <a:ext uri="{FF2B5EF4-FFF2-40B4-BE49-F238E27FC236}">
+                <a16:creationId xmlns:a16="http://schemas.microsoft.com/office/drawing/2014/main" id="{0B25E909-E35D-2DB7-097B-F0E8F5849B77}"/>
+              </a:ext>
+            </a:extLst>
+          </p:cNvPr>
+          <p:cNvCxnSpPr>
+            <a:cxnSpLocks/>
+          </p:cNvCxnSpPr>
+          <p:nvPr/>
+        </p:nvCxnSpPr>
+        <p:spPr>
+          <a:xfrm flipV="1">
+            <a:off x="7284507" y="2705658"/>
+            <a:ext cx="0" cy="714377"/>
+          </a:xfrm>
+          <a:prstGeom prst="straightConnector1">
+            <a:avLst/>
+          </a:prstGeom>
+          <a:ln w="28575">
+            <a:solidFill>
+              <a:srgbClr val="FF0000"/>
+            </a:solidFill>
+            <a:tailEnd type="triangle"/>
+          </a:ln>
+        </p:spPr>
+        <p:style>
+          <a:lnRef idx="1">
+            <a:schemeClr val="accent1"/>
+          </a:lnRef>
+          <a:fillRef idx="0">
+            <a:schemeClr val="accent1"/>
+          </a:fillRef>
+          <a:effectRef idx="0">
+            <a:schemeClr val="accent1"/>
+          </a:effectRef>
+          <a:fontRef idx="minor">
+            <a:schemeClr val="tx1"/>
+          </a:fontRef>
+        </p:style>
+      </p:cxnSp>
     </p:spTree>
     <p:extLst>
       <p:ext uri="{BB962C8B-B14F-4D97-AF65-F5344CB8AC3E}">
-        <p14:creationId xmlns:p14="http://schemas.microsoft.com/office/powerpoint/2010/main" val="1779087438"/>
+        <p14:creationId xmlns:p14="http://schemas.microsoft.com/office/powerpoint/2010/main" val="3020415987"/>
       </p:ext>
     </p:extLst>
   </p:cSld>
@@ -7018,8 +7489,8 @@
         </p:nvSpPr>
         <p:spPr>
           <a:xfrm>
-            <a:off x="5107708" y="1115395"/>
-            <a:ext cx="6503917" cy="4256705"/>
+            <a:off x="876822" y="1115395"/>
+            <a:ext cx="10734804" cy="4256705"/>
           </a:xfrm>
           <a:prstGeom prst="rect">
             <a:avLst/>
@@ -7451,7 +7922,7 @@
               <a:rPr lang="en-US" dirty="0">
                 <a:latin typeface="Gotham Narrow Book" pitchFamily="2" charset="0"/>
               </a:rPr>
-              <a:t>	• When single image is necessary</a:t>
+              <a:t>	• Secondary Slide</a:t>
             </a:r>
           </a:p>
           <a:p>
@@ -7464,7 +7935,7 @@
               <a:rPr lang="en-US" dirty="0">
                 <a:latin typeface="Gotham Narrow Book" pitchFamily="2" charset="0"/>
               </a:rPr>
-              <a:t>	• Use this as a reference for appropriate style</a:t>
+              <a:t>	• Secondary Slide</a:t>
             </a:r>
           </a:p>
           <a:p>
@@ -7477,61 +7948,67 @@
               <a:rPr lang="en-US" dirty="0">
                 <a:latin typeface="Gotham Narrow Book" pitchFamily="2" charset="0"/>
               </a:rPr>
-              <a:t>	• Images. Images. Images.</a:t>
-            </a:r>
-          </a:p>
-        </p:txBody>
-      </p:sp>
-      <p:sp>
-        <p:nvSpPr>
-          <p:cNvPr id="2" name="Rectangle 1">
-            <a:extLst>
-              <a:ext uri="{FF2B5EF4-FFF2-40B4-BE49-F238E27FC236}">
-                <a16:creationId xmlns:a16="http://schemas.microsoft.com/office/drawing/2014/main" id="{97ABE370-7C49-B54D-BC97-DC52776CBD47}"/>
-              </a:ext>
-            </a:extLst>
-          </p:cNvPr>
-          <p:cNvSpPr/>
-          <p:nvPr/>
-        </p:nvSpPr>
-        <p:spPr>
-          <a:xfrm>
-            <a:off x="988291" y="1115395"/>
-            <a:ext cx="3888509" cy="4256705"/>
-          </a:xfrm>
-          <a:prstGeom prst="rect">
-            <a:avLst/>
-          </a:prstGeom>
-        </p:spPr>
-        <p:style>
-          <a:lnRef idx="2">
-            <a:schemeClr val="accent1">
-              <a:shade val="50000"/>
-            </a:schemeClr>
-          </a:lnRef>
-          <a:fillRef idx="1">
-            <a:schemeClr val="accent1"/>
-          </a:fillRef>
-          <a:effectRef idx="0">
-            <a:schemeClr val="accent1"/>
-          </a:effectRef>
-          <a:fontRef idx="minor">
-            <a:schemeClr val="lt1"/>
-          </a:fontRef>
-        </p:style>
-        <p:txBody>
-          <a:bodyPr rtlCol="0" anchor="ctr"/>
-          <a:lstStyle/>
-          <a:p>
-            <a:pPr algn="ctr"/>
-            <a:endParaRPr lang="en-US"/>
+              <a:t>	• Secondary Slide</a:t>
+            </a:r>
+          </a:p>
+          <a:p>
+            <a:pPr>
+              <a:lnSpc>
+                <a:spcPct val="125000"/>
+              </a:lnSpc>
+            </a:pPr>
+            <a:r>
+              <a:rPr lang="en-US" dirty="0">
+                <a:latin typeface="Gotham Narrow Book" pitchFamily="2" charset="0"/>
+              </a:rPr>
+              <a:t>	• Secondary Slide</a:t>
+            </a:r>
+          </a:p>
+          <a:p>
+            <a:pPr>
+              <a:lnSpc>
+                <a:spcPct val="125000"/>
+              </a:lnSpc>
+            </a:pPr>
+            <a:r>
+              <a:rPr lang="en-US" dirty="0">
+                <a:latin typeface="Gotham Narrow Book" pitchFamily="2" charset="0"/>
+              </a:rPr>
+              <a:t>	• Secondary Slide</a:t>
+            </a:r>
+          </a:p>
+          <a:p>
+            <a:pPr>
+              <a:lnSpc>
+                <a:spcPct val="125000"/>
+              </a:lnSpc>
+            </a:pPr>
+            <a:r>
+              <a:rPr lang="en-US" dirty="0">
+                <a:latin typeface="Gotham Narrow Book" pitchFamily="2" charset="0"/>
+              </a:rPr>
+              <a:t>	• Secondary Slide</a:t>
+            </a:r>
+          </a:p>
+          <a:p>
+            <a:pPr>
+              <a:lnSpc>
+                <a:spcPct val="125000"/>
+              </a:lnSpc>
+            </a:pPr>
+            <a:r>
+              <a:rPr lang="en-US" dirty="0">
+                <a:latin typeface="Gotham Narrow Book" pitchFamily="2" charset="0"/>
+              </a:rPr>
+              <a:t>	• Secondary Slide</a:t>
+            </a:r>
           </a:p>
         </p:txBody>
       </p:sp>
     </p:spTree>
     <p:extLst>
       <p:ext uri="{BB962C8B-B14F-4D97-AF65-F5344CB8AC3E}">
-        <p14:creationId xmlns:p14="http://schemas.microsoft.com/office/powerpoint/2010/main" val="1304093165"/>
+        <p14:creationId xmlns:p14="http://schemas.microsoft.com/office/powerpoint/2010/main" val="1779087438"/>
       </p:ext>
     </p:extLst>
   </p:cSld>
@@ -7626,8 +8103,8 @@
         </p:nvSpPr>
         <p:spPr>
           <a:xfrm>
-            <a:off x="8635999" y="1115394"/>
-            <a:ext cx="2975628" cy="4256705"/>
+            <a:off x="5107708" y="1115395"/>
+            <a:ext cx="6503917" cy="4256705"/>
           </a:xfrm>
           <a:prstGeom prst="rect">
             <a:avLst/>
@@ -7655,6 +8132,246 @@
               <a:rPr lang="en-US" dirty="0" err="1">
                 <a:latin typeface="Gotham Narrow Book" pitchFamily="2" charset="0"/>
               </a:rPr>
+              <a:t>amet</a:t>
+            </a:r>
+            <a:r>
+              <a:rPr lang="en-US" dirty="0">
+                <a:latin typeface="Gotham Narrow Book" pitchFamily="2" charset="0"/>
+              </a:rPr>
+              <a:t>, </a:t>
+            </a:r>
+            <a:r>
+              <a:rPr lang="en-US" dirty="0" err="1">
+                <a:latin typeface="Gotham Narrow Book" pitchFamily="2" charset="0"/>
+              </a:rPr>
+              <a:t>consectetur</a:t>
+            </a:r>
+            <a:r>
+              <a:rPr lang="en-US" dirty="0">
+                <a:latin typeface="Gotham Narrow Book" pitchFamily="2" charset="0"/>
+              </a:rPr>
+              <a:t> </a:t>
+            </a:r>
+            <a:r>
+              <a:rPr lang="en-US" dirty="0" err="1">
+                <a:latin typeface="Gotham Narrow Book" pitchFamily="2" charset="0"/>
+              </a:rPr>
+              <a:t>adipiscing</a:t>
+            </a:r>
+            <a:r>
+              <a:rPr lang="en-US" dirty="0">
+                <a:latin typeface="Gotham Narrow Book" pitchFamily="2" charset="0"/>
+              </a:rPr>
+              <a:t> </a:t>
+            </a:r>
+            <a:r>
+              <a:rPr lang="en-US" dirty="0" err="1">
+                <a:latin typeface="Gotham Narrow Book" pitchFamily="2" charset="0"/>
+              </a:rPr>
+              <a:t>elit</a:t>
+            </a:r>
+            <a:r>
+              <a:rPr lang="en-US" dirty="0">
+                <a:latin typeface="Gotham Narrow Book" pitchFamily="2" charset="0"/>
+              </a:rPr>
+              <a:t>, sed do </a:t>
+            </a:r>
+            <a:r>
+              <a:rPr lang="en-US" dirty="0" err="1">
+                <a:latin typeface="Gotham Narrow Book" pitchFamily="2" charset="0"/>
+              </a:rPr>
+              <a:t>eiusmod</a:t>
+            </a:r>
+            <a:r>
+              <a:rPr lang="en-US" dirty="0">
+                <a:latin typeface="Gotham Narrow Book" pitchFamily="2" charset="0"/>
+              </a:rPr>
+              <a:t> </a:t>
+            </a:r>
+            <a:r>
+              <a:rPr lang="en-US" dirty="0" err="1">
+                <a:latin typeface="Gotham Narrow Book" pitchFamily="2" charset="0"/>
+              </a:rPr>
+              <a:t>tempor</a:t>
+            </a:r>
+            <a:r>
+              <a:rPr lang="en-US" dirty="0">
+                <a:latin typeface="Gotham Narrow Book" pitchFamily="2" charset="0"/>
+              </a:rPr>
+              <a:t> </a:t>
+            </a:r>
+            <a:r>
+              <a:rPr lang="en-US" dirty="0" err="1">
+                <a:latin typeface="Gotham Narrow Book" pitchFamily="2" charset="0"/>
+              </a:rPr>
+              <a:t>incididunt</a:t>
+            </a:r>
+            <a:r>
+              <a:rPr lang="en-US" dirty="0">
+                <a:latin typeface="Gotham Narrow Book" pitchFamily="2" charset="0"/>
+              </a:rPr>
+              <a:t> </a:t>
+            </a:r>
+            <a:r>
+              <a:rPr lang="en-US" dirty="0" err="1">
+                <a:latin typeface="Gotham Narrow Book" pitchFamily="2" charset="0"/>
+              </a:rPr>
+              <a:t>ut</a:t>
+            </a:r>
+            <a:r>
+              <a:rPr lang="en-US" dirty="0">
+                <a:latin typeface="Gotham Narrow Book" pitchFamily="2" charset="0"/>
+              </a:rPr>
+              <a:t> </a:t>
+            </a:r>
+            <a:r>
+              <a:rPr lang="en-US" dirty="0" err="1">
+                <a:latin typeface="Gotham Narrow Book" pitchFamily="2" charset="0"/>
+              </a:rPr>
+              <a:t>labore</a:t>
+            </a:r>
+            <a:r>
+              <a:rPr lang="en-US" dirty="0">
+                <a:latin typeface="Gotham Narrow Book" pitchFamily="2" charset="0"/>
+              </a:rPr>
+              <a:t> et dolore magna </a:t>
+            </a:r>
+            <a:r>
+              <a:rPr lang="en-US" dirty="0" err="1">
+                <a:latin typeface="Gotham Narrow Book" pitchFamily="2" charset="0"/>
+              </a:rPr>
+              <a:t>aliqua</a:t>
+            </a:r>
+            <a:r>
+              <a:rPr lang="en-US" dirty="0">
+                <a:latin typeface="Gotham Narrow Book" pitchFamily="2" charset="0"/>
+              </a:rPr>
+              <a:t>. Ut </a:t>
+            </a:r>
+            <a:r>
+              <a:rPr lang="en-US" dirty="0" err="1">
+                <a:latin typeface="Gotham Narrow Book" pitchFamily="2" charset="0"/>
+              </a:rPr>
+              <a:t>enim</a:t>
+            </a:r>
+            <a:r>
+              <a:rPr lang="en-US" dirty="0">
+                <a:latin typeface="Gotham Narrow Book" pitchFamily="2" charset="0"/>
+              </a:rPr>
+              <a:t> ad minim </a:t>
+            </a:r>
+            <a:r>
+              <a:rPr lang="en-US" dirty="0" err="1">
+                <a:latin typeface="Gotham Narrow Book" pitchFamily="2" charset="0"/>
+              </a:rPr>
+              <a:t>veniam</a:t>
+            </a:r>
+            <a:r>
+              <a:rPr lang="en-US" dirty="0">
+                <a:latin typeface="Gotham Narrow Book" pitchFamily="2" charset="0"/>
+              </a:rPr>
+              <a:t>, </a:t>
+            </a:r>
+            <a:r>
+              <a:rPr lang="en-US" dirty="0" err="1">
+                <a:latin typeface="Gotham Narrow Book" pitchFamily="2" charset="0"/>
+              </a:rPr>
+              <a:t>quis</a:t>
+            </a:r>
+            <a:r>
+              <a:rPr lang="en-US" dirty="0">
+                <a:latin typeface="Gotham Narrow Book" pitchFamily="2" charset="0"/>
+              </a:rPr>
+              <a:t> </a:t>
+            </a:r>
+            <a:r>
+              <a:rPr lang="en-US" dirty="0" err="1">
+                <a:latin typeface="Gotham Narrow Book" pitchFamily="2" charset="0"/>
+              </a:rPr>
+              <a:t>nostrud</a:t>
+            </a:r>
+            <a:r>
+              <a:rPr lang="en-US" dirty="0">
+                <a:latin typeface="Gotham Narrow Book" pitchFamily="2" charset="0"/>
+              </a:rPr>
+              <a:t> exercitation </a:t>
+            </a:r>
+            <a:r>
+              <a:rPr lang="en-US" dirty="0" err="1">
+                <a:latin typeface="Gotham Narrow Book" pitchFamily="2" charset="0"/>
+              </a:rPr>
+              <a:t>ullamco</a:t>
+            </a:r>
+            <a:r>
+              <a:rPr lang="en-US" dirty="0">
+                <a:latin typeface="Gotham Narrow Book" pitchFamily="2" charset="0"/>
+              </a:rPr>
+              <a:t> </a:t>
+            </a:r>
+            <a:r>
+              <a:rPr lang="en-US" dirty="0" err="1">
+                <a:latin typeface="Gotham Narrow Book" pitchFamily="2" charset="0"/>
+              </a:rPr>
+              <a:t>laboris</a:t>
+            </a:r>
+            <a:r>
+              <a:rPr lang="en-US" dirty="0">
+                <a:latin typeface="Gotham Narrow Book" pitchFamily="2" charset="0"/>
+              </a:rPr>
+              <a:t> nisi </a:t>
+            </a:r>
+            <a:r>
+              <a:rPr lang="en-US" dirty="0" err="1">
+                <a:latin typeface="Gotham Narrow Book" pitchFamily="2" charset="0"/>
+              </a:rPr>
+              <a:t>ut</a:t>
+            </a:r>
+            <a:r>
+              <a:rPr lang="en-US" dirty="0">
+                <a:latin typeface="Gotham Narrow Book" pitchFamily="2" charset="0"/>
+              </a:rPr>
+              <a:t> </a:t>
+            </a:r>
+            <a:r>
+              <a:rPr lang="en-US" dirty="0" err="1">
+                <a:latin typeface="Gotham Narrow Book" pitchFamily="2" charset="0"/>
+              </a:rPr>
+              <a:t>aliquip</a:t>
+            </a:r>
+            <a:r>
+              <a:rPr lang="en-US" dirty="0">
+                <a:latin typeface="Gotham Narrow Book" pitchFamily="2" charset="0"/>
+              </a:rPr>
+              <a:t> ex </a:t>
+            </a:r>
+            <a:r>
+              <a:rPr lang="en-US" dirty="0" err="1">
+                <a:latin typeface="Gotham Narrow Book" pitchFamily="2" charset="0"/>
+              </a:rPr>
+              <a:t>ea</a:t>
+            </a:r>
+            <a:r>
+              <a:rPr lang="en-US" dirty="0">
+                <a:latin typeface="Gotham Narrow Book" pitchFamily="2" charset="0"/>
+              </a:rPr>
+              <a:t> </a:t>
+            </a:r>
+            <a:r>
+              <a:rPr lang="en-US" dirty="0" err="1">
+                <a:latin typeface="Gotham Narrow Book" pitchFamily="2" charset="0"/>
+              </a:rPr>
+              <a:t>commodo</a:t>
+            </a:r>
+            <a:r>
+              <a:rPr lang="en-US" dirty="0">
+                <a:latin typeface="Gotham Narrow Book" pitchFamily="2" charset="0"/>
+              </a:rPr>
+              <a:t> </a:t>
+            </a:r>
+            <a:r>
+              <a:rPr lang="en-US" dirty="0" err="1">
+                <a:latin typeface="Gotham Narrow Book" pitchFamily="2" charset="0"/>
+              </a:rPr>
               <a:t>consequat</a:t>
             </a:r>
             <a:r>
@@ -7691,7 +8408,103 @@
               <a:rPr lang="en-US" dirty="0" err="1">
                 <a:latin typeface="Gotham Narrow Book" pitchFamily="2" charset="0"/>
               </a:rPr>
-              <a:t>reprehende</a:t>
+              <a:t>reprehenderit</a:t>
+            </a:r>
+            <a:r>
+              <a:rPr lang="en-US" dirty="0">
+                <a:latin typeface="Gotham Narrow Book" pitchFamily="2" charset="0"/>
+              </a:rPr>
+              <a:t> in </a:t>
+            </a:r>
+            <a:r>
+              <a:rPr lang="en-US" dirty="0" err="1">
+                <a:latin typeface="Gotham Narrow Book" pitchFamily="2" charset="0"/>
+              </a:rPr>
+              <a:t>voluptate</a:t>
+            </a:r>
+            <a:r>
+              <a:rPr lang="en-US" dirty="0">
+                <a:latin typeface="Gotham Narrow Book" pitchFamily="2" charset="0"/>
+              </a:rPr>
+              <a:t> </a:t>
+            </a:r>
+            <a:r>
+              <a:rPr lang="en-US" dirty="0" err="1">
+                <a:latin typeface="Gotham Narrow Book" pitchFamily="2" charset="0"/>
+              </a:rPr>
+              <a:t>velit</a:t>
+            </a:r>
+            <a:r>
+              <a:rPr lang="en-US" dirty="0">
+                <a:latin typeface="Gotham Narrow Book" pitchFamily="2" charset="0"/>
+              </a:rPr>
+              <a:t> </a:t>
+            </a:r>
+            <a:r>
+              <a:rPr lang="en-US" dirty="0" err="1">
+                <a:latin typeface="Gotham Narrow Book" pitchFamily="2" charset="0"/>
+              </a:rPr>
+              <a:t>esse</a:t>
+            </a:r>
+            <a:r>
+              <a:rPr lang="en-US" dirty="0">
+                <a:latin typeface="Gotham Narrow Book" pitchFamily="2" charset="0"/>
+              </a:rPr>
+              <a:t> </a:t>
+            </a:r>
+            <a:r>
+              <a:rPr lang="en-US" dirty="0" err="1">
+                <a:latin typeface="Gotham Narrow Book" pitchFamily="2" charset="0"/>
+              </a:rPr>
+              <a:t>cillum</a:t>
+            </a:r>
+            <a:r>
+              <a:rPr lang="en-US" dirty="0">
+                <a:latin typeface="Gotham Narrow Book" pitchFamily="2" charset="0"/>
+              </a:rPr>
+              <a:t> dolore </a:t>
+            </a:r>
+            <a:r>
+              <a:rPr lang="en-US" dirty="0" err="1">
+                <a:latin typeface="Gotham Narrow Book" pitchFamily="2" charset="0"/>
+              </a:rPr>
+              <a:t>eu</a:t>
+            </a:r>
+            <a:r>
+              <a:rPr lang="en-US" dirty="0">
+                <a:latin typeface="Gotham Narrow Book" pitchFamily="2" charset="0"/>
+              </a:rPr>
+              <a:t> </a:t>
+            </a:r>
+            <a:r>
+              <a:rPr lang="en-US" dirty="0" err="1">
+                <a:latin typeface="Gotham Narrow Book" pitchFamily="2" charset="0"/>
+              </a:rPr>
+              <a:t>fugiat</a:t>
+            </a:r>
+            <a:r>
+              <a:rPr lang="en-US" dirty="0">
+                <a:latin typeface="Gotham Narrow Book" pitchFamily="2" charset="0"/>
+              </a:rPr>
+              <a:t> </a:t>
+            </a:r>
+            <a:r>
+              <a:rPr lang="en-US" dirty="0" err="1">
+                <a:latin typeface="Gotham Narrow Book" pitchFamily="2" charset="0"/>
+              </a:rPr>
+              <a:t>nulla</a:t>
+            </a:r>
+            <a:r>
+              <a:rPr lang="en-US" dirty="0">
+                <a:latin typeface="Gotham Narrow Book" pitchFamily="2" charset="0"/>
+              </a:rPr>
+              <a:t> </a:t>
+            </a:r>
+            <a:r>
+              <a:rPr lang="en-US" dirty="0" err="1">
+                <a:latin typeface="Gotham Narrow Book" pitchFamily="2" charset="0"/>
+              </a:rPr>
+              <a:t>pariature</a:t>
             </a:r>
             <a:r>
               <a:rPr lang="en-US" dirty="0">
@@ -7706,9 +8519,12 @@
                 <a:spcPct val="125000"/>
               </a:lnSpc>
             </a:pPr>
-            <a:endParaRPr lang="en-US" dirty="0">
-              <a:latin typeface="Gotham Narrow Book" pitchFamily="2" charset="0"/>
-            </a:endParaRPr>
+            <a:r>
+              <a:rPr lang="en-US" dirty="0">
+                <a:latin typeface="Gotham Narrow Book" pitchFamily="2" charset="0"/>
+              </a:rPr>
+              <a:t>	</a:t>
+            </a:r>
           </a:p>
           <a:p>
             <a:pPr>
@@ -7720,7 +8536,7 @@
               <a:rPr lang="en-US" dirty="0">
                 <a:latin typeface="Gotham Narrow Book" pitchFamily="2" charset="0"/>
               </a:rPr>
-              <a:t>• Use this slide for multiple images</a:t>
+              <a:t>	• When single image is necessary</a:t>
             </a:r>
           </a:p>
           <a:p>
@@ -7733,7 +8549,7 @@
               <a:rPr lang="en-US" dirty="0">
                 <a:latin typeface="Gotham Narrow Book" pitchFamily="2" charset="0"/>
               </a:rPr>
-              <a:t>• If they absolutely require text</a:t>
+              <a:t>	• Use this as a reference for appropriate style</a:t>
             </a:r>
           </a:p>
           <a:p>
@@ -7746,27 +8562,17 @@
               <a:rPr lang="en-US" dirty="0">
                 <a:latin typeface="Gotham Narrow Book" pitchFamily="2" charset="0"/>
               </a:rPr>
-              <a:t>• Otherwise, use next slide for multiples</a:t>
-            </a:r>
-          </a:p>
-          <a:p>
-            <a:pPr>
-              <a:lnSpc>
-                <a:spcPct val="125000"/>
-              </a:lnSpc>
-            </a:pPr>
-            <a:endParaRPr lang="en-US" dirty="0">
-              <a:latin typeface="Gotham Narrow Book" pitchFamily="2" charset="0"/>
-            </a:endParaRPr>
-          </a:p>
-        </p:txBody>
-      </p:sp>
-      <p:sp>
-        <p:nvSpPr>
-          <p:cNvPr id="8" name="Rectangle 7">
-            <a:extLst>
-              <a:ext uri="{FF2B5EF4-FFF2-40B4-BE49-F238E27FC236}">
-                <a16:creationId xmlns:a16="http://schemas.microsoft.com/office/drawing/2014/main" id="{EC0271BB-6B97-9749-9D88-A5CC3B86D619}"/>
+              <a:t>	• Images. Images. Images.</a:t>
+            </a:r>
+          </a:p>
+        </p:txBody>
+      </p:sp>
+      <p:sp>
+        <p:nvSpPr>
+          <p:cNvPr id="2" name="Rectangle 1">
+            <a:extLst>
+              <a:ext uri="{FF2B5EF4-FFF2-40B4-BE49-F238E27FC236}">
+                <a16:creationId xmlns:a16="http://schemas.microsoft.com/office/drawing/2014/main" id="{97ABE370-7C49-B54D-BC97-DC52776CBD47}"/>
               </a:ext>
             </a:extLst>
           </p:cNvPr>
@@ -7775,8 +8581,8 @@
         </p:nvSpPr>
         <p:spPr>
           <a:xfrm>
-            <a:off x="988292" y="1115394"/>
-            <a:ext cx="3592946" cy="4256705"/>
+            <a:off x="988291" y="1115395"/>
+            <a:ext cx="3888509" cy="4256705"/>
           </a:xfrm>
           <a:prstGeom prst="rect">
             <a:avLst/>
@@ -7807,56 +8613,10 @@
           </a:p>
         </p:txBody>
       </p:sp>
-      <p:sp>
-        <p:nvSpPr>
-          <p:cNvPr id="9" name="Rectangle 8">
-            <a:extLst>
-              <a:ext uri="{FF2B5EF4-FFF2-40B4-BE49-F238E27FC236}">
-                <a16:creationId xmlns:a16="http://schemas.microsoft.com/office/drawing/2014/main" id="{38B83EF9-3F52-B145-A21A-EA0D8AC181A0}"/>
-              </a:ext>
-            </a:extLst>
-          </p:cNvPr>
-          <p:cNvSpPr/>
-          <p:nvPr/>
-        </p:nvSpPr>
-        <p:spPr>
-          <a:xfrm>
-            <a:off x="4812146" y="1115394"/>
-            <a:ext cx="3592946" cy="4256705"/>
-          </a:xfrm>
-          <a:prstGeom prst="rect">
-            <a:avLst/>
-          </a:prstGeom>
-        </p:spPr>
-        <p:style>
-          <a:lnRef idx="2">
-            <a:schemeClr val="accent1">
-              <a:shade val="50000"/>
-            </a:schemeClr>
-          </a:lnRef>
-          <a:fillRef idx="1">
-            <a:schemeClr val="accent1"/>
-          </a:fillRef>
-          <a:effectRef idx="0">
-            <a:schemeClr val="accent1"/>
-          </a:effectRef>
-          <a:fontRef idx="minor">
-            <a:schemeClr val="lt1"/>
-          </a:fontRef>
-        </p:style>
-        <p:txBody>
-          <a:bodyPr rtlCol="0" anchor="ctr"/>
-          <a:lstStyle/>
-          <a:p>
-            <a:pPr algn="ctr"/>
-            <a:endParaRPr lang="en-US"/>
-          </a:p>
-        </p:txBody>
-      </p:sp>
     </p:spTree>
     <p:extLst>
       <p:ext uri="{BB962C8B-B14F-4D97-AF65-F5344CB8AC3E}">
-        <p14:creationId xmlns:p14="http://schemas.microsoft.com/office/powerpoint/2010/main" val="3019877112"/>
+        <p14:creationId xmlns:p14="http://schemas.microsoft.com/office/powerpoint/2010/main" val="1304093165"/>
       </p:ext>
     </p:extLst>
   </p:cSld>
@@ -7939,10 +8699,159 @@
       </p:sp>
       <p:sp>
         <p:nvSpPr>
-          <p:cNvPr id="2" name="Rectangle 1">
-            <a:extLst>
-              <a:ext uri="{FF2B5EF4-FFF2-40B4-BE49-F238E27FC236}">
-                <a16:creationId xmlns:a16="http://schemas.microsoft.com/office/drawing/2014/main" id="{97ABE370-7C49-B54D-BC97-DC52776CBD47}"/>
+          <p:cNvPr id="6" name="TextBox 5">
+            <a:extLst>
+              <a:ext uri="{FF2B5EF4-FFF2-40B4-BE49-F238E27FC236}">
+                <a16:creationId xmlns:a16="http://schemas.microsoft.com/office/drawing/2014/main" id="{A87927AC-8429-D242-9F31-193EE99C1A6C}"/>
+              </a:ext>
+            </a:extLst>
+          </p:cNvPr>
+          <p:cNvSpPr txBox="1"/>
+          <p:nvPr/>
+        </p:nvSpPr>
+        <p:spPr>
+          <a:xfrm>
+            <a:off x="8635999" y="1115394"/>
+            <a:ext cx="2975628" cy="4256705"/>
+          </a:xfrm>
+          <a:prstGeom prst="rect">
+            <a:avLst/>
+          </a:prstGeom>
+          <a:noFill/>
+        </p:spPr>
+        <p:txBody>
+          <a:bodyPr wrap="square" rtlCol="0">
+            <a:noAutofit/>
+          </a:bodyPr>
+          <a:lstStyle/>
+          <a:p>
+            <a:pPr>
+              <a:lnSpc>
+                <a:spcPct val="125000"/>
+              </a:lnSpc>
+            </a:pPr>
+            <a:r>
+              <a:rPr lang="en-US" dirty="0">
+                <a:latin typeface="Gotham Narrow Book" pitchFamily="2" charset="0"/>
+              </a:rPr>
+              <a:t>Body copy goes here. Lorem ipsum dolor sit </a:t>
+            </a:r>
+            <a:r>
+              <a:rPr lang="en-US" dirty="0" err="1">
+                <a:latin typeface="Gotham Narrow Book" pitchFamily="2" charset="0"/>
+              </a:rPr>
+              <a:t>consequat</a:t>
+            </a:r>
+            <a:r>
+              <a:rPr lang="en-US" dirty="0">
+                <a:latin typeface="Gotham Narrow Book" pitchFamily="2" charset="0"/>
+              </a:rPr>
+              <a:t>. Duis </a:t>
+            </a:r>
+            <a:r>
+              <a:rPr lang="en-US" dirty="0" err="1">
+                <a:latin typeface="Gotham Narrow Book" pitchFamily="2" charset="0"/>
+              </a:rPr>
+              <a:t>aute</a:t>
+            </a:r>
+            <a:r>
+              <a:rPr lang="en-US" dirty="0">
+                <a:latin typeface="Gotham Narrow Book" pitchFamily="2" charset="0"/>
+              </a:rPr>
+              <a:t> </a:t>
+            </a:r>
+            <a:r>
+              <a:rPr lang="en-US" dirty="0" err="1">
+                <a:latin typeface="Gotham Narrow Book" pitchFamily="2" charset="0"/>
+              </a:rPr>
+              <a:t>irure</a:t>
+            </a:r>
+            <a:r>
+              <a:rPr lang="en-US" dirty="0">
+                <a:latin typeface="Gotham Narrow Book" pitchFamily="2" charset="0"/>
+              </a:rPr>
+              <a:t> dolor in </a:t>
+            </a:r>
+            <a:r>
+              <a:rPr lang="en-US" dirty="0" err="1">
+                <a:latin typeface="Gotham Narrow Book" pitchFamily="2" charset="0"/>
+              </a:rPr>
+              <a:t>reprehende</a:t>
+            </a:r>
+            <a:r>
+              <a:rPr lang="en-US" dirty="0">
+                <a:latin typeface="Gotham Narrow Book" pitchFamily="2" charset="0"/>
+              </a:rPr>
+              <a:t>.</a:t>
+            </a:r>
+          </a:p>
+          <a:p>
+            <a:pPr>
+              <a:lnSpc>
+                <a:spcPct val="125000"/>
+              </a:lnSpc>
+            </a:pPr>
+            <a:endParaRPr lang="en-US" dirty="0">
+              <a:latin typeface="Gotham Narrow Book" pitchFamily="2" charset="0"/>
+            </a:endParaRPr>
+          </a:p>
+          <a:p>
+            <a:pPr>
+              <a:lnSpc>
+                <a:spcPct val="125000"/>
+              </a:lnSpc>
+            </a:pPr>
+            <a:r>
+              <a:rPr lang="en-US" dirty="0">
+                <a:latin typeface="Gotham Narrow Book" pitchFamily="2" charset="0"/>
+              </a:rPr>
+              <a:t>• Use this slide for multiple images</a:t>
+            </a:r>
+          </a:p>
+          <a:p>
+            <a:pPr>
+              <a:lnSpc>
+                <a:spcPct val="125000"/>
+              </a:lnSpc>
+            </a:pPr>
+            <a:r>
+              <a:rPr lang="en-US" dirty="0">
+                <a:latin typeface="Gotham Narrow Book" pitchFamily="2" charset="0"/>
+              </a:rPr>
+              <a:t>• If they absolutely require text</a:t>
+            </a:r>
+          </a:p>
+          <a:p>
+            <a:pPr>
+              <a:lnSpc>
+                <a:spcPct val="125000"/>
+              </a:lnSpc>
+            </a:pPr>
+            <a:r>
+              <a:rPr lang="en-US" dirty="0">
+                <a:latin typeface="Gotham Narrow Book" pitchFamily="2" charset="0"/>
+              </a:rPr>
+              <a:t>• Otherwise, use next slide for multiples</a:t>
+            </a:r>
+          </a:p>
+          <a:p>
+            <a:pPr>
+              <a:lnSpc>
+                <a:spcPct val="125000"/>
+              </a:lnSpc>
+            </a:pPr>
+            <a:endParaRPr lang="en-US" dirty="0">
+              <a:latin typeface="Gotham Narrow Book" pitchFamily="2" charset="0"/>
+            </a:endParaRPr>
+          </a:p>
+        </p:txBody>
+      </p:sp>
+      <p:sp>
+        <p:nvSpPr>
+          <p:cNvPr id="8" name="Rectangle 7">
+            <a:extLst>
+              <a:ext uri="{FF2B5EF4-FFF2-40B4-BE49-F238E27FC236}">
+                <a16:creationId xmlns:a16="http://schemas.microsoft.com/office/drawing/2014/main" id="{EC0271BB-6B97-9749-9D88-A5CC3B86D619}"/>
               </a:ext>
             </a:extLst>
           </p:cNvPr>
@@ -7951,8 +8860,8 @@
         </p:nvSpPr>
         <p:spPr>
           <a:xfrm>
-            <a:off x="988292" y="1115395"/>
-            <a:ext cx="6503917" cy="4256705"/>
+            <a:off x="988292" y="1115394"/>
+            <a:ext cx="3592946" cy="4256705"/>
           </a:xfrm>
           <a:prstGeom prst="rect">
             <a:avLst/>
@@ -7979,16 +8888,16 @@
           <a:lstStyle/>
           <a:p>
             <a:pPr algn="ctr"/>
-            <a:endParaRPr lang="en-US" dirty="0"/>
-          </a:p>
-        </p:txBody>
-      </p:sp>
-      <p:sp>
-        <p:nvSpPr>
-          <p:cNvPr id="7" name="Rectangle 6">
-            <a:extLst>
-              <a:ext uri="{FF2B5EF4-FFF2-40B4-BE49-F238E27FC236}">
-                <a16:creationId xmlns:a16="http://schemas.microsoft.com/office/drawing/2014/main" id="{DFE81E64-7A57-7845-BEE2-C07904F7A7D8}"/>
+            <a:endParaRPr lang="en-US"/>
+          </a:p>
+        </p:txBody>
+      </p:sp>
+      <p:sp>
+        <p:nvSpPr>
+          <p:cNvPr id="9" name="Rectangle 8">
+            <a:extLst>
+              <a:ext uri="{FF2B5EF4-FFF2-40B4-BE49-F238E27FC236}">
+                <a16:creationId xmlns:a16="http://schemas.microsoft.com/office/drawing/2014/main" id="{38B83EF9-3F52-B145-A21A-EA0D8AC181A0}"/>
               </a:ext>
             </a:extLst>
           </p:cNvPr>
@@ -7997,8 +8906,8 @@
         </p:nvSpPr>
         <p:spPr>
           <a:xfrm>
-            <a:off x="7723117" y="1115395"/>
-            <a:ext cx="3888509" cy="2015732"/>
+            <a:off x="4812146" y="1115394"/>
+            <a:ext cx="3592946" cy="4256705"/>
           </a:xfrm>
           <a:prstGeom prst="rect">
             <a:avLst/>
@@ -8029,56 +8938,10 @@
           </a:p>
         </p:txBody>
       </p:sp>
-      <p:sp>
-        <p:nvSpPr>
-          <p:cNvPr id="8" name="Rectangle 7">
-            <a:extLst>
-              <a:ext uri="{FF2B5EF4-FFF2-40B4-BE49-F238E27FC236}">
-                <a16:creationId xmlns:a16="http://schemas.microsoft.com/office/drawing/2014/main" id="{A07ECD11-F74C-3D42-8A2D-B2538B33996C}"/>
-              </a:ext>
-            </a:extLst>
-          </p:cNvPr>
-          <p:cNvSpPr/>
-          <p:nvPr/>
-        </p:nvSpPr>
-        <p:spPr>
-          <a:xfrm>
-            <a:off x="7723116" y="3356368"/>
-            <a:ext cx="3888509" cy="2015732"/>
-          </a:xfrm>
-          <a:prstGeom prst="rect">
-            <a:avLst/>
-          </a:prstGeom>
-        </p:spPr>
-        <p:style>
-          <a:lnRef idx="2">
-            <a:schemeClr val="accent1">
-              <a:shade val="50000"/>
-            </a:schemeClr>
-          </a:lnRef>
-          <a:fillRef idx="1">
-            <a:schemeClr val="accent1"/>
-          </a:fillRef>
-          <a:effectRef idx="0">
-            <a:schemeClr val="accent1"/>
-          </a:effectRef>
-          <a:fontRef idx="minor">
-            <a:schemeClr val="lt1"/>
-          </a:fontRef>
-        </p:style>
-        <p:txBody>
-          <a:bodyPr rtlCol="0" anchor="ctr"/>
-          <a:lstStyle/>
-          <a:p>
-            <a:pPr algn="ctr"/>
-            <a:endParaRPr lang="en-US"/>
-          </a:p>
-        </p:txBody>
-      </p:sp>
     </p:spTree>
     <p:extLst>
       <p:ext uri="{BB962C8B-B14F-4D97-AF65-F5344CB8AC3E}">
-        <p14:creationId xmlns:p14="http://schemas.microsoft.com/office/powerpoint/2010/main" val="756621199"/>
+        <p14:creationId xmlns:p14="http://schemas.microsoft.com/office/powerpoint/2010/main" val="3019877112"/>
       </p:ext>
     </p:extLst>
   </p:cSld>

--- a/MELISOvsGPU.pptx
+++ b/MELISOvsGPU.pptx
@@ -118,7 +118,7 @@
   <p:extLst>
     <p:ext uri="{EFAFB233-063F-42B5-8137-9DF3F51BA10A}">
       <p15:sldGuideLst xmlns:p15="http://schemas.microsoft.com/office/powerpoint/2012/main">
-        <p15:guide id="1" orient="horz" pos="3384" userDrawn="1">
+        <p15:guide id="1" orient="horz" pos="3432" userDrawn="1">
           <p15:clr>
             <a:srgbClr val="A4A3A4"/>
           </p15:clr>
@@ -137,7 +137,8 @@
 <file path=ppt/revisionInfo.xml><?xml version="1.0" encoding="utf-8"?>
 <p1510:revInfo xmlns:a="http://schemas.openxmlformats.org/drawingml/2006/main" xmlns:r="http://schemas.openxmlformats.org/officeDocument/2006/relationships" xmlns:p1510="http://schemas.microsoft.com/office/powerpoint/2015/10/main">
   <p1510:revLst>
-    <p1510:client id="{6486FCFF-8752-4976-86E7-4BDA6065866B}" v="51" dt="2025-04-04T00:12:45.750"/>
+    <p1510:client id="{49634A00-7B53-5240-B5A7-76D836DF3C57}" v="315" dt="2025-04-04T13:48:46.536"/>
+    <p1510:client id="{6486FCFF-8752-4976-86E7-4BDA6065866B}" v="87" dt="2025-04-04T23:30:12.809"/>
   </p1510:revLst>
 </p1510:revInfo>
 </file>
@@ -146,433 +147,74 @@
 <pc:chgInfo xmlns:a="http://schemas.openxmlformats.org/drawingml/2006/main" xmlns:r="http://schemas.openxmlformats.org/officeDocument/2006/relationships" xmlns:ac="http://schemas.microsoft.com/office/drawing/2013/main/command" xmlns:pc="http://schemas.microsoft.com/office/powerpoint/2013/main/command">
   <pc:docChgLst>
     <pc:chgData name="Quang-Nguyen Vo-Huynh" userId="6a1b2bcfbbb34c0c" providerId="LiveId" clId="{6486FCFF-8752-4976-86E7-4BDA6065866B}"/>
-    <pc:docChg chg="undo redo custSel addSld modSld">
-      <pc:chgData name="Quang-Nguyen Vo-Huynh" userId="6a1b2bcfbbb34c0c" providerId="LiveId" clId="{6486FCFF-8752-4976-86E7-4BDA6065866B}" dt="2025-04-04T00:12:59.976" v="1394" actId="20577"/>
+    <pc:docChg chg="undo custSel modSld">
+      <pc:chgData name="Quang-Nguyen Vo-Huynh" userId="6a1b2bcfbbb34c0c" providerId="LiveId" clId="{6486FCFF-8752-4976-86E7-4BDA6065866B}" dt="2025-04-04T23:30:21.336" v="265" actId="20577"/>
       <pc:docMkLst>
         <pc:docMk/>
       </pc:docMkLst>
-      <pc:sldChg chg="addSp delSp modSp mod">
-        <pc:chgData name="Quang-Nguyen Vo-Huynh" userId="6a1b2bcfbbb34c0c" providerId="LiveId" clId="{6486FCFF-8752-4976-86E7-4BDA6065866B}" dt="2025-04-03T19:10:36.933" v="541" actId="14100"/>
-        <pc:sldMkLst>
-          <pc:docMk/>
-          <pc:sldMk cId="1045490457" sldId="257"/>
-        </pc:sldMkLst>
-        <pc:spChg chg="add del mod">
-          <ac:chgData name="Quang-Nguyen Vo-Huynh" userId="6a1b2bcfbbb34c0c" providerId="LiveId" clId="{6486FCFF-8752-4976-86E7-4BDA6065866B}" dt="2025-04-03T18:55:52.507" v="36" actId="478"/>
-          <ac:spMkLst>
-            <pc:docMk/>
-            <pc:sldMk cId="1045490457" sldId="257"/>
-            <ac:spMk id="4" creationId="{EEA810A0-6B0E-4732-AB76-997103DADB4A}"/>
-          </ac:spMkLst>
-        </pc:spChg>
-        <pc:spChg chg="add mod">
-          <ac:chgData name="Quang-Nguyen Vo-Huynh" userId="6a1b2bcfbbb34c0c" providerId="LiveId" clId="{6486FCFF-8752-4976-86E7-4BDA6065866B}" dt="2025-04-03T18:56:17.870" v="45" actId="1035"/>
-          <ac:spMkLst>
-            <pc:docMk/>
-            <pc:sldMk cId="1045490457" sldId="257"/>
-            <ac:spMk id="5" creationId="{5107C4F1-D4C6-FCE2-29C7-9A48E4A8DB7C}"/>
-          </ac:spMkLst>
-        </pc:spChg>
-        <pc:spChg chg="add mod">
-          <ac:chgData name="Quang-Nguyen Vo-Huynh" userId="6a1b2bcfbbb34c0c" providerId="LiveId" clId="{6486FCFF-8752-4976-86E7-4BDA6065866B}" dt="2025-04-03T18:56:34.691" v="53" actId="14100"/>
-          <ac:spMkLst>
-            <pc:docMk/>
-            <pc:sldMk cId="1045490457" sldId="257"/>
-            <ac:spMk id="6" creationId="{38A8E737-8A49-12A6-5C5E-716EAB874168}"/>
-          </ac:spMkLst>
-        </pc:spChg>
-        <pc:spChg chg="add mod">
-          <ac:chgData name="Quang-Nguyen Vo-Huynh" userId="6a1b2bcfbbb34c0c" providerId="LiveId" clId="{6486FCFF-8752-4976-86E7-4BDA6065866B}" dt="2025-04-03T19:07:49.032" v="272" actId="14100"/>
-          <ac:spMkLst>
-            <pc:docMk/>
-            <pc:sldMk cId="1045490457" sldId="257"/>
-            <ac:spMk id="8" creationId="{80820429-15C0-28A3-9B19-1F9BF67EF0F5}"/>
-          </ac:spMkLst>
-        </pc:spChg>
-        <pc:spChg chg="mod">
-          <ac:chgData name="Quang-Nguyen Vo-Huynh" userId="6a1b2bcfbbb34c0c" providerId="LiveId" clId="{6486FCFF-8752-4976-86E7-4BDA6065866B}" dt="2025-04-03T18:55:03.804" v="29" actId="1076"/>
-          <ac:spMkLst>
-            <pc:docMk/>
-            <pc:sldMk cId="1045490457" sldId="257"/>
-            <ac:spMk id="10" creationId="{9B71DA5C-13E2-A149-B419-F04D98AC3511}"/>
-          </ac:spMkLst>
-        </pc:spChg>
-        <pc:spChg chg="mod">
-          <ac:chgData name="Quang-Nguyen Vo-Huynh" userId="6a1b2bcfbbb34c0c" providerId="LiveId" clId="{6486FCFF-8752-4976-86E7-4BDA6065866B}" dt="2025-04-03T18:55:00.501" v="28" actId="1076"/>
-          <ac:spMkLst>
-            <pc:docMk/>
-            <pc:sldMk cId="1045490457" sldId="257"/>
-            <ac:spMk id="11" creationId="{DD074894-0E99-894A-9B1A-0D7C79F5F6D7}"/>
-          </ac:spMkLst>
-        </pc:spChg>
-        <pc:spChg chg="mod">
-          <ac:chgData name="Quang-Nguyen Vo-Huynh" userId="6a1b2bcfbbb34c0c" providerId="LiveId" clId="{6486FCFF-8752-4976-86E7-4BDA6065866B}" dt="2025-04-03T19:09:00.950" v="477" actId="20577"/>
-          <ac:spMkLst>
-            <pc:docMk/>
-            <pc:sldMk cId="1045490457" sldId="257"/>
-            <ac:spMk id="12" creationId="{B0E297CD-5450-7441-A033-60CDC02876B0}"/>
-          </ac:spMkLst>
-        </pc:spChg>
-        <pc:spChg chg="add mod">
-          <ac:chgData name="Quang-Nguyen Vo-Huynh" userId="6a1b2bcfbbb34c0c" providerId="LiveId" clId="{6486FCFF-8752-4976-86E7-4BDA6065866B}" dt="2025-04-03T19:06:59.815" v="267" actId="1076"/>
-          <ac:spMkLst>
-            <pc:docMk/>
-            <pc:sldMk cId="1045490457" sldId="257"/>
-            <ac:spMk id="13" creationId="{F64AC631-6E96-BDA2-0FE0-05BC812DD181}"/>
-          </ac:spMkLst>
-        </pc:spChg>
-        <pc:spChg chg="add mod">
-          <ac:chgData name="Quang-Nguyen Vo-Huynh" userId="6a1b2bcfbbb34c0c" providerId="LiveId" clId="{6486FCFF-8752-4976-86E7-4BDA6065866B}" dt="2025-04-03T19:10:36.933" v="541" actId="14100"/>
-          <ac:spMkLst>
-            <pc:docMk/>
-            <pc:sldMk cId="1045490457" sldId="257"/>
-            <ac:spMk id="18" creationId="{7125C2F2-3D54-0341-6B37-C4848752A90E}"/>
-          </ac:spMkLst>
-        </pc:spChg>
-        <pc:picChg chg="add mod">
-          <ac:chgData name="Quang-Nguyen Vo-Huynh" userId="6a1b2bcfbbb34c0c" providerId="LiveId" clId="{6486FCFF-8752-4976-86E7-4BDA6065866B}" dt="2025-04-03T18:55:16.612" v="32" actId="14100"/>
-          <ac:picMkLst>
-            <pc:docMk/>
-            <pc:sldMk cId="1045490457" sldId="257"/>
-            <ac:picMk id="3" creationId="{18B44170-16CA-B15C-93B3-6264D8ECB5C6}"/>
-          </ac:picMkLst>
-        </pc:picChg>
-        <pc:cxnChg chg="add mod">
-          <ac:chgData name="Quang-Nguyen Vo-Huynh" userId="6a1b2bcfbbb34c0c" providerId="LiveId" clId="{6486FCFF-8752-4976-86E7-4BDA6065866B}" dt="2025-04-03T19:07:13.969" v="269" actId="208"/>
-          <ac:cxnSpMkLst>
-            <pc:docMk/>
-            <pc:sldMk cId="1045490457" sldId="257"/>
-            <ac:cxnSpMk id="15" creationId="{0FBB2B1F-F5CE-4F23-BDB2-58AE3C0CA2A1}"/>
-          </ac:cxnSpMkLst>
-        </pc:cxnChg>
-        <pc:cxnChg chg="add mod">
-          <ac:chgData name="Quang-Nguyen Vo-Huynh" userId="6a1b2bcfbbb34c0c" providerId="LiveId" clId="{6486FCFF-8752-4976-86E7-4BDA6065866B}" dt="2025-04-03T19:07:28.785" v="271" actId="208"/>
-          <ac:cxnSpMkLst>
-            <pc:docMk/>
-            <pc:sldMk cId="1045490457" sldId="257"/>
-            <ac:cxnSpMk id="17" creationId="{54BFC188-5E64-7823-A8C3-C614F4729CAE}"/>
-          </ac:cxnSpMkLst>
-        </pc:cxnChg>
-      </pc:sldChg>
-      <pc:sldChg chg="mod modShow">
-        <pc:chgData name="Quang-Nguyen Vo-Huynh" userId="6a1b2bcfbbb34c0c" providerId="LiveId" clId="{6486FCFF-8752-4976-86E7-4BDA6065866B}" dt="2025-04-03T19:10:06.586" v="537" actId="729"/>
-        <pc:sldMkLst>
-          <pc:docMk/>
-          <pc:sldMk cId="1663129815" sldId="258"/>
-        </pc:sldMkLst>
-      </pc:sldChg>
-      <pc:sldChg chg="mod modShow">
-        <pc:chgData name="Quang-Nguyen Vo-Huynh" userId="6a1b2bcfbbb34c0c" providerId="LiveId" clId="{6486FCFF-8752-4976-86E7-4BDA6065866B}" dt="2025-04-03T19:10:06.586" v="537" actId="729"/>
-        <pc:sldMkLst>
-          <pc:docMk/>
-          <pc:sldMk cId="1779087438" sldId="259"/>
-        </pc:sldMkLst>
-      </pc:sldChg>
-      <pc:sldChg chg="mod modShow">
-        <pc:chgData name="Quang-Nguyen Vo-Huynh" userId="6a1b2bcfbbb34c0c" providerId="LiveId" clId="{6486FCFF-8752-4976-86E7-4BDA6065866B}" dt="2025-04-03T19:10:06.586" v="537" actId="729"/>
-        <pc:sldMkLst>
-          <pc:docMk/>
-          <pc:sldMk cId="1304093165" sldId="260"/>
-        </pc:sldMkLst>
-      </pc:sldChg>
-      <pc:sldChg chg="mod modShow">
-        <pc:chgData name="Quang-Nguyen Vo-Huynh" userId="6a1b2bcfbbb34c0c" providerId="LiveId" clId="{6486FCFF-8752-4976-86E7-4BDA6065866B}" dt="2025-04-03T19:10:06.586" v="537" actId="729"/>
-        <pc:sldMkLst>
-          <pc:docMk/>
-          <pc:sldMk cId="756621199" sldId="261"/>
-        </pc:sldMkLst>
-      </pc:sldChg>
-      <pc:sldChg chg="mod modShow">
-        <pc:chgData name="Quang-Nguyen Vo-Huynh" userId="6a1b2bcfbbb34c0c" providerId="LiveId" clId="{6486FCFF-8752-4976-86E7-4BDA6065866B}" dt="2025-04-03T19:10:06.586" v="537" actId="729"/>
-        <pc:sldMkLst>
-          <pc:docMk/>
-          <pc:sldMk cId="3019877112" sldId="262"/>
-        </pc:sldMkLst>
-      </pc:sldChg>
-      <pc:sldChg chg="mod modShow">
-        <pc:chgData name="Quang-Nguyen Vo-Huynh" userId="6a1b2bcfbbb34c0c" providerId="LiveId" clId="{6486FCFF-8752-4976-86E7-4BDA6065866B}" dt="2025-04-03T19:10:06.586" v="537" actId="729"/>
-        <pc:sldMkLst>
-          <pc:docMk/>
-          <pc:sldMk cId="3546150263" sldId="263"/>
-        </pc:sldMkLst>
-      </pc:sldChg>
-      <pc:sldChg chg="addSp delSp modSp mod">
-        <pc:chgData name="Quang-Nguyen Vo-Huynh" userId="6a1b2bcfbbb34c0c" providerId="LiveId" clId="{6486FCFF-8752-4976-86E7-4BDA6065866B}" dt="2025-04-03T19:11:27.349" v="573" actId="1076"/>
-        <pc:sldMkLst>
-          <pc:docMk/>
-          <pc:sldMk cId="1288842434" sldId="266"/>
-        </pc:sldMkLst>
-        <pc:spChg chg="add mod">
-          <ac:chgData name="Quang-Nguyen Vo-Huynh" userId="6a1b2bcfbbb34c0c" providerId="LiveId" clId="{6486FCFF-8752-4976-86E7-4BDA6065866B}" dt="2025-04-03T19:11:15.758" v="571"/>
-          <ac:spMkLst>
-            <pc:docMk/>
-            <pc:sldMk cId="1288842434" sldId="266"/>
-            <ac:spMk id="2" creationId="{B5541AB6-E9CA-F07D-355C-175DE376731B}"/>
-          </ac:spMkLst>
-        </pc:spChg>
-        <pc:spChg chg="add mod">
-          <ac:chgData name="Quang-Nguyen Vo-Huynh" userId="6a1b2bcfbbb34c0c" providerId="LiveId" clId="{6486FCFF-8752-4976-86E7-4BDA6065866B}" dt="2025-04-03T19:11:27.349" v="573" actId="1076"/>
-          <ac:spMkLst>
-            <pc:docMk/>
-            <pc:sldMk cId="1288842434" sldId="266"/>
-            <ac:spMk id="3" creationId="{C38B8077-CE6A-5385-81E5-F52A04C87B83}"/>
-          </ac:spMkLst>
-        </pc:spChg>
-        <pc:spChg chg="del mod">
-          <ac:chgData name="Quang-Nguyen Vo-Huynh" userId="6a1b2bcfbbb34c0c" providerId="LiveId" clId="{6486FCFF-8752-4976-86E7-4BDA6065866B}" dt="2025-04-03T19:11:15.447" v="570" actId="478"/>
-          <ac:spMkLst>
-            <pc:docMk/>
-            <pc:sldMk cId="1288842434" sldId="266"/>
-            <ac:spMk id="6" creationId="{1851FAA6-B02C-0841-8093-DB5B5E2D753C}"/>
-          </ac:spMkLst>
-        </pc:spChg>
-      </pc:sldChg>
-      <pc:sldChg chg="addSp delSp modSp add mod">
-        <pc:chgData name="Quang-Nguyen Vo-Huynh" userId="6a1b2bcfbbb34c0c" providerId="LiveId" clId="{6486FCFF-8752-4976-86E7-4BDA6065866B}" dt="2025-04-04T00:05:24.605" v="1213" actId="20577"/>
+      <pc:sldChg chg="modSp mod">
+        <pc:chgData name="Quang-Nguyen Vo-Huynh" userId="6a1b2bcfbbb34c0c" providerId="LiveId" clId="{6486FCFF-8752-4976-86E7-4BDA6065866B}" dt="2025-04-04T23:30:21.336" v="265" actId="20577"/>
         <pc:sldMkLst>
           <pc:docMk/>
           <pc:sldMk cId="602613557" sldId="267"/>
         </pc:sldMkLst>
-        <pc:spChg chg="add del">
-          <ac:chgData name="Quang-Nguyen Vo-Huynh" userId="6a1b2bcfbbb34c0c" providerId="LiveId" clId="{6486FCFF-8752-4976-86E7-4BDA6065866B}" dt="2025-04-03T19:09:56.506" v="536" actId="478"/>
-          <ac:spMkLst>
-            <pc:docMk/>
-            <pc:sldMk cId="602613557" sldId="267"/>
-            <ac:spMk id="5" creationId="{7AE297E6-6A52-F35E-EC49-7910EE6175FB}"/>
-          </ac:spMkLst>
-        </pc:spChg>
-        <pc:spChg chg="add del">
-          <ac:chgData name="Quang-Nguyen Vo-Huynh" userId="6a1b2bcfbbb34c0c" providerId="LiveId" clId="{6486FCFF-8752-4976-86E7-4BDA6065866B}" dt="2025-04-03T19:09:56.506" v="536" actId="478"/>
-          <ac:spMkLst>
-            <pc:docMk/>
-            <pc:sldMk cId="602613557" sldId="267"/>
-            <ac:spMk id="6" creationId="{8AD03BB7-B317-2B6E-ED24-A049EE6AC579}"/>
-          </ac:spMkLst>
-        </pc:spChg>
-        <pc:spChg chg="add del">
-          <ac:chgData name="Quang-Nguyen Vo-Huynh" userId="6a1b2bcfbbb34c0c" providerId="LiveId" clId="{6486FCFF-8752-4976-86E7-4BDA6065866B}" dt="2025-04-03T19:09:56.506" v="536" actId="478"/>
-          <ac:spMkLst>
-            <pc:docMk/>
-            <pc:sldMk cId="602613557" sldId="267"/>
-            <ac:spMk id="8" creationId="{3FA44690-92A7-D66A-22E9-FB55FCD14376}"/>
-          </ac:spMkLst>
-        </pc:spChg>
         <pc:spChg chg="mod">
-          <ac:chgData name="Quang-Nguyen Vo-Huynh" userId="6a1b2bcfbbb34c0c" providerId="LiveId" clId="{6486FCFF-8752-4976-86E7-4BDA6065866B}" dt="2025-04-03T19:09:37.354" v="529" actId="20577"/>
-          <ac:spMkLst>
-            <pc:docMk/>
-            <pc:sldMk cId="602613557" sldId="267"/>
-            <ac:spMk id="11" creationId="{CEAB13F5-595C-8253-C197-5B1649ACF2E3}"/>
-          </ac:spMkLst>
-        </pc:spChg>
-        <pc:spChg chg="add del mod">
-          <ac:chgData name="Quang-Nguyen Vo-Huynh" userId="6a1b2bcfbbb34c0c" providerId="LiveId" clId="{6486FCFF-8752-4976-86E7-4BDA6065866B}" dt="2025-04-03T23:06:57.744" v="900" actId="20577"/>
+          <ac:chgData name="Quang-Nguyen Vo-Huynh" userId="6a1b2bcfbbb34c0c" providerId="LiveId" clId="{6486FCFF-8752-4976-86E7-4BDA6065866B}" dt="2025-04-04T23:09:46.843" v="157" actId="20577"/>
           <ac:spMkLst>
             <pc:docMk/>
             <pc:sldMk cId="602613557" sldId="267"/>
             <ac:spMk id="12" creationId="{0068D70A-C8DB-EDA1-501E-9F46F17FC28D}"/>
           </ac:spMkLst>
         </pc:spChg>
-        <pc:spChg chg="add del">
-          <ac:chgData name="Quang-Nguyen Vo-Huynh" userId="6a1b2bcfbbb34c0c" providerId="LiveId" clId="{6486FCFF-8752-4976-86E7-4BDA6065866B}" dt="2025-04-03T19:09:56.506" v="536" actId="478"/>
-          <ac:spMkLst>
-            <pc:docMk/>
-            <pc:sldMk cId="602613557" sldId="267"/>
-            <ac:spMk id="13" creationId="{480E0BC6-C543-423F-5D82-4D0D0242CBF9}"/>
-          </ac:spMkLst>
-        </pc:spChg>
-        <pc:spChg chg="add del">
-          <ac:chgData name="Quang-Nguyen Vo-Huynh" userId="6a1b2bcfbbb34c0c" providerId="LiveId" clId="{6486FCFF-8752-4976-86E7-4BDA6065866B}" dt="2025-04-03T19:09:56.506" v="536" actId="478"/>
-          <ac:spMkLst>
-            <pc:docMk/>
-            <pc:sldMk cId="602613557" sldId="267"/>
-            <ac:spMk id="18" creationId="{01E9ECFE-B656-A991-E9D1-9E67EF01F3A9}"/>
-          </ac:spMkLst>
-        </pc:spChg>
-        <pc:graphicFrameChg chg="add mod modGraphic">
-          <ac:chgData name="Quang-Nguyen Vo-Huynh" userId="6a1b2bcfbbb34c0c" providerId="LiveId" clId="{6486FCFF-8752-4976-86E7-4BDA6065866B}" dt="2025-04-04T00:05:24.605" v="1213" actId="20577"/>
+        <pc:graphicFrameChg chg="mod modGraphic">
+          <ac:chgData name="Quang-Nguyen Vo-Huynh" userId="6a1b2bcfbbb34c0c" providerId="LiveId" clId="{6486FCFF-8752-4976-86E7-4BDA6065866B}" dt="2025-04-04T23:30:21.336" v="265" actId="20577"/>
           <ac:graphicFrameMkLst>
             <pc:docMk/>
             <pc:sldMk cId="602613557" sldId="267"/>
             <ac:graphicFrameMk id="2" creationId="{98974048-6FED-9403-D4AC-9B4AB925BC9B}"/>
           </ac:graphicFrameMkLst>
         </pc:graphicFrameChg>
-        <pc:picChg chg="add del">
-          <ac:chgData name="Quang-Nguyen Vo-Huynh" userId="6a1b2bcfbbb34c0c" providerId="LiveId" clId="{6486FCFF-8752-4976-86E7-4BDA6065866B}" dt="2025-04-03T19:09:56.506" v="536" actId="478"/>
-          <ac:picMkLst>
+      </pc:sldChg>
+    </pc:docChg>
+  </pc:docChgLst>
+  <pc:docChgLst>
+    <pc:chgData name="Quang-Nguyen Vo-Huynh" userId="6a1b2bcfbbb34c0c" providerId="LiveId" clId="{49634A00-7B53-5240-B5A7-76D836DF3C57}"/>
+    <pc:docChg chg="undo custSel modSld">
+      <pc:chgData name="Quang-Nguyen Vo-Huynh" userId="6a1b2bcfbbb34c0c" providerId="LiveId" clId="{49634A00-7B53-5240-B5A7-76D836DF3C57}" dt="2025-04-04T13:47:14.972" v="312" actId="20577"/>
+      <pc:docMkLst>
+        <pc:docMk/>
+      </pc:docMkLst>
+      <pc:sldChg chg="addSp modSp mod">
+        <pc:chgData name="Quang-Nguyen Vo-Huynh" userId="6a1b2bcfbbb34c0c" providerId="LiveId" clId="{49634A00-7B53-5240-B5A7-76D836DF3C57}" dt="2025-04-04T13:47:14.972" v="312" actId="20577"/>
+        <pc:sldMkLst>
+          <pc:docMk/>
+          <pc:sldMk cId="602613557" sldId="267"/>
+        </pc:sldMkLst>
+        <pc:spChg chg="add mod">
+          <ac:chgData name="Quang-Nguyen Vo-Huynh" userId="6a1b2bcfbbb34c0c" providerId="LiveId" clId="{49634A00-7B53-5240-B5A7-76D836DF3C57}" dt="2025-04-04T13:47:14.972" v="312" actId="20577"/>
+          <ac:spMkLst>
             <pc:docMk/>
             <pc:sldMk cId="602613557" sldId="267"/>
-            <ac:picMk id="3" creationId="{44B00FAD-AD31-5183-6AFF-920245E63F84}"/>
-          </ac:picMkLst>
-        </pc:picChg>
-        <pc:cxnChg chg="add del mod">
-          <ac:chgData name="Quang-Nguyen Vo-Huynh" userId="6a1b2bcfbbb34c0c" providerId="LiveId" clId="{6486FCFF-8752-4976-86E7-4BDA6065866B}" dt="2025-04-03T19:09:56.506" v="536" actId="478"/>
-          <ac:cxnSpMkLst>
+            <ac:spMk id="3" creationId="{667B7F80-39B3-9E4E-CDB2-112503DEA4F1}"/>
+          </ac:spMkLst>
+        </pc:spChg>
+        <pc:graphicFrameChg chg="modGraphic">
+          <ac:chgData name="Quang-Nguyen Vo-Huynh" userId="6a1b2bcfbbb34c0c" providerId="LiveId" clId="{49634A00-7B53-5240-B5A7-76D836DF3C57}" dt="2025-04-04T13:45:24.005" v="108" actId="20577"/>
+          <ac:graphicFrameMkLst>
             <pc:docMk/>
             <pc:sldMk cId="602613557" sldId="267"/>
-            <ac:cxnSpMk id="15" creationId="{8F386B0F-ADB2-7A38-4977-44267ECDDB31}"/>
-          </ac:cxnSpMkLst>
-        </pc:cxnChg>
-        <pc:cxnChg chg="add del mod">
-          <ac:chgData name="Quang-Nguyen Vo-Huynh" userId="6a1b2bcfbbb34c0c" providerId="LiveId" clId="{6486FCFF-8752-4976-86E7-4BDA6065866B}" dt="2025-04-03T19:09:56.506" v="536" actId="478"/>
-          <ac:cxnSpMkLst>
-            <pc:docMk/>
-            <pc:sldMk cId="602613557" sldId="267"/>
-            <ac:cxnSpMk id="17" creationId="{7F19AB58-58AB-4C0F-8A98-82D9B9446C01}"/>
-          </ac:cxnSpMkLst>
-        </pc:cxnChg>
-      </pc:sldChg>
-      <pc:sldChg chg="addSp delSp modSp add mod">
-        <pc:chgData name="Quang-Nguyen Vo-Huynh" userId="6a1b2bcfbbb34c0c" providerId="LiveId" clId="{6486FCFF-8752-4976-86E7-4BDA6065866B}" dt="2025-04-04T00:05:11.427" v="1212" actId="1076"/>
-        <pc:sldMkLst>
-          <pc:docMk/>
-          <pc:sldMk cId="3020415987" sldId="268"/>
-        </pc:sldMkLst>
-        <pc:spChg chg="add mod">
-          <ac:chgData name="Quang-Nguyen Vo-Huynh" userId="6a1b2bcfbbb34c0c" providerId="LiveId" clId="{6486FCFF-8752-4976-86E7-4BDA6065866B}" dt="2025-04-03T23:38:46.750" v="1167" actId="1076"/>
-          <ac:spMkLst>
-            <pc:docMk/>
-            <pc:sldMk cId="3020415987" sldId="268"/>
-            <ac:spMk id="4" creationId="{E4EF3038-17B3-FB14-10BE-2E7446ECFE2D}"/>
-          </ac:spMkLst>
-        </pc:spChg>
-        <pc:spChg chg="add mod">
-          <ac:chgData name="Quang-Nguyen Vo-Huynh" userId="6a1b2bcfbbb34c0c" providerId="LiveId" clId="{6486FCFF-8752-4976-86E7-4BDA6065866B}" dt="2025-04-03T23:38:38.157" v="1165" actId="1076"/>
-          <ac:spMkLst>
-            <pc:docMk/>
-            <pc:sldMk cId="3020415987" sldId="268"/>
-            <ac:spMk id="7" creationId="{AB94BE8C-777C-A307-9AF5-D49FD09495F6}"/>
-          </ac:spMkLst>
-        </pc:spChg>
-        <pc:spChg chg="add mod">
-          <ac:chgData name="Quang-Nguyen Vo-Huynh" userId="6a1b2bcfbbb34c0c" providerId="LiveId" clId="{6486FCFF-8752-4976-86E7-4BDA6065866B}" dt="2025-04-04T00:00:48.929" v="1206" actId="14100"/>
-          <ac:spMkLst>
-            <pc:docMk/>
-            <pc:sldMk cId="3020415987" sldId="268"/>
-            <ac:spMk id="8" creationId="{5B378BF3-CBB3-3FB3-9F05-1BD5EDFD45E0}"/>
-          </ac:spMkLst>
-        </pc:spChg>
-        <pc:spChg chg="mod">
-          <ac:chgData name="Quang-Nguyen Vo-Huynh" userId="6a1b2bcfbbb34c0c" providerId="LiveId" clId="{6486FCFF-8752-4976-86E7-4BDA6065866B}" dt="2025-04-03T23:19:31.144" v="1096" actId="20577"/>
-          <ac:spMkLst>
-            <pc:docMk/>
-            <pc:sldMk cId="3020415987" sldId="268"/>
-            <ac:spMk id="11" creationId="{AEFFBD17-43B7-894F-AFEA-8E0E6A5F7E98}"/>
-          </ac:spMkLst>
-        </pc:spChg>
-        <pc:spChg chg="del">
-          <ac:chgData name="Quang-Nguyen Vo-Huynh" userId="6a1b2bcfbbb34c0c" providerId="LiveId" clId="{6486FCFF-8752-4976-86E7-4BDA6065866B}" dt="2025-04-03T23:19:36.040" v="1097" actId="478"/>
-          <ac:spMkLst>
-            <pc:docMk/>
-            <pc:sldMk cId="3020415987" sldId="268"/>
-            <ac:spMk id="12" creationId="{1D34D478-FA91-8E2E-FCE2-933ECEF9B13F}"/>
-          </ac:spMkLst>
-        </pc:spChg>
-        <pc:grpChg chg="add mod">
-          <ac:chgData name="Quang-Nguyen Vo-Huynh" userId="6a1b2bcfbbb34c0c" providerId="LiveId" clId="{6486FCFF-8752-4976-86E7-4BDA6065866B}" dt="2025-04-03T23:38:46.750" v="1167" actId="1076"/>
-          <ac:grpSpMkLst>
-            <pc:docMk/>
-            <pc:sldMk cId="3020415987" sldId="268"/>
-            <ac:grpSpMk id="5" creationId="{59795E21-DA31-A5BA-B12B-96D86AC4F108}"/>
-          </ac:grpSpMkLst>
-        </pc:grpChg>
-        <pc:graphicFrameChg chg="del">
-          <ac:chgData name="Quang-Nguyen Vo-Huynh" userId="6a1b2bcfbbb34c0c" providerId="LiveId" clId="{6486FCFF-8752-4976-86E7-4BDA6065866B}" dt="2025-04-03T23:19:39.078" v="1098" actId="478"/>
-          <ac:graphicFrameMkLst>
-            <pc:docMk/>
-            <pc:sldMk cId="3020415987" sldId="268"/>
-            <ac:graphicFrameMk id="2" creationId="{C9600E8E-A314-1D51-255C-1AEA58EC0404}"/>
+            <ac:graphicFrameMk id="2" creationId="{98974048-6FED-9403-D4AC-9B4AB925BC9B}"/>
           </ac:graphicFrameMkLst>
         </pc:graphicFrameChg>
-        <pc:picChg chg="add del mod">
-          <ac:chgData name="Quang-Nguyen Vo-Huynh" userId="6a1b2bcfbbb34c0c" providerId="LiveId" clId="{6486FCFF-8752-4976-86E7-4BDA6065866B}" dt="2025-04-03T23:58:20.060" v="1197" actId="478"/>
-          <ac:picMkLst>
-            <pc:docMk/>
-            <pc:sldMk cId="3020415987" sldId="268"/>
-            <ac:picMk id="2" creationId="{91EE67DC-2AF2-AE58-E056-D6FAC6AE5C07}"/>
-          </ac:picMkLst>
-        </pc:picChg>
-        <pc:picChg chg="add mod">
-          <ac:chgData name="Quang-Nguyen Vo-Huynh" userId="6a1b2bcfbbb34c0c" providerId="LiveId" clId="{6486FCFF-8752-4976-86E7-4BDA6065866B}" dt="2025-04-04T00:00:24.095" v="1201" actId="1076"/>
-          <ac:picMkLst>
-            <pc:docMk/>
-            <pc:sldMk cId="3020415987" sldId="268"/>
-            <ac:picMk id="3" creationId="{1C132775-0121-69A6-4129-1D9BD186437B}"/>
-          </ac:picMkLst>
-        </pc:picChg>
-        <pc:picChg chg="add del mod">
-          <ac:chgData name="Quang-Nguyen Vo-Huynh" userId="6a1b2bcfbbb34c0c" providerId="LiveId" clId="{6486FCFF-8752-4976-86E7-4BDA6065866B}" dt="2025-04-03T23:39:40.821" v="1174" actId="478"/>
-          <ac:picMkLst>
-            <pc:docMk/>
-            <pc:sldMk cId="3020415987" sldId="268"/>
-            <ac:picMk id="9" creationId="{7D8BFFDD-A0A0-518E-6FD9-6097521502F0}"/>
-          </ac:picMkLst>
-        </pc:picChg>
-        <pc:picChg chg="add mod">
-          <ac:chgData name="Quang-Nguyen Vo-Huynh" userId="6a1b2bcfbbb34c0c" providerId="LiveId" clId="{6486FCFF-8752-4976-86E7-4BDA6065866B}" dt="2025-04-04T00:04:59.689" v="1210" actId="1076"/>
-          <ac:picMkLst>
-            <pc:docMk/>
-            <pc:sldMk cId="3020415987" sldId="268"/>
-            <ac:picMk id="9" creationId="{99747D26-248E-CD85-DEBC-A15C12059DE5}"/>
-          </ac:picMkLst>
-        </pc:picChg>
-        <pc:picChg chg="add mod">
-          <ac:chgData name="Quang-Nguyen Vo-Huynh" userId="6a1b2bcfbbb34c0c" providerId="LiveId" clId="{6486FCFF-8752-4976-86E7-4BDA6065866B}" dt="2025-04-03T23:38:46.750" v="1167" actId="1076"/>
-          <ac:picMkLst>
-            <pc:docMk/>
-            <pc:sldMk cId="3020415987" sldId="268"/>
-            <ac:picMk id="1026" creationId="{071D94FC-373A-CE1C-3F78-8F30A9E048A5}"/>
-          </ac:picMkLst>
-        </pc:picChg>
-        <pc:picChg chg="add mod">
-          <ac:chgData name="Quang-Nguyen Vo-Huynh" userId="6a1b2bcfbbb34c0c" providerId="LiveId" clId="{6486FCFF-8752-4976-86E7-4BDA6065866B}" dt="2025-04-03T23:38:42.036" v="1166" actId="1076"/>
-          <ac:picMkLst>
-            <pc:docMk/>
-            <pc:sldMk cId="3020415987" sldId="268"/>
-            <ac:picMk id="1028" creationId="{201F9ED0-7E72-FE07-157E-4F6D5A0D09B3}"/>
-          </ac:picMkLst>
-        </pc:picChg>
-        <pc:picChg chg="add mod">
-          <ac:chgData name="Quang-Nguyen Vo-Huynh" userId="6a1b2bcfbbb34c0c" providerId="LiveId" clId="{6486FCFF-8752-4976-86E7-4BDA6065866B}" dt="2025-04-03T23:44:35.071" v="1182" actId="1076"/>
-          <ac:picMkLst>
-            <pc:docMk/>
-            <pc:sldMk cId="3020415987" sldId="268"/>
-            <ac:picMk id="1030" creationId="{480BDE92-0965-5E2F-02E8-ED525B946677}"/>
-          </ac:picMkLst>
-        </pc:picChg>
-        <pc:cxnChg chg="add mod">
-          <ac:chgData name="Quang-Nguyen Vo-Huynh" userId="6a1b2bcfbbb34c0c" providerId="LiveId" clId="{6486FCFF-8752-4976-86E7-4BDA6065866B}" dt="2025-04-04T00:05:11.427" v="1212" actId="1076"/>
-          <ac:cxnSpMkLst>
-            <pc:docMk/>
-            <pc:sldMk cId="3020415987" sldId="268"/>
-            <ac:cxnSpMk id="12" creationId="{0B25E909-E35D-2DB7-097B-F0E8F5849B77}"/>
-          </ac:cxnSpMkLst>
-        </pc:cxnChg>
-        <pc:cxnChg chg="add mod">
-          <ac:chgData name="Quang-Nguyen Vo-Huynh" userId="6a1b2bcfbbb34c0c" providerId="LiveId" clId="{6486FCFF-8752-4976-86E7-4BDA6065866B}" dt="2025-04-03T23:44:48.056" v="1185" actId="14100"/>
-          <ac:cxnSpMkLst>
-            <pc:docMk/>
-            <pc:sldMk cId="3020415987" sldId="268"/>
-            <ac:cxnSpMk id="14" creationId="{3446585D-C4EE-0497-C15B-8677B711D0C1}"/>
-          </ac:cxnSpMkLst>
-        </pc:cxnChg>
       </pc:sldChg>
-      <pc:sldChg chg="modSp add mod">
-        <pc:chgData name="Quang-Nguyen Vo-Huynh" userId="6a1b2bcfbbb34c0c" providerId="LiveId" clId="{6486FCFF-8752-4976-86E7-4BDA6065866B}" dt="2025-04-04T00:12:59.976" v="1394" actId="20577"/>
+      <pc:sldChg chg="modSp mod">
+        <pc:chgData name="Quang-Nguyen Vo-Huynh" userId="6a1b2bcfbbb34c0c" providerId="LiveId" clId="{49634A00-7B53-5240-B5A7-76D836DF3C57}" dt="2025-04-04T13:45:08.318" v="102" actId="122"/>
         <pc:sldMkLst>
           <pc:docMk/>
           <pc:sldMk cId="151919946" sldId="269"/>
         </pc:sldMkLst>
         <pc:spChg chg="mod">
-          <ac:chgData name="Quang-Nguyen Vo-Huynh" userId="6a1b2bcfbbb34c0c" providerId="LiveId" clId="{6486FCFF-8752-4976-86E7-4BDA6065866B}" dt="2025-04-04T00:06:49.563" v="1224" actId="20577"/>
-          <ac:spMkLst>
-            <pc:docMk/>
-            <pc:sldMk cId="151919946" sldId="269"/>
-            <ac:spMk id="11" creationId="{7022E541-1F1E-8E1E-8F08-CE80A692C52A}"/>
-          </ac:spMkLst>
-        </pc:spChg>
-        <pc:spChg chg="mod">
-          <ac:chgData name="Quang-Nguyen Vo-Huynh" userId="6a1b2bcfbbb34c0c" providerId="LiveId" clId="{6486FCFF-8752-4976-86E7-4BDA6065866B}" dt="2025-04-04T00:07:20.773" v="1288" actId="20577"/>
+          <ac:chgData name="Quang-Nguyen Vo-Huynh" userId="6a1b2bcfbbb34c0c" providerId="LiveId" clId="{49634A00-7B53-5240-B5A7-76D836DF3C57}" dt="2025-04-04T13:40:53.689" v="55" actId="20577"/>
           <ac:spMkLst>
             <pc:docMk/>
             <pc:sldMk cId="151919946" sldId="269"/>
@@ -580,7 +222,7 @@
           </ac:spMkLst>
         </pc:spChg>
         <pc:graphicFrameChg chg="mod modGraphic">
-          <ac:chgData name="Quang-Nguyen Vo-Huynh" userId="6a1b2bcfbbb34c0c" providerId="LiveId" clId="{6486FCFF-8752-4976-86E7-4BDA6065866B}" dt="2025-04-04T00:12:59.976" v="1394" actId="20577"/>
+          <ac:chgData name="Quang-Nguyen Vo-Huynh" userId="6a1b2bcfbbb34c0c" providerId="LiveId" clId="{49634A00-7B53-5240-B5A7-76D836DF3C57}" dt="2025-04-04T13:45:08.318" v="102" actId="122"/>
           <ac:graphicFrameMkLst>
             <pc:docMk/>
             <pc:sldMk cId="151919946" sldId="269"/>
@@ -743,7 +385,7 @@
           <a:p>
             <a:fld id="{8F923C7D-B11C-8E43-A742-35D7D77F5333}" type="datetimeFigureOut">
               <a:rPr lang="en-US" smtClean="0"/>
-              <a:t>4/3/2025</a:t>
+              <a:t>4/4/2025</a:t>
             </a:fld>
             <a:endParaRPr lang="en-US"/>
           </a:p>
@@ -957,7 +599,7 @@
           <a:p>
             <a:fld id="{8F923C7D-B11C-8E43-A742-35D7D77F5333}" type="datetimeFigureOut">
               <a:rPr lang="en-US" smtClean="0"/>
-              <a:t>4/3/2025</a:t>
+              <a:t>4/4/2025</a:t>
             </a:fld>
             <a:endParaRPr lang="en-US"/>
           </a:p>
@@ -1176,7 +818,7 @@
           <a:p>
             <a:fld id="{8F923C7D-B11C-8E43-A742-35D7D77F5333}" type="datetimeFigureOut">
               <a:rPr lang="en-US" smtClean="0"/>
-              <a:t>4/3/2025</a:t>
+              <a:t>4/4/2025</a:t>
             </a:fld>
             <a:endParaRPr lang="en-US"/>
           </a:p>
@@ -1390,7 +1032,7 @@
           <a:p>
             <a:fld id="{8F923C7D-B11C-8E43-A742-35D7D77F5333}" type="datetimeFigureOut">
               <a:rPr lang="en-US" smtClean="0"/>
-              <a:t>4/3/2025</a:t>
+              <a:t>4/4/2025</a:t>
             </a:fld>
             <a:endParaRPr lang="en-US"/>
           </a:p>
@@ -1676,7 +1318,7 @@
           <a:p>
             <a:fld id="{8F923C7D-B11C-8E43-A742-35D7D77F5333}" type="datetimeFigureOut">
               <a:rPr lang="en-US" smtClean="0"/>
-              <a:t>4/3/2025</a:t>
+              <a:t>4/4/2025</a:t>
             </a:fld>
             <a:endParaRPr lang="en-US"/>
           </a:p>
@@ -1957,7 +1599,7 @@
           <a:p>
             <a:fld id="{8F923C7D-B11C-8E43-A742-35D7D77F5333}" type="datetimeFigureOut">
               <a:rPr lang="en-US" smtClean="0"/>
-              <a:t>4/3/2025</a:t>
+              <a:t>4/4/2025</a:t>
             </a:fld>
             <a:endParaRPr lang="en-US"/>
           </a:p>
@@ -2380,7 +2022,7 @@
           <a:p>
             <a:fld id="{8F923C7D-B11C-8E43-A742-35D7D77F5333}" type="datetimeFigureOut">
               <a:rPr lang="en-US" smtClean="0"/>
-              <a:t>4/3/2025</a:t>
+              <a:t>4/4/2025</a:t>
             </a:fld>
             <a:endParaRPr lang="en-US"/>
           </a:p>
@@ -2537,7 +2179,7 @@
           <a:p>
             <a:fld id="{8F923C7D-B11C-8E43-A742-35D7D77F5333}" type="datetimeFigureOut">
               <a:rPr lang="en-US" smtClean="0"/>
-              <a:t>4/3/2025</a:t>
+              <a:t>4/4/2025</a:t>
             </a:fld>
             <a:endParaRPr lang="en-US"/>
           </a:p>
@@ -2658,7 +2300,7 @@
           <a:p>
             <a:fld id="{8F923C7D-B11C-8E43-A742-35D7D77F5333}" type="datetimeFigureOut">
               <a:rPr lang="en-US" smtClean="0"/>
-              <a:t>4/3/2025</a:t>
+              <a:t>4/4/2025</a:t>
             </a:fld>
             <a:endParaRPr lang="en-US"/>
           </a:p>
@@ -2980,7 +2622,7 @@
           <a:p>
             <a:fld id="{8F923C7D-B11C-8E43-A742-35D7D77F5333}" type="datetimeFigureOut">
               <a:rPr lang="en-US" smtClean="0"/>
-              <a:t>4/3/2025</a:t>
+              <a:t>4/4/2025</a:t>
             </a:fld>
             <a:endParaRPr lang="en-US"/>
           </a:p>
@@ -3282,7 +2924,7 @@
           <a:p>
             <a:fld id="{8F923C7D-B11C-8E43-A742-35D7D77F5333}" type="datetimeFigureOut">
               <a:rPr lang="en-US" smtClean="0"/>
-              <a:t>4/3/2025</a:t>
+              <a:t>4/4/2025</a:t>
             </a:fld>
             <a:endParaRPr lang="en-US"/>
           </a:p>
@@ -3493,7 +3135,7 @@
           <a:p>
             <a:fld id="{8F923C7D-B11C-8E43-A742-35D7D77F5333}" type="datetimeFigureOut">
               <a:rPr lang="en-US" smtClean="0"/>
-              <a:t>4/3/2025</a:t>
+              <a:t>4/4/2025</a:t>
             </a:fld>
             <a:endParaRPr lang="en-US"/>
           </a:p>
@@ -3948,7 +3590,7 @@
           <a:lstStyle/>
           <a:p>
             <a:r>
-              <a:rPr lang="en-US" sz="4800" dirty="0">
+              <a:rPr lang="en-US" sz="4800">
                 <a:solidFill>
                   <a:schemeClr val="bg1"/>
                 </a:solidFill>
@@ -3988,33 +3630,33 @@
           <a:lstStyle/>
           <a:p>
             <a:r>
-              <a:rPr lang="en-US" sz="1600" b="1" dirty="0">
+              <a:rPr lang="en-US" sz="1600" b="1">
                 <a:latin typeface="Gotham Narrow Bold" pitchFamily="2" charset="0"/>
                 <a:cs typeface="Rubik" panose="02000604000000020004" pitchFamily="2" charset="-79"/>
               </a:rPr>
               <a:t>Huynh Q. N. Vo</a:t>
             </a:r>
             <a:br>
-              <a:rPr lang="en-US" sz="1600" b="1" dirty="0">
+              <a:rPr lang="en-US" sz="1600" b="1">
                 <a:latin typeface="Gotham Narrow Bold" pitchFamily="2" charset="0"/>
                 <a:cs typeface="Rubik" panose="02000604000000020004" pitchFamily="2" charset="-79"/>
               </a:rPr>
             </a:br>
             <a:r>
-              <a:rPr lang="en-US" sz="1600" b="1" dirty="0">
+              <a:rPr lang="en-US" sz="1600" b="1">
                 <a:latin typeface="Gotham Narrow Bold" pitchFamily="2" charset="0"/>
                 <a:cs typeface="Rubik" panose="02000604000000020004" pitchFamily="2" charset="-79"/>
               </a:rPr>
               <a:t>School of Industrial Engineering and Management</a:t>
             </a:r>
             <a:br>
-              <a:rPr lang="en-US" sz="1600" b="1" dirty="0">
+              <a:rPr lang="en-US" sz="1600" b="1">
                 <a:latin typeface="Gotham Narrow Bold" pitchFamily="2" charset="0"/>
                 <a:cs typeface="Rubik" panose="02000604000000020004" pitchFamily="2" charset="-79"/>
               </a:rPr>
             </a:br>
             <a:r>
-              <a:rPr lang="en-US" sz="1600" b="1" dirty="0">
+              <a:rPr lang="en-US" sz="1600" b="1">
                 <a:latin typeface="Gotham Narrow Bold" pitchFamily="2" charset="0"/>
                 <a:cs typeface="Rubik" panose="02000604000000020004" pitchFamily="2" charset="-79"/>
               </a:rPr>
@@ -4052,33 +3694,33 @@
           <a:lstStyle/>
           <a:p>
             <a:r>
-              <a:rPr lang="en-US" sz="1600" b="1" dirty="0">
+              <a:rPr lang="en-US" sz="1600" b="1">
                 <a:latin typeface="Gotham Narrow Bold" pitchFamily="2" charset="0"/>
                 <a:cs typeface="Rubik" panose="02000604000000020004" pitchFamily="2" charset="-79"/>
               </a:rPr>
               <a:t>Paritosh Ramanan</a:t>
             </a:r>
             <a:br>
-              <a:rPr lang="en-US" sz="1600" b="1" dirty="0">
+              <a:rPr lang="en-US" sz="1600" b="1">
                 <a:latin typeface="Gotham Narrow Bold" pitchFamily="2" charset="0"/>
                 <a:cs typeface="Rubik" panose="02000604000000020004" pitchFamily="2" charset="-79"/>
               </a:rPr>
             </a:br>
             <a:r>
-              <a:rPr lang="en-US" sz="1600" b="1" dirty="0">
+              <a:rPr lang="en-US" sz="1600" b="1">
                 <a:latin typeface="Gotham Narrow Bold" pitchFamily="2" charset="0"/>
                 <a:cs typeface="Rubik" panose="02000604000000020004" pitchFamily="2" charset="-79"/>
               </a:rPr>
               <a:t>School of Industrial Engineering and Management</a:t>
             </a:r>
             <a:br>
-              <a:rPr lang="en-US" sz="1600" b="1" dirty="0">
+              <a:rPr lang="en-US" sz="1600" b="1">
                 <a:latin typeface="Gotham Narrow Bold" pitchFamily="2" charset="0"/>
                 <a:cs typeface="Rubik" panose="02000604000000020004" pitchFamily="2" charset="-79"/>
               </a:rPr>
             </a:br>
             <a:r>
-              <a:rPr lang="en-US" sz="1600" b="1" dirty="0">
+              <a:rPr lang="en-US" sz="1600" b="1">
                 <a:latin typeface="Gotham Narrow Bold" pitchFamily="2" charset="0"/>
                 <a:cs typeface="Rubik" panose="02000604000000020004" pitchFamily="2" charset="-79"/>
               </a:rPr>
@@ -4160,7 +3802,7 @@
           <a:lstStyle/>
           <a:p>
             <a:r>
-              <a:rPr lang="en-US" sz="2400" b="1" dirty="0">
+              <a:rPr lang="en-US" sz="2400" b="1">
                 <a:solidFill>
                   <a:srgbClr val="63666A"/>
                 </a:solidFill>
@@ -4213,7 +3855,7 @@
           <a:lstStyle/>
           <a:p>
             <a:pPr algn="ctr"/>
-            <a:endParaRPr lang="en-US" dirty="0"/>
+            <a:endParaRPr lang="en-US"/>
           </a:p>
         </p:txBody>
       </p:sp>
@@ -4382,7 +4024,7 @@
           <a:lstStyle/>
           <a:p>
             <a:r>
-              <a:rPr lang="en-US" sz="2400" b="1" dirty="0">
+              <a:rPr lang="en-US" sz="2400" b="1">
                 <a:solidFill>
                   <a:srgbClr val="63666A"/>
                 </a:solidFill>
@@ -4427,7 +4069,7 @@
               </a:lnSpc>
             </a:pPr>
             <a:r>
-              <a:rPr lang="en-US" dirty="0">
+              <a:rPr lang="en-US">
                 <a:latin typeface="Gotham Narrow Book" pitchFamily="2" charset="0"/>
               </a:rPr>
               <a:t>Body copy goes here. Last slide in a section. Last slide in a section. Last slide in a section. Last slide in a section. Last slide in a section. Last slide in a section. Last slide in a section. Last slide in a section. Last slide in a section. Last slide in a section. Last slide in a section. Last slide in a section. Last slide in a section. Last slide in a section. Last slide in a section. Last slide in a section. Last slide in a section. Last slide in a section. </a:t>
@@ -4440,7 +4082,7 @@
               </a:lnSpc>
             </a:pPr>
             <a:r>
-              <a:rPr lang="en-US" dirty="0">
+              <a:rPr lang="en-US">
                 <a:latin typeface="Gotham Narrow Book" pitchFamily="2" charset="0"/>
               </a:rPr>
               <a:t>	</a:t>
@@ -4453,7 +4095,7 @@
               </a:lnSpc>
             </a:pPr>
             <a:r>
-              <a:rPr lang="en-US" dirty="0">
+              <a:rPr lang="en-US">
                 <a:latin typeface="Gotham Narrow Book" pitchFamily="2" charset="0"/>
               </a:rPr>
               <a:t>Body copy goes here. Last slide in a section. Last slide in a section. Last slide in a section. Last slide in a section. Last slide in a section. Last slide in a section. Last slide in a section. Last slide in a section. Last slide in a section. Last slide in a section. Last slide in a section. Last slide in a section. Last slide in a section. Last slide in a section. Last slide in a section. Last slide in a section. Last slide in a section. Last slide in a section. </a:t>
@@ -4465,7 +4107,7 @@
                 <a:spcPct val="125000"/>
               </a:lnSpc>
             </a:pPr>
-            <a:endParaRPr lang="en-US" dirty="0">
+            <a:endParaRPr lang="en-US">
               <a:latin typeface="Gotham Narrow Book" pitchFamily="2" charset="0"/>
             </a:endParaRPr>
           </a:p>
@@ -4476,7 +4118,7 @@
               </a:lnSpc>
             </a:pPr>
             <a:r>
-              <a:rPr lang="en-US" dirty="0">
+              <a:rPr lang="en-US">
                 <a:latin typeface="Gotham Narrow Book" pitchFamily="2" charset="0"/>
               </a:rPr>
               <a:t>	• Last slide in each section</a:t>
@@ -4489,7 +4131,7 @@
               </a:lnSpc>
             </a:pPr>
             <a:r>
-              <a:rPr lang="en-US" dirty="0">
+              <a:rPr lang="en-US">
                 <a:latin typeface="Gotham Narrow Book" pitchFamily="2" charset="0"/>
               </a:rPr>
               <a:t>	• Last slide in each section</a:t>
@@ -4570,7 +4212,7 @@
           <a:lstStyle/>
           <a:p>
             <a:r>
-              <a:rPr lang="en-US" sz="2400" b="1" dirty="0">
+              <a:rPr lang="en-US" sz="2400" b="1">
                 <a:solidFill>
                   <a:srgbClr val="63666A"/>
                 </a:solidFill>
@@ -4579,7 +4221,7 @@
               <a:t>O | </a:t>
             </a:r>
             <a:r>
-              <a:rPr lang="en-US" sz="2400" dirty="0">
+              <a:rPr lang="en-US" sz="2400">
                 <a:solidFill>
                   <a:srgbClr val="63666A"/>
                 </a:solidFill>
@@ -4590,7 +4232,7 @@
           </a:p>
           <a:p>
             <a:r>
-              <a:rPr lang="en-US" sz="2400" b="1" dirty="0">
+              <a:rPr lang="en-US" sz="2400" b="1">
                 <a:solidFill>
                   <a:srgbClr val="63666A"/>
                 </a:solidFill>
@@ -4599,7 +4241,7 @@
               <a:t>C | </a:t>
             </a:r>
             <a:r>
-              <a:rPr lang="en-US" sz="2400" dirty="0">
+              <a:rPr lang="en-US" sz="2400">
                 <a:solidFill>
                   <a:srgbClr val="63666A"/>
                 </a:solidFill>
@@ -4610,7 +4252,7 @@
           </a:p>
           <a:p>
             <a:r>
-              <a:rPr lang="en-US" sz="2400" b="1" dirty="0">
+              <a:rPr lang="en-US" sz="2400" b="1">
                 <a:solidFill>
                   <a:srgbClr val="63666A"/>
                 </a:solidFill>
@@ -4619,7 +4261,7 @@
               <a:t>E | </a:t>
             </a:r>
             <a:r>
-              <a:rPr lang="en-US" sz="2400" dirty="0" err="1">
+              <a:rPr lang="en-US" sz="2400" err="1">
                 <a:solidFill>
                   <a:srgbClr val="63666A"/>
                 </a:solidFill>
@@ -4627,7 +4269,7 @@
               </a:rPr>
               <a:t>name.presenter@okstate.edu</a:t>
             </a:r>
-            <a:endParaRPr lang="en-US" sz="2400" dirty="0">
+            <a:endParaRPr lang="en-US" sz="2400">
               <a:solidFill>
                 <a:srgbClr val="63666A"/>
               </a:solidFill>
@@ -4636,7 +4278,7 @@
           </a:p>
           <a:p>
             <a:r>
-              <a:rPr lang="en-US" sz="2400" dirty="0">
+              <a:rPr lang="en-US" sz="2400">
                 <a:solidFill>
                   <a:srgbClr val="63666A"/>
                 </a:solidFill>
@@ -4646,7 +4288,7 @@
             </a:r>
           </a:p>
           <a:p>
-            <a:endParaRPr lang="en-US" sz="2400" dirty="0">
+            <a:endParaRPr lang="en-US" sz="2400">
               <a:solidFill>
                 <a:schemeClr val="accent6"/>
               </a:solidFill>
@@ -4655,7 +4297,7 @@
           </a:p>
           <a:p>
             <a:r>
-              <a:rPr lang="en-US" sz="2400" b="1" dirty="0" err="1">
+              <a:rPr lang="en-US" sz="2400" b="1" err="1">
                 <a:solidFill>
                   <a:srgbClr val="FB6400"/>
                 </a:solidFill>
@@ -4664,7 +4306,7 @@
               <a:t>brand.okstate.edu</a:t>
             </a:r>
             <a:r>
-              <a:rPr lang="en-US" sz="2400" b="1" dirty="0">
+              <a:rPr lang="en-US" sz="2400" b="1">
                 <a:solidFill>
                   <a:srgbClr val="FB6400"/>
                 </a:solidFill>
@@ -4704,7 +4346,7 @@
           <a:lstStyle/>
           <a:p>
             <a:r>
-              <a:rPr lang="en-US" sz="6300" dirty="0">
+              <a:rPr lang="en-US" sz="6300">
                 <a:solidFill>
                   <a:srgbClr val="63666A"/>
                 </a:solidFill>
@@ -4744,7 +4386,7 @@
           <a:lstStyle/>
           <a:p>
             <a:r>
-              <a:rPr lang="en-US" sz="3000" b="1" dirty="0">
+              <a:rPr lang="en-US" sz="3000" b="1">
                 <a:solidFill>
                   <a:srgbClr val="FB6400"/>
                 </a:solidFill>
@@ -4830,7 +4472,7 @@
           <a:p>
             <a:pPr algn="ctr"/>
             <a:r>
-              <a:rPr lang="en-US" sz="6300" dirty="0">
+              <a:rPr lang="en-US" sz="6300">
                 <a:solidFill>
                   <a:srgbClr val="FB6400"/>
                 </a:solidFill>
@@ -4914,7 +4556,7 @@
           <a:lstStyle/>
           <a:p>
             <a:r>
-              <a:rPr lang="en-US" sz="4800" dirty="0">
+              <a:rPr lang="en-US" sz="4800">
                 <a:solidFill>
                   <a:srgbClr val="FB6400"/>
                 </a:solidFill>
@@ -4954,7 +4596,7 @@
           <a:lstStyle/>
           <a:p>
             <a:r>
-              <a:rPr lang="en-US" sz="2400" b="1" dirty="0">
+              <a:rPr lang="en-US" sz="2400" b="1">
                 <a:solidFill>
                   <a:srgbClr val="63666A"/>
                 </a:solidFill>
@@ -5003,7 +4645,7 @@
                   <a:buChar char="§"/>
                 </a:pPr>
                 <a:r>
-                  <a:rPr lang="en-US" dirty="0">
+                  <a:rPr lang="en-US">
                     <a:latin typeface="Gotham Narrow Book" pitchFamily="2" charset="0"/>
                   </a:rPr>
                   <a:t>Most scientific applications are iterative in nature (e.g., Krylov Subspace Methods, PDHG, etc.)</a:t>
@@ -5018,7 +4660,7 @@
                   <a:buChar char="§"/>
                 </a:pPr>
                 <a:r>
-                  <a:rPr lang="en-US" dirty="0">
+                  <a:rPr lang="en-US">
                     <a:latin typeface="Gotham Narrow Book" pitchFamily="2" charset="0"/>
                   </a:rPr>
                   <a:t>The performance of these applications are strongly correlated to the 2-norm of the involved matrices, denoted by </a:t>
@@ -5066,7 +4708,7 @@
                   </m:oMath>
                 </a14:m>
                 <a:r>
-                  <a:rPr lang="en-US" dirty="0">
+                  <a:rPr lang="en-US">
                     <a:latin typeface="Gotham Narrow Book" pitchFamily="2" charset="0"/>
                   </a:rPr>
                   <a:t>.</a:t>
@@ -5081,7 +4723,7 @@
                   <a:buChar char="§"/>
                 </a:pPr>
                 <a:r>
-                  <a:rPr lang="en-US" dirty="0">
+                  <a:rPr lang="en-US">
                     <a:latin typeface="Gotham Narrow Book" pitchFamily="2" charset="0"/>
                   </a:rPr>
                   <a:t>The Power Iteration (PI) method is a simple tool to provide a good estimation of </a:t>
@@ -5129,7 +4771,7 @@
                   </m:oMath>
                 </a14:m>
                 <a:r>
-                  <a:rPr lang="en-US" dirty="0">
+                  <a:rPr lang="en-US">
                     <a:latin typeface="Gotham Narrow Book" pitchFamily="2" charset="0"/>
                   </a:rPr>
                   <a:t>, which equals to the dominant eigenvalue of </a:t>
@@ -5145,7 +4787,7 @@
                   </m:oMath>
                 </a14:m>
                 <a:r>
-                  <a:rPr lang="en-US" dirty="0">
+                  <a:rPr lang="en-US">
                     <a:latin typeface="Gotham Narrow Book" pitchFamily="2" charset="0"/>
                   </a:rPr>
                   <a:t>.</a:t>
@@ -5160,7 +4802,7 @@
                   <a:buChar char="§"/>
                 </a:pPr>
                 <a:r>
-                  <a:rPr lang="en-US" dirty="0">
+                  <a:rPr lang="en-US">
                     <a:latin typeface="Gotham Narrow Book" pitchFamily="2" charset="0"/>
                   </a:rPr>
                   <a:t>Algorithm: </a:t>
@@ -5373,7 +5015,7 @@
           <a:lstStyle/>
           <a:p>
             <a:r>
-              <a:rPr lang="en-US" sz="1200" dirty="0">
+              <a:rPr lang="en-US" sz="1200">
                 <a:latin typeface="Gotham Narrow Book" pitchFamily="2" charset="0"/>
               </a:rPr>
               <a:t>Reference:</a:t>
@@ -5385,7 +5027,7 @@
               <a:buAutoNum type="arabicPeriod"/>
             </a:pPr>
             <a:r>
-              <a:rPr lang="en-US" sz="1200" dirty="0">
+              <a:rPr lang="en-US" sz="1200">
                 <a:latin typeface="Gotham Narrow Book" pitchFamily="2" charset="0"/>
               </a:rPr>
               <a:t>Trefethen, Bau III (2022). Numerical Linear Algebra - 25th Anniversary Edition, Chapter 27.</a:t>
@@ -5397,19 +5039,19 @@
               <a:buAutoNum type="arabicPeriod"/>
             </a:pPr>
             <a:r>
-              <a:rPr lang="fr-FR" sz="1200" dirty="0" err="1">
+              <a:rPr lang="fr-FR" sz="1200" err="1">
                 <a:latin typeface="Gotham Narrow Book" pitchFamily="2" charset="0"/>
               </a:rPr>
               <a:t>Golub</a:t>
             </a:r>
             <a:r>
-              <a:rPr lang="fr-FR" sz="1200" dirty="0">
+              <a:rPr lang="fr-FR" sz="1200">
                 <a:latin typeface="Gotham Narrow Book" pitchFamily="2" charset="0"/>
               </a:rPr>
               <a:t>, Van Loan (2013). Matrix Computations</a:t>
             </a:r>
             <a:r>
-              <a:rPr lang="en-US" sz="1200" dirty="0">
+              <a:rPr lang="en-US" sz="1200">
                 <a:latin typeface="Gotham Narrow Book" pitchFamily="2" charset="0"/>
               </a:rPr>
               <a:t>, Chapter 8.</a:t>
@@ -5420,7 +5062,7 @@
               <a:buFont typeface="+mj-lt"/>
               <a:buAutoNum type="arabicPeriod"/>
             </a:pPr>
-            <a:endParaRPr lang="en-US" sz="1200" dirty="0">
+            <a:endParaRPr lang="en-US" sz="1200">
               <a:latin typeface="Gotham Narrow Book" pitchFamily="2" charset="0"/>
             </a:endParaRPr>
           </a:p>
@@ -5429,7 +5071,7 @@
               <a:buFont typeface="+mj-lt"/>
               <a:buAutoNum type="arabicPeriod"/>
             </a:pPr>
-            <a:endParaRPr lang="en-US" sz="1200" dirty="0">
+            <a:endParaRPr lang="en-US" sz="1200">
               <a:latin typeface="Gotham Narrow Book" pitchFamily="2" charset="0"/>
             </a:endParaRPr>
           </a:p>
@@ -5438,7 +5080,7 @@
               <a:buFont typeface="Arial" panose="020B0604020202020204" pitchFamily="34" charset="0"/>
               <a:buChar char="•"/>
             </a:pPr>
-            <a:endParaRPr lang="en-US" sz="1200" dirty="0"/>
+            <a:endParaRPr lang="en-US" sz="1200"/>
           </a:p>
         </p:txBody>
       </p:sp>
@@ -5487,7 +5129,7 @@
           <a:p>
             <a:pPr algn="ctr"/>
             <a:r>
-              <a:rPr lang="en-US" dirty="0">
+              <a:rPr lang="en-US">
                 <a:latin typeface="Gotham Narrow Book" pitchFamily="2" charset="0"/>
               </a:rPr>
               <a:t>This method involves matrix-vector multiplication (MVM)</a:t>
@@ -5614,7 +5256,7 @@
           <a:lstStyle/>
           <a:p>
             <a:r>
-              <a:rPr lang="en-US" sz="1200" dirty="0">
+              <a:rPr lang="en-US" sz="1200">
                 <a:latin typeface="Gotham Narrow Book" pitchFamily="2" charset="0"/>
               </a:rPr>
               <a:t>Note: The original algorithm accommodates for squared matrices. For rectangular matrices, we used a modified version of PI.</a:t>
@@ -5625,7 +5267,7 @@
               <a:buFont typeface="Arial" panose="020B0604020202020204" pitchFamily="34" charset="0"/>
               <a:buChar char="•"/>
             </a:pPr>
-            <a:endParaRPr lang="en-US" sz="1200" dirty="0"/>
+            <a:endParaRPr lang="en-US" sz="1200"/>
           </a:p>
         </p:txBody>
       </p:sp>
@@ -5708,7 +5350,7 @@
           <a:lstStyle/>
           <a:p>
             <a:r>
-              <a:rPr lang="en-US" sz="4800" dirty="0">
+              <a:rPr lang="en-US" sz="4800">
                 <a:solidFill>
                   <a:srgbClr val="FB6400"/>
                 </a:solidFill>
@@ -5748,7 +5390,7 @@
           <a:lstStyle/>
           <a:p>
             <a:r>
-              <a:rPr lang="en-US" sz="2400" b="1" dirty="0">
+              <a:rPr lang="en-US" sz="2400" b="1">
                 <a:solidFill>
                   <a:srgbClr val="63666A"/>
                 </a:solidFill>
@@ -5879,7 +5521,22 @@
               <a:rPr lang="en-US" dirty="0">
                 <a:latin typeface="Gotham Narrow Book" pitchFamily="2" charset="0"/>
               </a:rPr>
-              <a:t>  Results:</a:t>
+              <a:t>We conducted the experiments with 100 replicates. </a:t>
+            </a:r>
+          </a:p>
+          <a:p>
+            <a:pPr marL="285750" indent="-285750">
+              <a:lnSpc>
+                <a:spcPct val="125000"/>
+              </a:lnSpc>
+              <a:buFont typeface="Wingdings" pitchFamily="2" charset="2"/>
+              <a:buChar char="§"/>
+            </a:pPr>
+            <a:r>
+              <a:rPr lang="en-US" dirty="0">
+                <a:latin typeface="Gotham Narrow Book" pitchFamily="2" charset="0"/>
+              </a:rPr>
+              <a:t>Results:</a:t>
             </a:r>
           </a:p>
           <a:p>
@@ -5894,305 +5551,1362 @@
           </a:p>
         </p:txBody>
       </p:sp>
-      <p:graphicFrame>
-        <p:nvGraphicFramePr>
-          <p:cNvPr id="2" name="Table 1">
-            <a:extLst>
-              <a:ext uri="{FF2B5EF4-FFF2-40B4-BE49-F238E27FC236}">
-                <a16:creationId xmlns:a16="http://schemas.microsoft.com/office/drawing/2014/main" id="{98974048-6FED-9403-D4AC-9B4AB925BC9B}"/>
-              </a:ext>
-            </a:extLst>
-          </p:cNvPr>
-          <p:cNvGraphicFramePr>
-            <a:graphicFrameLocks noGrp="1"/>
-          </p:cNvGraphicFramePr>
-          <p:nvPr>
-            <p:extLst>
-              <p:ext uri="{D42A27DB-BD31-4B8C-83A1-F6EECF244321}">
-                <p14:modId xmlns:p14="http://schemas.microsoft.com/office/powerpoint/2010/main" val="2342471373"/>
-              </p:ext>
-            </p:extLst>
-          </p:nvPr>
-        </p:nvGraphicFramePr>
-        <p:xfrm>
-          <a:off x="596564" y="2658334"/>
-          <a:ext cx="8127999" cy="1752600"/>
-        </p:xfrm>
-        <a:graphic>
-          <a:graphicData uri="http://schemas.openxmlformats.org/drawingml/2006/table">
-            <a:tbl>
-              <a:tblPr firstRow="1" bandRow="1">
-                <a:tableStyleId>{5C22544A-7EE6-4342-B048-85BDC9FD1C3A}</a:tableStyleId>
-              </a:tblPr>
-              <a:tblGrid>
-                <a:gridCol w="2774165">
-                  <a:extLst>
-                    <a:ext uri="{9D8B030D-6E8A-4147-A177-3AD203B41FA5}">
-                      <a16:colId xmlns:a16="http://schemas.microsoft.com/office/drawing/2014/main" val="3715258470"/>
-                    </a:ext>
-                  </a:extLst>
-                </a:gridCol>
-                <a:gridCol w="2644501">
-                  <a:extLst>
-                    <a:ext uri="{9D8B030D-6E8A-4147-A177-3AD203B41FA5}">
-                      <a16:colId xmlns:a16="http://schemas.microsoft.com/office/drawing/2014/main" val="2837321965"/>
-                    </a:ext>
-                  </a:extLst>
-                </a:gridCol>
-                <a:gridCol w="2709333">
-                  <a:extLst>
-                    <a:ext uri="{9D8B030D-6E8A-4147-A177-3AD203B41FA5}">
-                      <a16:colId xmlns:a16="http://schemas.microsoft.com/office/drawing/2014/main" val="113310370"/>
-                    </a:ext>
-                  </a:extLst>
-                </a:gridCol>
-              </a:tblGrid>
-              <a:tr h="370840">
-                <a:tc>
-                  <a:txBody>
-                    <a:bodyPr/>
-                    <a:lstStyle/>
-                    <a:p>
-                      <a:pPr algn="ctr"/>
-                      <a:r>
-                        <a:rPr lang="en-US" dirty="0">
-                          <a:latin typeface="Gotham Narrow Book"/>
-                        </a:rPr>
-                        <a:t>Matrix</a:t>
-                      </a:r>
-                    </a:p>
-                  </a:txBody>
-                  <a:tcPr/>
-                </a:tc>
-                <a:tc>
-                  <a:txBody>
-                    <a:bodyPr/>
-                    <a:lstStyle/>
-                    <a:p>
-                      <a:pPr algn="ctr"/>
-                      <a:r>
-                        <a:rPr lang="en-US" dirty="0">
-                          <a:latin typeface="Gotham Narrow Book"/>
-                        </a:rPr>
-                        <a:t>GPU</a:t>
-                      </a:r>
-                    </a:p>
-                  </a:txBody>
-                  <a:tcPr/>
-                </a:tc>
-                <a:tc>
-                  <a:txBody>
-                    <a:bodyPr/>
-                    <a:lstStyle/>
-                    <a:p>
-                      <a:pPr algn="ctr"/>
-                      <a:r>
-                        <a:rPr lang="en-US" dirty="0">
-                          <a:latin typeface="Gotham Narrow Book"/>
-                        </a:rPr>
-                        <a:t>MELISO-simulated Devices</a:t>
-                      </a:r>
-                    </a:p>
-                  </a:txBody>
-                  <a:tcPr/>
-                </a:tc>
+      <mc:AlternateContent xmlns:mc="http://schemas.openxmlformats.org/markup-compatibility/2006">
+        <mc:Choice xmlns:a14="http://schemas.microsoft.com/office/drawing/2010/main" Requires="a14">
+          <p:graphicFrame>
+            <p:nvGraphicFramePr>
+              <p:cNvPr id="2" name="Table 1">
                 <a:extLst>
-                  <a:ext uri="{0D108BD9-81ED-4DB2-BD59-A6C34878D82A}">
-                    <a16:rowId xmlns:a16="http://schemas.microsoft.com/office/drawing/2014/main" val="3939403022"/>
+                  <a:ext uri="{FF2B5EF4-FFF2-40B4-BE49-F238E27FC236}">
+                    <a16:creationId xmlns:a16="http://schemas.microsoft.com/office/drawing/2014/main" id="{98974048-6FED-9403-D4AC-9B4AB925BC9B}"/>
                   </a:ext>
                 </a:extLst>
-              </a:tr>
-              <a:tr h="370840">
-                <a:tc>
-                  <a:txBody>
-                    <a:bodyPr/>
-                    <a:lstStyle/>
-                    <a:p>
-                      <a:r>
-                        <a:rPr lang="en-US" dirty="0">
-                          <a:latin typeface="Gotham Narrow Book"/>
-                        </a:rPr>
-                        <a:t>Symmetric tridiagonal [1]</a:t>
-                      </a:r>
-                    </a:p>
-                  </a:txBody>
-                  <a:tcPr/>
-                </a:tc>
-                <a:tc>
-                  <a:txBody>
-                    <a:bodyPr/>
-                    <a:lstStyle/>
-                    <a:p>
-                      <a:pPr algn="ctr" fontAlgn="b"/>
-                      <a:r>
-                        <a:rPr lang="en-US" dirty="0">
-                          <a:latin typeface="Gotham Narrow Book"/>
-                        </a:rPr>
-                        <a:t>0.4030</a:t>
-                      </a:r>
-                    </a:p>
-                  </a:txBody>
-                  <a:tcPr marL="9525" marR="9525" marT="9525" marB="0" anchor="b"/>
-                </a:tc>
-                <a:tc>
-                  <a:txBody>
-                    <a:bodyPr/>
-                    <a:lstStyle/>
-                    <a:p>
-                      <a:pPr algn="ctr"/>
-                      <a:r>
-                        <a:rPr lang="en-US" dirty="0">
-                          <a:latin typeface="Gotham Narrow Book"/>
-                        </a:rPr>
-                        <a:t>0.1782</a:t>
-                      </a:r>
-                    </a:p>
-                  </a:txBody>
-                  <a:tcPr/>
-                </a:tc>
+              </p:cNvPr>
+              <p:cNvGraphicFramePr>
+                <a:graphicFrameLocks noGrp="1"/>
+              </p:cNvGraphicFramePr>
+              <p:nvPr>
+                <p:extLst>
+                  <p:ext uri="{D42A27DB-BD31-4B8C-83A1-F6EECF244321}">
+                    <p14:modId xmlns:p14="http://schemas.microsoft.com/office/powerpoint/2010/main" val="913850147"/>
+                  </p:ext>
+                </p:extLst>
+              </p:nvPr>
+            </p:nvGraphicFramePr>
+            <p:xfrm>
+              <a:off x="596564" y="2878073"/>
+              <a:ext cx="10992104" cy="1854200"/>
+            </p:xfrm>
+            <a:graphic>
+              <a:graphicData uri="http://schemas.openxmlformats.org/drawingml/2006/table">
+                <a:tbl>
+                  <a:tblPr firstRow="1" bandRow="1">
+                    <a:tableStyleId>{5C22544A-7EE6-4342-B048-85BDC9FD1C3A}</a:tableStyleId>
+                  </a:tblPr>
+                  <a:tblGrid>
+                    <a:gridCol w="2818067">
+                      <a:extLst>
+                        <a:ext uri="{9D8B030D-6E8A-4147-A177-3AD203B41FA5}">
+                          <a16:colId xmlns:a16="http://schemas.microsoft.com/office/drawing/2014/main" val="3715258470"/>
+                        </a:ext>
+                      </a:extLst>
+                    </a:gridCol>
+                    <a:gridCol w="1076642">
+                      <a:extLst>
+                        <a:ext uri="{9D8B030D-6E8A-4147-A177-3AD203B41FA5}">
+                          <a16:colId xmlns:a16="http://schemas.microsoft.com/office/drawing/2014/main" val="2837321965"/>
+                        </a:ext>
+                      </a:extLst>
+                    </a:gridCol>
+                    <a:gridCol w="2941955">
+                      <a:extLst>
+                        <a:ext uri="{9D8B030D-6E8A-4147-A177-3AD203B41FA5}">
+                          <a16:colId xmlns:a16="http://schemas.microsoft.com/office/drawing/2014/main" val="113310370"/>
+                        </a:ext>
+                      </a:extLst>
+                    </a:gridCol>
+                    <a:gridCol w="1213485">
+                      <a:extLst>
+                        <a:ext uri="{9D8B030D-6E8A-4147-A177-3AD203B41FA5}">
+                          <a16:colId xmlns:a16="http://schemas.microsoft.com/office/drawing/2014/main" val="2125414621"/>
+                        </a:ext>
+                      </a:extLst>
+                    </a:gridCol>
+                    <a:gridCol w="2941955">
+                      <a:extLst>
+                        <a:ext uri="{9D8B030D-6E8A-4147-A177-3AD203B41FA5}">
+                          <a16:colId xmlns:a16="http://schemas.microsoft.com/office/drawing/2014/main" val="2034883439"/>
+                        </a:ext>
+                      </a:extLst>
+                    </a:gridCol>
+                  </a:tblGrid>
+                  <a:tr h="370840">
+                    <a:tc>
+                      <a:txBody>
+                        <a:bodyPr/>
+                        <a:lstStyle/>
+                        <a:p>
+                          <a:pPr algn="ctr"/>
+                          <a:endParaRPr lang="en-US" sz="1800" dirty="0">
+                            <a:latin typeface="Gotham Narrow Book"/>
+                          </a:endParaRPr>
+                        </a:p>
+                      </a:txBody>
+                      <a:tcPr/>
+                    </a:tc>
+                    <a:tc gridSpan="2">
+                      <a:txBody>
+                        <a:bodyPr/>
+                        <a:lstStyle/>
+                        <a:p>
+                          <a:pPr algn="ctr"/>
+                          <a:r>
+                            <a:rPr lang="en-US" sz="1800" dirty="0">
+                              <a:latin typeface="Gotham Narrow Book"/>
+                            </a:rPr>
+                            <a:t>Energy Consumption [J]</a:t>
+                          </a:r>
+                        </a:p>
+                      </a:txBody>
+                      <a:tcPr/>
+                    </a:tc>
+                    <a:tc hMerge="1">
+                      <a:txBody>
+                        <a:bodyPr/>
+                        <a:lstStyle/>
+                        <a:p>
+                          <a:pPr algn="ctr"/>
+                          <a:endParaRPr lang="en-US" dirty="0">
+                            <a:latin typeface="Gotham Narrow Book"/>
+                          </a:endParaRPr>
+                        </a:p>
+                      </a:txBody>
+                      <a:tcPr/>
+                    </a:tc>
+                    <a:tc gridSpan="2">
+                      <a:txBody>
+                        <a:bodyPr/>
+                        <a:lstStyle/>
+                        <a:p>
+                          <a:pPr algn="ctr"/>
+                          <a:r>
+                            <a:rPr lang="en-US" sz="1800" dirty="0">
+                              <a:latin typeface="Gotham Narrow Book"/>
+                            </a:rPr>
+                            <a:t>Relative 2-Norm Error (%)</a:t>
+                          </a:r>
+                        </a:p>
+                      </a:txBody>
+                      <a:tcPr/>
+                    </a:tc>
+                    <a:tc hMerge="1">
+                      <a:txBody>
+                        <a:bodyPr/>
+                        <a:lstStyle/>
+                        <a:p>
+                          <a:pPr algn="ctr"/>
+                          <a:endParaRPr lang="en-US" dirty="0">
+                            <a:latin typeface="Gotham Narrow Book"/>
+                          </a:endParaRPr>
+                        </a:p>
+                      </a:txBody>
+                      <a:tcPr/>
+                    </a:tc>
+                    <a:extLst>
+                      <a:ext uri="{0D108BD9-81ED-4DB2-BD59-A6C34878D82A}">
+                        <a16:rowId xmlns:a16="http://schemas.microsoft.com/office/drawing/2014/main" val="3859963474"/>
+                      </a:ext>
+                    </a:extLst>
+                  </a:tr>
+                  <a:tr h="370840">
+                    <a:tc>
+                      <a:txBody>
+                        <a:bodyPr/>
+                        <a:lstStyle/>
+                        <a:p>
+                          <a:pPr algn="ctr"/>
+                          <a:r>
+                            <a:rPr lang="en-US" sz="1800" dirty="0">
+                              <a:latin typeface="Gotham Narrow Book"/>
+                            </a:rPr>
+                            <a:t>Matrix</a:t>
+                          </a:r>
+                        </a:p>
+                      </a:txBody>
+                      <a:tcPr/>
+                    </a:tc>
+                    <a:tc>
+                      <a:txBody>
+                        <a:bodyPr/>
+                        <a:lstStyle/>
+                        <a:p>
+                          <a:pPr algn="ctr"/>
+                          <a:r>
+                            <a:rPr lang="en-US" sz="1800" dirty="0">
+                              <a:latin typeface="Gotham Narrow Book"/>
+                            </a:rPr>
+                            <a:t>GPU</a:t>
+                          </a:r>
+                        </a:p>
+                      </a:txBody>
+                      <a:tcPr/>
+                    </a:tc>
+                    <a:tc>
+                      <a:txBody>
+                        <a:bodyPr/>
+                        <a:lstStyle/>
+                        <a:p>
+                          <a:pPr algn="ctr"/>
+                          <a:r>
+                            <a:rPr lang="en-US" sz="1800" dirty="0">
+                              <a:latin typeface="Gotham Narrow Book"/>
+                            </a:rPr>
+                            <a:t>MELISO-simulated Devices</a:t>
+                          </a:r>
+                        </a:p>
+                      </a:txBody>
+                      <a:tcPr/>
+                    </a:tc>
+                    <a:tc>
+                      <a:txBody>
+                        <a:bodyPr/>
+                        <a:lstStyle/>
+                        <a:p>
+                          <a:pPr algn="ctr"/>
+                          <a:r>
+                            <a:rPr lang="en-US" sz="1800" dirty="0">
+                              <a:latin typeface="Gotham Narrow Book"/>
+                            </a:rPr>
+                            <a:t>GPU</a:t>
+                          </a:r>
+                        </a:p>
+                      </a:txBody>
+                      <a:tcPr/>
+                    </a:tc>
+                    <a:tc>
+                      <a:txBody>
+                        <a:bodyPr/>
+                        <a:lstStyle/>
+                        <a:p>
+                          <a:pPr algn="ctr"/>
+                          <a:r>
+                            <a:rPr lang="en-US" sz="1800" dirty="0">
+                              <a:latin typeface="Gotham Narrow Book"/>
+                            </a:rPr>
+                            <a:t>MELISO-simulated Devices</a:t>
+                          </a:r>
+                        </a:p>
+                      </a:txBody>
+                      <a:tcPr/>
+                    </a:tc>
+                    <a:extLst>
+                      <a:ext uri="{0D108BD9-81ED-4DB2-BD59-A6C34878D82A}">
+                        <a16:rowId xmlns:a16="http://schemas.microsoft.com/office/drawing/2014/main" val="3939403022"/>
+                      </a:ext>
+                    </a:extLst>
+                  </a:tr>
+                  <a:tr h="370840">
+                    <a:tc>
+                      <a:txBody>
+                        <a:bodyPr/>
+                        <a:lstStyle/>
+                        <a:p>
+                          <a:r>
+                            <a:rPr lang="en-US" sz="1800" dirty="0">
+                              <a:latin typeface="Gotham Narrow Book"/>
+                            </a:rPr>
+                            <a:t>Symmetric tridiagonal [1]</a:t>
+                          </a:r>
+                        </a:p>
+                      </a:txBody>
+                      <a:tcPr/>
+                    </a:tc>
+                    <a:tc>
+                      <a:txBody>
+                        <a:bodyPr/>
+                        <a:lstStyle/>
+                        <a:p>
+                          <a:pPr algn="ctr" fontAlgn="b"/>
+                          <a:r>
+                            <a:rPr lang="en-US" sz="1800" b="0" i="0" kern="1200" dirty="0">
+                              <a:solidFill>
+                                <a:schemeClr val="dk1"/>
+                              </a:solidFill>
+                              <a:effectLst/>
+                              <a:latin typeface="Gotham Narrow Book"/>
+                              <a:ea typeface="+mn-ea"/>
+                              <a:cs typeface="+mn-cs"/>
+                            </a:rPr>
+                            <a:t>0.3475</a:t>
+                          </a:r>
+                          <a:endParaRPr lang="en-US" sz="1800" dirty="0">
+                            <a:latin typeface="Gotham Narrow Book"/>
+                          </a:endParaRPr>
+                        </a:p>
+                      </a:txBody>
+                      <a:tcPr marL="9525" marR="9525" marT="9525" marB="0" anchor="b"/>
+                    </a:tc>
+                    <a:tc>
+                      <a:txBody>
+                        <a:bodyPr/>
+                        <a:lstStyle/>
+                        <a:p>
+                          <a:pPr algn="ctr"/>
+                          <a:endParaRPr lang="en-US" sz="1800" dirty="0">
+                            <a:latin typeface="Gotham Narrow Book"/>
+                          </a:endParaRPr>
+                        </a:p>
+                      </a:txBody>
+                      <a:tcPr/>
+                    </a:tc>
+                    <a:tc>
+                      <a:txBody>
+                        <a:bodyPr/>
+                        <a:lstStyle/>
+                        <a:p>
+                          <a:pPr algn="ctr"/>
+                          <a:r>
+                            <a:rPr lang="en-US" sz="1800" b="0" i="0" kern="1200" dirty="0">
+                              <a:solidFill>
+                                <a:schemeClr val="dk1"/>
+                              </a:solidFill>
+                              <a:effectLst/>
+                              <a:latin typeface="Gotham Narrow Book"/>
+                              <a:ea typeface="+mn-ea"/>
+                              <a:cs typeface="+mn-cs"/>
+                            </a:rPr>
+                            <a:t>2.20</a:t>
+                          </a:r>
+                          <a14:m>
+                            <m:oMath xmlns:m="http://schemas.openxmlformats.org/officeDocument/2006/math">
+                              <m:sSup>
+                                <m:sSupPr>
+                                  <m:ctrlPr>
+                                    <a:rPr lang="en-US" sz="1800" b="0" i="1" kern="1200" dirty="0" smtClean="0">
+                                      <a:solidFill>
+                                        <a:schemeClr val="dk1"/>
+                                      </a:solidFill>
+                                      <a:effectLst/>
+                                      <a:latin typeface="Cambria Math" panose="02040503050406030204" pitchFamily="18" charset="0"/>
+                                      <a:ea typeface="+mn-ea"/>
+                                      <a:cs typeface="+mn-cs"/>
+                                    </a:rPr>
+                                  </m:ctrlPr>
+                                </m:sSupPr>
+                                <m:e>
+                                  <m:r>
+                                    <a:rPr lang="en-US" sz="1800" b="0" i="1" kern="1200" dirty="0" smtClean="0">
+                                      <a:solidFill>
+                                        <a:schemeClr val="dk1"/>
+                                      </a:solidFill>
+                                      <a:effectLst/>
+                                      <a:latin typeface="Cambria Math" panose="02040503050406030204" pitchFamily="18" charset="0"/>
+                                      <a:ea typeface="+mn-ea"/>
+                                      <a:cs typeface="+mn-cs"/>
+                                    </a:rPr>
+                                    <m:t>𝑒</m:t>
+                                  </m:r>
+                                </m:e>
+                                <m:sup>
+                                  <m:r>
+                                    <a:rPr lang="en-US" sz="1800" b="0" i="1" kern="1200" dirty="0" smtClean="0">
+                                      <a:solidFill>
+                                        <a:schemeClr val="dk1"/>
+                                      </a:solidFill>
+                                      <a:effectLst/>
+                                      <a:latin typeface="Cambria Math" panose="02040503050406030204" pitchFamily="18" charset="0"/>
+                                      <a:ea typeface="+mn-ea"/>
+                                      <a:cs typeface="+mn-cs"/>
+                                    </a:rPr>
+                                    <m:t>−13</m:t>
+                                  </m:r>
+                                </m:sup>
+                              </m:sSup>
+                            </m:oMath>
+                          </a14:m>
+                          <a:endParaRPr lang="en-US" sz="1800" dirty="0">
+                            <a:latin typeface="Gotham Narrow Book"/>
+                          </a:endParaRPr>
+                        </a:p>
+                      </a:txBody>
+                      <a:tcPr/>
+                    </a:tc>
+                    <a:tc>
+                      <a:txBody>
+                        <a:bodyPr/>
+                        <a:lstStyle/>
+                        <a:p>
+                          <a:pPr algn="ctr"/>
+                          <a:endParaRPr lang="en-US" sz="1800" dirty="0">
+                            <a:latin typeface="Gotham Narrow Book"/>
+                          </a:endParaRPr>
+                        </a:p>
+                      </a:txBody>
+                      <a:tcPr/>
+                    </a:tc>
+                    <a:extLst>
+                      <a:ext uri="{0D108BD9-81ED-4DB2-BD59-A6C34878D82A}">
+                        <a16:rowId xmlns:a16="http://schemas.microsoft.com/office/drawing/2014/main" val="3484688066"/>
+                      </a:ext>
+                    </a:extLst>
+                  </a:tr>
+                  <a:tr h="370840">
+                    <a:tc>
+                      <a:txBody>
+                        <a:bodyPr/>
+                        <a:lstStyle/>
+                        <a:p>
+                          <a:r>
+                            <a:rPr lang="en-US" sz="1800">
+                              <a:latin typeface="Gotham Narrow Book"/>
+                            </a:rPr>
+                            <a:t>Constraint matrix [2]</a:t>
+                          </a:r>
+                        </a:p>
+                      </a:txBody>
+                      <a:tcPr/>
+                    </a:tc>
+                    <a:tc>
+                      <a:txBody>
+                        <a:bodyPr/>
+                        <a:lstStyle/>
+                        <a:p>
+                          <a:pPr marL="0" marR="0" lvl="0" indent="0" algn="ctr" defTabSz="914400" rtl="0" eaLnBrk="1" fontAlgn="auto" latinLnBrk="0" hangingPunct="1">
+                            <a:lnSpc>
+                              <a:spcPct val="100000"/>
+                            </a:lnSpc>
+                            <a:spcBef>
+                              <a:spcPts val="0"/>
+                            </a:spcBef>
+                            <a:spcAft>
+                              <a:spcPts val="0"/>
+                            </a:spcAft>
+                            <a:buClrTx/>
+                            <a:buSzTx/>
+                            <a:buFontTx/>
+                            <a:buNone/>
+                            <a:tabLst/>
+                            <a:defRPr/>
+                          </a:pPr>
+                          <a:r>
+                            <a:rPr lang="en-US" sz="1800" b="0" i="0" kern="1200" dirty="0">
+                              <a:solidFill>
+                                <a:schemeClr val="dk1"/>
+                              </a:solidFill>
+                              <a:effectLst/>
+                              <a:latin typeface="Gotham Narrow Book"/>
+                              <a:ea typeface="+mn-ea"/>
+                              <a:cs typeface="+mn-cs"/>
+                            </a:rPr>
+                            <a:t>0.2643</a:t>
+                          </a:r>
+                          <a:endParaRPr lang="en-US" sz="1800" dirty="0">
+                            <a:latin typeface="Gotham Narrow Book"/>
+                          </a:endParaRPr>
+                        </a:p>
+                      </a:txBody>
+                      <a:tcPr/>
+                    </a:tc>
+                    <a:tc>
+                      <a:txBody>
+                        <a:bodyPr/>
+                        <a:lstStyle/>
+                        <a:p>
+                          <a:pPr algn="ctr"/>
+                          <a:endParaRPr lang="en-US" sz="1800" dirty="0">
+                            <a:latin typeface="Gotham Narrow Book"/>
+                          </a:endParaRPr>
+                        </a:p>
+                      </a:txBody>
+                      <a:tcPr/>
+                    </a:tc>
+                    <a:tc>
+                      <a:txBody>
+                        <a:bodyPr/>
+                        <a:lstStyle/>
+                        <a:p>
+                          <a:pPr marL="0" marR="0" lvl="0" indent="0" algn="ctr" defTabSz="914400" rtl="0" eaLnBrk="1" fontAlgn="auto" latinLnBrk="0" hangingPunct="1">
+                            <a:lnSpc>
+                              <a:spcPct val="100000"/>
+                            </a:lnSpc>
+                            <a:spcBef>
+                              <a:spcPts val="0"/>
+                            </a:spcBef>
+                            <a:spcAft>
+                              <a:spcPts val="0"/>
+                            </a:spcAft>
+                            <a:buClrTx/>
+                            <a:buSzTx/>
+                            <a:buFontTx/>
+                            <a:buNone/>
+                            <a:tabLst/>
+                            <a:defRPr/>
+                          </a:pPr>
+                          <a:r>
+                            <a:rPr lang="en-US" sz="1800" b="0" i="0" kern="1200" dirty="0">
+                              <a:solidFill>
+                                <a:schemeClr val="dk1"/>
+                              </a:solidFill>
+                              <a:effectLst/>
+                              <a:latin typeface="Gotham Narrow Book"/>
+                              <a:ea typeface="+mn-ea"/>
+                              <a:cs typeface="+mn-cs"/>
+                            </a:rPr>
+                            <a:t>1.30</a:t>
+                          </a:r>
+                          <a14:m>
+                            <m:oMath xmlns:m="http://schemas.openxmlformats.org/officeDocument/2006/math">
+                              <m:sSup>
+                                <m:sSupPr>
+                                  <m:ctrlPr>
+                                    <a:rPr lang="en-US" sz="1800" b="0" i="1" kern="1200" dirty="0" smtClean="0">
+                                      <a:solidFill>
+                                        <a:schemeClr val="dk1"/>
+                                      </a:solidFill>
+                                      <a:effectLst/>
+                                      <a:latin typeface="Cambria Math" panose="02040503050406030204" pitchFamily="18" charset="0"/>
+                                      <a:ea typeface="+mn-ea"/>
+                                      <a:cs typeface="+mn-cs"/>
+                                    </a:rPr>
+                                  </m:ctrlPr>
+                                </m:sSupPr>
+                                <m:e>
+                                  <m:r>
+                                    <a:rPr lang="en-US" sz="1800" b="0" i="1" kern="1200" dirty="0" smtClean="0">
+                                      <a:solidFill>
+                                        <a:schemeClr val="dk1"/>
+                                      </a:solidFill>
+                                      <a:effectLst/>
+                                      <a:latin typeface="Cambria Math" panose="02040503050406030204" pitchFamily="18" charset="0"/>
+                                      <a:ea typeface="+mn-ea"/>
+                                      <a:cs typeface="+mn-cs"/>
+                                    </a:rPr>
+                                    <m:t>𝑒</m:t>
+                                  </m:r>
+                                </m:e>
+                                <m:sup>
+                                  <m:r>
+                                    <a:rPr lang="en-US" sz="1800" b="0" i="1" kern="1200" dirty="0" smtClean="0">
+                                      <a:solidFill>
+                                        <a:schemeClr val="dk1"/>
+                                      </a:solidFill>
+                                      <a:effectLst/>
+                                      <a:latin typeface="Cambria Math" panose="02040503050406030204" pitchFamily="18" charset="0"/>
+                                      <a:ea typeface="+mn-ea"/>
+                                      <a:cs typeface="+mn-cs"/>
+                                    </a:rPr>
+                                    <m:t>−1</m:t>
+                                  </m:r>
+                                  <m:r>
+                                    <a:rPr lang="en-US" sz="1800" b="0" i="1" kern="1200" dirty="0" smtClean="0">
+                                      <a:solidFill>
+                                        <a:schemeClr val="dk1"/>
+                                      </a:solidFill>
+                                      <a:effectLst/>
+                                      <a:latin typeface="Cambria Math" panose="02040503050406030204" pitchFamily="18" charset="0"/>
+                                      <a:ea typeface="+mn-ea"/>
+                                      <a:cs typeface="+mn-cs"/>
+                                    </a:rPr>
+                                    <m:t>5</m:t>
+                                  </m:r>
+                                </m:sup>
+                              </m:sSup>
+                            </m:oMath>
+                          </a14:m>
+                          <a:endParaRPr lang="en-US" sz="1800" dirty="0">
+                            <a:latin typeface="Gotham Narrow Book"/>
+                          </a:endParaRPr>
+                        </a:p>
+                      </a:txBody>
+                      <a:tcPr/>
+                    </a:tc>
+                    <a:tc>
+                      <a:txBody>
+                        <a:bodyPr/>
+                        <a:lstStyle/>
+                        <a:p>
+                          <a:pPr algn="ctr"/>
+                          <a:endParaRPr lang="en-US" sz="1800" dirty="0">
+                            <a:latin typeface="Gotham Narrow Book"/>
+                          </a:endParaRPr>
+                        </a:p>
+                      </a:txBody>
+                      <a:tcPr/>
+                    </a:tc>
+                    <a:extLst>
+                      <a:ext uri="{0D108BD9-81ED-4DB2-BD59-A6C34878D82A}">
+                        <a16:rowId xmlns:a16="http://schemas.microsoft.com/office/drawing/2014/main" val="1255951861"/>
+                      </a:ext>
+                    </a:extLst>
+                  </a:tr>
+                  <a:tr h="370840">
+                    <a:tc>
+                      <a:txBody>
+                        <a:bodyPr/>
+                        <a:lstStyle/>
+                        <a:p>
+                          <a:pPr marL="0" marR="0" lvl="0" indent="0" algn="l" defTabSz="914400" rtl="0" eaLnBrk="1" fontAlgn="auto" latinLnBrk="0" hangingPunct="1">
+                            <a:lnSpc>
+                              <a:spcPct val="100000"/>
+                            </a:lnSpc>
+                            <a:spcBef>
+                              <a:spcPts val="0"/>
+                            </a:spcBef>
+                            <a:spcAft>
+                              <a:spcPts val="0"/>
+                            </a:spcAft>
+                            <a:buClrTx/>
+                            <a:buSzTx/>
+                            <a:buFontTx/>
+                            <a:buNone/>
+                            <a:tabLst/>
+                            <a:defRPr/>
+                          </a:pPr>
+                          <a:r>
+                            <a:rPr lang="en-US" sz="1800">
+                              <a:latin typeface="Gotham Narrow Book"/>
+                            </a:rPr>
+                            <a:t>Constraint matrix [3]</a:t>
+                          </a:r>
+                        </a:p>
+                      </a:txBody>
+                      <a:tcPr/>
+                    </a:tc>
+                    <a:tc>
+                      <a:txBody>
+                        <a:bodyPr/>
+                        <a:lstStyle/>
+                        <a:p>
+                          <a:pPr algn="ctr"/>
+                          <a:r>
+                            <a:rPr lang="en-US" sz="1800" dirty="0">
+                              <a:latin typeface="Gotham Narrow Book"/>
+                            </a:rPr>
+                            <a:t>0.2761</a:t>
+                          </a:r>
+                        </a:p>
+                      </a:txBody>
+                      <a:tcPr/>
+                    </a:tc>
+                    <a:tc>
+                      <a:txBody>
+                        <a:bodyPr/>
+                        <a:lstStyle/>
+                        <a:p>
+                          <a:pPr algn="ctr"/>
+                          <a:endParaRPr lang="en-US" sz="1800" dirty="0">
+                            <a:latin typeface="Gotham Narrow Book"/>
+                          </a:endParaRPr>
+                        </a:p>
+                      </a:txBody>
+                      <a:tcPr/>
+                    </a:tc>
+                    <a:tc>
+                      <a:txBody>
+                        <a:bodyPr/>
+                        <a:lstStyle/>
+                        <a:p>
+                          <a:pPr marL="0" marR="0" lvl="0" indent="0" algn="ctr" defTabSz="914400" rtl="0" eaLnBrk="1" fontAlgn="auto" latinLnBrk="0" hangingPunct="1">
+                            <a:lnSpc>
+                              <a:spcPct val="100000"/>
+                            </a:lnSpc>
+                            <a:spcBef>
+                              <a:spcPts val="0"/>
+                            </a:spcBef>
+                            <a:spcAft>
+                              <a:spcPts val="0"/>
+                            </a:spcAft>
+                            <a:buClrTx/>
+                            <a:buSzTx/>
+                            <a:buFontTx/>
+                            <a:buNone/>
+                            <a:tabLst/>
+                            <a:defRPr/>
+                          </a:pPr>
+                          <a:r>
+                            <a:rPr lang="en-US" sz="1800" b="0" i="0" kern="1200" dirty="0">
+                              <a:solidFill>
+                                <a:schemeClr val="dk1"/>
+                              </a:solidFill>
+                              <a:effectLst/>
+                              <a:latin typeface="Gotham Narrow Book"/>
+                              <a:ea typeface="+mn-ea"/>
+                              <a:cs typeface="+mn-cs"/>
+                            </a:rPr>
+                            <a:t>8.66</a:t>
+                          </a:r>
+                          <a14:m>
+                            <m:oMath xmlns:m="http://schemas.openxmlformats.org/officeDocument/2006/math">
+                              <m:sSup>
+                                <m:sSupPr>
+                                  <m:ctrlPr>
+                                    <a:rPr lang="en-US" sz="1800" b="0" i="1" kern="1200" dirty="0" smtClean="0">
+                                      <a:solidFill>
+                                        <a:schemeClr val="dk1"/>
+                                      </a:solidFill>
+                                      <a:effectLst/>
+                                      <a:latin typeface="Cambria Math" panose="02040503050406030204" pitchFamily="18" charset="0"/>
+                                      <a:ea typeface="+mn-ea"/>
+                                      <a:cs typeface="+mn-cs"/>
+                                    </a:rPr>
+                                  </m:ctrlPr>
+                                </m:sSupPr>
+                                <m:e>
+                                  <m:r>
+                                    <a:rPr lang="en-US" sz="1800" b="0" i="1" kern="1200" dirty="0" smtClean="0">
+                                      <a:solidFill>
+                                        <a:schemeClr val="dk1"/>
+                                      </a:solidFill>
+                                      <a:effectLst/>
+                                      <a:latin typeface="Cambria Math" panose="02040503050406030204" pitchFamily="18" charset="0"/>
+                                      <a:ea typeface="+mn-ea"/>
+                                      <a:cs typeface="+mn-cs"/>
+                                    </a:rPr>
+                                    <m:t>𝑒</m:t>
+                                  </m:r>
+                                </m:e>
+                                <m:sup>
+                                  <m:r>
+                                    <a:rPr lang="en-US" sz="1800" b="0" i="1" kern="1200" dirty="0" smtClean="0">
+                                      <a:solidFill>
+                                        <a:schemeClr val="dk1"/>
+                                      </a:solidFill>
+                                      <a:effectLst/>
+                                      <a:latin typeface="Cambria Math" panose="02040503050406030204" pitchFamily="18" charset="0"/>
+                                      <a:ea typeface="+mn-ea"/>
+                                      <a:cs typeface="+mn-cs"/>
+                                    </a:rPr>
+                                    <m:t>−15</m:t>
+                                  </m:r>
+                                </m:sup>
+                              </m:sSup>
+                            </m:oMath>
+                          </a14:m>
+                          <a:endParaRPr lang="en-US" sz="1800" dirty="0">
+                            <a:latin typeface="Gotham Narrow Book"/>
+                          </a:endParaRPr>
+                        </a:p>
+                      </a:txBody>
+                      <a:tcPr/>
+                    </a:tc>
+                    <a:tc>
+                      <a:txBody>
+                        <a:bodyPr/>
+                        <a:lstStyle/>
+                        <a:p>
+                          <a:pPr algn="ctr"/>
+                          <a:endParaRPr lang="en-US" sz="1800" dirty="0">
+                            <a:latin typeface="Gotham Narrow Book"/>
+                          </a:endParaRPr>
+                        </a:p>
+                      </a:txBody>
+                      <a:tcPr/>
+                    </a:tc>
+                    <a:extLst>
+                      <a:ext uri="{0D108BD9-81ED-4DB2-BD59-A6C34878D82A}">
+                        <a16:rowId xmlns:a16="http://schemas.microsoft.com/office/drawing/2014/main" val="1489652481"/>
+                      </a:ext>
+                    </a:extLst>
+                  </a:tr>
+                </a:tbl>
+              </a:graphicData>
+            </a:graphic>
+          </p:graphicFrame>
+        </mc:Choice>
+        <mc:Fallback>
+          <p:graphicFrame>
+            <p:nvGraphicFramePr>
+              <p:cNvPr id="2" name="Table 1">
                 <a:extLst>
-                  <a:ext uri="{0D108BD9-81ED-4DB2-BD59-A6C34878D82A}">
-                    <a16:rowId xmlns:a16="http://schemas.microsoft.com/office/drawing/2014/main" val="3484688066"/>
+                  <a:ext uri="{FF2B5EF4-FFF2-40B4-BE49-F238E27FC236}">
+                    <a16:creationId xmlns:a16="http://schemas.microsoft.com/office/drawing/2014/main" id="{98974048-6FED-9403-D4AC-9B4AB925BC9B}"/>
                   </a:ext>
                 </a:extLst>
-              </a:tr>
-              <a:tr h="370840">
-                <a:tc>
-                  <a:txBody>
-                    <a:bodyPr/>
-                    <a:lstStyle/>
-                    <a:p>
-                      <a:r>
-                        <a:rPr lang="en-US" dirty="0">
-                          <a:latin typeface="Gotham Narrow Book"/>
-                        </a:rPr>
-                        <a:t>Constraint matrix [2]</a:t>
-                      </a:r>
-                    </a:p>
-                  </a:txBody>
-                  <a:tcPr/>
-                </a:tc>
-                <a:tc>
-                  <a:txBody>
-                    <a:bodyPr/>
-                    <a:lstStyle/>
-                    <a:p>
-                      <a:pPr marL="0" marR="0" lvl="0" indent="0" algn="ctr" defTabSz="914400" rtl="0" eaLnBrk="1" fontAlgn="auto" latinLnBrk="0" hangingPunct="1">
-                        <a:lnSpc>
-                          <a:spcPct val="100000"/>
-                        </a:lnSpc>
-                        <a:spcBef>
-                          <a:spcPts val="0"/>
-                        </a:spcBef>
-                        <a:spcAft>
-                          <a:spcPts val="0"/>
-                        </a:spcAft>
-                        <a:buClrTx/>
-                        <a:buSzTx/>
-                        <a:buFontTx/>
-                        <a:buNone/>
-                        <a:tabLst/>
-                        <a:defRPr/>
-                      </a:pPr>
-                      <a:r>
-                        <a:rPr lang="en-US" dirty="0">
-                          <a:latin typeface="Gotham Narrow Book"/>
-                        </a:rPr>
-                        <a:t>0.24673</a:t>
-                      </a:r>
-                    </a:p>
-                  </a:txBody>
-                  <a:tcPr/>
-                </a:tc>
-                <a:tc>
-                  <a:txBody>
-                    <a:bodyPr/>
-                    <a:lstStyle/>
-                    <a:p>
-                      <a:endParaRPr lang="en-US" dirty="0">
-                        <a:latin typeface="Gotham Narrow Book"/>
-                      </a:endParaRPr>
-                    </a:p>
-                  </a:txBody>
-                  <a:tcPr/>
-                </a:tc>
-                <a:extLst>
-                  <a:ext uri="{0D108BD9-81ED-4DB2-BD59-A6C34878D82A}">
-                    <a16:rowId xmlns:a16="http://schemas.microsoft.com/office/drawing/2014/main" val="1255951861"/>
-                  </a:ext>
-                </a:extLst>
-              </a:tr>
-              <a:tr h="370840">
-                <a:tc>
-                  <a:txBody>
-                    <a:bodyPr/>
-                    <a:lstStyle/>
-                    <a:p>
-                      <a:pPr marL="0" marR="0" lvl="0" indent="0" algn="l" defTabSz="914400" rtl="0" eaLnBrk="1" fontAlgn="auto" latinLnBrk="0" hangingPunct="1">
-                        <a:lnSpc>
-                          <a:spcPct val="100000"/>
-                        </a:lnSpc>
-                        <a:spcBef>
-                          <a:spcPts val="0"/>
-                        </a:spcBef>
-                        <a:spcAft>
-                          <a:spcPts val="0"/>
-                        </a:spcAft>
-                        <a:buClrTx/>
-                        <a:buSzTx/>
-                        <a:buFontTx/>
-                        <a:buNone/>
-                        <a:tabLst/>
-                        <a:defRPr/>
-                      </a:pPr>
-                      <a:r>
-                        <a:rPr lang="en-US" dirty="0">
-                          <a:latin typeface="Gotham Narrow Book"/>
-                        </a:rPr>
-                        <a:t>Constraint matrix [3]</a:t>
-                      </a:r>
-                    </a:p>
-                  </a:txBody>
-                  <a:tcPr/>
-                </a:tc>
-                <a:tc>
-                  <a:txBody>
-                    <a:bodyPr/>
-                    <a:lstStyle/>
-                    <a:p>
-                      <a:pPr algn="ctr"/>
-                      <a:r>
-                        <a:rPr lang="en-US" dirty="0">
-                          <a:latin typeface="Gotham Narrow Book"/>
-                        </a:rPr>
-                        <a:t>0.26003</a:t>
-                      </a:r>
-                    </a:p>
-                  </a:txBody>
-                  <a:tcPr/>
-                </a:tc>
-                <a:tc>
-                  <a:txBody>
-                    <a:bodyPr/>
-                    <a:lstStyle/>
-                    <a:p>
-                      <a:endParaRPr lang="en-US" dirty="0">
-                        <a:latin typeface="Gotham Narrow Book"/>
-                      </a:endParaRPr>
-                    </a:p>
-                  </a:txBody>
-                  <a:tcPr/>
-                </a:tc>
-                <a:extLst>
-                  <a:ext uri="{0D108BD9-81ED-4DB2-BD59-A6C34878D82A}">
-                    <a16:rowId xmlns:a16="http://schemas.microsoft.com/office/drawing/2014/main" val="1489652481"/>
-                  </a:ext>
-                </a:extLst>
-              </a:tr>
-            </a:tbl>
-          </a:graphicData>
-        </a:graphic>
-      </p:graphicFrame>
+              </p:cNvPr>
+              <p:cNvGraphicFramePr>
+                <a:graphicFrameLocks noGrp="1"/>
+              </p:cNvGraphicFramePr>
+              <p:nvPr>
+                <p:extLst>
+                  <p:ext uri="{D42A27DB-BD31-4B8C-83A1-F6EECF244321}">
+                    <p14:modId xmlns:p14="http://schemas.microsoft.com/office/powerpoint/2010/main" val="913850147"/>
+                  </p:ext>
+                </p:extLst>
+              </p:nvPr>
+            </p:nvGraphicFramePr>
+            <p:xfrm>
+              <a:off x="596564" y="2878073"/>
+              <a:ext cx="10992104" cy="1854200"/>
+            </p:xfrm>
+            <a:graphic>
+              <a:graphicData uri="http://schemas.openxmlformats.org/drawingml/2006/table">
+                <a:tbl>
+                  <a:tblPr firstRow="1" bandRow="1">
+                    <a:tableStyleId>{5C22544A-7EE6-4342-B048-85BDC9FD1C3A}</a:tableStyleId>
+                  </a:tblPr>
+                  <a:tblGrid>
+                    <a:gridCol w="2818067">
+                      <a:extLst>
+                        <a:ext uri="{9D8B030D-6E8A-4147-A177-3AD203B41FA5}">
+                          <a16:colId xmlns:a16="http://schemas.microsoft.com/office/drawing/2014/main" val="3715258470"/>
+                        </a:ext>
+                      </a:extLst>
+                    </a:gridCol>
+                    <a:gridCol w="1076642">
+                      <a:extLst>
+                        <a:ext uri="{9D8B030D-6E8A-4147-A177-3AD203B41FA5}">
+                          <a16:colId xmlns:a16="http://schemas.microsoft.com/office/drawing/2014/main" val="2837321965"/>
+                        </a:ext>
+                      </a:extLst>
+                    </a:gridCol>
+                    <a:gridCol w="2941955">
+                      <a:extLst>
+                        <a:ext uri="{9D8B030D-6E8A-4147-A177-3AD203B41FA5}">
+                          <a16:colId xmlns:a16="http://schemas.microsoft.com/office/drawing/2014/main" val="113310370"/>
+                        </a:ext>
+                      </a:extLst>
+                    </a:gridCol>
+                    <a:gridCol w="1213485">
+                      <a:extLst>
+                        <a:ext uri="{9D8B030D-6E8A-4147-A177-3AD203B41FA5}">
+                          <a16:colId xmlns:a16="http://schemas.microsoft.com/office/drawing/2014/main" val="2125414621"/>
+                        </a:ext>
+                      </a:extLst>
+                    </a:gridCol>
+                    <a:gridCol w="2941955">
+                      <a:extLst>
+                        <a:ext uri="{9D8B030D-6E8A-4147-A177-3AD203B41FA5}">
+                          <a16:colId xmlns:a16="http://schemas.microsoft.com/office/drawing/2014/main" val="2034883439"/>
+                        </a:ext>
+                      </a:extLst>
+                    </a:gridCol>
+                  </a:tblGrid>
+                  <a:tr h="370840">
+                    <a:tc>
+                      <a:txBody>
+                        <a:bodyPr/>
+                        <a:lstStyle/>
+                        <a:p>
+                          <a:pPr algn="ctr"/>
+                          <a:endParaRPr lang="en-US" sz="1800" dirty="0">
+                            <a:latin typeface="Gotham Narrow Book"/>
+                          </a:endParaRPr>
+                        </a:p>
+                      </a:txBody>
+                      <a:tcPr/>
+                    </a:tc>
+                    <a:tc gridSpan="2">
+                      <a:txBody>
+                        <a:bodyPr/>
+                        <a:lstStyle/>
+                        <a:p>
+                          <a:pPr algn="ctr"/>
+                          <a:r>
+                            <a:rPr lang="en-US" sz="1800" dirty="0">
+                              <a:latin typeface="Gotham Narrow Book"/>
+                            </a:rPr>
+                            <a:t>Energy Consumption [J]</a:t>
+                          </a:r>
+                        </a:p>
+                      </a:txBody>
+                      <a:tcPr/>
+                    </a:tc>
+                    <a:tc hMerge="1">
+                      <a:txBody>
+                        <a:bodyPr/>
+                        <a:lstStyle/>
+                        <a:p>
+                          <a:pPr algn="ctr"/>
+                          <a:endParaRPr lang="en-US" dirty="0">
+                            <a:latin typeface="Gotham Narrow Book"/>
+                          </a:endParaRPr>
+                        </a:p>
+                      </a:txBody>
+                      <a:tcPr/>
+                    </a:tc>
+                    <a:tc gridSpan="2">
+                      <a:txBody>
+                        <a:bodyPr/>
+                        <a:lstStyle/>
+                        <a:p>
+                          <a:pPr algn="ctr"/>
+                          <a:r>
+                            <a:rPr lang="en-US" sz="1800" dirty="0">
+                              <a:latin typeface="Gotham Narrow Book"/>
+                            </a:rPr>
+                            <a:t>Relative 2-Norm Error (%)</a:t>
+                          </a:r>
+                        </a:p>
+                      </a:txBody>
+                      <a:tcPr/>
+                    </a:tc>
+                    <a:tc hMerge="1">
+                      <a:txBody>
+                        <a:bodyPr/>
+                        <a:lstStyle/>
+                        <a:p>
+                          <a:pPr algn="ctr"/>
+                          <a:endParaRPr lang="en-US" dirty="0">
+                            <a:latin typeface="Gotham Narrow Book"/>
+                          </a:endParaRPr>
+                        </a:p>
+                      </a:txBody>
+                      <a:tcPr/>
+                    </a:tc>
+                    <a:extLst>
+                      <a:ext uri="{0D108BD9-81ED-4DB2-BD59-A6C34878D82A}">
+                        <a16:rowId xmlns:a16="http://schemas.microsoft.com/office/drawing/2014/main" val="3859963474"/>
+                      </a:ext>
+                    </a:extLst>
+                  </a:tr>
+                  <a:tr h="370840">
+                    <a:tc>
+                      <a:txBody>
+                        <a:bodyPr/>
+                        <a:lstStyle/>
+                        <a:p>
+                          <a:pPr algn="ctr"/>
+                          <a:r>
+                            <a:rPr lang="en-US" sz="1800" dirty="0">
+                              <a:latin typeface="Gotham Narrow Book"/>
+                            </a:rPr>
+                            <a:t>Matrix</a:t>
+                          </a:r>
+                        </a:p>
+                      </a:txBody>
+                      <a:tcPr/>
+                    </a:tc>
+                    <a:tc>
+                      <a:txBody>
+                        <a:bodyPr/>
+                        <a:lstStyle/>
+                        <a:p>
+                          <a:pPr algn="ctr"/>
+                          <a:r>
+                            <a:rPr lang="en-US" sz="1800" dirty="0">
+                              <a:latin typeface="Gotham Narrow Book"/>
+                            </a:rPr>
+                            <a:t>GPU</a:t>
+                          </a:r>
+                        </a:p>
+                      </a:txBody>
+                      <a:tcPr/>
+                    </a:tc>
+                    <a:tc>
+                      <a:txBody>
+                        <a:bodyPr/>
+                        <a:lstStyle/>
+                        <a:p>
+                          <a:pPr algn="ctr"/>
+                          <a:r>
+                            <a:rPr lang="en-US" sz="1800" dirty="0">
+                              <a:latin typeface="Gotham Narrow Book"/>
+                            </a:rPr>
+                            <a:t>MELISO-simulated Devices</a:t>
+                          </a:r>
+                        </a:p>
+                      </a:txBody>
+                      <a:tcPr/>
+                    </a:tc>
+                    <a:tc>
+                      <a:txBody>
+                        <a:bodyPr/>
+                        <a:lstStyle/>
+                        <a:p>
+                          <a:pPr algn="ctr"/>
+                          <a:r>
+                            <a:rPr lang="en-US" sz="1800" dirty="0">
+                              <a:latin typeface="Gotham Narrow Book"/>
+                            </a:rPr>
+                            <a:t>GPU</a:t>
+                          </a:r>
+                        </a:p>
+                      </a:txBody>
+                      <a:tcPr/>
+                    </a:tc>
+                    <a:tc>
+                      <a:txBody>
+                        <a:bodyPr/>
+                        <a:lstStyle/>
+                        <a:p>
+                          <a:pPr algn="ctr"/>
+                          <a:r>
+                            <a:rPr lang="en-US" sz="1800" dirty="0">
+                              <a:latin typeface="Gotham Narrow Book"/>
+                            </a:rPr>
+                            <a:t>MELISO-simulated Devices</a:t>
+                          </a:r>
+                        </a:p>
+                      </a:txBody>
+                      <a:tcPr/>
+                    </a:tc>
+                    <a:extLst>
+                      <a:ext uri="{0D108BD9-81ED-4DB2-BD59-A6C34878D82A}">
+                        <a16:rowId xmlns:a16="http://schemas.microsoft.com/office/drawing/2014/main" val="3939403022"/>
+                      </a:ext>
+                    </a:extLst>
+                  </a:tr>
+                  <a:tr h="370840">
+                    <a:tc>
+                      <a:txBody>
+                        <a:bodyPr/>
+                        <a:lstStyle/>
+                        <a:p>
+                          <a:r>
+                            <a:rPr lang="en-US" sz="1800" dirty="0">
+                              <a:latin typeface="Gotham Narrow Book"/>
+                            </a:rPr>
+                            <a:t>Symmetric tridiagonal [1]</a:t>
+                          </a:r>
+                        </a:p>
+                      </a:txBody>
+                      <a:tcPr/>
+                    </a:tc>
+                    <a:tc>
+                      <a:txBody>
+                        <a:bodyPr/>
+                        <a:lstStyle/>
+                        <a:p>
+                          <a:pPr algn="ctr" fontAlgn="b"/>
+                          <a:r>
+                            <a:rPr lang="en-US" sz="1800" b="0" i="0" kern="1200" dirty="0">
+                              <a:solidFill>
+                                <a:schemeClr val="dk1"/>
+                              </a:solidFill>
+                              <a:effectLst/>
+                              <a:latin typeface="Gotham Narrow Book"/>
+                              <a:ea typeface="+mn-ea"/>
+                              <a:cs typeface="+mn-cs"/>
+                            </a:rPr>
+                            <a:t>0.3475</a:t>
+                          </a:r>
+                          <a:endParaRPr lang="en-US" sz="1800" dirty="0">
+                            <a:latin typeface="Gotham Narrow Book"/>
+                          </a:endParaRPr>
+                        </a:p>
+                      </a:txBody>
+                      <a:tcPr marL="9525" marR="9525" marT="9525" marB="0" anchor="b"/>
+                    </a:tc>
+                    <a:tc>
+                      <a:txBody>
+                        <a:bodyPr/>
+                        <a:lstStyle/>
+                        <a:p>
+                          <a:pPr algn="ctr"/>
+                          <a:endParaRPr lang="en-US" sz="1800" dirty="0">
+                            <a:latin typeface="Gotham Narrow Book"/>
+                          </a:endParaRPr>
+                        </a:p>
+                      </a:txBody>
+                      <a:tcPr/>
+                    </a:tc>
+                    <a:tc>
+                      <a:txBody>
+                        <a:bodyPr/>
+                        <a:lstStyle/>
+                        <a:p>
+                          <a:endParaRPr lang="en-US"/>
+                        </a:p>
+                      </a:txBody>
+                      <a:tcPr>
+                        <a:blipFill>
+                          <a:blip r:embed="rId3"/>
+                          <a:stretch>
+                            <a:fillRect l="-564824" t="-208197" r="-244724" b="-222951"/>
+                          </a:stretch>
+                        </a:blipFill>
+                      </a:tcPr>
+                    </a:tc>
+                    <a:tc>
+                      <a:txBody>
+                        <a:bodyPr/>
+                        <a:lstStyle/>
+                        <a:p>
+                          <a:pPr algn="ctr"/>
+                          <a:endParaRPr lang="en-US" sz="1800" dirty="0">
+                            <a:latin typeface="Gotham Narrow Book"/>
+                          </a:endParaRPr>
+                        </a:p>
+                      </a:txBody>
+                      <a:tcPr/>
+                    </a:tc>
+                    <a:extLst>
+                      <a:ext uri="{0D108BD9-81ED-4DB2-BD59-A6C34878D82A}">
+                        <a16:rowId xmlns:a16="http://schemas.microsoft.com/office/drawing/2014/main" val="3484688066"/>
+                      </a:ext>
+                    </a:extLst>
+                  </a:tr>
+                  <a:tr h="370840">
+                    <a:tc>
+                      <a:txBody>
+                        <a:bodyPr/>
+                        <a:lstStyle/>
+                        <a:p>
+                          <a:r>
+                            <a:rPr lang="en-US" sz="1800">
+                              <a:latin typeface="Gotham Narrow Book"/>
+                            </a:rPr>
+                            <a:t>Constraint matrix [2]</a:t>
+                          </a:r>
+                        </a:p>
+                      </a:txBody>
+                      <a:tcPr/>
+                    </a:tc>
+                    <a:tc>
+                      <a:txBody>
+                        <a:bodyPr/>
+                        <a:lstStyle/>
+                        <a:p>
+                          <a:pPr marL="0" marR="0" lvl="0" indent="0" algn="ctr" defTabSz="914400" rtl="0" eaLnBrk="1" fontAlgn="auto" latinLnBrk="0" hangingPunct="1">
+                            <a:lnSpc>
+                              <a:spcPct val="100000"/>
+                            </a:lnSpc>
+                            <a:spcBef>
+                              <a:spcPts val="0"/>
+                            </a:spcBef>
+                            <a:spcAft>
+                              <a:spcPts val="0"/>
+                            </a:spcAft>
+                            <a:buClrTx/>
+                            <a:buSzTx/>
+                            <a:buFontTx/>
+                            <a:buNone/>
+                            <a:tabLst/>
+                            <a:defRPr/>
+                          </a:pPr>
+                          <a:r>
+                            <a:rPr lang="en-US" sz="1800" b="0" i="0" kern="1200" dirty="0">
+                              <a:solidFill>
+                                <a:schemeClr val="dk1"/>
+                              </a:solidFill>
+                              <a:effectLst/>
+                              <a:latin typeface="Gotham Narrow Book"/>
+                              <a:ea typeface="+mn-ea"/>
+                              <a:cs typeface="+mn-cs"/>
+                            </a:rPr>
+                            <a:t>0.2643</a:t>
+                          </a:r>
+                          <a:endParaRPr lang="en-US" sz="1800" dirty="0">
+                            <a:latin typeface="Gotham Narrow Book"/>
+                          </a:endParaRPr>
+                        </a:p>
+                      </a:txBody>
+                      <a:tcPr/>
+                    </a:tc>
+                    <a:tc>
+                      <a:txBody>
+                        <a:bodyPr/>
+                        <a:lstStyle/>
+                        <a:p>
+                          <a:pPr algn="ctr"/>
+                          <a:endParaRPr lang="en-US" sz="1800" dirty="0">
+                            <a:latin typeface="Gotham Narrow Book"/>
+                          </a:endParaRPr>
+                        </a:p>
+                      </a:txBody>
+                      <a:tcPr/>
+                    </a:tc>
+                    <a:tc>
+                      <a:txBody>
+                        <a:bodyPr/>
+                        <a:lstStyle/>
+                        <a:p>
+                          <a:endParaRPr lang="en-US"/>
+                        </a:p>
+                      </a:txBody>
+                      <a:tcPr>
+                        <a:blipFill>
+                          <a:blip r:embed="rId3"/>
+                          <a:stretch>
+                            <a:fillRect l="-564824" t="-308197" r="-244724" b="-122951"/>
+                          </a:stretch>
+                        </a:blipFill>
+                      </a:tcPr>
+                    </a:tc>
+                    <a:tc>
+                      <a:txBody>
+                        <a:bodyPr/>
+                        <a:lstStyle/>
+                        <a:p>
+                          <a:pPr algn="ctr"/>
+                          <a:endParaRPr lang="en-US" sz="1800" dirty="0">
+                            <a:latin typeface="Gotham Narrow Book"/>
+                          </a:endParaRPr>
+                        </a:p>
+                      </a:txBody>
+                      <a:tcPr/>
+                    </a:tc>
+                    <a:extLst>
+                      <a:ext uri="{0D108BD9-81ED-4DB2-BD59-A6C34878D82A}">
+                        <a16:rowId xmlns:a16="http://schemas.microsoft.com/office/drawing/2014/main" val="1255951861"/>
+                      </a:ext>
+                    </a:extLst>
+                  </a:tr>
+                  <a:tr h="370840">
+                    <a:tc>
+                      <a:txBody>
+                        <a:bodyPr/>
+                        <a:lstStyle/>
+                        <a:p>
+                          <a:pPr marL="0" marR="0" lvl="0" indent="0" algn="l" defTabSz="914400" rtl="0" eaLnBrk="1" fontAlgn="auto" latinLnBrk="0" hangingPunct="1">
+                            <a:lnSpc>
+                              <a:spcPct val="100000"/>
+                            </a:lnSpc>
+                            <a:spcBef>
+                              <a:spcPts val="0"/>
+                            </a:spcBef>
+                            <a:spcAft>
+                              <a:spcPts val="0"/>
+                            </a:spcAft>
+                            <a:buClrTx/>
+                            <a:buSzTx/>
+                            <a:buFontTx/>
+                            <a:buNone/>
+                            <a:tabLst/>
+                            <a:defRPr/>
+                          </a:pPr>
+                          <a:r>
+                            <a:rPr lang="en-US" sz="1800">
+                              <a:latin typeface="Gotham Narrow Book"/>
+                            </a:rPr>
+                            <a:t>Constraint matrix [3]</a:t>
+                          </a:r>
+                        </a:p>
+                      </a:txBody>
+                      <a:tcPr/>
+                    </a:tc>
+                    <a:tc>
+                      <a:txBody>
+                        <a:bodyPr/>
+                        <a:lstStyle/>
+                        <a:p>
+                          <a:pPr algn="ctr"/>
+                          <a:r>
+                            <a:rPr lang="en-US" sz="1800" dirty="0">
+                              <a:latin typeface="Gotham Narrow Book"/>
+                            </a:rPr>
+                            <a:t>0.2761</a:t>
+                          </a:r>
+                        </a:p>
+                      </a:txBody>
+                      <a:tcPr/>
+                    </a:tc>
+                    <a:tc>
+                      <a:txBody>
+                        <a:bodyPr/>
+                        <a:lstStyle/>
+                        <a:p>
+                          <a:pPr algn="ctr"/>
+                          <a:endParaRPr lang="en-US" sz="1800" dirty="0">
+                            <a:latin typeface="Gotham Narrow Book"/>
+                          </a:endParaRPr>
+                        </a:p>
+                      </a:txBody>
+                      <a:tcPr/>
+                    </a:tc>
+                    <a:tc>
+                      <a:txBody>
+                        <a:bodyPr/>
+                        <a:lstStyle/>
+                        <a:p>
+                          <a:endParaRPr lang="en-US"/>
+                        </a:p>
+                      </a:txBody>
+                      <a:tcPr>
+                        <a:blipFill>
+                          <a:blip r:embed="rId3"/>
+                          <a:stretch>
+                            <a:fillRect l="-564824" t="-408197" r="-244724" b="-22951"/>
+                          </a:stretch>
+                        </a:blipFill>
+                      </a:tcPr>
+                    </a:tc>
+                    <a:tc>
+                      <a:txBody>
+                        <a:bodyPr/>
+                        <a:lstStyle/>
+                        <a:p>
+                          <a:pPr algn="ctr"/>
+                          <a:endParaRPr lang="en-US" sz="1800" dirty="0">
+                            <a:latin typeface="Gotham Narrow Book"/>
+                          </a:endParaRPr>
+                        </a:p>
+                      </a:txBody>
+                      <a:tcPr/>
+                    </a:tc>
+                    <a:extLst>
+                      <a:ext uri="{0D108BD9-81ED-4DB2-BD59-A6C34878D82A}">
+                        <a16:rowId xmlns:a16="http://schemas.microsoft.com/office/drawing/2014/main" val="1489652481"/>
+                      </a:ext>
+                    </a:extLst>
+                  </a:tr>
+                </a:tbl>
+              </a:graphicData>
+            </a:graphic>
+          </p:graphicFrame>
+        </mc:Fallback>
+      </mc:AlternateContent>
+      <p:sp>
+        <p:nvSpPr>
+          <p:cNvPr id="3" name="TextBox 2">
+            <a:extLst>
+              <a:ext uri="{FF2B5EF4-FFF2-40B4-BE49-F238E27FC236}">
+                <a16:creationId xmlns:a16="http://schemas.microsoft.com/office/drawing/2014/main" id="{667B7F80-39B3-9E4E-CDB2-112503DEA4F1}"/>
+              </a:ext>
+            </a:extLst>
+          </p:cNvPr>
+          <p:cNvSpPr txBox="1"/>
+          <p:nvPr/>
+        </p:nvSpPr>
+        <p:spPr>
+          <a:xfrm>
+            <a:off x="567836" y="5981623"/>
+            <a:ext cx="11056329" cy="830997"/>
+          </a:xfrm>
+          <a:prstGeom prst="rect">
+            <a:avLst/>
+          </a:prstGeom>
+          <a:noFill/>
+        </p:spPr>
+        <p:txBody>
+          <a:bodyPr wrap="square">
+            <a:spAutoFit/>
+          </a:bodyPr>
+          <a:lstStyle/>
+          <a:p>
+            <a:r>
+              <a:rPr lang="en-US" sz="1200">
+                <a:latin typeface="Gotham Narrow Book" pitchFamily="2" charset="0"/>
+              </a:rPr>
+              <a:t>Note: </a:t>
+            </a:r>
+          </a:p>
+          <a:p>
+            <a:pPr marL="171450" indent="-171450">
+              <a:buFont typeface="Arial" panose="020B0604020202020204" pitchFamily="34" charset="0"/>
+              <a:buChar char="•"/>
+            </a:pPr>
+            <a:r>
+              <a:rPr lang="en-US" sz="1200">
+                <a:latin typeface="Gotham Narrow Book" pitchFamily="2" charset="0"/>
+              </a:rPr>
+              <a:t>The energy consumption in MELISO-simulated devices are the sum of the read and write energies. The values are cumulative.</a:t>
+            </a:r>
+          </a:p>
+          <a:p>
+            <a:pPr marL="171450" indent="-171450">
+              <a:buFont typeface="Arial" panose="020B0604020202020204" pitchFamily="34" charset="0"/>
+              <a:buChar char="•"/>
+            </a:pPr>
+            <a:r>
+              <a:rPr lang="en-US" sz="1200">
+                <a:latin typeface="Gotham Narrow Book" pitchFamily="2" charset="0"/>
+              </a:rPr>
+              <a:t>The GPU energy consumption is measured using </a:t>
+            </a:r>
+            <a:r>
+              <a:rPr lang="en-US" sz="1200">
+                <a:latin typeface="Gotham Narrow Book" pitchFamily="2" charset="0"/>
+                <a:hlinkClick r:id="rId4"/>
+              </a:rPr>
+              <a:t>Zeus</a:t>
+            </a:r>
+            <a:r>
+              <a:rPr lang="en-US" sz="1200">
+                <a:latin typeface="Gotham Narrow Book" pitchFamily="2" charset="0"/>
+              </a:rPr>
+              <a:t>.</a:t>
+            </a:r>
+          </a:p>
+          <a:p>
+            <a:pPr marL="285750" indent="-285750">
+              <a:buFont typeface="Arial" panose="020B0604020202020204" pitchFamily="34" charset="0"/>
+              <a:buChar char="•"/>
+            </a:pPr>
+            <a:endParaRPr lang="en-US" sz="1200"/>
+          </a:p>
+        </p:txBody>
+      </p:sp>
     </p:spTree>
     <p:extLst>
       <p:ext uri="{BB962C8B-B14F-4D97-AF65-F5344CB8AC3E}">
@@ -6272,7 +6986,7 @@
           <a:lstStyle/>
           <a:p>
             <a:r>
-              <a:rPr lang="en-US" sz="4800" dirty="0">
+              <a:rPr lang="en-US" sz="4800">
                 <a:solidFill>
                   <a:srgbClr val="FB6400"/>
                 </a:solidFill>
@@ -6312,7 +7026,7 @@
           <a:lstStyle/>
           <a:p>
             <a:r>
-              <a:rPr lang="en-US" sz="2400" b="1" dirty="0">
+              <a:rPr lang="en-US" sz="2400" b="1">
                 <a:solidFill>
                   <a:srgbClr val="63666A"/>
                 </a:solidFill>
@@ -6359,7 +7073,7 @@
               <a:buChar char="§"/>
             </a:pPr>
             <a:r>
-              <a:rPr lang="en-US" dirty="0">
+              <a:rPr lang="en-US">
                 <a:latin typeface="Gotham Narrow Book" pitchFamily="2" charset="0"/>
               </a:rPr>
               <a:t>Breakdown results of MELISO-simulated devices:</a:t>
@@ -6371,7 +7085,7 @@
                 <a:spcPct val="125000"/>
               </a:lnSpc>
             </a:pPr>
-            <a:endParaRPr lang="en-US" dirty="0">
+            <a:endParaRPr lang="en-US">
               <a:latin typeface="Gotham Narrow Book" pitchFamily="2" charset="0"/>
             </a:endParaRPr>
           </a:p>
@@ -6392,7 +7106,7 @@
           <p:nvPr>
             <p:extLst>
               <p:ext uri="{D42A27DB-BD31-4B8C-83A1-F6EECF244321}">
-                <p14:modId xmlns:p14="http://schemas.microsoft.com/office/powerpoint/2010/main" val="4049480215"/>
+                <p14:modId xmlns:p14="http://schemas.microsoft.com/office/powerpoint/2010/main" val="820414837"/>
               </p:ext>
             </p:extLst>
           </p:nvPr>
@@ -6452,7 +7166,7 @@
                     <a:p>
                       <a:pPr algn="ctr"/>
                       <a:r>
-                        <a:rPr lang="en-US" dirty="0">
+                        <a:rPr lang="en-US">
                           <a:latin typeface="Gotham Narrow Book"/>
                         </a:rPr>
                         <a:t>Matrix</a:t>
@@ -6468,7 +7182,7 @@
                     <a:p>
                       <a:pPr algn="ctr"/>
                       <a:r>
-                        <a:rPr lang="en-US" dirty="0">
+                        <a:rPr lang="en-US">
                           <a:latin typeface="Gotham Narrow Book"/>
                         </a:rPr>
                         <a:t>Read Latency</a:t>
@@ -6484,7 +7198,7 @@
                     <a:p>
                       <a:pPr algn="ctr"/>
                       <a:r>
-                        <a:rPr lang="en-US" dirty="0">
+                        <a:rPr lang="en-US">
                           <a:latin typeface="Gotham Narrow Book"/>
                         </a:rPr>
                         <a:t>Read Energy</a:t>
@@ -6500,7 +7214,7 @@
                     <a:p>
                       <a:pPr algn="ctr"/>
                       <a:r>
-                        <a:rPr lang="en-US" dirty="0">
+                        <a:rPr lang="en-US">
                           <a:latin typeface="Gotham Narrow Book"/>
                         </a:rPr>
                         <a:t>Write Latency</a:t>
@@ -6516,7 +7230,7 @@
                     <a:p>
                       <a:pPr algn="ctr"/>
                       <a:r>
-                        <a:rPr lang="en-US" dirty="0">
+                        <a:rPr lang="en-US">
                           <a:latin typeface="Gotham Narrow Book"/>
                         </a:rPr>
                         <a:t>Write Energy</a:t>
@@ -6538,7 +7252,7 @@
                     <a:lstStyle/>
                     <a:p>
                       <a:r>
-                        <a:rPr lang="en-US" dirty="0">
+                        <a:rPr lang="en-US">
                           <a:latin typeface="Gotham Narrow Book"/>
                         </a:rPr>
                         <a:t>Symmetric tridiagonal [1]</a:t>
@@ -6554,7 +7268,7 @@
                     <a:p>
                       <a:pPr algn="ctr" fontAlgn="b"/>
                       <a:r>
-                        <a:rPr lang="en-US" dirty="0">
+                        <a:rPr lang="en-US">
                           <a:latin typeface="Gotham Narrow Book"/>
                         </a:rPr>
                         <a:t>138.0613</a:t>
@@ -6570,7 +7284,7 @@
                     <a:p>
                       <a:pPr algn="ctr"/>
                       <a:r>
-                        <a:rPr lang="en-US" dirty="0">
+                        <a:rPr lang="en-US">
                           <a:latin typeface="Gotham Narrow Book"/>
                         </a:rPr>
                         <a:t>0.1239</a:t>
@@ -6591,9 +7305,6 @@
                         </a:rPr>
                         <a:t>189.6263</a:t>
                       </a:r>
-                      <a:endParaRPr lang="en-US" dirty="0">
-                        <a:latin typeface="Gotham Narrow Book"/>
-                      </a:endParaRPr>
                     </a:p>
                   </a:txBody>
                   <a:tcPr/>
@@ -6605,7 +7316,7 @@
                     <a:p>
                       <a:pPr algn="ctr"/>
                       <a:r>
-                        <a:rPr lang="en-US" dirty="0">
+                        <a:rPr lang="en-US">
                           <a:latin typeface="Gotham Narrow Book"/>
                         </a:rPr>
                         <a:t>0.0543</a:t>
@@ -6627,7 +7338,7 @@
                     <a:lstStyle/>
                     <a:p>
                       <a:r>
-                        <a:rPr lang="en-US" dirty="0">
+                        <a:rPr lang="en-US">
                           <a:latin typeface="Gotham Narrow Book"/>
                         </a:rPr>
                         <a:t>Constraint matrix [2]</a:t>
@@ -6659,10 +7370,10 @@
                         <a:defRPr/>
                       </a:pPr>
                       <a:r>
-                        <a:rPr lang="en-US" dirty="0">
+                        <a:rPr lang="en-US">
                           <a:latin typeface="Gotham Narrow Book"/>
                         </a:rPr>
-                        <a:t>0.24673</a:t>
+                        <a:t>100.1153</a:t>
                       </a:r>
                     </a:p>
                   </a:txBody>
@@ -6673,9 +7384,29 @@
                     <a:bodyPr/>
                     <a:lstStyle/>
                     <a:p>
-                      <a:endParaRPr lang="en-US" dirty="0">
-                        <a:latin typeface="Gotham Narrow Book"/>
-                      </a:endParaRPr>
+                      <a:pPr marL="0" marR="0" lvl="0" indent="0" algn="ctr" defTabSz="914400" rtl="0" eaLnBrk="1" fontAlgn="auto" latinLnBrk="0" hangingPunct="1">
+                        <a:lnSpc>
+                          <a:spcPct val="100000"/>
+                        </a:lnSpc>
+                        <a:spcBef>
+                          <a:spcPts val="0"/>
+                        </a:spcBef>
+                        <a:spcAft>
+                          <a:spcPts val="0"/>
+                        </a:spcAft>
+                        <a:buClrTx/>
+                        <a:buSzTx/>
+                        <a:buFontTx/>
+                        <a:buNone/>
+                        <a:tabLst/>
+                        <a:defRPr/>
+                      </a:pPr>
+                      <a:r>
+                        <a:rPr lang="en-US">
+                          <a:latin typeface="Gotham Narrow Book"/>
+                        </a:rPr>
+                        <a:t>0.0688</a:t>
+                      </a:r>
                     </a:p>
                   </a:txBody>
                   <a:tcPr/>
@@ -6685,9 +7416,13 @@
                     <a:bodyPr/>
                     <a:lstStyle/>
                     <a:p>
-                      <a:endParaRPr lang="en-US" dirty="0">
-                        <a:latin typeface="Gotham Narrow Book"/>
-                      </a:endParaRPr>
+                      <a:pPr algn="ctr"/>
+                      <a:r>
+                        <a:rPr lang="en-US">
+                          <a:latin typeface="Gotham Narrow Book"/>
+                        </a:rPr>
+                        <a:t>167.1076</a:t>
+                      </a:r>
                     </a:p>
                   </a:txBody>
                   <a:tcPr/>
@@ -6697,9 +7432,13 @@
                     <a:bodyPr/>
                     <a:lstStyle/>
                     <a:p>
-                      <a:endParaRPr lang="en-US" dirty="0">
-                        <a:latin typeface="Gotham Narrow Book"/>
-                      </a:endParaRPr>
+                      <a:pPr algn="ctr"/>
+                      <a:r>
+                        <a:rPr lang="en-US">
+                          <a:latin typeface="Gotham Narrow Book"/>
+                        </a:rPr>
+                        <a:t>0.0299</a:t>
+                      </a:r>
                     </a:p>
                   </a:txBody>
                   <a:tcPr/>
@@ -6734,7 +7473,7 @@
                         <a:defRPr/>
                       </a:pPr>
                       <a:r>
-                        <a:rPr lang="en-US" dirty="0">
+                        <a:rPr lang="en-US">
                           <a:latin typeface="Gotham Narrow Book"/>
                         </a:rPr>
                         <a:t>Constraint matrix [3]</a:t>
@@ -6750,10 +7489,10 @@
                     <a:p>
                       <a:pPr algn="ctr"/>
                       <a:r>
-                        <a:rPr lang="en-US" dirty="0">
+                        <a:rPr lang="en-US">
                           <a:latin typeface="Gotham Narrow Book"/>
                         </a:rPr>
-                        <a:t>0.26003</a:t>
+                        <a:t>125.7092</a:t>
                       </a:r>
                     </a:p>
                   </a:txBody>
@@ -6764,9 +7503,13 @@
                     <a:bodyPr/>
                     <a:lstStyle/>
                     <a:p>
-                      <a:endParaRPr lang="en-US" dirty="0">
-                        <a:latin typeface="Gotham Narrow Book"/>
-                      </a:endParaRPr>
+                      <a:pPr algn="ctr"/>
+                      <a:r>
+                        <a:rPr lang="en-US">
+                          <a:latin typeface="Gotham Narrow Book"/>
+                        </a:rPr>
+                        <a:t>0.1089</a:t>
+                      </a:r>
                     </a:p>
                   </a:txBody>
                   <a:tcPr/>
@@ -6776,9 +7519,13 @@
                     <a:bodyPr/>
                     <a:lstStyle/>
                     <a:p>
-                      <a:endParaRPr lang="en-US" dirty="0">
-                        <a:latin typeface="Gotham Narrow Book"/>
-                      </a:endParaRPr>
+                      <a:pPr algn="ctr"/>
+                      <a:r>
+                        <a:rPr lang="en-US">
+                          <a:latin typeface="Gotham Narrow Book"/>
+                        </a:rPr>
+                        <a:t>179.0071</a:t>
+                      </a:r>
                     </a:p>
                   </a:txBody>
                   <a:tcPr/>
@@ -6788,9 +7535,13 @@
                     <a:bodyPr/>
                     <a:lstStyle/>
                     <a:p>
-                      <a:endParaRPr lang="en-US" dirty="0">
-                        <a:latin typeface="Gotham Narrow Book"/>
-                      </a:endParaRPr>
+                      <a:pPr algn="ctr"/>
+                      <a:r>
+                        <a:rPr lang="en-US">
+                          <a:latin typeface="Gotham Narrow Book"/>
+                        </a:rPr>
+                        <a:t>0.0473</a:t>
+                      </a:r>
                     </a:p>
                   </a:txBody>
                   <a:tcPr/>
@@ -6884,7 +7635,7 @@
           <a:lstStyle/>
           <a:p>
             <a:r>
-              <a:rPr lang="en-US" sz="4800" dirty="0">
+              <a:rPr lang="en-US" sz="4800">
                 <a:solidFill>
                   <a:srgbClr val="FB6400"/>
                 </a:solidFill>
@@ -6924,7 +7675,7 @@
           <a:lstStyle/>
           <a:p>
             <a:r>
-              <a:rPr lang="en-US" sz="2400" b="1" dirty="0">
+              <a:rPr lang="en-US" sz="2400" b="1">
                 <a:solidFill>
                   <a:srgbClr val="63666A"/>
                 </a:solidFill>
@@ -7116,7 +7867,7 @@
           <a:lstStyle/>
           <a:p>
             <a:r>
-              <a:rPr lang="en-US" dirty="0">
+              <a:rPr lang="en-US">
                 <a:latin typeface="Gotham Narrow Book"/>
               </a:rPr>
               <a:t>Symmetric tridiagonal [1]</a:t>
@@ -7292,7 +8043,7 @@
           <a:lstStyle/>
           <a:p>
             <a:r>
-              <a:rPr lang="en-US" dirty="0">
+              <a:rPr lang="en-US">
                 <a:latin typeface="Gotham Narrow Book"/>
               </a:rPr>
               <a:t>Constraint matrix [3]</a:t>
@@ -7464,7 +8215,7 @@
           <a:lstStyle/>
           <a:p>
             <a:r>
-              <a:rPr lang="en-US" sz="2400" b="1" dirty="0">
+              <a:rPr lang="en-US" sz="2400" b="1">
                 <a:solidFill>
                   <a:srgbClr val="63666A"/>
                 </a:solidFill>
@@ -7509,391 +8260,391 @@
               </a:lnSpc>
             </a:pPr>
             <a:r>
-              <a:rPr lang="en-US" dirty="0">
+              <a:rPr lang="en-US">
                 <a:latin typeface="Gotham Narrow Book" pitchFamily="2" charset="0"/>
               </a:rPr>
               <a:t>Body copy goes here. Lorem ipsum dolor sit </a:t>
             </a:r>
             <a:r>
-              <a:rPr lang="en-US" dirty="0" err="1">
+              <a:rPr lang="en-US" err="1">
                 <a:latin typeface="Gotham Narrow Book" pitchFamily="2" charset="0"/>
               </a:rPr>
               <a:t>amet</a:t>
             </a:r>
             <a:r>
-              <a:rPr lang="en-US" dirty="0">
+              <a:rPr lang="en-US">
                 <a:latin typeface="Gotham Narrow Book" pitchFamily="2" charset="0"/>
               </a:rPr>
               <a:t>, </a:t>
             </a:r>
             <a:r>
-              <a:rPr lang="en-US" dirty="0" err="1">
+              <a:rPr lang="en-US" err="1">
                 <a:latin typeface="Gotham Narrow Book" pitchFamily="2" charset="0"/>
               </a:rPr>
               <a:t>consectetur</a:t>
             </a:r>
             <a:r>
-              <a:rPr lang="en-US" dirty="0">
+              <a:rPr lang="en-US">
                 <a:latin typeface="Gotham Narrow Book" pitchFamily="2" charset="0"/>
               </a:rPr>
               <a:t> </a:t>
             </a:r>
             <a:r>
-              <a:rPr lang="en-US" dirty="0" err="1">
+              <a:rPr lang="en-US" err="1">
                 <a:latin typeface="Gotham Narrow Book" pitchFamily="2" charset="0"/>
               </a:rPr>
               <a:t>adipiscing</a:t>
             </a:r>
             <a:r>
-              <a:rPr lang="en-US" dirty="0">
+              <a:rPr lang="en-US">
                 <a:latin typeface="Gotham Narrow Book" pitchFamily="2" charset="0"/>
               </a:rPr>
               <a:t> </a:t>
             </a:r>
             <a:r>
-              <a:rPr lang="en-US" dirty="0" err="1">
+              <a:rPr lang="en-US" err="1">
                 <a:latin typeface="Gotham Narrow Book" pitchFamily="2" charset="0"/>
               </a:rPr>
               <a:t>elit</a:t>
             </a:r>
             <a:r>
-              <a:rPr lang="en-US" dirty="0">
+              <a:rPr lang="en-US">
                 <a:latin typeface="Gotham Narrow Book" pitchFamily="2" charset="0"/>
               </a:rPr>
               <a:t>, sed do </a:t>
             </a:r>
             <a:r>
-              <a:rPr lang="en-US" dirty="0" err="1">
+              <a:rPr lang="en-US" err="1">
                 <a:latin typeface="Gotham Narrow Book" pitchFamily="2" charset="0"/>
               </a:rPr>
               <a:t>eiusmod</a:t>
             </a:r>
             <a:r>
-              <a:rPr lang="en-US" dirty="0">
+              <a:rPr lang="en-US">
                 <a:latin typeface="Gotham Narrow Book" pitchFamily="2" charset="0"/>
               </a:rPr>
               <a:t> </a:t>
             </a:r>
             <a:r>
-              <a:rPr lang="en-US" dirty="0" err="1">
+              <a:rPr lang="en-US" err="1">
                 <a:latin typeface="Gotham Narrow Book" pitchFamily="2" charset="0"/>
               </a:rPr>
               <a:t>tempor</a:t>
             </a:r>
             <a:r>
-              <a:rPr lang="en-US" dirty="0">
+              <a:rPr lang="en-US">
                 <a:latin typeface="Gotham Narrow Book" pitchFamily="2" charset="0"/>
               </a:rPr>
               <a:t> </a:t>
             </a:r>
             <a:r>
-              <a:rPr lang="en-US" dirty="0" err="1">
+              <a:rPr lang="en-US" err="1">
                 <a:latin typeface="Gotham Narrow Book" pitchFamily="2" charset="0"/>
               </a:rPr>
               <a:t>incididunt</a:t>
             </a:r>
             <a:r>
-              <a:rPr lang="en-US" dirty="0">
+              <a:rPr lang="en-US">
                 <a:latin typeface="Gotham Narrow Book" pitchFamily="2" charset="0"/>
               </a:rPr>
               <a:t> </a:t>
             </a:r>
             <a:r>
-              <a:rPr lang="en-US" dirty="0" err="1">
+              <a:rPr lang="en-US" err="1">
                 <a:latin typeface="Gotham Narrow Book" pitchFamily="2" charset="0"/>
               </a:rPr>
               <a:t>ut</a:t>
             </a:r>
             <a:r>
-              <a:rPr lang="en-US" dirty="0">
+              <a:rPr lang="en-US">
                 <a:latin typeface="Gotham Narrow Book" pitchFamily="2" charset="0"/>
               </a:rPr>
               <a:t> </a:t>
             </a:r>
             <a:r>
-              <a:rPr lang="en-US" dirty="0" err="1">
+              <a:rPr lang="en-US" err="1">
                 <a:latin typeface="Gotham Narrow Book" pitchFamily="2" charset="0"/>
               </a:rPr>
               <a:t>labore</a:t>
             </a:r>
             <a:r>
-              <a:rPr lang="en-US" dirty="0">
+              <a:rPr lang="en-US">
                 <a:latin typeface="Gotham Narrow Book" pitchFamily="2" charset="0"/>
               </a:rPr>
               <a:t> et dolore magna </a:t>
             </a:r>
             <a:r>
-              <a:rPr lang="en-US" dirty="0" err="1">
+              <a:rPr lang="en-US" err="1">
                 <a:latin typeface="Gotham Narrow Book" pitchFamily="2" charset="0"/>
               </a:rPr>
               <a:t>aliqua</a:t>
             </a:r>
             <a:r>
-              <a:rPr lang="en-US" dirty="0">
+              <a:rPr lang="en-US">
                 <a:latin typeface="Gotham Narrow Book" pitchFamily="2" charset="0"/>
               </a:rPr>
               <a:t>. Ut </a:t>
             </a:r>
             <a:r>
-              <a:rPr lang="en-US" dirty="0" err="1">
+              <a:rPr lang="en-US" err="1">
                 <a:latin typeface="Gotham Narrow Book" pitchFamily="2" charset="0"/>
               </a:rPr>
               <a:t>enim</a:t>
             </a:r>
             <a:r>
-              <a:rPr lang="en-US" dirty="0">
+              <a:rPr lang="en-US">
                 <a:latin typeface="Gotham Narrow Book" pitchFamily="2" charset="0"/>
               </a:rPr>
               <a:t> ad minim </a:t>
             </a:r>
             <a:r>
-              <a:rPr lang="en-US" dirty="0" err="1">
+              <a:rPr lang="en-US" err="1">
                 <a:latin typeface="Gotham Narrow Book" pitchFamily="2" charset="0"/>
               </a:rPr>
               <a:t>veniam</a:t>
             </a:r>
             <a:r>
-              <a:rPr lang="en-US" dirty="0">
+              <a:rPr lang="en-US">
                 <a:latin typeface="Gotham Narrow Book" pitchFamily="2" charset="0"/>
               </a:rPr>
               <a:t>, </a:t>
             </a:r>
             <a:r>
-              <a:rPr lang="en-US" dirty="0" err="1">
+              <a:rPr lang="en-US" err="1">
                 <a:latin typeface="Gotham Narrow Book" pitchFamily="2" charset="0"/>
               </a:rPr>
               <a:t>quis</a:t>
             </a:r>
             <a:r>
-              <a:rPr lang="en-US" dirty="0">
+              <a:rPr lang="en-US">
                 <a:latin typeface="Gotham Narrow Book" pitchFamily="2" charset="0"/>
               </a:rPr>
               <a:t> </a:t>
             </a:r>
             <a:r>
-              <a:rPr lang="en-US" dirty="0" err="1">
+              <a:rPr lang="en-US" err="1">
                 <a:latin typeface="Gotham Narrow Book" pitchFamily="2" charset="0"/>
               </a:rPr>
               <a:t>nostrud</a:t>
             </a:r>
             <a:r>
-              <a:rPr lang="en-US" dirty="0">
+              <a:rPr lang="en-US">
                 <a:latin typeface="Gotham Narrow Book" pitchFamily="2" charset="0"/>
               </a:rPr>
               <a:t> exercitation </a:t>
             </a:r>
             <a:r>
-              <a:rPr lang="en-US" dirty="0" err="1">
+              <a:rPr lang="en-US" err="1">
                 <a:latin typeface="Gotham Narrow Book" pitchFamily="2" charset="0"/>
               </a:rPr>
               <a:t>ullamco</a:t>
             </a:r>
             <a:r>
-              <a:rPr lang="en-US" dirty="0">
+              <a:rPr lang="en-US">
                 <a:latin typeface="Gotham Narrow Book" pitchFamily="2" charset="0"/>
               </a:rPr>
               <a:t> </a:t>
             </a:r>
             <a:r>
-              <a:rPr lang="en-US" dirty="0" err="1">
+              <a:rPr lang="en-US" err="1">
                 <a:latin typeface="Gotham Narrow Book" pitchFamily="2" charset="0"/>
               </a:rPr>
               <a:t>laboris</a:t>
             </a:r>
             <a:r>
-              <a:rPr lang="en-US" dirty="0">
+              <a:rPr lang="en-US">
                 <a:latin typeface="Gotham Narrow Book" pitchFamily="2" charset="0"/>
               </a:rPr>
               <a:t> nisi </a:t>
             </a:r>
             <a:r>
-              <a:rPr lang="en-US" dirty="0" err="1">
+              <a:rPr lang="en-US" err="1">
                 <a:latin typeface="Gotham Narrow Book" pitchFamily="2" charset="0"/>
               </a:rPr>
               <a:t>ut</a:t>
             </a:r>
             <a:r>
-              <a:rPr lang="en-US" dirty="0">
+              <a:rPr lang="en-US">
                 <a:latin typeface="Gotham Narrow Book" pitchFamily="2" charset="0"/>
               </a:rPr>
               <a:t> </a:t>
             </a:r>
             <a:r>
-              <a:rPr lang="en-US" dirty="0" err="1">
+              <a:rPr lang="en-US" err="1">
                 <a:latin typeface="Gotham Narrow Book" pitchFamily="2" charset="0"/>
               </a:rPr>
               <a:t>aliquip</a:t>
             </a:r>
             <a:r>
-              <a:rPr lang="en-US" dirty="0">
+              <a:rPr lang="en-US">
                 <a:latin typeface="Gotham Narrow Book" pitchFamily="2" charset="0"/>
               </a:rPr>
               <a:t> ex </a:t>
             </a:r>
             <a:r>
-              <a:rPr lang="en-US" dirty="0" err="1">
+              <a:rPr lang="en-US" err="1">
                 <a:latin typeface="Gotham Narrow Book" pitchFamily="2" charset="0"/>
               </a:rPr>
               <a:t>ea</a:t>
             </a:r>
             <a:r>
-              <a:rPr lang="en-US" dirty="0">
+              <a:rPr lang="en-US">
                 <a:latin typeface="Gotham Narrow Book" pitchFamily="2" charset="0"/>
               </a:rPr>
               <a:t> </a:t>
             </a:r>
             <a:r>
-              <a:rPr lang="en-US" dirty="0" err="1">
+              <a:rPr lang="en-US" err="1">
                 <a:latin typeface="Gotham Narrow Book" pitchFamily="2" charset="0"/>
               </a:rPr>
               <a:t>commodo</a:t>
             </a:r>
             <a:r>
-              <a:rPr lang="en-US" dirty="0">
+              <a:rPr lang="en-US">
                 <a:latin typeface="Gotham Narrow Book" pitchFamily="2" charset="0"/>
               </a:rPr>
               <a:t> </a:t>
             </a:r>
             <a:r>
-              <a:rPr lang="en-US" dirty="0" err="1">
+              <a:rPr lang="en-US" err="1">
                 <a:latin typeface="Gotham Narrow Book" pitchFamily="2" charset="0"/>
               </a:rPr>
               <a:t>consequat</a:t>
             </a:r>
             <a:r>
-              <a:rPr lang="en-US" dirty="0">
+              <a:rPr lang="en-US">
                 <a:latin typeface="Gotham Narrow Book" pitchFamily="2" charset="0"/>
               </a:rPr>
               <a:t>. Duis </a:t>
             </a:r>
             <a:r>
-              <a:rPr lang="en-US" dirty="0" err="1">
+              <a:rPr lang="en-US" err="1">
                 <a:latin typeface="Gotham Narrow Book" pitchFamily="2" charset="0"/>
               </a:rPr>
               <a:t>aute</a:t>
             </a:r>
             <a:r>
-              <a:rPr lang="en-US" dirty="0">
+              <a:rPr lang="en-US">
                 <a:latin typeface="Gotham Narrow Book" pitchFamily="2" charset="0"/>
               </a:rPr>
               <a:t> </a:t>
             </a:r>
             <a:r>
-              <a:rPr lang="en-US" dirty="0" err="1">
+              <a:rPr lang="en-US" err="1">
                 <a:latin typeface="Gotham Narrow Book" pitchFamily="2" charset="0"/>
               </a:rPr>
               <a:t>irure</a:t>
             </a:r>
             <a:r>
-              <a:rPr lang="en-US" dirty="0">
+              <a:rPr lang="en-US">
                 <a:latin typeface="Gotham Narrow Book" pitchFamily="2" charset="0"/>
               </a:rPr>
               <a:t> dolor in </a:t>
             </a:r>
             <a:r>
-              <a:rPr lang="en-US" dirty="0" err="1">
+              <a:rPr lang="en-US" err="1">
                 <a:latin typeface="Gotham Narrow Book" pitchFamily="2" charset="0"/>
               </a:rPr>
               <a:t>reprehenderit</a:t>
             </a:r>
             <a:r>
-              <a:rPr lang="en-US" dirty="0">
+              <a:rPr lang="en-US">
                 <a:latin typeface="Gotham Narrow Book" pitchFamily="2" charset="0"/>
               </a:rPr>
               <a:t> in </a:t>
             </a:r>
             <a:r>
-              <a:rPr lang="en-US" dirty="0" err="1">
+              <a:rPr lang="en-US" err="1">
                 <a:latin typeface="Gotham Narrow Book" pitchFamily="2" charset="0"/>
               </a:rPr>
               <a:t>voluptate</a:t>
             </a:r>
             <a:r>
-              <a:rPr lang="en-US" dirty="0">
+              <a:rPr lang="en-US">
                 <a:latin typeface="Gotham Narrow Book" pitchFamily="2" charset="0"/>
               </a:rPr>
               <a:t> </a:t>
             </a:r>
             <a:r>
-              <a:rPr lang="en-US" dirty="0" err="1">
+              <a:rPr lang="en-US" err="1">
                 <a:latin typeface="Gotham Narrow Book" pitchFamily="2" charset="0"/>
               </a:rPr>
               <a:t>velit</a:t>
             </a:r>
             <a:r>
-              <a:rPr lang="en-US" dirty="0">
+              <a:rPr lang="en-US">
                 <a:latin typeface="Gotham Narrow Book" pitchFamily="2" charset="0"/>
               </a:rPr>
               <a:t> </a:t>
             </a:r>
             <a:r>
-              <a:rPr lang="en-US" dirty="0" err="1">
+              <a:rPr lang="en-US" err="1">
                 <a:latin typeface="Gotham Narrow Book" pitchFamily="2" charset="0"/>
               </a:rPr>
               <a:t>esse</a:t>
             </a:r>
             <a:r>
-              <a:rPr lang="en-US" dirty="0">
+              <a:rPr lang="en-US">
                 <a:latin typeface="Gotham Narrow Book" pitchFamily="2" charset="0"/>
               </a:rPr>
               <a:t> </a:t>
             </a:r>
             <a:r>
-              <a:rPr lang="en-US" dirty="0" err="1">
+              <a:rPr lang="en-US" err="1">
                 <a:latin typeface="Gotham Narrow Book" pitchFamily="2" charset="0"/>
               </a:rPr>
               <a:t>cillum</a:t>
             </a:r>
             <a:r>
-              <a:rPr lang="en-US" dirty="0">
+              <a:rPr lang="en-US">
                 <a:latin typeface="Gotham Narrow Book" pitchFamily="2" charset="0"/>
               </a:rPr>
               <a:t> dolore </a:t>
             </a:r>
             <a:r>
-              <a:rPr lang="en-US" dirty="0" err="1">
+              <a:rPr lang="en-US" err="1">
                 <a:latin typeface="Gotham Narrow Book" pitchFamily="2" charset="0"/>
               </a:rPr>
               <a:t>eu</a:t>
             </a:r>
             <a:r>
-              <a:rPr lang="en-US" dirty="0">
+              <a:rPr lang="en-US">
                 <a:latin typeface="Gotham Narrow Book" pitchFamily="2" charset="0"/>
               </a:rPr>
               <a:t> </a:t>
             </a:r>
             <a:r>
-              <a:rPr lang="en-US" dirty="0" err="1">
+              <a:rPr lang="en-US" err="1">
                 <a:latin typeface="Gotham Narrow Book" pitchFamily="2" charset="0"/>
               </a:rPr>
               <a:t>fugiat</a:t>
             </a:r>
             <a:r>
-              <a:rPr lang="en-US" dirty="0">
+              <a:rPr lang="en-US">
                 <a:latin typeface="Gotham Narrow Book" pitchFamily="2" charset="0"/>
               </a:rPr>
               <a:t> </a:t>
             </a:r>
             <a:r>
-              <a:rPr lang="en-US" dirty="0" err="1">
+              <a:rPr lang="en-US" err="1">
                 <a:latin typeface="Gotham Narrow Book" pitchFamily="2" charset="0"/>
               </a:rPr>
               <a:t>nulla</a:t>
             </a:r>
             <a:r>
-              <a:rPr lang="en-US" dirty="0">
+              <a:rPr lang="en-US">
                 <a:latin typeface="Gotham Narrow Book" pitchFamily="2" charset="0"/>
               </a:rPr>
               <a:t> </a:t>
             </a:r>
             <a:r>
-              <a:rPr lang="en-US" dirty="0" err="1">
+              <a:rPr lang="en-US" err="1">
                 <a:latin typeface="Gotham Narrow Book" pitchFamily="2" charset="0"/>
               </a:rPr>
               <a:t>pariature</a:t>
             </a:r>
             <a:r>
-              <a:rPr lang="en-US" dirty="0">
+              <a:rPr lang="en-US">
                 <a:latin typeface="Gotham Narrow Book" pitchFamily="2" charset="0"/>
               </a:rPr>
               <a:t>.</a:t>
@@ -7906,7 +8657,7 @@
               </a:lnSpc>
             </a:pPr>
             <a:r>
-              <a:rPr lang="en-US" dirty="0">
+              <a:rPr lang="en-US">
                 <a:latin typeface="Gotham Narrow Book" pitchFamily="2" charset="0"/>
               </a:rPr>
               <a:t>	</a:t>
@@ -7919,7 +8670,7 @@
               </a:lnSpc>
             </a:pPr>
             <a:r>
-              <a:rPr lang="en-US" dirty="0">
+              <a:rPr lang="en-US">
                 <a:latin typeface="Gotham Narrow Book" pitchFamily="2" charset="0"/>
               </a:rPr>
               <a:t>	• Secondary Slide</a:t>
@@ -7932,7 +8683,7 @@
               </a:lnSpc>
             </a:pPr>
             <a:r>
-              <a:rPr lang="en-US" dirty="0">
+              <a:rPr lang="en-US">
                 <a:latin typeface="Gotham Narrow Book" pitchFamily="2" charset="0"/>
               </a:rPr>
               <a:t>	• Secondary Slide</a:t>
@@ -7945,7 +8696,7 @@
               </a:lnSpc>
             </a:pPr>
             <a:r>
-              <a:rPr lang="en-US" dirty="0">
+              <a:rPr lang="en-US">
                 <a:latin typeface="Gotham Narrow Book" pitchFamily="2" charset="0"/>
               </a:rPr>
               <a:t>	• Secondary Slide</a:t>
@@ -7958,7 +8709,7 @@
               </a:lnSpc>
             </a:pPr>
             <a:r>
-              <a:rPr lang="en-US" dirty="0">
+              <a:rPr lang="en-US">
                 <a:latin typeface="Gotham Narrow Book" pitchFamily="2" charset="0"/>
               </a:rPr>
               <a:t>	• Secondary Slide</a:t>
@@ -7971,7 +8722,7 @@
               </a:lnSpc>
             </a:pPr>
             <a:r>
-              <a:rPr lang="en-US" dirty="0">
+              <a:rPr lang="en-US">
                 <a:latin typeface="Gotham Narrow Book" pitchFamily="2" charset="0"/>
               </a:rPr>
               <a:t>	• Secondary Slide</a:t>
@@ -7984,7 +8735,7 @@
               </a:lnSpc>
             </a:pPr>
             <a:r>
-              <a:rPr lang="en-US" dirty="0">
+              <a:rPr lang="en-US">
                 <a:latin typeface="Gotham Narrow Book" pitchFamily="2" charset="0"/>
               </a:rPr>
               <a:t>	• Secondary Slide</a:t>
@@ -7997,7 +8748,7 @@
               </a:lnSpc>
             </a:pPr>
             <a:r>
-              <a:rPr lang="en-US" dirty="0">
+              <a:rPr lang="en-US">
                 <a:latin typeface="Gotham Narrow Book" pitchFamily="2" charset="0"/>
               </a:rPr>
               <a:t>	• Secondary Slide</a:t>
@@ -8078,7 +8829,7 @@
           <a:lstStyle/>
           <a:p>
             <a:r>
-              <a:rPr lang="en-US" sz="2400" b="1" dirty="0">
+              <a:rPr lang="en-US" sz="2400" b="1">
                 <a:solidFill>
                   <a:srgbClr val="63666A"/>
                 </a:solidFill>
@@ -8123,391 +8874,391 @@
               </a:lnSpc>
             </a:pPr>
             <a:r>
-              <a:rPr lang="en-US" dirty="0">
+              <a:rPr lang="en-US">
                 <a:latin typeface="Gotham Narrow Book" pitchFamily="2" charset="0"/>
               </a:rPr>
               <a:t>Body copy goes here. Lorem ipsum dolor sit </a:t>
             </a:r>
             <a:r>
-              <a:rPr lang="en-US" dirty="0" err="1">
+              <a:rPr lang="en-US" err="1">
                 <a:latin typeface="Gotham Narrow Book" pitchFamily="2" charset="0"/>
               </a:rPr>
               <a:t>amet</a:t>
             </a:r>
             <a:r>
-              <a:rPr lang="en-US" dirty="0">
+              <a:rPr lang="en-US">
                 <a:latin typeface="Gotham Narrow Book" pitchFamily="2" charset="0"/>
               </a:rPr>
               <a:t>, </a:t>
             </a:r>
             <a:r>
-              <a:rPr lang="en-US" dirty="0" err="1">
+              <a:rPr lang="en-US" err="1">
                 <a:latin typeface="Gotham Narrow Book" pitchFamily="2" charset="0"/>
               </a:rPr>
               <a:t>consectetur</a:t>
             </a:r>
             <a:r>
-              <a:rPr lang="en-US" dirty="0">
+              <a:rPr lang="en-US">
                 <a:latin typeface="Gotham Narrow Book" pitchFamily="2" charset="0"/>
               </a:rPr>
               <a:t> </a:t>
             </a:r>
             <a:r>
-              <a:rPr lang="en-US" dirty="0" err="1">
+              <a:rPr lang="en-US" err="1">
                 <a:latin typeface="Gotham Narrow Book" pitchFamily="2" charset="0"/>
               </a:rPr>
               <a:t>adipiscing</a:t>
             </a:r>
             <a:r>
-              <a:rPr lang="en-US" dirty="0">
+              <a:rPr lang="en-US">
                 <a:latin typeface="Gotham Narrow Book" pitchFamily="2" charset="0"/>
               </a:rPr>
               <a:t> </a:t>
             </a:r>
             <a:r>
-              <a:rPr lang="en-US" dirty="0" err="1">
+              <a:rPr lang="en-US" err="1">
                 <a:latin typeface="Gotham Narrow Book" pitchFamily="2" charset="0"/>
               </a:rPr>
               <a:t>elit</a:t>
             </a:r>
             <a:r>
-              <a:rPr lang="en-US" dirty="0">
+              <a:rPr lang="en-US">
                 <a:latin typeface="Gotham Narrow Book" pitchFamily="2" charset="0"/>
               </a:rPr>
               <a:t>, sed do </a:t>
             </a:r>
             <a:r>
-              <a:rPr lang="en-US" dirty="0" err="1">
+              <a:rPr lang="en-US" err="1">
                 <a:latin typeface="Gotham Narrow Book" pitchFamily="2" charset="0"/>
               </a:rPr>
               <a:t>eiusmod</a:t>
             </a:r>
             <a:r>
-              <a:rPr lang="en-US" dirty="0">
+              <a:rPr lang="en-US">
                 <a:latin typeface="Gotham Narrow Book" pitchFamily="2" charset="0"/>
               </a:rPr>
               <a:t> </a:t>
             </a:r>
             <a:r>
-              <a:rPr lang="en-US" dirty="0" err="1">
+              <a:rPr lang="en-US" err="1">
                 <a:latin typeface="Gotham Narrow Book" pitchFamily="2" charset="0"/>
               </a:rPr>
               <a:t>tempor</a:t>
             </a:r>
             <a:r>
-              <a:rPr lang="en-US" dirty="0">
+              <a:rPr lang="en-US">
                 <a:latin typeface="Gotham Narrow Book" pitchFamily="2" charset="0"/>
               </a:rPr>
               <a:t> </a:t>
             </a:r>
             <a:r>
-              <a:rPr lang="en-US" dirty="0" err="1">
+              <a:rPr lang="en-US" err="1">
                 <a:latin typeface="Gotham Narrow Book" pitchFamily="2" charset="0"/>
               </a:rPr>
               <a:t>incididunt</a:t>
             </a:r>
             <a:r>
-              <a:rPr lang="en-US" dirty="0">
+              <a:rPr lang="en-US">
                 <a:latin typeface="Gotham Narrow Book" pitchFamily="2" charset="0"/>
               </a:rPr>
               <a:t> </a:t>
             </a:r>
             <a:r>
-              <a:rPr lang="en-US" dirty="0" err="1">
+              <a:rPr lang="en-US" err="1">
                 <a:latin typeface="Gotham Narrow Book" pitchFamily="2" charset="0"/>
               </a:rPr>
               <a:t>ut</a:t>
             </a:r>
             <a:r>
-              <a:rPr lang="en-US" dirty="0">
+              <a:rPr lang="en-US">
                 <a:latin typeface="Gotham Narrow Book" pitchFamily="2" charset="0"/>
               </a:rPr>
               <a:t> </a:t>
             </a:r>
             <a:r>
-              <a:rPr lang="en-US" dirty="0" err="1">
+              <a:rPr lang="en-US" err="1">
                 <a:latin typeface="Gotham Narrow Book" pitchFamily="2" charset="0"/>
               </a:rPr>
               <a:t>labore</a:t>
             </a:r>
             <a:r>
-              <a:rPr lang="en-US" dirty="0">
+              <a:rPr lang="en-US">
                 <a:latin typeface="Gotham Narrow Book" pitchFamily="2" charset="0"/>
               </a:rPr>
               <a:t> et dolore magna </a:t>
             </a:r>
             <a:r>
-              <a:rPr lang="en-US" dirty="0" err="1">
+              <a:rPr lang="en-US" err="1">
                 <a:latin typeface="Gotham Narrow Book" pitchFamily="2" charset="0"/>
               </a:rPr>
               <a:t>aliqua</a:t>
             </a:r>
             <a:r>
-              <a:rPr lang="en-US" dirty="0">
+              <a:rPr lang="en-US">
                 <a:latin typeface="Gotham Narrow Book" pitchFamily="2" charset="0"/>
               </a:rPr>
               <a:t>. Ut </a:t>
             </a:r>
             <a:r>
-              <a:rPr lang="en-US" dirty="0" err="1">
+              <a:rPr lang="en-US" err="1">
                 <a:latin typeface="Gotham Narrow Book" pitchFamily="2" charset="0"/>
               </a:rPr>
               <a:t>enim</a:t>
             </a:r>
             <a:r>
-              <a:rPr lang="en-US" dirty="0">
+              <a:rPr lang="en-US">
                 <a:latin typeface="Gotham Narrow Book" pitchFamily="2" charset="0"/>
               </a:rPr>
               <a:t> ad minim </a:t>
             </a:r>
             <a:r>
-              <a:rPr lang="en-US" dirty="0" err="1">
+              <a:rPr lang="en-US" err="1">
                 <a:latin typeface="Gotham Narrow Book" pitchFamily="2" charset="0"/>
               </a:rPr>
               <a:t>veniam</a:t>
             </a:r>
             <a:r>
-              <a:rPr lang="en-US" dirty="0">
+              <a:rPr lang="en-US">
                 <a:latin typeface="Gotham Narrow Book" pitchFamily="2" charset="0"/>
               </a:rPr>
               <a:t>, </a:t>
             </a:r>
             <a:r>
-              <a:rPr lang="en-US" dirty="0" err="1">
+              <a:rPr lang="en-US" err="1">
                 <a:latin typeface="Gotham Narrow Book" pitchFamily="2" charset="0"/>
               </a:rPr>
               <a:t>quis</a:t>
             </a:r>
             <a:r>
-              <a:rPr lang="en-US" dirty="0">
+              <a:rPr lang="en-US">
                 <a:latin typeface="Gotham Narrow Book" pitchFamily="2" charset="0"/>
               </a:rPr>
               <a:t> </a:t>
             </a:r>
             <a:r>
-              <a:rPr lang="en-US" dirty="0" err="1">
+              <a:rPr lang="en-US" err="1">
                 <a:latin typeface="Gotham Narrow Book" pitchFamily="2" charset="0"/>
               </a:rPr>
               <a:t>nostrud</a:t>
             </a:r>
             <a:r>
-              <a:rPr lang="en-US" dirty="0">
+              <a:rPr lang="en-US">
                 <a:latin typeface="Gotham Narrow Book" pitchFamily="2" charset="0"/>
               </a:rPr>
               <a:t> exercitation </a:t>
             </a:r>
             <a:r>
-              <a:rPr lang="en-US" dirty="0" err="1">
+              <a:rPr lang="en-US" err="1">
                 <a:latin typeface="Gotham Narrow Book" pitchFamily="2" charset="0"/>
               </a:rPr>
               <a:t>ullamco</a:t>
             </a:r>
             <a:r>
-              <a:rPr lang="en-US" dirty="0">
+              <a:rPr lang="en-US">
                 <a:latin typeface="Gotham Narrow Book" pitchFamily="2" charset="0"/>
               </a:rPr>
               <a:t> </a:t>
             </a:r>
             <a:r>
-              <a:rPr lang="en-US" dirty="0" err="1">
+              <a:rPr lang="en-US" err="1">
                 <a:latin typeface="Gotham Narrow Book" pitchFamily="2" charset="0"/>
               </a:rPr>
               <a:t>laboris</a:t>
             </a:r>
             <a:r>
-              <a:rPr lang="en-US" dirty="0">
+              <a:rPr lang="en-US">
                 <a:latin typeface="Gotham Narrow Book" pitchFamily="2" charset="0"/>
               </a:rPr>
               <a:t> nisi </a:t>
             </a:r>
             <a:r>
-              <a:rPr lang="en-US" dirty="0" err="1">
+              <a:rPr lang="en-US" err="1">
                 <a:latin typeface="Gotham Narrow Book" pitchFamily="2" charset="0"/>
               </a:rPr>
               <a:t>ut</a:t>
             </a:r>
             <a:r>
-              <a:rPr lang="en-US" dirty="0">
+              <a:rPr lang="en-US">
                 <a:latin typeface="Gotham Narrow Book" pitchFamily="2" charset="0"/>
               </a:rPr>
               <a:t> </a:t>
             </a:r>
             <a:r>
-              <a:rPr lang="en-US" dirty="0" err="1">
+              <a:rPr lang="en-US" err="1">
                 <a:latin typeface="Gotham Narrow Book" pitchFamily="2" charset="0"/>
               </a:rPr>
               <a:t>aliquip</a:t>
             </a:r>
             <a:r>
-              <a:rPr lang="en-US" dirty="0">
+              <a:rPr lang="en-US">
                 <a:latin typeface="Gotham Narrow Book" pitchFamily="2" charset="0"/>
               </a:rPr>
               <a:t> ex </a:t>
             </a:r>
             <a:r>
-              <a:rPr lang="en-US" dirty="0" err="1">
+              <a:rPr lang="en-US" err="1">
                 <a:latin typeface="Gotham Narrow Book" pitchFamily="2" charset="0"/>
               </a:rPr>
               <a:t>ea</a:t>
             </a:r>
             <a:r>
-              <a:rPr lang="en-US" dirty="0">
+              <a:rPr lang="en-US">
                 <a:latin typeface="Gotham Narrow Book" pitchFamily="2" charset="0"/>
               </a:rPr>
               <a:t> </a:t>
             </a:r>
             <a:r>
-              <a:rPr lang="en-US" dirty="0" err="1">
+              <a:rPr lang="en-US" err="1">
                 <a:latin typeface="Gotham Narrow Book" pitchFamily="2" charset="0"/>
               </a:rPr>
               <a:t>commodo</a:t>
             </a:r>
             <a:r>
-              <a:rPr lang="en-US" dirty="0">
+              <a:rPr lang="en-US">
                 <a:latin typeface="Gotham Narrow Book" pitchFamily="2" charset="0"/>
               </a:rPr>
               <a:t> </a:t>
             </a:r>
             <a:r>
-              <a:rPr lang="en-US" dirty="0" err="1">
+              <a:rPr lang="en-US" err="1">
                 <a:latin typeface="Gotham Narrow Book" pitchFamily="2" charset="0"/>
               </a:rPr>
               <a:t>consequat</a:t>
             </a:r>
             <a:r>
-              <a:rPr lang="en-US" dirty="0">
+              <a:rPr lang="en-US">
                 <a:latin typeface="Gotham Narrow Book" pitchFamily="2" charset="0"/>
               </a:rPr>
               <a:t>. Duis </a:t>
             </a:r>
             <a:r>
-              <a:rPr lang="en-US" dirty="0" err="1">
+              <a:rPr lang="en-US" err="1">
                 <a:latin typeface="Gotham Narrow Book" pitchFamily="2" charset="0"/>
               </a:rPr>
               <a:t>aute</a:t>
             </a:r>
             <a:r>
-              <a:rPr lang="en-US" dirty="0">
+              <a:rPr lang="en-US">
                 <a:latin typeface="Gotham Narrow Book" pitchFamily="2" charset="0"/>
               </a:rPr>
               <a:t> </a:t>
             </a:r>
             <a:r>
-              <a:rPr lang="en-US" dirty="0" err="1">
+              <a:rPr lang="en-US" err="1">
                 <a:latin typeface="Gotham Narrow Book" pitchFamily="2" charset="0"/>
               </a:rPr>
               <a:t>irure</a:t>
             </a:r>
             <a:r>
-              <a:rPr lang="en-US" dirty="0">
+              <a:rPr lang="en-US">
                 <a:latin typeface="Gotham Narrow Book" pitchFamily="2" charset="0"/>
               </a:rPr>
               <a:t> dolor in </a:t>
             </a:r>
             <a:r>
-              <a:rPr lang="en-US" dirty="0" err="1">
+              <a:rPr lang="en-US" err="1">
                 <a:latin typeface="Gotham Narrow Book" pitchFamily="2" charset="0"/>
               </a:rPr>
               <a:t>reprehenderit</a:t>
             </a:r>
             <a:r>
-              <a:rPr lang="en-US" dirty="0">
+              <a:rPr lang="en-US">
                 <a:latin typeface="Gotham Narrow Book" pitchFamily="2" charset="0"/>
               </a:rPr>
               <a:t> in </a:t>
             </a:r>
             <a:r>
-              <a:rPr lang="en-US" dirty="0" err="1">
+              <a:rPr lang="en-US" err="1">
                 <a:latin typeface="Gotham Narrow Book" pitchFamily="2" charset="0"/>
               </a:rPr>
               <a:t>voluptate</a:t>
             </a:r>
             <a:r>
-              <a:rPr lang="en-US" dirty="0">
+              <a:rPr lang="en-US">
                 <a:latin typeface="Gotham Narrow Book" pitchFamily="2" charset="0"/>
               </a:rPr>
               <a:t> </a:t>
             </a:r>
             <a:r>
-              <a:rPr lang="en-US" dirty="0" err="1">
+              <a:rPr lang="en-US" err="1">
                 <a:latin typeface="Gotham Narrow Book" pitchFamily="2" charset="0"/>
               </a:rPr>
               <a:t>velit</a:t>
             </a:r>
             <a:r>
-              <a:rPr lang="en-US" dirty="0">
+              <a:rPr lang="en-US">
                 <a:latin typeface="Gotham Narrow Book" pitchFamily="2" charset="0"/>
               </a:rPr>
               <a:t> </a:t>
             </a:r>
             <a:r>
-              <a:rPr lang="en-US" dirty="0" err="1">
+              <a:rPr lang="en-US" err="1">
                 <a:latin typeface="Gotham Narrow Book" pitchFamily="2" charset="0"/>
               </a:rPr>
               <a:t>esse</a:t>
             </a:r>
             <a:r>
-              <a:rPr lang="en-US" dirty="0">
+              <a:rPr lang="en-US">
                 <a:latin typeface="Gotham Narrow Book" pitchFamily="2" charset="0"/>
               </a:rPr>
               <a:t> </a:t>
             </a:r>
             <a:r>
-              <a:rPr lang="en-US" dirty="0" err="1">
+              <a:rPr lang="en-US" err="1">
                 <a:latin typeface="Gotham Narrow Book" pitchFamily="2" charset="0"/>
               </a:rPr>
               <a:t>cillum</a:t>
             </a:r>
             <a:r>
-              <a:rPr lang="en-US" dirty="0">
+              <a:rPr lang="en-US">
                 <a:latin typeface="Gotham Narrow Book" pitchFamily="2" charset="0"/>
               </a:rPr>
               <a:t> dolore </a:t>
             </a:r>
             <a:r>
-              <a:rPr lang="en-US" dirty="0" err="1">
+              <a:rPr lang="en-US" err="1">
                 <a:latin typeface="Gotham Narrow Book" pitchFamily="2" charset="0"/>
               </a:rPr>
               <a:t>eu</a:t>
             </a:r>
             <a:r>
-              <a:rPr lang="en-US" dirty="0">
+              <a:rPr lang="en-US">
                 <a:latin typeface="Gotham Narrow Book" pitchFamily="2" charset="0"/>
               </a:rPr>
               <a:t> </a:t>
             </a:r>
             <a:r>
-              <a:rPr lang="en-US" dirty="0" err="1">
+              <a:rPr lang="en-US" err="1">
                 <a:latin typeface="Gotham Narrow Book" pitchFamily="2" charset="0"/>
               </a:rPr>
               <a:t>fugiat</a:t>
             </a:r>
             <a:r>
-              <a:rPr lang="en-US" dirty="0">
+              <a:rPr lang="en-US">
                 <a:latin typeface="Gotham Narrow Book" pitchFamily="2" charset="0"/>
               </a:rPr>
               <a:t> </a:t>
             </a:r>
             <a:r>
-              <a:rPr lang="en-US" dirty="0" err="1">
+              <a:rPr lang="en-US" err="1">
                 <a:latin typeface="Gotham Narrow Book" pitchFamily="2" charset="0"/>
               </a:rPr>
               <a:t>nulla</a:t>
             </a:r>
             <a:r>
-              <a:rPr lang="en-US" dirty="0">
+              <a:rPr lang="en-US">
                 <a:latin typeface="Gotham Narrow Book" pitchFamily="2" charset="0"/>
               </a:rPr>
               <a:t> </a:t>
             </a:r>
             <a:r>
-              <a:rPr lang="en-US" dirty="0" err="1">
+              <a:rPr lang="en-US" err="1">
                 <a:latin typeface="Gotham Narrow Book" pitchFamily="2" charset="0"/>
               </a:rPr>
               <a:t>pariature</a:t>
             </a:r>
             <a:r>
-              <a:rPr lang="en-US" dirty="0">
+              <a:rPr lang="en-US">
                 <a:latin typeface="Gotham Narrow Book" pitchFamily="2" charset="0"/>
               </a:rPr>
               <a:t>.</a:t>
@@ -8520,7 +9271,7 @@
               </a:lnSpc>
             </a:pPr>
             <a:r>
-              <a:rPr lang="en-US" dirty="0">
+              <a:rPr lang="en-US">
                 <a:latin typeface="Gotham Narrow Book" pitchFamily="2" charset="0"/>
               </a:rPr>
               <a:t>	</a:t>
@@ -8533,7 +9284,7 @@
               </a:lnSpc>
             </a:pPr>
             <a:r>
-              <a:rPr lang="en-US" dirty="0">
+              <a:rPr lang="en-US">
                 <a:latin typeface="Gotham Narrow Book" pitchFamily="2" charset="0"/>
               </a:rPr>
               <a:t>	• When single image is necessary</a:t>
@@ -8546,7 +9297,7 @@
               </a:lnSpc>
             </a:pPr>
             <a:r>
-              <a:rPr lang="en-US" dirty="0">
+              <a:rPr lang="en-US">
                 <a:latin typeface="Gotham Narrow Book" pitchFamily="2" charset="0"/>
               </a:rPr>
               <a:t>	• Use this as a reference for appropriate style</a:t>
@@ -8559,7 +9310,7 @@
               </a:lnSpc>
             </a:pPr>
             <a:r>
-              <a:rPr lang="en-US" dirty="0">
+              <a:rPr lang="en-US">
                 <a:latin typeface="Gotham Narrow Book" pitchFamily="2" charset="0"/>
               </a:rPr>
               <a:t>	• Images. Images. Images.</a:t>
@@ -8686,7 +9437,7 @@
           <a:lstStyle/>
           <a:p>
             <a:r>
-              <a:rPr lang="en-US" sz="2400" b="1" dirty="0">
+              <a:rPr lang="en-US" sz="2400" b="1">
                 <a:solidFill>
                   <a:srgbClr val="63666A"/>
                 </a:solidFill>
@@ -8731,55 +9482,55 @@
               </a:lnSpc>
             </a:pPr>
             <a:r>
-              <a:rPr lang="en-US" dirty="0">
+              <a:rPr lang="en-US">
                 <a:latin typeface="Gotham Narrow Book" pitchFamily="2" charset="0"/>
               </a:rPr>
               <a:t>Body copy goes here. Lorem ipsum dolor sit </a:t>
             </a:r>
             <a:r>
-              <a:rPr lang="en-US" dirty="0" err="1">
+              <a:rPr lang="en-US" err="1">
                 <a:latin typeface="Gotham Narrow Book" pitchFamily="2" charset="0"/>
               </a:rPr>
               <a:t>consequat</a:t>
             </a:r>
             <a:r>
-              <a:rPr lang="en-US" dirty="0">
+              <a:rPr lang="en-US">
                 <a:latin typeface="Gotham Narrow Book" pitchFamily="2" charset="0"/>
               </a:rPr>
               <a:t>. Duis </a:t>
             </a:r>
             <a:r>
-              <a:rPr lang="en-US" dirty="0" err="1">
+              <a:rPr lang="en-US" err="1">
                 <a:latin typeface="Gotham Narrow Book" pitchFamily="2" charset="0"/>
               </a:rPr>
               <a:t>aute</a:t>
             </a:r>
             <a:r>
-              <a:rPr lang="en-US" dirty="0">
+              <a:rPr lang="en-US">
                 <a:latin typeface="Gotham Narrow Book" pitchFamily="2" charset="0"/>
               </a:rPr>
               <a:t> </a:t>
             </a:r>
             <a:r>
-              <a:rPr lang="en-US" dirty="0" err="1">
+              <a:rPr lang="en-US" err="1">
                 <a:latin typeface="Gotham Narrow Book" pitchFamily="2" charset="0"/>
               </a:rPr>
               <a:t>irure</a:t>
             </a:r>
             <a:r>
-              <a:rPr lang="en-US" dirty="0">
+              <a:rPr lang="en-US">
                 <a:latin typeface="Gotham Narrow Book" pitchFamily="2" charset="0"/>
               </a:rPr>
               <a:t> dolor in </a:t>
             </a:r>
             <a:r>
-              <a:rPr lang="en-US" dirty="0" err="1">
+              <a:rPr lang="en-US" err="1">
                 <a:latin typeface="Gotham Narrow Book" pitchFamily="2" charset="0"/>
               </a:rPr>
               <a:t>reprehende</a:t>
             </a:r>
             <a:r>
-              <a:rPr lang="en-US" dirty="0">
+              <a:rPr lang="en-US">
                 <a:latin typeface="Gotham Narrow Book" pitchFamily="2" charset="0"/>
               </a:rPr>
               <a:t>.</a:t>
@@ -8791,7 +9542,7 @@
                 <a:spcPct val="125000"/>
               </a:lnSpc>
             </a:pPr>
-            <a:endParaRPr lang="en-US" dirty="0">
+            <a:endParaRPr lang="en-US">
               <a:latin typeface="Gotham Narrow Book" pitchFamily="2" charset="0"/>
             </a:endParaRPr>
           </a:p>
@@ -8802,7 +9553,7 @@
               </a:lnSpc>
             </a:pPr>
             <a:r>
-              <a:rPr lang="en-US" dirty="0">
+              <a:rPr lang="en-US">
                 <a:latin typeface="Gotham Narrow Book" pitchFamily="2" charset="0"/>
               </a:rPr>
               <a:t>• Use this slide for multiple images</a:t>
@@ -8815,7 +9566,7 @@
               </a:lnSpc>
             </a:pPr>
             <a:r>
-              <a:rPr lang="en-US" dirty="0">
+              <a:rPr lang="en-US">
                 <a:latin typeface="Gotham Narrow Book" pitchFamily="2" charset="0"/>
               </a:rPr>
               <a:t>• If they absolutely require text</a:t>
@@ -8828,7 +9579,7 @@
               </a:lnSpc>
             </a:pPr>
             <a:r>
-              <a:rPr lang="en-US" dirty="0">
+              <a:rPr lang="en-US">
                 <a:latin typeface="Gotham Narrow Book" pitchFamily="2" charset="0"/>
               </a:rPr>
               <a:t>• Otherwise, use next slide for multiples</a:t>
@@ -8840,7 +9591,7 @@
                 <a:spcPct val="125000"/>
               </a:lnSpc>
             </a:pPr>
-            <a:endParaRPr lang="en-US" dirty="0">
+            <a:endParaRPr lang="en-US">
               <a:latin typeface="Gotham Narrow Book" pitchFamily="2" charset="0"/>
             </a:endParaRPr>
           </a:p>
